--- a/docs/output/PJ1测试汇报_成果展示风格版_优化版.pptx
+++ b/docs/output/PJ1测试汇报_成果展示风格版_优化版.pptx
@@ -1,34 +1,37 @@
 
 <file path=ppt/presentation.xml><?xml version="1.0" encoding="utf-8"?>
-<p:presentation xmlns:a="http://schemas.openxmlformats.org/drawingml/2006/main" xmlns:r="http://schemas.openxmlformats.org/officeDocument/2006/relationships" xmlns:p="http://schemas.openxmlformats.org/presentationml/2006/main" saveSubsetFonts="1" autoCompressPictures="0">
+<p:presentation xmlns:a="http://schemas.openxmlformats.org/drawingml/2006/main" xmlns:r="http://schemas.openxmlformats.org/officeDocument/2006/relationships" xmlns:p="http://schemas.openxmlformats.org/presentationml/2006/main" autoCompressPictures="0">
   <p:sldMasterIdLst>
     <p:sldMasterId id="2147483648" r:id="rId1"/>
   </p:sldMasterIdLst>
   <p:sldIdLst>
-    <p:sldId id="256" r:id="rId7"/>
-    <p:sldId id="257" r:id="rId8"/>
-    <p:sldId id="258" r:id="rId9"/>
-    <p:sldId id="259" r:id="rId10"/>
-    <p:sldId id="260" r:id="rId11"/>
-    <p:sldId id="261" r:id="rId12"/>
-    <p:sldId id="262" r:id="rId13"/>
-    <p:sldId id="263" r:id="rId14"/>
-    <p:sldId id="264" r:id="rId15"/>
-    <p:sldId id="265" r:id="rId16"/>
-    <p:sldId id="266" r:id="rId17"/>
-    <p:sldId id="267" r:id="rId18"/>
-    <p:sldId id="268" r:id="rId19"/>
-    <p:sldId id="269" r:id="rId20"/>
-    <p:sldId id="270" r:id="rId21"/>
-    <p:sldId id="271" r:id="rId22"/>
-    <p:sldId id="272" r:id="rId23"/>
-    <p:sldId id="273" r:id="rId24"/>
-    <p:sldId id="274" r:id="rId25"/>
-    <p:sldId id="275" r:id="rId26"/>
-    <p:sldId id="276" r:id="rId27"/>
+    <p:sldId id="256" r:id="rId3"/>
+    <p:sldId id="257" r:id="rId4"/>
+    <p:sldId id="258" r:id="rId5"/>
+    <p:sldId id="259" r:id="rId6"/>
+    <p:sldId id="260" r:id="rId7"/>
+    <p:sldId id="261" r:id="rId8"/>
+    <p:sldId id="262" r:id="rId9"/>
+    <p:sldId id="263" r:id="rId10"/>
+    <p:sldId id="264" r:id="rId11"/>
+    <p:sldId id="265" r:id="rId12"/>
+    <p:sldId id="266" r:id="rId13"/>
+    <p:sldId id="267" r:id="rId14"/>
+    <p:sldId id="268" r:id="rId15"/>
+    <p:sldId id="269" r:id="rId16"/>
+    <p:sldId id="270" r:id="rId17"/>
+    <p:sldId id="271" r:id="rId18"/>
+    <p:sldId id="272" r:id="rId19"/>
+    <p:sldId id="273" r:id="rId20"/>
+    <p:sldId id="274" r:id="rId21"/>
+    <p:sldId id="275" r:id="rId22"/>
+    <p:sldId id="276" r:id="rId23"/>
   </p:sldIdLst>
-  <p:sldSz cx="12191999" cy="6858000" type="screen4x3"/>
+  <p:sldSz cx="12191365" cy="6858000" type="screen4x3"/>
   <p:notesSz cx="6858000" cy="9144000"/>
+  <p:custDataLst>
+    <p:tags r:id="rId27"/>
+  </p:custDataLst>
   <p:defaultTextStyle>
     <a:defPPr>
       <a:defRPr lang="en-US"/>
@@ -124,6 +127,22 @@
       </a:defRPr>
     </a:lvl9pPr>
   </p:defaultTextStyle>
+  <p:extLst>
+    <p:ext uri="{EFAFB233-063F-42B5-8137-9DF3F51BA10A}">
+      <p15:sldGuideLst xmlns:p15="http://schemas.microsoft.com/office/powerpoint/2012/main">
+        <p15:guide id="1" orient="horz" pos="2160" userDrawn="1">
+          <p15:clr>
+            <a:srgbClr val="A4A3A4"/>
+          </p15:clr>
+        </p15:guide>
+        <p15:guide id="2" pos="2880" userDrawn="1">
+          <p15:clr>
+            <a:srgbClr val="A4A3A4"/>
+          </p15:clr>
+        </p15:guide>
+      </p15:sldGuideLst>
+    </p:ext>
+  </p:extLst>
 </p:presentation>
 </file>
 
@@ -308,7 +327,6 @@
           <a:p>
             <a:fld id="{5BCAD085-E8A6-8845-BD4E-CB4CCA059FC4}" type="datetimeFigureOut">
               <a:rPr lang="en-US" smtClean="0"/>
-              <a:t>1/27/13</a:t>
             </a:fld>
             <a:endParaRPr lang="en-US"/>
           </a:p>
@@ -350,18 +368,12 @@
           <a:p>
             <a:fld id="{C1FF6DA9-008F-8B48-92A6-B652298478BF}" type="slidenum">
               <a:rPr lang="en-US" smtClean="0"/>
-              <a:t>‹#›</a:t>
             </a:fld>
             <a:endParaRPr lang="en-US"/>
           </a:p>
         </p:txBody>
       </p:sp>
     </p:spTree>
-    <p:extLst>
-      <p:ext uri="{BB962C8B-B14F-4D97-AF65-F5344CB8AC3E}">
-        <p14:creationId xmlns:p14="http://schemas.microsoft.com/office/powerpoint/2010/main" val="3168075583"/>
-      </p:ext>
-    </p:extLst>
   </p:cSld>
   <p:clrMapOvr>
     <a:masterClrMapping/>
@@ -429,6 +441,7 @@
               <a:rPr lang="en-US" smtClean="0"/>
               <a:t>Click to edit Master text styles</a:t>
             </a:r>
+            <a:endParaRPr lang="en-US" smtClean="0"/>
           </a:p>
           <a:p>
             <a:pPr lvl="1"/>
@@ -436,6 +449,7 @@
               <a:rPr lang="en-US" smtClean="0"/>
               <a:t>Second level</a:t>
             </a:r>
+            <a:endParaRPr lang="en-US" smtClean="0"/>
           </a:p>
           <a:p>
             <a:pPr lvl="2"/>
@@ -443,6 +457,7 @@
               <a:rPr lang="en-US" smtClean="0"/>
               <a:t>Third level</a:t>
             </a:r>
+            <a:endParaRPr lang="en-US" smtClean="0"/>
           </a:p>
           <a:p>
             <a:pPr lvl="3"/>
@@ -450,6 +465,7 @@
               <a:rPr lang="en-US" smtClean="0"/>
               <a:t>Fourth level</a:t>
             </a:r>
+            <a:endParaRPr lang="en-US" smtClean="0"/>
           </a:p>
           <a:p>
             <a:pPr lvl="4"/>
@@ -478,7 +494,6 @@
           <a:p>
             <a:fld id="{5BCAD085-E8A6-8845-BD4E-CB4CCA059FC4}" type="datetimeFigureOut">
               <a:rPr lang="en-US" smtClean="0"/>
-              <a:t>1/27/13</a:t>
             </a:fld>
             <a:endParaRPr lang="en-US"/>
           </a:p>
@@ -520,18 +535,12 @@
           <a:p>
             <a:fld id="{C1FF6DA9-008F-8B48-92A6-B652298478BF}" type="slidenum">
               <a:rPr lang="en-US" smtClean="0"/>
-              <a:t>‹#›</a:t>
             </a:fld>
             <a:endParaRPr lang="en-US"/>
           </a:p>
         </p:txBody>
       </p:sp>
     </p:spTree>
-    <p:extLst>
-      <p:ext uri="{BB962C8B-B14F-4D97-AF65-F5344CB8AC3E}">
-        <p14:creationId xmlns:p14="http://schemas.microsoft.com/office/powerpoint/2010/main" val="2910927964"/>
-      </p:ext>
-    </p:extLst>
   </p:cSld>
   <p:clrMapOvr>
     <a:masterClrMapping/>
@@ -609,6 +618,7 @@
               <a:rPr lang="en-US" smtClean="0"/>
               <a:t>Click to edit Master text styles</a:t>
             </a:r>
+            <a:endParaRPr lang="en-US" smtClean="0"/>
           </a:p>
           <a:p>
             <a:pPr lvl="1"/>
@@ -616,6 +626,7 @@
               <a:rPr lang="en-US" smtClean="0"/>
               <a:t>Second level</a:t>
             </a:r>
+            <a:endParaRPr lang="en-US" smtClean="0"/>
           </a:p>
           <a:p>
             <a:pPr lvl="2"/>
@@ -623,6 +634,7 @@
               <a:rPr lang="en-US" smtClean="0"/>
               <a:t>Third level</a:t>
             </a:r>
+            <a:endParaRPr lang="en-US" smtClean="0"/>
           </a:p>
           <a:p>
             <a:pPr lvl="3"/>
@@ -630,6 +642,7 @@
               <a:rPr lang="en-US" smtClean="0"/>
               <a:t>Fourth level</a:t>
             </a:r>
+            <a:endParaRPr lang="en-US" smtClean="0"/>
           </a:p>
           <a:p>
             <a:pPr lvl="4"/>
@@ -658,7 +671,6 @@
           <a:p>
             <a:fld id="{5BCAD085-E8A6-8845-BD4E-CB4CCA059FC4}" type="datetimeFigureOut">
               <a:rPr lang="en-US" smtClean="0"/>
-              <a:t>1/27/13</a:t>
             </a:fld>
             <a:endParaRPr lang="en-US"/>
           </a:p>
@@ -700,18 +712,12 @@
           <a:p>
             <a:fld id="{C1FF6DA9-008F-8B48-92A6-B652298478BF}" type="slidenum">
               <a:rPr lang="en-US" smtClean="0"/>
-              <a:t>‹#›</a:t>
             </a:fld>
             <a:endParaRPr lang="en-US"/>
           </a:p>
         </p:txBody>
       </p:sp>
     </p:spTree>
-    <p:extLst>
-      <p:ext uri="{BB962C8B-B14F-4D97-AF65-F5344CB8AC3E}">
-        <p14:creationId xmlns:p14="http://schemas.microsoft.com/office/powerpoint/2010/main" val="3612223792"/>
-      </p:ext>
-    </p:extLst>
   </p:cSld>
   <p:clrMapOvr>
     <a:masterClrMapping/>
@@ -779,6 +785,7 @@
               <a:rPr lang="en-US" smtClean="0"/>
               <a:t>Click to edit Master text styles</a:t>
             </a:r>
+            <a:endParaRPr lang="en-US" smtClean="0"/>
           </a:p>
           <a:p>
             <a:pPr lvl="1"/>
@@ -786,6 +793,7 @@
               <a:rPr lang="en-US" smtClean="0"/>
               <a:t>Second level</a:t>
             </a:r>
+            <a:endParaRPr lang="en-US" smtClean="0"/>
           </a:p>
           <a:p>
             <a:pPr lvl="2"/>
@@ -793,6 +801,7 @@
               <a:rPr lang="en-US" smtClean="0"/>
               <a:t>Third level</a:t>
             </a:r>
+            <a:endParaRPr lang="en-US" smtClean="0"/>
           </a:p>
           <a:p>
             <a:pPr lvl="3"/>
@@ -800,6 +809,7 @@
               <a:rPr lang="en-US" smtClean="0"/>
               <a:t>Fourth level</a:t>
             </a:r>
+            <a:endParaRPr lang="en-US" smtClean="0"/>
           </a:p>
           <a:p>
             <a:pPr lvl="4"/>
@@ -828,7 +838,6 @@
           <a:p>
             <a:fld id="{5BCAD085-E8A6-8845-BD4E-CB4CCA059FC4}" type="datetimeFigureOut">
               <a:rPr lang="en-US" smtClean="0"/>
-              <a:t>1/27/13</a:t>
             </a:fld>
             <a:endParaRPr lang="en-US"/>
           </a:p>
@@ -870,18 +879,12 @@
           <a:p>
             <a:fld id="{C1FF6DA9-008F-8B48-92A6-B652298478BF}" type="slidenum">
               <a:rPr lang="en-US" smtClean="0"/>
-              <a:t>‹#›</a:t>
             </a:fld>
             <a:endParaRPr lang="en-US"/>
           </a:p>
         </p:txBody>
       </p:sp>
     </p:spTree>
-    <p:extLst>
-      <p:ext uri="{BB962C8B-B14F-4D97-AF65-F5344CB8AC3E}">
-        <p14:creationId xmlns:p14="http://schemas.microsoft.com/office/powerpoint/2010/main" val="2614314258"/>
-      </p:ext>
-    </p:extLst>
   </p:cSld>
   <p:clrMapOvr>
     <a:masterClrMapping/>
@@ -1054,6 +1057,7 @@
               <a:rPr lang="en-US" smtClean="0"/>
               <a:t>Click to edit Master text styles</a:t>
             </a:r>
+            <a:endParaRPr lang="en-US" smtClean="0"/>
           </a:p>
         </p:txBody>
       </p:sp>
@@ -1074,7 +1078,6 @@
           <a:p>
             <a:fld id="{5BCAD085-E8A6-8845-BD4E-CB4CCA059FC4}" type="datetimeFigureOut">
               <a:rPr lang="en-US" smtClean="0"/>
-              <a:t>1/27/13</a:t>
             </a:fld>
             <a:endParaRPr lang="en-US"/>
           </a:p>
@@ -1116,18 +1119,12 @@
           <a:p>
             <a:fld id="{C1FF6DA9-008F-8B48-92A6-B652298478BF}" type="slidenum">
               <a:rPr lang="en-US" smtClean="0"/>
-              <a:t>‹#›</a:t>
             </a:fld>
             <a:endParaRPr lang="en-US"/>
           </a:p>
         </p:txBody>
       </p:sp>
     </p:spTree>
-    <p:extLst>
-      <p:ext uri="{BB962C8B-B14F-4D97-AF65-F5344CB8AC3E}">
-        <p14:creationId xmlns:p14="http://schemas.microsoft.com/office/powerpoint/2010/main" val="960648375"/>
-      </p:ext>
-    </p:extLst>
   </p:cSld>
   <p:clrMapOvr>
     <a:masterClrMapping/>
@@ -1228,6 +1225,7 @@
               <a:rPr lang="en-US" smtClean="0"/>
               <a:t>Click to edit Master text styles</a:t>
             </a:r>
+            <a:endParaRPr lang="en-US" smtClean="0"/>
           </a:p>
           <a:p>
             <a:pPr lvl="1"/>
@@ -1235,6 +1233,7 @@
               <a:rPr lang="en-US" smtClean="0"/>
               <a:t>Second level</a:t>
             </a:r>
+            <a:endParaRPr lang="en-US" smtClean="0"/>
           </a:p>
           <a:p>
             <a:pPr lvl="2"/>
@@ -1242,6 +1241,7 @@
               <a:rPr lang="en-US" smtClean="0"/>
               <a:t>Third level</a:t>
             </a:r>
+            <a:endParaRPr lang="en-US" smtClean="0"/>
           </a:p>
           <a:p>
             <a:pPr lvl="3"/>
@@ -1249,6 +1249,7 @@
               <a:rPr lang="en-US" smtClean="0"/>
               <a:t>Fourth level</a:t>
             </a:r>
+            <a:endParaRPr lang="en-US" smtClean="0"/>
           </a:p>
           <a:p>
             <a:pPr lvl="4"/>
@@ -1313,6 +1314,7 @@
               <a:rPr lang="en-US" smtClean="0"/>
               <a:t>Click to edit Master text styles</a:t>
             </a:r>
+            <a:endParaRPr lang="en-US" smtClean="0"/>
           </a:p>
           <a:p>
             <a:pPr lvl="1"/>
@@ -1320,6 +1322,7 @@
               <a:rPr lang="en-US" smtClean="0"/>
               <a:t>Second level</a:t>
             </a:r>
+            <a:endParaRPr lang="en-US" smtClean="0"/>
           </a:p>
           <a:p>
             <a:pPr lvl="2"/>
@@ -1327,6 +1330,7 @@
               <a:rPr lang="en-US" smtClean="0"/>
               <a:t>Third level</a:t>
             </a:r>
+            <a:endParaRPr lang="en-US" smtClean="0"/>
           </a:p>
           <a:p>
             <a:pPr lvl="3"/>
@@ -1334,6 +1338,7 @@
               <a:rPr lang="en-US" smtClean="0"/>
               <a:t>Fourth level</a:t>
             </a:r>
+            <a:endParaRPr lang="en-US" smtClean="0"/>
           </a:p>
           <a:p>
             <a:pPr lvl="4"/>
@@ -1362,7 +1367,6 @@
           <a:p>
             <a:fld id="{5BCAD085-E8A6-8845-BD4E-CB4CCA059FC4}" type="datetimeFigureOut">
               <a:rPr lang="en-US" smtClean="0"/>
-              <a:t>1/27/13</a:t>
             </a:fld>
             <a:endParaRPr lang="en-US"/>
           </a:p>
@@ -1404,18 +1408,12 @@
           <a:p>
             <a:fld id="{C1FF6DA9-008F-8B48-92A6-B652298478BF}" type="slidenum">
               <a:rPr lang="en-US" smtClean="0"/>
-              <a:t>‹#›</a:t>
             </a:fld>
             <a:endParaRPr lang="en-US"/>
           </a:p>
         </p:txBody>
       </p:sp>
     </p:spTree>
-    <p:extLst>
-      <p:ext uri="{BB962C8B-B14F-4D97-AF65-F5344CB8AC3E}">
-        <p14:creationId xmlns:p14="http://schemas.microsoft.com/office/powerpoint/2010/main" val="2782244947"/>
-      </p:ext>
-    </p:extLst>
   </p:cSld>
   <p:clrMapOvr>
     <a:masterClrMapping/>
@@ -1529,6 +1527,7 @@
               <a:rPr lang="en-US" smtClean="0"/>
               <a:t>Click to edit Master text styles</a:t>
             </a:r>
+            <a:endParaRPr lang="en-US" smtClean="0"/>
           </a:p>
         </p:txBody>
       </p:sp>
@@ -1585,6 +1584,7 @@
               <a:rPr lang="en-US" smtClean="0"/>
               <a:t>Click to edit Master text styles</a:t>
             </a:r>
+            <a:endParaRPr lang="en-US" smtClean="0"/>
           </a:p>
           <a:p>
             <a:pPr lvl="1"/>
@@ -1592,6 +1592,7 @@
               <a:rPr lang="en-US" smtClean="0"/>
               <a:t>Second level</a:t>
             </a:r>
+            <a:endParaRPr lang="en-US" smtClean="0"/>
           </a:p>
           <a:p>
             <a:pPr lvl="2"/>
@@ -1599,6 +1600,7 @@
               <a:rPr lang="en-US" smtClean="0"/>
               <a:t>Third level</a:t>
             </a:r>
+            <a:endParaRPr lang="en-US" smtClean="0"/>
           </a:p>
           <a:p>
             <a:pPr lvl="3"/>
@@ -1606,6 +1608,7 @@
               <a:rPr lang="en-US" smtClean="0"/>
               <a:t>Fourth level</a:t>
             </a:r>
+            <a:endParaRPr lang="en-US" smtClean="0"/>
           </a:p>
           <a:p>
             <a:pPr lvl="4"/>
@@ -1679,6 +1682,7 @@
               <a:rPr lang="en-US" smtClean="0"/>
               <a:t>Click to edit Master text styles</a:t>
             </a:r>
+            <a:endParaRPr lang="en-US" smtClean="0"/>
           </a:p>
         </p:txBody>
       </p:sp>
@@ -1735,6 +1739,7 @@
               <a:rPr lang="en-US" smtClean="0"/>
               <a:t>Click to edit Master text styles</a:t>
             </a:r>
+            <a:endParaRPr lang="en-US" smtClean="0"/>
           </a:p>
           <a:p>
             <a:pPr lvl="1"/>
@@ -1742,6 +1747,7 @@
               <a:rPr lang="en-US" smtClean="0"/>
               <a:t>Second level</a:t>
             </a:r>
+            <a:endParaRPr lang="en-US" smtClean="0"/>
           </a:p>
           <a:p>
             <a:pPr lvl="2"/>
@@ -1749,6 +1755,7 @@
               <a:rPr lang="en-US" smtClean="0"/>
               <a:t>Third level</a:t>
             </a:r>
+            <a:endParaRPr lang="en-US" smtClean="0"/>
           </a:p>
           <a:p>
             <a:pPr lvl="3"/>
@@ -1756,6 +1763,7 @@
               <a:rPr lang="en-US" smtClean="0"/>
               <a:t>Fourth level</a:t>
             </a:r>
+            <a:endParaRPr lang="en-US" smtClean="0"/>
           </a:p>
           <a:p>
             <a:pPr lvl="4"/>
@@ -1784,7 +1792,6 @@
           <a:p>
             <a:fld id="{5BCAD085-E8A6-8845-BD4E-CB4CCA059FC4}" type="datetimeFigureOut">
               <a:rPr lang="en-US" smtClean="0"/>
-              <a:t>1/27/13</a:t>
             </a:fld>
             <a:endParaRPr lang="en-US"/>
           </a:p>
@@ -1826,18 +1833,12 @@
           <a:p>
             <a:fld id="{C1FF6DA9-008F-8B48-92A6-B652298478BF}" type="slidenum">
               <a:rPr lang="en-US" smtClean="0"/>
-              <a:t>‹#›</a:t>
             </a:fld>
             <a:endParaRPr lang="en-US"/>
           </a:p>
         </p:txBody>
       </p:sp>
     </p:spTree>
-    <p:extLst>
-      <p:ext uri="{BB962C8B-B14F-4D97-AF65-F5344CB8AC3E}">
-        <p14:creationId xmlns:p14="http://schemas.microsoft.com/office/powerpoint/2010/main" val="990158736"/>
-      </p:ext>
-    </p:extLst>
   </p:cSld>
   <p:clrMapOvr>
     <a:masterClrMapping/>
@@ -1902,7 +1903,6 @@
           <a:p>
             <a:fld id="{5BCAD085-E8A6-8845-BD4E-CB4CCA059FC4}" type="datetimeFigureOut">
               <a:rPr lang="en-US" smtClean="0"/>
-              <a:t>1/27/13</a:t>
             </a:fld>
             <a:endParaRPr lang="en-US"/>
           </a:p>
@@ -1944,18 +1944,12 @@
           <a:p>
             <a:fld id="{C1FF6DA9-008F-8B48-92A6-B652298478BF}" type="slidenum">
               <a:rPr lang="en-US" smtClean="0"/>
-              <a:t>‹#›</a:t>
             </a:fld>
             <a:endParaRPr lang="en-US"/>
           </a:p>
         </p:txBody>
       </p:sp>
     </p:spTree>
-    <p:extLst>
-      <p:ext uri="{BB962C8B-B14F-4D97-AF65-F5344CB8AC3E}">
-        <p14:creationId xmlns:p14="http://schemas.microsoft.com/office/powerpoint/2010/main" val="727027711"/>
-      </p:ext>
-    </p:extLst>
   </p:cSld>
   <p:clrMapOvr>
     <a:masterClrMapping/>
@@ -1997,7 +1991,6 @@
           <a:p>
             <a:fld id="{5BCAD085-E8A6-8845-BD4E-CB4CCA059FC4}" type="datetimeFigureOut">
               <a:rPr lang="en-US" smtClean="0"/>
-              <a:t>1/27/13</a:t>
             </a:fld>
             <a:endParaRPr lang="en-US"/>
           </a:p>
@@ -2039,18 +2032,12 @@
           <a:p>
             <a:fld id="{C1FF6DA9-008F-8B48-92A6-B652298478BF}" type="slidenum">
               <a:rPr lang="en-US" smtClean="0"/>
-              <a:t>‹#›</a:t>
             </a:fld>
             <a:endParaRPr lang="en-US"/>
           </a:p>
         </p:txBody>
       </p:sp>
     </p:spTree>
-    <p:extLst>
-      <p:ext uri="{BB962C8B-B14F-4D97-AF65-F5344CB8AC3E}">
-        <p14:creationId xmlns:p14="http://schemas.microsoft.com/office/powerpoint/2010/main" val="1212999818"/>
-      </p:ext>
-    </p:extLst>
   </p:cSld>
   <p:clrMapOvr>
     <a:masterClrMapping/>
@@ -2160,6 +2147,7 @@
               <a:rPr lang="en-US" smtClean="0"/>
               <a:t>Click to edit Master text styles</a:t>
             </a:r>
+            <a:endParaRPr lang="en-US" smtClean="0"/>
           </a:p>
           <a:p>
             <a:pPr lvl="1"/>
@@ -2167,6 +2155,7 @@
               <a:rPr lang="en-US" smtClean="0"/>
               <a:t>Second level</a:t>
             </a:r>
+            <a:endParaRPr lang="en-US" smtClean="0"/>
           </a:p>
           <a:p>
             <a:pPr lvl="2"/>
@@ -2174,6 +2163,7 @@
               <a:rPr lang="en-US" smtClean="0"/>
               <a:t>Third level</a:t>
             </a:r>
+            <a:endParaRPr lang="en-US" smtClean="0"/>
           </a:p>
           <a:p>
             <a:pPr lvl="3"/>
@@ -2181,6 +2171,7 @@
               <a:rPr lang="en-US" smtClean="0"/>
               <a:t>Fourth level</a:t>
             </a:r>
+            <a:endParaRPr lang="en-US" smtClean="0"/>
           </a:p>
           <a:p>
             <a:pPr lvl="4"/>
@@ -2254,6 +2245,7 @@
               <a:rPr lang="en-US" smtClean="0"/>
               <a:t>Click to edit Master text styles</a:t>
             </a:r>
+            <a:endParaRPr lang="en-US" smtClean="0"/>
           </a:p>
         </p:txBody>
       </p:sp>
@@ -2274,7 +2266,6 @@
           <a:p>
             <a:fld id="{5BCAD085-E8A6-8845-BD4E-CB4CCA059FC4}" type="datetimeFigureOut">
               <a:rPr lang="en-US" smtClean="0"/>
-              <a:t>1/27/13</a:t>
             </a:fld>
             <a:endParaRPr lang="en-US"/>
           </a:p>
@@ -2316,18 +2307,12 @@
           <a:p>
             <a:fld id="{C1FF6DA9-008F-8B48-92A6-B652298478BF}" type="slidenum">
               <a:rPr lang="en-US" smtClean="0"/>
-              <a:t>‹#›</a:t>
             </a:fld>
             <a:endParaRPr lang="en-US"/>
           </a:p>
         </p:txBody>
       </p:sp>
     </p:spTree>
-    <p:extLst>
-      <p:ext uri="{BB962C8B-B14F-4D97-AF65-F5344CB8AC3E}">
-        <p14:creationId xmlns:p14="http://schemas.microsoft.com/office/powerpoint/2010/main" val="1840726560"/>
-      </p:ext>
-    </p:extLst>
   </p:cSld>
   <p:clrMapOvr>
     <a:masterClrMapping/>
@@ -2507,6 +2492,7 @@
               <a:rPr lang="en-US" smtClean="0"/>
               <a:t>Click to edit Master text styles</a:t>
             </a:r>
+            <a:endParaRPr lang="en-US" smtClean="0"/>
           </a:p>
         </p:txBody>
       </p:sp>
@@ -2527,7 +2513,6 @@
           <a:p>
             <a:fld id="{5BCAD085-E8A6-8845-BD4E-CB4CCA059FC4}" type="datetimeFigureOut">
               <a:rPr lang="en-US" smtClean="0"/>
-              <a:t>1/27/13</a:t>
             </a:fld>
             <a:endParaRPr lang="en-US"/>
           </a:p>
@@ -2569,18 +2554,12 @@
           <a:p>
             <a:fld id="{C1FF6DA9-008F-8B48-92A6-B652298478BF}" type="slidenum">
               <a:rPr lang="en-US" smtClean="0"/>
-              <a:t>‹#›</a:t>
             </a:fld>
             <a:endParaRPr lang="en-US"/>
           </a:p>
         </p:txBody>
       </p:sp>
     </p:spTree>
-    <p:extLst>
-      <p:ext uri="{BB962C8B-B14F-4D97-AF65-F5344CB8AC3E}">
-        <p14:creationId xmlns:p14="http://schemas.microsoft.com/office/powerpoint/2010/main" val="3889236939"/>
-      </p:ext>
-    </p:extLst>
   </p:cSld>
   <p:clrMapOvr>
     <a:masterClrMapping/>
@@ -2673,6 +2652,7 @@
               <a:rPr lang="en-US" smtClean="0"/>
               <a:t>Click to edit Master text styles</a:t>
             </a:r>
+            <a:endParaRPr lang="en-US" smtClean="0"/>
           </a:p>
           <a:p>
             <a:pPr lvl="1"/>
@@ -2680,6 +2660,7 @@
               <a:rPr lang="en-US" smtClean="0"/>
               <a:t>Second level</a:t>
             </a:r>
+            <a:endParaRPr lang="en-US" smtClean="0"/>
           </a:p>
           <a:p>
             <a:pPr lvl="2"/>
@@ -2687,6 +2668,7 @@
               <a:rPr lang="en-US" smtClean="0"/>
               <a:t>Third level</a:t>
             </a:r>
+            <a:endParaRPr lang="en-US" smtClean="0"/>
           </a:p>
           <a:p>
             <a:pPr lvl="3"/>
@@ -2694,6 +2676,7 @@
               <a:rPr lang="en-US" smtClean="0"/>
               <a:t>Fourth level</a:t>
             </a:r>
+            <a:endParaRPr lang="en-US" smtClean="0"/>
           </a:p>
           <a:p>
             <a:pPr lvl="4"/>
@@ -2740,7 +2723,6 @@
           <a:p>
             <a:fld id="{5BCAD085-E8A6-8845-BD4E-CB4CCA059FC4}" type="datetimeFigureOut">
               <a:rPr lang="en-US" smtClean="0"/>
-              <a:t>1/27/13</a:t>
             </a:fld>
             <a:endParaRPr lang="en-US"/>
           </a:p>
@@ -2818,18 +2800,12 @@
           <a:p>
             <a:fld id="{C1FF6DA9-008F-8B48-92A6-B652298478BF}" type="slidenum">
               <a:rPr lang="en-US" smtClean="0"/>
-              <a:t>‹#›</a:t>
             </a:fld>
             <a:endParaRPr lang="en-US"/>
           </a:p>
         </p:txBody>
       </p:sp>
     </p:spTree>
-    <p:extLst>
-      <p:ext uri="{BB962C8B-B14F-4D97-AF65-F5344CB8AC3E}">
-        <p14:creationId xmlns:p14="http://schemas.microsoft.com/office/powerpoint/2010/main" val="2209977519"/>
-      </p:ext>
-    </p:extLst>
   </p:cSld>
   <p:clrMap bg1="lt1" tx1="dk1" bg2="lt2" tx2="dk2" accent1="accent1" accent2="accent2" accent3="accent3" accent4="accent4" accent5="accent5" accent6="accent6" hlink="hlink" folHlink="folHlink"/>
   <p:sldLayoutIdLst>
@@ -2867,7 +2843,7 @@
         <a:spcBef>
           <a:spcPct val="20000"/>
         </a:spcBef>
-        <a:buFont typeface="Arial"/>
+        <a:buFont typeface="Arial" panose="020B0604020202020204"/>
         <a:buChar char="•"/>
         <a:defRPr sz="3200" kern="1200">
           <a:solidFill>
@@ -2882,7 +2858,7 @@
         <a:spcBef>
           <a:spcPct val="20000"/>
         </a:spcBef>
-        <a:buFont typeface="Arial"/>
+        <a:buFont typeface="Arial" panose="020B0604020202020204"/>
         <a:buChar char="–"/>
         <a:defRPr sz="2800" kern="1200">
           <a:solidFill>
@@ -2897,7 +2873,7 @@
         <a:spcBef>
           <a:spcPct val="20000"/>
         </a:spcBef>
-        <a:buFont typeface="Arial"/>
+        <a:buFont typeface="Arial" panose="020B0604020202020204"/>
         <a:buChar char="•"/>
         <a:defRPr sz="2400" kern="1200">
           <a:solidFill>
@@ -2912,7 +2888,7 @@
         <a:spcBef>
           <a:spcPct val="20000"/>
         </a:spcBef>
-        <a:buFont typeface="Arial"/>
+        <a:buFont typeface="Arial" panose="020B0604020202020204"/>
         <a:buChar char="–"/>
         <a:defRPr sz="2000" kern="1200">
           <a:solidFill>
@@ -2927,7 +2903,7 @@
         <a:spcBef>
           <a:spcPct val="20000"/>
         </a:spcBef>
-        <a:buFont typeface="Arial"/>
+        <a:buFont typeface="Arial" panose="020B0604020202020204"/>
         <a:buChar char="»"/>
         <a:defRPr sz="2000" kern="1200">
           <a:solidFill>
@@ -2942,7 +2918,7 @@
         <a:spcBef>
           <a:spcPct val="20000"/>
         </a:spcBef>
-        <a:buFont typeface="Arial"/>
+        <a:buFont typeface="Arial" panose="020B0604020202020204"/>
         <a:buChar char="•"/>
         <a:defRPr sz="2000" kern="1200">
           <a:solidFill>
@@ -2957,7 +2933,7 @@
         <a:spcBef>
           <a:spcPct val="20000"/>
         </a:spcBef>
-        <a:buFont typeface="Arial"/>
+        <a:buFont typeface="Arial" panose="020B0604020202020204"/>
         <a:buChar char="•"/>
         <a:defRPr sz="2000" kern="1200">
           <a:solidFill>
@@ -2972,7 +2948,7 @@
         <a:spcBef>
           <a:spcPct val="20000"/>
         </a:spcBef>
-        <a:buFont typeface="Arial"/>
+        <a:buFont typeface="Arial" panose="020B0604020202020204"/>
         <a:buChar char="•"/>
         <a:defRPr sz="2000" kern="1200">
           <a:solidFill>
@@ -2987,7 +2963,7 @@
         <a:spcBef>
           <a:spcPct val="20000"/>
         </a:spcBef>
-        <a:buFont typeface="Arial"/>
+        <a:buFont typeface="Arial" panose="020B0604020202020204"/>
         <a:buChar char="•"/>
         <a:defRPr sz="2000" kern="1200">
           <a:solidFill>
@@ -3099,7 +3075,7 @@
 </file>
 
 <file path=ppt/slides/slide1.xml><?xml version="1.0" encoding="utf-8"?>
-<p:sld xmlns:a="http://schemas.openxmlformats.org/drawingml/2006/main" xmlns:p="http://schemas.openxmlformats.org/presentationml/2006/main" xmlns:r="http://schemas.openxmlformats.org/officeDocument/2006/relationships">
+<p:sld xmlns:a="http://schemas.openxmlformats.org/drawingml/2006/main" xmlns:r="http://schemas.openxmlformats.org/officeDocument/2006/relationships" xmlns:p="http://schemas.openxmlformats.org/presentationml/2006/main">
   <p:cSld>
     <p:spTree>
       <p:nvGrpSpPr>
@@ -3436,10 +3412,16 @@
                 <a:solidFill>
                   <a:srgbClr val="000000"/>
                 </a:solidFill>
-                <a:latin typeface="Microsoft YaHei"/>
+                <a:latin typeface="微软雅黑" panose="020B0503020204020204" charset="-122"/>
               </a:rPr>
               <a:t>图表1</a:t>
             </a:r>
+            <a:endParaRPr sz="700" b="0">
+              <a:solidFill>
+                <a:srgbClr val="000000"/>
+              </a:solidFill>
+              <a:latin typeface="微软雅黑" panose="020B0503020204020204" charset="-122"/>
+            </a:endParaRPr>
           </a:p>
         </p:txBody>
       </p:sp>
@@ -3471,10 +3453,16 @@
                 <a:solidFill>
                   <a:srgbClr val="000000"/>
                 </a:solidFill>
-                <a:latin typeface="Microsoft YaHei"/>
+                <a:latin typeface="微软雅黑" panose="020B0503020204020204" charset="-122"/>
               </a:rPr>
               <a:t>SoftwareTestingDemo  测试成果展示</a:t>
             </a:r>
+            <a:endParaRPr sz="2900" b="1">
+              <a:solidFill>
+                <a:srgbClr val="000000"/>
+              </a:solidFill>
+              <a:latin typeface="微软雅黑" panose="020B0503020204020204" charset="-122"/>
+            </a:endParaRPr>
           </a:p>
         </p:txBody>
       </p:sp>
@@ -3506,10 +3494,16 @@
                 <a:solidFill>
                   <a:srgbClr val="000000"/>
                 </a:solidFill>
-                <a:latin typeface="Microsoft YaHei"/>
+                <a:latin typeface="微软雅黑" panose="020B0503020204020204" charset="-122"/>
               </a:rPr>
               <a:t>第 PJ1 小组   胡彬泽 沙华煜 彭祈元 郭政颖 周宇尘</a:t>
             </a:r>
+            <a:endParaRPr sz="1700" b="0">
+              <a:solidFill>
+                <a:srgbClr val="000000"/>
+              </a:solidFill>
+              <a:latin typeface="微软雅黑" panose="020B0503020204020204" charset="-122"/>
+            </a:endParaRPr>
           </a:p>
           <a:p>
             <a:pPr algn="ctr"/>
@@ -3518,10 +3512,16 @@
                 <a:solidFill>
                   <a:srgbClr val="000000"/>
                 </a:solidFill>
-                <a:latin typeface="Microsoft YaHei"/>
+                <a:latin typeface="微软雅黑" panose="020B0503020204020204" charset="-122"/>
               </a:rPr>
               <a:t>测试计划标识   Project1_TestPlan_V1.2_20260423</a:t>
             </a:r>
+            <a:endParaRPr sz="1700" b="0">
+              <a:solidFill>
+                <a:srgbClr val="000000"/>
+              </a:solidFill>
+              <a:latin typeface="微软雅黑" panose="020B0503020204020204" charset="-122"/>
+            </a:endParaRPr>
           </a:p>
         </p:txBody>
       </p:sp>
@@ -3534,7 +3534,7 @@
 </file>
 
 <file path=ppt/slides/slide10.xml><?xml version="1.0" encoding="utf-8"?>
-<p:sld xmlns:a="http://schemas.openxmlformats.org/drawingml/2006/main" xmlns:p="http://schemas.openxmlformats.org/presentationml/2006/main" xmlns:r="http://schemas.openxmlformats.org/officeDocument/2006/relationships">
+<p:sld xmlns:a="http://schemas.openxmlformats.org/drawingml/2006/main" xmlns:r="http://schemas.openxmlformats.org/officeDocument/2006/relationships" xmlns:p="http://schemas.openxmlformats.org/presentationml/2006/main">
   <p:cSld>
     <p:spTree>
       <p:nvGrpSpPr>
@@ -3871,10 +3871,16 @@
                 <a:solidFill>
                   <a:srgbClr val="000000"/>
                 </a:solidFill>
-                <a:latin typeface="Microsoft YaHei"/>
+                <a:latin typeface="微软雅黑" panose="020B0503020204020204" charset="-122"/>
               </a:rPr>
               <a:t>图表10</a:t>
             </a:r>
+            <a:endParaRPr sz="700" b="0">
+              <a:solidFill>
+                <a:srgbClr val="000000"/>
+              </a:solidFill>
+              <a:latin typeface="微软雅黑" panose="020B0503020204020204" charset="-122"/>
+            </a:endParaRPr>
           </a:p>
         </p:txBody>
       </p:sp>
@@ -3905,10 +3911,16 @@
                 <a:solidFill>
                   <a:srgbClr val="000000"/>
                 </a:solidFill>
-                <a:latin typeface="Microsoft YaHei"/>
+                <a:latin typeface="微软雅黑" panose="020B0503020204020204" charset="-122"/>
               </a:rPr>
               <a:t>不会被测试的特性</a:t>
             </a:r>
+            <a:endParaRPr sz="3000" b="1">
+              <a:solidFill>
+                <a:srgbClr val="000000"/>
+              </a:solidFill>
+              <a:latin typeface="微软雅黑" panose="020B0503020204020204" charset="-122"/>
+            </a:endParaRPr>
           </a:p>
         </p:txBody>
       </p:sp>
@@ -3947,10 +3959,16 @@
                           <a:solidFill>
                             <a:srgbClr val="FFFFFF"/>
                           </a:solidFill>
-                          <a:latin typeface="Microsoft YaHei"/>
+                          <a:latin typeface="微软雅黑" panose="020B0503020204020204" charset="-122"/>
                         </a:rPr>
                         <a:t>序号</a:t>
                       </a:r>
+                      <a:endParaRPr sz="1300" b="1">
+                        <a:solidFill>
+                          <a:srgbClr val="FFFFFF"/>
+                        </a:solidFill>
+                        <a:latin typeface="微软雅黑" panose="020B0503020204020204" charset="-122"/>
+                      </a:endParaRPr>
                     </a:p>
                   </a:txBody>
                   <a:tcPr>
@@ -3970,10 +3988,16 @@
                           <a:solidFill>
                             <a:srgbClr val="FFFFFF"/>
                           </a:solidFill>
-                          <a:latin typeface="Microsoft YaHei"/>
+                          <a:latin typeface="微软雅黑" panose="020B0503020204020204" charset="-122"/>
                         </a:rPr>
                         <a:t>不会被测试的特性</a:t>
                       </a:r>
+                      <a:endParaRPr sz="1300" b="1">
+                        <a:solidFill>
+                          <a:srgbClr val="FFFFFF"/>
+                        </a:solidFill>
+                        <a:latin typeface="微软雅黑" panose="020B0503020204020204" charset="-122"/>
+                      </a:endParaRPr>
                     </a:p>
                   </a:txBody>
                   <a:tcPr>
@@ -3993,10 +4017,16 @@
                           <a:solidFill>
                             <a:srgbClr val="FFFFFF"/>
                           </a:solidFill>
-                          <a:latin typeface="Microsoft YaHei"/>
+                          <a:latin typeface="微软雅黑" panose="020B0503020204020204" charset="-122"/>
                         </a:rPr>
                         <a:t>原因</a:t>
                       </a:r>
+                      <a:endParaRPr sz="1300" b="1">
+                        <a:solidFill>
+                          <a:srgbClr val="FFFFFF"/>
+                        </a:solidFill>
+                        <a:latin typeface="微软雅黑" panose="020B0503020204020204" charset="-122"/>
+                      </a:endParaRPr>
                     </a:p>
                   </a:txBody>
                   <a:tcPr>
@@ -4018,10 +4048,16 @@
                           <a:solidFill>
                             <a:srgbClr val="000000"/>
                           </a:solidFill>
-                          <a:latin typeface="Microsoft YaHei"/>
+                          <a:latin typeface="微软雅黑" panose="020B0503020204020204" charset="-122"/>
                         </a:rPr>
                         <a:t>1</a:t>
                       </a:r>
+                      <a:endParaRPr sz="1200" b="0">
+                        <a:solidFill>
+                          <a:srgbClr val="000000"/>
+                        </a:solidFill>
+                        <a:latin typeface="微软雅黑" panose="020B0503020204020204" charset="-122"/>
+                      </a:endParaRPr>
                     </a:p>
                   </a:txBody>
                   <a:tcPr>
@@ -4041,10 +4077,16 @@
                           <a:solidFill>
                             <a:srgbClr val="000000"/>
                           </a:solidFill>
-                          <a:latin typeface="Microsoft YaHei"/>
+                          <a:latin typeface="微软雅黑" panose="020B0503020204020204" charset="-122"/>
                         </a:rPr>
                         <a:t>浏览器 UI 自动化</a:t>
                       </a:r>
+                      <a:endParaRPr sz="1200" b="0">
+                        <a:solidFill>
+                          <a:srgbClr val="000000"/>
+                        </a:solidFill>
+                        <a:latin typeface="微软雅黑" panose="020B0503020204020204" charset="-122"/>
+                      </a:endParaRPr>
                     </a:p>
                   </a:txBody>
                   <a:tcPr>
@@ -4064,10 +4106,16 @@
                           <a:solidFill>
                             <a:srgbClr val="000000"/>
                           </a:solidFill>
-                          <a:latin typeface="Microsoft YaHei"/>
+                          <a:latin typeface="微软雅黑" panose="020B0503020204020204" charset="-122"/>
                         </a:rPr>
                         <a:t>PJ1 要求聚焦 service 单元测试与 controller 集成测试</a:t>
                       </a:r>
+                      <a:endParaRPr sz="1200" b="0">
+                        <a:solidFill>
+                          <a:srgbClr val="000000"/>
+                        </a:solidFill>
+                        <a:latin typeface="微软雅黑" panose="020B0503020204020204" charset="-122"/>
+                      </a:endParaRPr>
                     </a:p>
                   </a:txBody>
                   <a:tcPr>
@@ -4089,10 +4137,16 @@
                           <a:solidFill>
                             <a:srgbClr val="000000"/>
                           </a:solidFill>
-                          <a:latin typeface="Microsoft YaHei"/>
+                          <a:latin typeface="微软雅黑" panose="020B0503020204020204" charset="-122"/>
                         </a:rPr>
                         <a:t>2</a:t>
                       </a:r>
+                      <a:endParaRPr sz="1200" b="0">
+                        <a:solidFill>
+                          <a:srgbClr val="000000"/>
+                        </a:solidFill>
+                        <a:latin typeface="微软雅黑" panose="020B0503020204020204" charset="-122"/>
+                      </a:endParaRPr>
                     </a:p>
                   </a:txBody>
                   <a:tcPr>
@@ -4112,10 +4166,16 @@
                           <a:solidFill>
                             <a:srgbClr val="000000"/>
                           </a:solidFill>
-                          <a:latin typeface="Microsoft YaHei"/>
+                          <a:latin typeface="微软雅黑" panose="020B0503020204020204" charset="-122"/>
                         </a:rPr>
                         <a:t>性能压测</a:t>
                       </a:r>
+                      <a:endParaRPr sz="1200" b="0">
+                        <a:solidFill>
+                          <a:srgbClr val="000000"/>
+                        </a:solidFill>
+                        <a:latin typeface="微软雅黑" panose="020B0503020204020204" charset="-122"/>
+                      </a:endParaRPr>
                     </a:p>
                   </a:txBody>
                   <a:tcPr>
@@ -4135,10 +4195,16 @@
                           <a:solidFill>
                             <a:srgbClr val="000000"/>
                           </a:solidFill>
-                          <a:latin typeface="Microsoft YaHei"/>
+                          <a:latin typeface="微软雅黑" panose="020B0503020204020204" charset="-122"/>
                         </a:rPr>
                         <a:t>课程任务未要求吞吐、并发与响应时间指标</a:t>
                       </a:r>
+                      <a:endParaRPr sz="1200" b="0">
+                        <a:solidFill>
+                          <a:srgbClr val="000000"/>
+                        </a:solidFill>
+                        <a:latin typeface="微软雅黑" panose="020B0503020204020204" charset="-122"/>
+                      </a:endParaRPr>
                     </a:p>
                   </a:txBody>
                   <a:tcPr>
@@ -4160,10 +4226,16 @@
                           <a:solidFill>
                             <a:srgbClr val="000000"/>
                           </a:solidFill>
-                          <a:latin typeface="Microsoft YaHei"/>
+                          <a:latin typeface="微软雅黑" panose="020B0503020204020204" charset="-122"/>
                         </a:rPr>
                         <a:t>3</a:t>
                       </a:r>
+                      <a:endParaRPr sz="1200" b="0">
+                        <a:solidFill>
+                          <a:srgbClr val="000000"/>
+                        </a:solidFill>
+                        <a:latin typeface="微软雅黑" panose="020B0503020204020204" charset="-122"/>
+                      </a:endParaRPr>
                     </a:p>
                   </a:txBody>
                   <a:tcPr>
@@ -4183,10 +4255,16 @@
                           <a:solidFill>
                             <a:srgbClr val="000000"/>
                           </a:solidFill>
-                          <a:latin typeface="Microsoft YaHei"/>
+                          <a:latin typeface="微软雅黑" panose="020B0503020204020204" charset="-122"/>
                         </a:rPr>
                         <a:t>安全渗透测试</a:t>
                       </a:r>
+                      <a:endParaRPr sz="1200" b="0">
+                        <a:solidFill>
+                          <a:srgbClr val="000000"/>
+                        </a:solidFill>
+                        <a:latin typeface="微软雅黑" panose="020B0503020204020204" charset="-122"/>
+                      </a:endParaRPr>
                     </a:p>
                   </a:txBody>
                   <a:tcPr>
@@ -4206,10 +4284,16 @@
                           <a:solidFill>
                             <a:srgbClr val="000000"/>
                           </a:solidFill>
-                          <a:latin typeface="Microsoft YaHei"/>
+                          <a:latin typeface="微软雅黑" panose="020B0503020204020204" charset="-122"/>
                         </a:rPr>
                         <a:t>仅验证登录态与权限分支，不做漏洞扫描</a:t>
                       </a:r>
+                      <a:endParaRPr sz="1200" b="0">
+                        <a:solidFill>
+                          <a:srgbClr val="000000"/>
+                        </a:solidFill>
+                        <a:latin typeface="微软雅黑" panose="020B0503020204020204" charset="-122"/>
+                      </a:endParaRPr>
                     </a:p>
                   </a:txBody>
                   <a:tcPr>
@@ -4231,10 +4315,16 @@
                           <a:solidFill>
                             <a:srgbClr val="000000"/>
                           </a:solidFill>
-                          <a:latin typeface="Microsoft YaHei"/>
+                          <a:latin typeface="微软雅黑" panose="020B0503020204020204" charset="-122"/>
                         </a:rPr>
                         <a:t>4</a:t>
                       </a:r>
+                      <a:endParaRPr sz="1200" b="0">
+                        <a:solidFill>
+                          <a:srgbClr val="000000"/>
+                        </a:solidFill>
+                        <a:latin typeface="微软雅黑" panose="020B0503020204020204" charset="-122"/>
+                      </a:endParaRPr>
                     </a:p>
                   </a:txBody>
                   <a:tcPr>
@@ -4254,10 +4344,16 @@
                           <a:solidFill>
                             <a:srgbClr val="000000"/>
                           </a:solidFill>
-                          <a:latin typeface="Microsoft YaHei"/>
+                          <a:latin typeface="微软雅黑" panose="020B0503020204020204" charset="-122"/>
                         </a:rPr>
                         <a:t>真实 MySQL 专有行为</a:t>
                       </a:r>
+                      <a:endParaRPr sz="1200" b="0">
+                        <a:solidFill>
+                          <a:srgbClr val="000000"/>
+                        </a:solidFill>
+                        <a:latin typeface="微软雅黑" panose="020B0503020204020204" charset="-122"/>
+                      </a:endParaRPr>
                     </a:p>
                   </a:txBody>
                   <a:tcPr>
@@ -4277,10 +4373,16 @@
                           <a:solidFill>
                             <a:srgbClr val="000000"/>
                           </a:solidFill>
-                          <a:latin typeface="Microsoft YaHei"/>
+                          <a:latin typeface="微软雅黑" panose="020B0503020204020204" charset="-122"/>
                         </a:rPr>
                         <a:t>H2 MySQL 模式用于可复现测试，真实库差异列为限制</a:t>
                       </a:r>
+                      <a:endParaRPr sz="1200" b="0">
+                        <a:solidFill>
+                          <a:srgbClr val="000000"/>
+                        </a:solidFill>
+                        <a:latin typeface="微软雅黑" panose="020B0503020204020204" charset="-122"/>
+                      </a:endParaRPr>
                     </a:p>
                   </a:txBody>
                   <a:tcPr>
@@ -4302,10 +4404,16 @@
                           <a:solidFill>
                             <a:srgbClr val="000000"/>
                           </a:solidFill>
-                          <a:latin typeface="Microsoft YaHei"/>
+                          <a:latin typeface="微软雅黑" panose="020B0503020204020204" charset="-122"/>
                         </a:rPr>
                         <a:t>5</a:t>
                       </a:r>
+                      <a:endParaRPr sz="1200" b="0">
+                        <a:solidFill>
+                          <a:srgbClr val="000000"/>
+                        </a:solidFill>
+                        <a:latin typeface="微软雅黑" panose="020B0503020204020204" charset="-122"/>
+                      </a:endParaRPr>
                     </a:p>
                   </a:txBody>
                   <a:tcPr>
@@ -4325,10 +4433,16 @@
                           <a:solidFill>
                             <a:srgbClr val="000000"/>
                           </a:solidFill>
-                          <a:latin typeface="Microsoft YaHei"/>
+                          <a:latin typeface="微软雅黑" panose="020B0503020204020204" charset="-122"/>
                         </a:rPr>
                         <a:t>真实文件落盘</a:t>
                       </a:r>
+                      <a:endParaRPr sz="1200" b="0">
+                        <a:solidFill>
+                          <a:srgbClr val="000000"/>
+                        </a:solidFill>
+                        <a:latin typeface="微软雅黑" panose="020B0503020204020204" charset="-122"/>
+                      </a:endParaRPr>
                     </a:p>
                   </a:txBody>
                   <a:tcPr>
@@ -4348,10 +4462,16 @@
                           <a:solidFill>
                             <a:srgbClr val="000000"/>
                           </a:solidFill>
-                          <a:latin typeface="Microsoft YaHei"/>
+                          <a:latin typeface="微软雅黑" panose="020B0503020204020204" charset="-122"/>
                         </a:rPr>
                         <a:t>FileUtil 与业务主流程关联较弱，后续可单独隔离补测</a:t>
                       </a:r>
+                      <a:endParaRPr sz="1200" b="0">
+                        <a:solidFill>
+                          <a:srgbClr val="000000"/>
+                        </a:solidFill>
+                        <a:latin typeface="微软雅黑" panose="020B0503020204020204" charset="-122"/>
+                      </a:endParaRPr>
                     </a:p>
                   </a:txBody>
                   <a:tcPr>
@@ -4374,7 +4494,7 @@
 </file>
 
 <file path=ppt/slides/slide11.xml><?xml version="1.0" encoding="utf-8"?>
-<p:sld xmlns:a="http://schemas.openxmlformats.org/drawingml/2006/main" xmlns:p="http://schemas.openxmlformats.org/presentationml/2006/main" xmlns:r="http://schemas.openxmlformats.org/officeDocument/2006/relationships">
+<p:sld xmlns:a="http://schemas.openxmlformats.org/drawingml/2006/main" xmlns:r="http://schemas.openxmlformats.org/officeDocument/2006/relationships" xmlns:p="http://schemas.openxmlformats.org/presentationml/2006/main">
   <p:cSld>
     <p:spTree>
       <p:nvGrpSpPr>
@@ -4711,10 +4831,16 @@
                 <a:solidFill>
                   <a:srgbClr val="000000"/>
                 </a:solidFill>
-                <a:latin typeface="Microsoft YaHei"/>
+                <a:latin typeface="微软雅黑" panose="020B0503020204020204" charset="-122"/>
               </a:rPr>
               <a:t>图表11</a:t>
             </a:r>
+            <a:endParaRPr sz="700" b="0">
+              <a:solidFill>
+                <a:srgbClr val="000000"/>
+              </a:solidFill>
+              <a:latin typeface="微软雅黑" panose="020B0503020204020204" charset="-122"/>
+            </a:endParaRPr>
           </a:p>
         </p:txBody>
       </p:sp>
@@ -4745,10 +4871,16 @@
                 <a:solidFill>
                   <a:srgbClr val="000000"/>
                 </a:solidFill>
-                <a:latin typeface="Microsoft YaHei"/>
+                <a:latin typeface="微软雅黑" panose="020B0503020204020204" charset="-122"/>
               </a:rPr>
               <a:t>测试用例设计文档</a:t>
             </a:r>
+            <a:endParaRPr sz="2500" b="1">
+              <a:solidFill>
+                <a:srgbClr val="000000"/>
+              </a:solidFill>
+              <a:latin typeface="微软雅黑" panose="020B0503020204020204" charset="-122"/>
+            </a:endParaRPr>
           </a:p>
           <a:p>
             <a:r>
@@ -4756,10 +4888,16 @@
                 <a:solidFill>
                   <a:srgbClr val="000000"/>
                 </a:solidFill>
-                <a:latin typeface="Microsoft YaHei"/>
+                <a:latin typeface="微软雅黑" panose="020B0503020204020204" charset="-122"/>
               </a:rPr>
               <a:t>以订单状态流转为例</a:t>
             </a:r>
+            <a:endParaRPr sz="2500" b="1">
+              <a:solidFill>
+                <a:srgbClr val="000000"/>
+              </a:solidFill>
+              <a:latin typeface="微软雅黑" panose="020B0503020204020204" charset="-122"/>
+            </a:endParaRPr>
           </a:p>
         </p:txBody>
       </p:sp>
@@ -4799,10 +4937,16 @@
                           <a:solidFill>
                             <a:srgbClr val="FFFFFF"/>
                           </a:solidFill>
-                          <a:latin typeface="Microsoft YaHei"/>
+                          <a:latin typeface="微软雅黑" panose="020B0503020204020204" charset="-122"/>
                         </a:rPr>
                         <a:t>设计技术</a:t>
                       </a:r>
+                      <a:endParaRPr sz="1200" b="1">
+                        <a:solidFill>
+                          <a:srgbClr val="FFFFFF"/>
+                        </a:solidFill>
+                        <a:latin typeface="微软雅黑" panose="020B0503020204020204" charset="-122"/>
+                      </a:endParaRPr>
                     </a:p>
                   </a:txBody>
                   <a:tcPr>
@@ -4822,10 +4966,16 @@
                           <a:solidFill>
                             <a:srgbClr val="FFFFFF"/>
                           </a:solidFill>
-                          <a:latin typeface="Microsoft YaHei"/>
+                          <a:latin typeface="微软雅黑" panose="020B0503020204020204" charset="-122"/>
                         </a:rPr>
                         <a:t>代表输入/场景</a:t>
                       </a:r>
+                      <a:endParaRPr sz="1200" b="1">
+                        <a:solidFill>
+                          <a:srgbClr val="FFFFFF"/>
+                        </a:solidFill>
+                        <a:latin typeface="微软雅黑" panose="020B0503020204020204" charset="-122"/>
+                      </a:endParaRPr>
                     </a:p>
                   </a:txBody>
                   <a:tcPr>
@@ -4845,10 +4995,16 @@
                           <a:solidFill>
                             <a:srgbClr val="FFFFFF"/>
                           </a:solidFill>
-                          <a:latin typeface="Microsoft YaHei"/>
+                          <a:latin typeface="微软雅黑" panose="020B0503020204020204" charset="-122"/>
                         </a:rPr>
                         <a:t>预期结果</a:t>
                       </a:r>
+                      <a:endParaRPr sz="1200" b="1">
+                        <a:solidFill>
+                          <a:srgbClr val="FFFFFF"/>
+                        </a:solidFill>
+                        <a:latin typeface="微软雅黑" panose="020B0503020204020204" charset="-122"/>
+                      </a:endParaRPr>
                     </a:p>
                   </a:txBody>
                   <a:tcPr>
@@ -4868,10 +5024,16 @@
                           <a:solidFill>
                             <a:srgbClr val="FFFFFF"/>
                           </a:solidFill>
-                          <a:latin typeface="Microsoft YaHei"/>
+                          <a:latin typeface="微软雅黑" panose="020B0503020204020204" charset="-122"/>
                         </a:rPr>
                         <a:t>编号口径</a:t>
                       </a:r>
+                      <a:endParaRPr sz="1200" b="1">
+                        <a:solidFill>
+                          <a:srgbClr val="FFFFFF"/>
+                        </a:solidFill>
+                        <a:latin typeface="微软雅黑" panose="020B0503020204020204" charset="-122"/>
+                      </a:endParaRPr>
                     </a:p>
                   </a:txBody>
                   <a:tcPr>
@@ -4893,10 +5055,16 @@
                           <a:solidFill>
                             <a:srgbClr val="000000"/>
                           </a:solidFill>
-                          <a:latin typeface="Microsoft YaHei"/>
+                          <a:latin typeface="微软雅黑" panose="020B0503020204020204" charset="-122"/>
                         </a:rPr>
                         <a:t>等价类划分</a:t>
                       </a:r>
+                      <a:endParaRPr sz="1100" b="0">
+                        <a:solidFill>
+                          <a:srgbClr val="000000"/>
+                        </a:solidFill>
+                        <a:latin typeface="微软雅黑" panose="020B0503020204020204" charset="-122"/>
+                      </a:endParaRPr>
                     </a:p>
                   </a:txBody>
                   <a:tcPr>
@@ -4916,10 +5084,16 @@
                           <a:solidFill>
                             <a:srgbClr val="000000"/>
                           </a:solidFill>
-                          <a:latin typeface="Microsoft YaHei"/>
+                          <a:latin typeface="微软雅黑" panose="020B0503020204020204" charset="-122"/>
                         </a:rPr>
                         <a:t>合法用户、合法场馆、存在的订单 ID</a:t>
                       </a:r>
+                      <a:endParaRPr sz="1100" b="0">
+                        <a:solidFill>
+                          <a:srgbClr val="000000"/>
+                        </a:solidFill>
+                        <a:latin typeface="微软雅黑" panose="020B0503020204020204" charset="-122"/>
+                      </a:endParaRPr>
                     </a:p>
                   </a:txBody>
                   <a:tcPr>
@@ -4939,10 +5113,16 @@
                           <a:solidFill>
                             <a:srgbClr val="000000"/>
                           </a:solidFill>
-                          <a:latin typeface="Microsoft YaHei"/>
+                          <a:latin typeface="微软雅黑" panose="020B0503020204020204" charset="-122"/>
                         </a:rPr>
                         <a:t>订单创建/查询成功</a:t>
                       </a:r>
+                      <a:endParaRPr sz="1100" b="0">
+                        <a:solidFill>
+                          <a:srgbClr val="000000"/>
+                        </a:solidFill>
+                        <a:latin typeface="微软雅黑" panose="020B0503020204020204" charset="-122"/>
+                      </a:endParaRPr>
                     </a:p>
                   </a:txBody>
                   <a:tcPr>
@@ -4962,10 +5142,16 @@
                           <a:solidFill>
                             <a:srgbClr val="000000"/>
                           </a:solidFill>
-                          <a:latin typeface="Microsoft YaHei"/>
+                          <a:latin typeface="微软雅黑" panose="020B0503020204020204" charset="-122"/>
                         </a:rPr>
                         <a:t>订单相关用例</a:t>
                       </a:r>
+                      <a:endParaRPr sz="1100" b="0">
+                        <a:solidFill>
+                          <a:srgbClr val="000000"/>
+                        </a:solidFill>
+                        <a:latin typeface="微软雅黑" panose="020B0503020204020204" charset="-122"/>
+                      </a:endParaRPr>
                     </a:p>
                   </a:txBody>
                   <a:tcPr>
@@ -4987,10 +5173,16 @@
                           <a:solidFill>
                             <a:srgbClr val="000000"/>
                           </a:solidFill>
-                          <a:latin typeface="Microsoft YaHei"/>
+                          <a:latin typeface="微软雅黑" panose="020B0503020204020204" charset="-122"/>
                         </a:rPr>
                         <a:t>边界值分析</a:t>
                       </a:r>
+                      <a:endParaRPr sz="1100" b="0">
+                        <a:solidFill>
+                          <a:srgbClr val="000000"/>
+                        </a:solidFill>
+                        <a:latin typeface="微软雅黑" panose="020B0503020204020204" charset="-122"/>
+                      </a:endParaRPr>
                     </a:p>
                   </a:txBody>
                   <a:tcPr>
@@ -5010,10 +5202,16 @@
                           <a:solidFill>
                             <a:srgbClr val="000000"/>
                           </a:solidFill>
-                          <a:latin typeface="Microsoft YaHei"/>
+                          <a:latin typeface="微软雅黑" panose="020B0503020204020204" charset="-122"/>
                         </a:rPr>
                         <a:t>page 默认值、非法页码、空参数</a:t>
                       </a:r>
+                      <a:endParaRPr sz="1100" b="0">
+                        <a:solidFill>
+                          <a:srgbClr val="000000"/>
+                        </a:solidFill>
+                        <a:latin typeface="微软雅黑" panose="020B0503020204020204" charset="-122"/>
+                      </a:endParaRPr>
                     </a:p>
                   </a:txBody>
                   <a:tcPr>
@@ -5033,10 +5231,16 @@
                           <a:solidFill>
                             <a:srgbClr val="000000"/>
                           </a:solidFill>
-                          <a:latin typeface="Microsoft YaHei"/>
+                          <a:latin typeface="微软雅黑" panose="020B0503020204020204" charset="-122"/>
                         </a:rPr>
                         <a:t>返回默认页或异常路径被验证</a:t>
                       </a:r>
+                      <a:endParaRPr sz="1100" b="0">
+                        <a:solidFill>
+                          <a:srgbClr val="000000"/>
+                        </a:solidFill>
+                        <a:latin typeface="微软雅黑" panose="020B0503020204020204" charset="-122"/>
+                      </a:endParaRPr>
                     </a:p>
                   </a:txBody>
                   <a:tcPr>
@@ -5056,10 +5260,16 @@
                           <a:solidFill>
                             <a:srgbClr val="000000"/>
                           </a:solidFill>
-                          <a:latin typeface="Microsoft YaHei"/>
+                          <a:latin typeface="微软雅黑" panose="020B0503020204020204" charset="-122"/>
                         </a:rPr>
                         <a:t>分页与参数用例</a:t>
                       </a:r>
+                      <a:endParaRPr sz="1100" b="0">
+                        <a:solidFill>
+                          <a:srgbClr val="000000"/>
+                        </a:solidFill>
+                        <a:latin typeface="微软雅黑" panose="020B0503020204020204" charset="-122"/>
+                      </a:endParaRPr>
                     </a:p>
                   </a:txBody>
                   <a:tcPr>
@@ -5081,10 +5291,16 @@
                           <a:solidFill>
                             <a:srgbClr val="000000"/>
                           </a:solidFill>
-                          <a:latin typeface="Microsoft YaHei"/>
+                          <a:latin typeface="微软雅黑" panose="020B0503020204020204" charset="-122"/>
                         </a:rPr>
                         <a:t>语句覆盖</a:t>
                       </a:r>
+                      <a:endParaRPr sz="1100" b="0">
+                        <a:solidFill>
+                          <a:srgbClr val="000000"/>
+                        </a:solidFill>
+                        <a:latin typeface="微软雅黑" panose="020B0503020204020204" charset="-122"/>
+                      </a:endParaRPr>
                     </a:p>
                   </a:txBody>
                   <a:tcPr>
@@ -5104,10 +5320,16 @@
                           <a:solidFill>
                             <a:srgbClr val="000000"/>
                           </a:solidFill>
-                          <a:latin typeface="Microsoft YaHei"/>
+                          <a:latin typeface="微软雅黑" panose="020B0503020204020204" charset="-122"/>
                         </a:rPr>
                         <a:t>创建、取消、查询等核心业务路径</a:t>
                       </a:r>
+                      <a:endParaRPr sz="1100" b="0">
+                        <a:solidFill>
+                          <a:srgbClr val="000000"/>
+                        </a:solidFill>
+                        <a:latin typeface="微软雅黑" panose="020B0503020204020204" charset="-122"/>
+                      </a:endParaRPr>
                     </a:p>
                   </a:txBody>
                   <a:tcPr>
@@ -5127,10 +5349,16 @@
                           <a:solidFill>
                             <a:srgbClr val="000000"/>
                           </a:solidFill>
-                          <a:latin typeface="Microsoft YaHei"/>
+                          <a:latin typeface="微软雅黑" panose="020B0503020204020204" charset="-122"/>
                         </a:rPr>
                         <a:t>可达语句至少执行一次</a:t>
                       </a:r>
+                      <a:endParaRPr sz="1100" b="0">
+                        <a:solidFill>
+                          <a:srgbClr val="000000"/>
+                        </a:solidFill>
+                        <a:latin typeface="微软雅黑" panose="020B0503020204020204" charset="-122"/>
+                      </a:endParaRPr>
                     </a:p>
                   </a:txBody>
                   <a:tcPr>
@@ -5150,10 +5378,16 @@
                           <a:solidFill>
                             <a:srgbClr val="000000"/>
                           </a:solidFill>
-                          <a:latin typeface="Microsoft YaHei"/>
+                          <a:latin typeface="微软雅黑" panose="020B0503020204020204" charset="-122"/>
                         </a:rPr>
                         <a:t>单元测试用例</a:t>
                       </a:r>
+                      <a:endParaRPr sz="1100" b="0">
+                        <a:solidFill>
+                          <a:srgbClr val="000000"/>
+                        </a:solidFill>
+                        <a:latin typeface="微软雅黑" panose="020B0503020204020204" charset="-122"/>
+                      </a:endParaRPr>
                     </a:p>
                   </a:txBody>
                   <a:tcPr>
@@ -5175,10 +5409,16 @@
                           <a:solidFill>
                             <a:srgbClr val="000000"/>
                           </a:solidFill>
-                          <a:latin typeface="Microsoft YaHei"/>
+                          <a:latin typeface="微软雅黑" panose="020B0503020204020204" charset="-122"/>
                         </a:rPr>
                         <a:t>判定覆盖</a:t>
                       </a:r>
+                      <a:endParaRPr sz="1100" b="0">
+                        <a:solidFill>
+                          <a:srgbClr val="000000"/>
+                        </a:solidFill>
+                        <a:latin typeface="微软雅黑" panose="020B0503020204020204" charset="-122"/>
+                      </a:endParaRPr>
                     </a:p>
                   </a:txBody>
                   <a:tcPr>
@@ -5198,10 +5438,16 @@
                           <a:solidFill>
                             <a:srgbClr val="000000"/>
                           </a:solidFill>
-                          <a:latin typeface="Microsoft YaHei"/>
+                          <a:latin typeface="微软雅黑" panose="020B0503020204020204" charset="-122"/>
                         </a:rPr>
                         <a:t>审核通过/拒绝、未登录/已登录</a:t>
                       </a:r>
+                      <a:endParaRPr sz="1100" b="0">
+                        <a:solidFill>
+                          <a:srgbClr val="000000"/>
+                        </a:solidFill>
+                        <a:latin typeface="微软雅黑" panose="020B0503020204020204" charset="-122"/>
+                      </a:endParaRPr>
                     </a:p>
                   </a:txBody>
                   <a:tcPr>
@@ -5221,10 +5467,16 @@
                           <a:solidFill>
                             <a:srgbClr val="000000"/>
                           </a:solidFill>
-                          <a:latin typeface="Microsoft YaHei"/>
+                          <a:latin typeface="微软雅黑" panose="020B0503020204020204" charset="-122"/>
                         </a:rPr>
                         <a:t>true/false 两侧均被验证</a:t>
                       </a:r>
+                      <a:endParaRPr sz="1100" b="0">
+                        <a:solidFill>
+                          <a:srgbClr val="000000"/>
+                        </a:solidFill>
+                        <a:latin typeface="微软雅黑" panose="020B0503020204020204" charset="-122"/>
+                      </a:endParaRPr>
                     </a:p>
                   </a:txBody>
                   <a:tcPr>
@@ -5244,10 +5496,16 @@
                           <a:solidFill>
                             <a:srgbClr val="000000"/>
                           </a:solidFill>
-                          <a:latin typeface="Microsoft YaHei"/>
+                          <a:latin typeface="微软雅黑" panose="020B0503020204020204" charset="-122"/>
                         </a:rPr>
                         <a:t>集成测试用例</a:t>
                       </a:r>
+                      <a:endParaRPr sz="1100" b="0">
+                        <a:solidFill>
+                          <a:srgbClr val="000000"/>
+                        </a:solidFill>
+                        <a:latin typeface="微软雅黑" panose="020B0503020204020204" charset="-122"/>
+                      </a:endParaRPr>
                     </a:p>
                   </a:txBody>
                   <a:tcPr>
@@ -5270,7 +5528,7 @@
 </file>
 
 <file path=ppt/slides/slide12.xml><?xml version="1.0" encoding="utf-8"?>
-<p:sld xmlns:a="http://schemas.openxmlformats.org/drawingml/2006/main" xmlns:p="http://schemas.openxmlformats.org/presentationml/2006/main" xmlns:r="http://schemas.openxmlformats.org/officeDocument/2006/relationships">
+<p:sld xmlns:a="http://schemas.openxmlformats.org/drawingml/2006/main" xmlns:r="http://schemas.openxmlformats.org/officeDocument/2006/relationships" xmlns:p="http://schemas.openxmlformats.org/presentationml/2006/main">
   <p:cSld>
     <p:spTree>
       <p:nvGrpSpPr>
@@ -5607,10 +5865,16 @@
                 <a:solidFill>
                   <a:srgbClr val="000000"/>
                 </a:solidFill>
-                <a:latin typeface="Microsoft YaHei"/>
+                <a:latin typeface="微软雅黑" panose="020B0503020204020204" charset="-122"/>
               </a:rPr>
               <a:t>图表12</a:t>
             </a:r>
+            <a:endParaRPr sz="700" b="0">
+              <a:solidFill>
+                <a:srgbClr val="000000"/>
+              </a:solidFill>
+              <a:latin typeface="微软雅黑" panose="020B0503020204020204" charset="-122"/>
+            </a:endParaRPr>
           </a:p>
         </p:txBody>
       </p:sp>
@@ -5641,10 +5905,16 @@
                 <a:solidFill>
                   <a:srgbClr val="000000"/>
                 </a:solidFill>
-                <a:latin typeface="Microsoft YaHei"/>
+                <a:latin typeface="微软雅黑" panose="020B0503020204020204" charset="-122"/>
               </a:rPr>
               <a:t>覆盖率</a:t>
             </a:r>
+            <a:endParaRPr sz="3000" b="1">
+              <a:solidFill>
+                <a:srgbClr val="000000"/>
+              </a:solidFill>
+              <a:latin typeface="微软雅黑" panose="020B0503020204020204" charset="-122"/>
+            </a:endParaRPr>
           </a:p>
         </p:txBody>
       </p:sp>
@@ -5695,10 +5965,16 @@
                 <a:solidFill>
                   <a:srgbClr val="FFFFFF"/>
                 </a:solidFill>
-                <a:latin typeface="Microsoft YaHei"/>
+                <a:latin typeface="微软雅黑" panose="020B0503020204020204" charset="-122"/>
               </a:rPr>
               <a:t>128</a:t>
             </a:r>
+            <a:endParaRPr sz="1500" b="1">
+              <a:solidFill>
+                <a:srgbClr val="FFFFFF"/>
+              </a:solidFill>
+              <a:latin typeface="微软雅黑" panose="020B0503020204020204" charset="-122"/>
+            </a:endParaRPr>
           </a:p>
           <a:p>
             <a:pPr algn="ctr"/>
@@ -5707,10 +5983,16 @@
                 <a:solidFill>
                   <a:srgbClr val="FFFFFF"/>
                 </a:solidFill>
-                <a:latin typeface="Microsoft YaHei"/>
+                <a:latin typeface="微软雅黑" panose="020B0503020204020204" charset="-122"/>
               </a:rPr>
               <a:t>自动化测试全部通过</a:t>
             </a:r>
+            <a:endParaRPr sz="1500" b="1">
+              <a:solidFill>
+                <a:srgbClr val="FFFFFF"/>
+              </a:solidFill>
+              <a:latin typeface="微软雅黑" panose="020B0503020204020204" charset="-122"/>
+            </a:endParaRPr>
           </a:p>
         </p:txBody>
       </p:sp>
@@ -5761,10 +6043,16 @@
                 <a:solidFill>
                   <a:srgbClr val="FFFFFF"/>
                 </a:solidFill>
-                <a:latin typeface="Microsoft YaHei"/>
+                <a:latin typeface="微软雅黑" panose="020B0503020204020204" charset="-122"/>
               </a:rPr>
               <a:t>92.54%</a:t>
             </a:r>
+            <a:endParaRPr sz="1500" b="1">
+              <a:solidFill>
+                <a:srgbClr val="FFFFFF"/>
+              </a:solidFill>
+              <a:latin typeface="微软雅黑" panose="020B0503020204020204" charset="-122"/>
+            </a:endParaRPr>
           </a:p>
           <a:p>
             <a:pPr algn="ctr"/>
@@ -5773,10 +6061,16 @@
                 <a:solidFill>
                   <a:srgbClr val="FFFFFF"/>
                 </a:solidFill>
-                <a:latin typeface="Microsoft YaHei"/>
+                <a:latin typeface="微软雅黑" panose="020B0503020204020204" charset="-122"/>
               </a:rPr>
               <a:t>整体指令覆盖率</a:t>
             </a:r>
+            <a:endParaRPr sz="1500" b="1">
+              <a:solidFill>
+                <a:srgbClr val="FFFFFF"/>
+              </a:solidFill>
+              <a:latin typeface="微软雅黑" panose="020B0503020204020204" charset="-122"/>
+            </a:endParaRPr>
           </a:p>
         </p:txBody>
       </p:sp>
@@ -5827,10 +6121,16 @@
                 <a:solidFill>
                   <a:srgbClr val="FFFFFF"/>
                 </a:solidFill>
-                <a:latin typeface="Microsoft YaHei"/>
+                <a:latin typeface="微软雅黑" panose="020B0503020204020204" charset="-122"/>
               </a:rPr>
               <a:t>80.77%</a:t>
             </a:r>
+            <a:endParaRPr sz="1500" b="1">
+              <a:solidFill>
+                <a:srgbClr val="FFFFFF"/>
+              </a:solidFill>
+              <a:latin typeface="微软雅黑" panose="020B0503020204020204" charset="-122"/>
+            </a:endParaRPr>
           </a:p>
           <a:p>
             <a:pPr algn="ctr"/>
@@ -5839,10 +6139,16 @@
                 <a:solidFill>
                   <a:srgbClr val="FFFFFF"/>
                 </a:solidFill>
-                <a:latin typeface="Microsoft YaHei"/>
+                <a:latin typeface="微软雅黑" panose="020B0503020204020204" charset="-122"/>
               </a:rPr>
               <a:t>整体分支覆盖率</a:t>
             </a:r>
+            <a:endParaRPr sz="1500" b="1">
+              <a:solidFill>
+                <a:srgbClr val="FFFFFF"/>
+              </a:solidFill>
+              <a:latin typeface="微软雅黑" panose="020B0503020204020204" charset="-122"/>
+            </a:endParaRPr>
           </a:p>
         </p:txBody>
       </p:sp>
@@ -5855,7 +6161,7 @@
           <p:nvPr/>
         </p:nvPicPr>
         <p:blipFill>
-          <a:blip r:embed="rId2"/>
+          <a:blip r:embed="rId1"/>
           <a:stretch>
             <a:fillRect/>
           </a:stretch>
@@ -5897,10 +6203,16 @@
                 <a:solidFill>
                   <a:srgbClr val="696969"/>
                 </a:solidFill>
-                <a:latin typeface="Microsoft YaHei"/>
+                <a:latin typeface="微软雅黑" panose="020B0503020204020204" charset="-122"/>
               </a:rPr>
               <a:t>补充：service.impl 指令/分支覆盖率 100%；controller 指令覆盖率 98.54%，分支覆盖率 82.35%。</a:t>
             </a:r>
+            <a:endParaRPr sz="1300" b="0">
+              <a:solidFill>
+                <a:srgbClr val="696969"/>
+              </a:solidFill>
+              <a:latin typeface="微软雅黑" panose="020B0503020204020204" charset="-122"/>
+            </a:endParaRPr>
           </a:p>
         </p:txBody>
       </p:sp>
@@ -5913,7 +6225,7 @@
 </file>
 
 <file path=ppt/slides/slide13.xml><?xml version="1.0" encoding="utf-8"?>
-<p:sld xmlns:a="http://schemas.openxmlformats.org/drawingml/2006/main" xmlns:p="http://schemas.openxmlformats.org/presentationml/2006/main" xmlns:r="http://schemas.openxmlformats.org/officeDocument/2006/relationships">
+<p:sld xmlns:a="http://schemas.openxmlformats.org/drawingml/2006/main" xmlns:r="http://schemas.openxmlformats.org/officeDocument/2006/relationships" xmlns:p="http://schemas.openxmlformats.org/presentationml/2006/main">
   <p:cSld>
     <p:spTree>
       <p:nvGrpSpPr>
@@ -6250,10 +6562,16 @@
                 <a:solidFill>
                   <a:srgbClr val="000000"/>
                 </a:solidFill>
-                <a:latin typeface="Microsoft YaHei"/>
+                <a:latin typeface="微软雅黑" panose="020B0503020204020204" charset="-122"/>
               </a:rPr>
               <a:t>图表13</a:t>
             </a:r>
+            <a:endParaRPr sz="700" b="0">
+              <a:solidFill>
+                <a:srgbClr val="000000"/>
+              </a:solidFill>
+              <a:latin typeface="微软雅黑" panose="020B0503020204020204" charset="-122"/>
+            </a:endParaRPr>
           </a:p>
         </p:txBody>
       </p:sp>
@@ -6284,10 +6602,16 @@
                 <a:solidFill>
                   <a:srgbClr val="000000"/>
                 </a:solidFill>
-                <a:latin typeface="Microsoft YaHei"/>
+                <a:latin typeface="微软雅黑" panose="020B0503020204020204" charset="-122"/>
               </a:rPr>
               <a:t>每个测试类里的基本思路</a:t>
             </a:r>
+            <a:endParaRPr sz="3000" b="1">
+              <a:solidFill>
+                <a:srgbClr val="000000"/>
+              </a:solidFill>
+              <a:latin typeface="微软雅黑" panose="020B0503020204020204" charset="-122"/>
+            </a:endParaRPr>
           </a:p>
         </p:txBody>
       </p:sp>
@@ -6318,10 +6642,16 @@
                 <a:solidFill>
                   <a:srgbClr val="000000"/>
                 </a:solidFill>
-                <a:latin typeface="Microsoft YaHei"/>
+                <a:latin typeface="微软雅黑" panose="020B0503020204020204" charset="-122"/>
               </a:rPr>
               <a:t>• service 单测：@ExtendWith + MockitoExtension 隔离 DAO</a:t>
             </a:r>
+            <a:endParaRPr sz="1500" b="0">
+              <a:solidFill>
+                <a:srgbClr val="000000"/>
+              </a:solidFill>
+              <a:latin typeface="微软雅黑" panose="020B0503020204020204" charset="-122"/>
+            </a:endParaRPr>
           </a:p>
           <a:p>
             <a:r>
@@ -6329,10 +6659,16 @@
                 <a:solidFill>
                   <a:srgbClr val="000000"/>
                 </a:solidFill>
-                <a:latin typeface="Microsoft YaHei"/>
+                <a:latin typeface="微软雅黑" panose="020B0503020204020204" charset="-122"/>
               </a:rPr>
               <a:t>• controller 集成：@SpringBootTest + @AutoConfigureMockMvc 启动上下文</a:t>
             </a:r>
+            <a:endParaRPr sz="1500" b="0">
+              <a:solidFill>
+                <a:srgbClr val="000000"/>
+              </a:solidFill>
+              <a:latin typeface="微软雅黑" panose="020B0503020204020204" charset="-122"/>
+            </a:endParaRPr>
           </a:p>
           <a:p>
             <a:r>
@@ -6340,10 +6676,16 @@
                 <a:solidFill>
                   <a:srgbClr val="000000"/>
                 </a:solidFill>
-                <a:latin typeface="Microsoft YaHei"/>
+                <a:latin typeface="微软雅黑" panose="020B0503020204020204" charset="-122"/>
               </a:rPr>
               <a:t>• BeforeEach / TestDataFactory 统一造数，保证测试互不污染</a:t>
             </a:r>
+            <a:endParaRPr sz="1500" b="0">
+              <a:solidFill>
+                <a:srgbClr val="000000"/>
+              </a:solidFill>
+              <a:latin typeface="微软雅黑" panose="020B0503020204020204" charset="-122"/>
+            </a:endParaRPr>
           </a:p>
           <a:p>
             <a:r>
@@ -6351,10 +6693,16 @@
                 <a:solidFill>
                   <a:srgbClr val="000000"/>
                 </a:solidFill>
-                <a:latin typeface="Microsoft YaHei"/>
+                <a:latin typeface="微软雅黑" panose="020B0503020204020204" charset="-122"/>
               </a:rPr>
               <a:t>• MockMvc perform 后校验 status、view、redirect、model 属性</a:t>
             </a:r>
+            <a:endParaRPr sz="1500" b="0">
+              <a:solidFill>
+                <a:srgbClr val="000000"/>
+              </a:solidFill>
+              <a:latin typeface="微软雅黑" panose="020B0503020204020204" charset="-122"/>
+            </a:endParaRPr>
           </a:p>
           <a:p>
             <a:r>
@@ -6362,10 +6710,16 @@
                 <a:solidFill>
                   <a:srgbClr val="000000"/>
                 </a:solidFill>
-                <a:latin typeface="Microsoft YaHei"/>
+                <a:latin typeface="微软雅黑" panose="020B0503020204020204" charset="-122"/>
               </a:rPr>
               <a:t>• 执行 mvn test 后由 Surefire 与 JaCoCo 汇总结果</a:t>
             </a:r>
+            <a:endParaRPr sz="1500" b="0">
+              <a:solidFill>
+                <a:srgbClr val="000000"/>
+              </a:solidFill>
+              <a:latin typeface="微软雅黑" panose="020B0503020204020204" charset="-122"/>
+            </a:endParaRPr>
           </a:p>
         </p:txBody>
       </p:sp>
@@ -6378,7 +6732,7 @@
 </file>
 
 <file path=ppt/slides/slide14.xml><?xml version="1.0" encoding="utf-8"?>
-<p:sld xmlns:a="http://schemas.openxmlformats.org/drawingml/2006/main" xmlns:p="http://schemas.openxmlformats.org/presentationml/2006/main" xmlns:r="http://schemas.openxmlformats.org/officeDocument/2006/relationships">
+<p:sld xmlns:a="http://schemas.openxmlformats.org/drawingml/2006/main" xmlns:r="http://schemas.openxmlformats.org/officeDocument/2006/relationships" xmlns:p="http://schemas.openxmlformats.org/presentationml/2006/main">
   <p:cSld>
     <p:spTree>
       <p:nvGrpSpPr>
@@ -6715,10 +7069,16 @@
                 <a:solidFill>
                   <a:srgbClr val="000000"/>
                 </a:solidFill>
-                <a:latin typeface="Microsoft YaHei"/>
+                <a:latin typeface="微软雅黑" panose="020B0503020204020204" charset="-122"/>
               </a:rPr>
               <a:t>图表14</a:t>
             </a:r>
+            <a:endParaRPr sz="700" b="0">
+              <a:solidFill>
+                <a:srgbClr val="000000"/>
+              </a:solidFill>
+              <a:latin typeface="微软雅黑" panose="020B0503020204020204" charset="-122"/>
+            </a:endParaRPr>
           </a:p>
         </p:txBody>
       </p:sp>
@@ -6749,10 +7109,16 @@
                 <a:solidFill>
                   <a:srgbClr val="000000"/>
                 </a:solidFill>
-                <a:latin typeface="Microsoft YaHei"/>
+                <a:latin typeface="微软雅黑" panose="020B0503020204020204" charset="-122"/>
               </a:rPr>
               <a:t>示例</a:t>
             </a:r>
+            <a:endParaRPr sz="3000" b="1">
+              <a:solidFill>
+                <a:srgbClr val="000000"/>
+              </a:solidFill>
+              <a:latin typeface="微软雅黑" panose="020B0503020204020204" charset="-122"/>
+            </a:endParaRPr>
           </a:p>
         </p:txBody>
       </p:sp>
@@ -6803,10 +7169,16 @@
                 <a:solidFill>
                   <a:srgbClr val="283C50"/>
                 </a:solidFill>
-                <a:latin typeface="Consolas"/>
+                <a:latin typeface="Consolas" panose="020B0609020204030204"/>
               </a:rPr>
               <a:t>@Test</a:t>
             </a:r>
+            <a:endParaRPr sz="1000">
+              <a:solidFill>
+                <a:srgbClr val="283C50"/>
+              </a:solidFill>
+              <a:latin typeface="Consolas" panose="020B0609020204030204"/>
+            </a:endParaRPr>
           </a:p>
           <a:p>
             <a:pPr algn="l"/>
@@ -6815,10 +7187,16 @@
                 <a:solidFill>
                   <a:srgbClr val="283C50"/>
                 </a:solidFill>
-                <a:latin typeface="Consolas"/>
+                <a:latin typeface="Consolas" panose="020B0609020204030204"/>
               </a:rPr>
               <a:t>void cancelOrder_shouldRedirectWhenLoginUserOwnsOrder() {</a:t>
             </a:r>
+            <a:endParaRPr sz="1000">
+              <a:solidFill>
+                <a:srgbClr val="283C50"/>
+              </a:solidFill>
+              <a:latin typeface="Consolas" panose="020B0609020204030204"/>
+            </a:endParaRPr>
           </a:p>
           <a:p>
             <a:pPr algn="l"/>
@@ -6827,10 +7205,16 @@
                 <a:solidFill>
                   <a:srgbClr val="283C50"/>
                 </a:solidFill>
-                <a:latin typeface="Consolas"/>
+                <a:latin typeface="Consolas" panose="020B0609020204030204"/>
               </a:rPr>
               <a:t>    mockMvc.perform(get("/order/cancel")</a:t>
             </a:r>
+            <a:endParaRPr sz="1000">
+              <a:solidFill>
+                <a:srgbClr val="283C50"/>
+              </a:solidFill>
+              <a:latin typeface="Consolas" panose="020B0609020204030204"/>
+            </a:endParaRPr>
           </a:p>
           <a:p>
             <a:pPr algn="l"/>
@@ -6839,10 +7223,16 @@
                 <a:solidFill>
                   <a:srgbClr val="283C50"/>
                 </a:solidFill>
-                <a:latin typeface="Consolas"/>
+                <a:latin typeface="Consolas" panose="020B0609020204030204"/>
               </a:rPr>
               <a:t>        .param("orderID", "1")</a:t>
             </a:r>
+            <a:endParaRPr sz="1000">
+              <a:solidFill>
+                <a:srgbClr val="283C50"/>
+              </a:solidFill>
+              <a:latin typeface="Consolas" panose="020B0609020204030204"/>
+            </a:endParaRPr>
           </a:p>
           <a:p>
             <a:pPr algn="l"/>
@@ -6851,10 +7241,16 @@
                 <a:solidFill>
                   <a:srgbClr val="283C50"/>
                 </a:solidFill>
-                <a:latin typeface="Consolas"/>
+                <a:latin typeface="Consolas" panose="020B0609020204030204"/>
               </a:rPr>
               <a:t>        .sessionAttr("user", user))</a:t>
             </a:r>
+            <a:endParaRPr sz="1000">
+              <a:solidFill>
+                <a:srgbClr val="283C50"/>
+              </a:solidFill>
+              <a:latin typeface="Consolas" panose="020B0609020204030204"/>
+            </a:endParaRPr>
           </a:p>
           <a:p>
             <a:pPr algn="l"/>
@@ -6863,10 +7259,16 @@
                 <a:solidFill>
                   <a:srgbClr val="283C50"/>
                 </a:solidFill>
-                <a:latin typeface="Consolas"/>
+                <a:latin typeface="Consolas" panose="020B0609020204030204"/>
               </a:rPr>
               <a:t>      .andExpect(status().is3xxRedirection())</a:t>
             </a:r>
+            <a:endParaRPr sz="1000">
+              <a:solidFill>
+                <a:srgbClr val="283C50"/>
+              </a:solidFill>
+              <a:latin typeface="Consolas" panose="020B0609020204030204"/>
+            </a:endParaRPr>
           </a:p>
           <a:p>
             <a:pPr algn="l"/>
@@ -6875,10 +7277,16 @@
                 <a:solidFill>
                   <a:srgbClr val="283C50"/>
                 </a:solidFill>
-                <a:latin typeface="Consolas"/>
+                <a:latin typeface="Consolas" panose="020B0609020204030204"/>
               </a:rPr>
               <a:t>      .andExpect(redirectedUrl("/order/list"));</a:t>
             </a:r>
+            <a:endParaRPr sz="1000">
+              <a:solidFill>
+                <a:srgbClr val="283C50"/>
+              </a:solidFill>
+              <a:latin typeface="Consolas" panose="020B0609020204030204"/>
+            </a:endParaRPr>
           </a:p>
           <a:p>
             <a:pPr algn="l"/>
@@ -6887,10 +7295,16 @@
                 <a:solidFill>
                   <a:srgbClr val="283C50"/>
                 </a:solidFill>
-                <a:latin typeface="Consolas"/>
+                <a:latin typeface="Consolas" panose="020B0609020204030204"/>
               </a:rPr>
               <a:t>}</a:t>
             </a:r>
+            <a:endParaRPr sz="1000">
+              <a:solidFill>
+                <a:srgbClr val="283C50"/>
+              </a:solidFill>
+              <a:latin typeface="Consolas" panose="020B0609020204030204"/>
+            </a:endParaRPr>
           </a:p>
         </p:txBody>
       </p:sp>
@@ -6941,10 +7355,16 @@
                 <a:solidFill>
                   <a:srgbClr val="283C50"/>
                 </a:solidFill>
-                <a:latin typeface="Consolas"/>
+                <a:latin typeface="Consolas" panose="020B0609020204030204"/>
               </a:rPr>
               <a:t>@Test</a:t>
             </a:r>
+            <a:endParaRPr sz="1000">
+              <a:solidFill>
+                <a:srgbClr val="283C50"/>
+              </a:solidFill>
+              <a:latin typeface="Consolas" panose="020B0609020204030204"/>
+            </a:endParaRPr>
           </a:p>
           <a:p>
             <a:pPr algn="l"/>
@@ -6953,10 +7373,16 @@
                 <a:solidFill>
                   <a:srgbClr val="283C50"/>
                 </a:solidFill>
-                <a:latin typeface="Consolas"/>
+                <a:latin typeface="Consolas" panose="020B0609020204030204"/>
               </a:rPr>
               <a:t>void checkLogin_shouldReturnNullWhenPasswordMismatch() {</a:t>
             </a:r>
+            <a:endParaRPr sz="1000">
+              <a:solidFill>
+                <a:srgbClr val="283C50"/>
+              </a:solidFill>
+              <a:latin typeface="Consolas" panose="020B0609020204030204"/>
+            </a:endParaRPr>
           </a:p>
           <a:p>
             <a:pPr algn="l"/>
@@ -6965,10 +7391,16 @@
                 <a:solidFill>
                   <a:srgbClr val="283C50"/>
                 </a:solidFill>
-                <a:latin typeface="Consolas"/>
+                <a:latin typeface="Consolas" panose="020B0609020204030204"/>
               </a:rPr>
               <a:t>    when(userDao.getUser("u01")).thenReturn(user);</a:t>
             </a:r>
+            <a:endParaRPr sz="1000">
+              <a:solidFill>
+                <a:srgbClr val="283C50"/>
+              </a:solidFill>
+              <a:latin typeface="Consolas" panose="020B0609020204030204"/>
+            </a:endParaRPr>
           </a:p>
           <a:p>
             <a:pPr algn="l"/>
@@ -6977,10 +7409,16 @@
                 <a:solidFill>
                   <a:srgbClr val="283C50"/>
                 </a:solidFill>
-                <a:latin typeface="Consolas"/>
+                <a:latin typeface="Consolas" panose="020B0609020204030204"/>
               </a:rPr>
               <a:t>    User result = userService.checkLogin("u01", "bad");</a:t>
             </a:r>
+            <a:endParaRPr sz="1000">
+              <a:solidFill>
+                <a:srgbClr val="283C50"/>
+              </a:solidFill>
+              <a:latin typeface="Consolas" panose="020B0609020204030204"/>
+            </a:endParaRPr>
           </a:p>
           <a:p>
             <a:pPr algn="l"/>
@@ -6989,10 +7427,16 @@
                 <a:solidFill>
                   <a:srgbClr val="283C50"/>
                 </a:solidFill>
-                <a:latin typeface="Consolas"/>
+                <a:latin typeface="Consolas" panose="020B0609020204030204"/>
               </a:rPr>
               <a:t>    assertNull(result);</a:t>
             </a:r>
+            <a:endParaRPr sz="1000">
+              <a:solidFill>
+                <a:srgbClr val="283C50"/>
+              </a:solidFill>
+              <a:latin typeface="Consolas" panose="020B0609020204030204"/>
+            </a:endParaRPr>
           </a:p>
           <a:p>
             <a:pPr algn="l"/>
@@ -7001,10 +7445,16 @@
                 <a:solidFill>
                   <a:srgbClr val="283C50"/>
                 </a:solidFill>
-                <a:latin typeface="Consolas"/>
+                <a:latin typeface="Consolas" panose="020B0609020204030204"/>
               </a:rPr>
               <a:t>}</a:t>
             </a:r>
+            <a:endParaRPr sz="1000">
+              <a:solidFill>
+                <a:srgbClr val="283C50"/>
+              </a:solidFill>
+              <a:latin typeface="Consolas" panose="020B0609020204030204"/>
+            </a:endParaRPr>
           </a:p>
         </p:txBody>
       </p:sp>
@@ -7036,10 +7486,16 @@
                 <a:solidFill>
                   <a:srgbClr val="AB4824"/>
                 </a:solidFill>
-                <a:latin typeface="Microsoft YaHei"/>
+                <a:latin typeface="微软雅黑" panose="020B0503020204020204" charset="-122"/>
               </a:rPr>
               <a:t>左侧：controller 集成测试路径校验</a:t>
             </a:r>
+            <a:endParaRPr sz="1600" b="0">
+              <a:solidFill>
+                <a:srgbClr val="AB4824"/>
+              </a:solidFill>
+              <a:latin typeface="微软雅黑" panose="020B0503020204020204" charset="-122"/>
+            </a:endParaRPr>
           </a:p>
           <a:p>
             <a:pPr algn="ctr"/>
@@ -7048,10 +7504,16 @@
                 <a:solidFill>
                   <a:srgbClr val="AB4824"/>
                 </a:solidFill>
-                <a:latin typeface="Microsoft YaHei"/>
+                <a:latin typeface="微软雅黑" panose="020B0503020204020204" charset="-122"/>
               </a:rPr>
               <a:t>右侧：service 单元测试分支校验</a:t>
             </a:r>
+            <a:endParaRPr sz="1600" b="0">
+              <a:solidFill>
+                <a:srgbClr val="AB4824"/>
+              </a:solidFill>
+              <a:latin typeface="微软雅黑" panose="020B0503020204020204" charset="-122"/>
+            </a:endParaRPr>
           </a:p>
         </p:txBody>
       </p:sp>
@@ -7064,7 +7526,7 @@
 </file>
 
 <file path=ppt/slides/slide15.xml><?xml version="1.0" encoding="utf-8"?>
-<p:sld xmlns:a="http://schemas.openxmlformats.org/drawingml/2006/main" xmlns:p="http://schemas.openxmlformats.org/presentationml/2006/main" xmlns:r="http://schemas.openxmlformats.org/officeDocument/2006/relationships">
+<p:sld xmlns:a="http://schemas.openxmlformats.org/drawingml/2006/main" xmlns:r="http://schemas.openxmlformats.org/officeDocument/2006/relationships" xmlns:p="http://schemas.openxmlformats.org/presentationml/2006/main">
   <p:cSld>
     <p:spTree>
       <p:nvGrpSpPr>
@@ -7401,10 +7863,16 @@
                 <a:solidFill>
                   <a:srgbClr val="000000"/>
                 </a:solidFill>
-                <a:latin typeface="Microsoft YaHei"/>
+                <a:latin typeface="微软雅黑" panose="020B0503020204020204" charset="-122"/>
               </a:rPr>
               <a:t>图表15</a:t>
             </a:r>
+            <a:endParaRPr sz="700" b="0">
+              <a:solidFill>
+                <a:srgbClr val="000000"/>
+              </a:solidFill>
+              <a:latin typeface="微软雅黑" panose="020B0503020204020204" charset="-122"/>
+            </a:endParaRPr>
           </a:p>
         </p:txBody>
       </p:sp>
@@ -7425,7 +7893,7 @@
           <a:noFill/>
         </p:spPr>
         <p:txBody>
-          <a:bodyPr wrap="none" lIns="0" rIns="0" tIns="0" bIns="0">
+          <a:bodyPr wrap="none" lIns="0" tIns="0" rIns="0" bIns="0">
             <a:spAutoFit/>
           </a:bodyPr>
           <a:lstStyle/>
@@ -7443,10 +7911,16 @@
                 <a:solidFill>
                   <a:srgbClr val="000000"/>
                 </a:solidFill>
-                <a:latin typeface="Microsoft YaHei"/>
+                <a:latin typeface="微软雅黑" panose="020B0503020204020204" charset="-122"/>
               </a:rPr>
               <a:t>单</a:t>
             </a:r>
+            <a:endParaRPr sz="2200" b="1">
+              <a:solidFill>
+                <a:srgbClr val="000000"/>
+              </a:solidFill>
+              <a:latin typeface="微软雅黑" panose="020B0503020204020204" charset="-122"/>
+            </a:endParaRPr>
           </a:p>
           <a:p>
             <a:pPr algn="ctr">
@@ -7462,10 +7936,16 @@
                 <a:solidFill>
                   <a:srgbClr val="000000"/>
                 </a:solidFill>
-                <a:latin typeface="Microsoft YaHei"/>
+                <a:latin typeface="微软雅黑" panose="020B0503020204020204" charset="-122"/>
               </a:rPr>
               <a:t>元</a:t>
             </a:r>
+            <a:endParaRPr sz="2200" b="1">
+              <a:solidFill>
+                <a:srgbClr val="000000"/>
+              </a:solidFill>
+              <a:latin typeface="微软雅黑" panose="020B0503020204020204" charset="-122"/>
+            </a:endParaRPr>
           </a:p>
           <a:p>
             <a:pPr algn="ctr">
@@ -7481,10 +7961,16 @@
                 <a:solidFill>
                   <a:srgbClr val="000000"/>
                 </a:solidFill>
-                <a:latin typeface="Microsoft YaHei"/>
+                <a:latin typeface="微软雅黑" panose="020B0503020204020204" charset="-122"/>
               </a:rPr>
               <a:t>测</a:t>
             </a:r>
+            <a:endParaRPr sz="2200" b="1">
+              <a:solidFill>
+                <a:srgbClr val="000000"/>
+              </a:solidFill>
+              <a:latin typeface="微软雅黑" panose="020B0503020204020204" charset="-122"/>
+            </a:endParaRPr>
           </a:p>
           <a:p>
             <a:pPr algn="ctr">
@@ -7500,10 +7986,16 @@
                 <a:solidFill>
                   <a:srgbClr val="000000"/>
                 </a:solidFill>
-                <a:latin typeface="Microsoft YaHei"/>
+                <a:latin typeface="微软雅黑" panose="020B0503020204020204" charset="-122"/>
               </a:rPr>
               <a:t>试</a:t>
             </a:r>
+            <a:endParaRPr sz="2200" b="1">
+              <a:solidFill>
+                <a:srgbClr val="000000"/>
+              </a:solidFill>
+              <a:latin typeface="微软雅黑" panose="020B0503020204020204" charset="-122"/>
+            </a:endParaRPr>
           </a:p>
           <a:p>
             <a:pPr algn="ctr">
@@ -7519,10 +8011,16 @@
                 <a:solidFill>
                   <a:srgbClr val="000000"/>
                 </a:solidFill>
-                <a:latin typeface="Microsoft YaHei"/>
+                <a:latin typeface="微软雅黑" panose="020B0503020204020204" charset="-122"/>
               </a:rPr>
               <a:t>模</a:t>
             </a:r>
+            <a:endParaRPr sz="2200" b="1">
+              <a:solidFill>
+                <a:srgbClr val="000000"/>
+              </a:solidFill>
+              <a:latin typeface="微软雅黑" panose="020B0503020204020204" charset="-122"/>
+            </a:endParaRPr>
           </a:p>
           <a:p>
             <a:pPr algn="ctr">
@@ -7538,10 +8036,16 @@
                 <a:solidFill>
                   <a:srgbClr val="000000"/>
                 </a:solidFill>
-                <a:latin typeface="Microsoft YaHei"/>
+                <a:latin typeface="微软雅黑" panose="020B0503020204020204" charset="-122"/>
               </a:rPr>
               <a:t>块</a:t>
             </a:r>
+            <a:endParaRPr sz="2200" b="1">
+              <a:solidFill>
+                <a:srgbClr val="000000"/>
+              </a:solidFill>
+              <a:latin typeface="微软雅黑" panose="020B0503020204020204" charset="-122"/>
+            </a:endParaRPr>
           </a:p>
         </p:txBody>
       </p:sp>
@@ -7581,10 +8085,16 @@
                           <a:solidFill>
                             <a:srgbClr val="FFFFFF"/>
                           </a:solidFill>
-                          <a:latin typeface="Microsoft YaHei"/>
+                          <a:latin typeface="微软雅黑" panose="020B0503020204020204" charset="-122"/>
                         </a:rPr>
                         <a:t>序号</a:t>
                       </a:r>
+                      <a:endParaRPr sz="1300" b="1">
+                        <a:solidFill>
+                          <a:srgbClr val="FFFFFF"/>
+                        </a:solidFill>
+                        <a:latin typeface="微软雅黑" panose="020B0503020204020204" charset="-122"/>
+                      </a:endParaRPr>
                     </a:p>
                   </a:txBody>
                   <a:tcPr>
@@ -7604,10 +8114,16 @@
                           <a:solidFill>
                             <a:srgbClr val="FFFFFF"/>
                           </a:solidFill>
-                          <a:latin typeface="Microsoft YaHei"/>
+                          <a:latin typeface="微软雅黑" panose="020B0503020204020204" charset="-122"/>
                         </a:rPr>
                         <a:t>测试模块</a:t>
                       </a:r>
+                      <a:endParaRPr sz="1300" b="1">
+                        <a:solidFill>
+                          <a:srgbClr val="FFFFFF"/>
+                        </a:solidFill>
+                        <a:latin typeface="微软雅黑" panose="020B0503020204020204" charset="-122"/>
+                      </a:endParaRPr>
                     </a:p>
                   </a:txBody>
                   <a:tcPr>
@@ -7627,10 +8143,16 @@
                           <a:solidFill>
                             <a:srgbClr val="FFFFFF"/>
                           </a:solidFill>
-                          <a:latin typeface="Microsoft YaHei"/>
+                          <a:latin typeface="微软雅黑" panose="020B0503020204020204" charset="-122"/>
                         </a:rPr>
                         <a:t>用例数量</a:t>
                       </a:r>
+                      <a:endParaRPr sz="1300" b="1">
+                        <a:solidFill>
+                          <a:srgbClr val="FFFFFF"/>
+                        </a:solidFill>
+                        <a:latin typeface="微软雅黑" panose="020B0503020204020204" charset="-122"/>
+                      </a:endParaRPr>
                     </a:p>
                   </a:txBody>
                   <a:tcPr>
@@ -7650,10 +8172,16 @@
                           <a:solidFill>
                             <a:srgbClr val="FFFFFF"/>
                           </a:solidFill>
-                          <a:latin typeface="Microsoft YaHei"/>
+                          <a:latin typeface="微软雅黑" panose="020B0503020204020204" charset="-122"/>
                         </a:rPr>
                         <a:t>覆盖重点</a:t>
                       </a:r>
+                      <a:endParaRPr sz="1300" b="1">
+                        <a:solidFill>
+                          <a:srgbClr val="FFFFFF"/>
+                        </a:solidFill>
+                        <a:latin typeface="微软雅黑" panose="020B0503020204020204" charset="-122"/>
+                      </a:endParaRPr>
                     </a:p>
                   </a:txBody>
                   <a:tcPr>
@@ -7675,10 +8203,16 @@
                           <a:solidFill>
                             <a:srgbClr val="000000"/>
                           </a:solidFill>
-                          <a:latin typeface="Microsoft YaHei"/>
+                          <a:latin typeface="微软雅黑" panose="020B0503020204020204" charset="-122"/>
                         </a:rPr>
                         <a:t>1</a:t>
                       </a:r>
+                      <a:endParaRPr sz="1200" b="0">
+                        <a:solidFill>
+                          <a:srgbClr val="000000"/>
+                        </a:solidFill>
+                        <a:latin typeface="微软雅黑" panose="020B0503020204020204" charset="-122"/>
+                      </a:endParaRPr>
                     </a:p>
                   </a:txBody>
                   <a:tcPr>
@@ -7698,10 +8232,16 @@
                           <a:solidFill>
                             <a:srgbClr val="000000"/>
                           </a:solidFill>
-                          <a:latin typeface="Microsoft YaHei"/>
+                          <a:latin typeface="微软雅黑" panose="020B0503020204020204" charset="-122"/>
                         </a:rPr>
                         <a:t>用户服务</a:t>
                       </a:r>
+                      <a:endParaRPr sz="1200" b="0">
+                        <a:solidFill>
+                          <a:srgbClr val="000000"/>
+                        </a:solidFill>
+                        <a:latin typeface="微软雅黑" panose="020B0503020204020204" charset="-122"/>
+                      </a:endParaRPr>
                     </a:p>
                   </a:txBody>
                   <a:tcPr>
@@ -7721,10 +8261,16 @@
                           <a:solidFill>
                             <a:srgbClr val="000000"/>
                           </a:solidFill>
-                          <a:latin typeface="Microsoft YaHei"/>
+                          <a:latin typeface="微软雅黑" panose="020B0503020204020204" charset="-122"/>
                         </a:rPr>
                         <a:t>8</a:t>
                       </a:r>
+                      <a:endParaRPr sz="1200" b="0">
+                        <a:solidFill>
+                          <a:srgbClr val="000000"/>
+                        </a:solidFill>
+                        <a:latin typeface="微软雅黑" panose="020B0503020204020204" charset="-122"/>
+                      </a:endParaRPr>
                     </a:p>
                   </a:txBody>
                   <a:tcPr>
@@ -7744,10 +8290,16 @@
                           <a:solidFill>
                             <a:srgbClr val="000000"/>
                           </a:solidFill>
-                          <a:latin typeface="Microsoft YaHei"/>
+                          <a:latin typeface="微软雅黑" panose="020B0503020204020204" charset="-122"/>
                         </a:rPr>
                         <a:t>登录、注册、增删改查</a:t>
                       </a:r>
+                      <a:endParaRPr sz="1200" b="0">
+                        <a:solidFill>
+                          <a:srgbClr val="000000"/>
+                        </a:solidFill>
+                        <a:latin typeface="微软雅黑" panose="020B0503020204020204" charset="-122"/>
+                      </a:endParaRPr>
                     </a:p>
                   </a:txBody>
                   <a:tcPr>
@@ -7769,10 +8321,16 @@
                           <a:solidFill>
                             <a:srgbClr val="000000"/>
                           </a:solidFill>
-                          <a:latin typeface="Microsoft YaHei"/>
+                          <a:latin typeface="微软雅黑" panose="020B0503020204020204" charset="-122"/>
                         </a:rPr>
                         <a:t>2</a:t>
                       </a:r>
+                      <a:endParaRPr sz="1200" b="0">
+                        <a:solidFill>
+                          <a:srgbClr val="000000"/>
+                        </a:solidFill>
+                        <a:latin typeface="微软雅黑" panose="020B0503020204020204" charset="-122"/>
+                      </a:endParaRPr>
                     </a:p>
                   </a:txBody>
                   <a:tcPr>
@@ -7792,10 +8350,16 @@
                           <a:solidFill>
                             <a:srgbClr val="000000"/>
                           </a:solidFill>
-                          <a:latin typeface="Microsoft YaHei"/>
+                          <a:latin typeface="微软雅黑" panose="020B0503020204020204" charset="-122"/>
                         </a:rPr>
                         <a:t>场馆服务</a:t>
                       </a:r>
+                      <a:endParaRPr sz="1200" b="0">
+                        <a:solidFill>
+                          <a:srgbClr val="000000"/>
+                        </a:solidFill>
+                        <a:latin typeface="微软雅黑" panose="020B0503020204020204" charset="-122"/>
+                      </a:endParaRPr>
                     </a:p>
                   </a:txBody>
                   <a:tcPr>
@@ -7815,10 +8379,16 @@
                           <a:solidFill>
                             <a:srgbClr val="000000"/>
                           </a:solidFill>
-                          <a:latin typeface="Microsoft YaHei"/>
+                          <a:latin typeface="微软雅黑" panose="020B0503020204020204" charset="-122"/>
                         </a:rPr>
                         <a:t>8</a:t>
                       </a:r>
+                      <a:endParaRPr sz="1200" b="0">
+                        <a:solidFill>
+                          <a:srgbClr val="000000"/>
+                        </a:solidFill>
+                        <a:latin typeface="微软雅黑" panose="020B0503020204020204" charset="-122"/>
+                      </a:endParaRPr>
                     </a:p>
                   </a:txBody>
                   <a:tcPr>
@@ -7838,10 +8408,16 @@
                           <a:solidFill>
                             <a:srgbClr val="000000"/>
                           </a:solidFill>
-                          <a:latin typeface="Microsoft YaHei"/>
+                          <a:latin typeface="微软雅黑" panose="020B0503020204020204" charset="-122"/>
                         </a:rPr>
                         <a:t>场馆查询、更新、删除</a:t>
                       </a:r>
+                      <a:endParaRPr sz="1200" b="0">
+                        <a:solidFill>
+                          <a:srgbClr val="000000"/>
+                        </a:solidFill>
+                        <a:latin typeface="微软雅黑" panose="020B0503020204020204" charset="-122"/>
+                      </a:endParaRPr>
                     </a:p>
                   </a:txBody>
                   <a:tcPr>
@@ -7863,10 +8439,16 @@
                           <a:solidFill>
                             <a:srgbClr val="000000"/>
                           </a:solidFill>
-                          <a:latin typeface="Microsoft YaHei"/>
+                          <a:latin typeface="微软雅黑" panose="020B0503020204020204" charset="-122"/>
                         </a:rPr>
                         <a:t>3</a:t>
                       </a:r>
+                      <a:endParaRPr sz="1200" b="0">
+                        <a:solidFill>
+                          <a:srgbClr val="000000"/>
+                        </a:solidFill>
+                        <a:latin typeface="微软雅黑" panose="020B0503020204020204" charset="-122"/>
+                      </a:endParaRPr>
                     </a:p>
                   </a:txBody>
                   <a:tcPr>
@@ -7886,10 +8468,16 @@
                           <a:solidFill>
                             <a:srgbClr val="000000"/>
                           </a:solidFill>
-                          <a:latin typeface="Microsoft YaHei"/>
+                          <a:latin typeface="微软雅黑" panose="020B0503020204020204" charset="-122"/>
                         </a:rPr>
                         <a:t>订单服务</a:t>
                       </a:r>
+                      <a:endParaRPr sz="1200" b="0">
+                        <a:solidFill>
+                          <a:srgbClr val="000000"/>
+                        </a:solidFill>
+                        <a:latin typeface="微软雅黑" panose="020B0503020204020204" charset="-122"/>
+                      </a:endParaRPr>
                     </a:p>
                   </a:txBody>
                   <a:tcPr>
@@ -7909,10 +8497,16 @@
                           <a:solidFill>
                             <a:srgbClr val="000000"/>
                           </a:solidFill>
-                          <a:latin typeface="Microsoft YaHei"/>
+                          <a:latin typeface="微软雅黑" panose="020B0503020204020204" charset="-122"/>
                         </a:rPr>
                         <a:t>14</a:t>
                       </a:r>
+                      <a:endParaRPr sz="1200" b="0">
+                        <a:solidFill>
+                          <a:srgbClr val="000000"/>
+                        </a:solidFill>
+                        <a:latin typeface="微软雅黑" panose="020B0503020204020204" charset="-122"/>
+                      </a:endParaRPr>
                     </a:p>
                   </a:txBody>
                   <a:tcPr>
@@ -7932,10 +8526,16 @@
                           <a:solidFill>
                             <a:srgbClr val="000000"/>
                           </a:solidFill>
-                          <a:latin typeface="Microsoft YaHei"/>
+                          <a:latin typeface="微软雅黑" panose="020B0503020204020204" charset="-122"/>
                         </a:rPr>
                         <a:t>订单创建、取消、审核状态</a:t>
                       </a:r>
+                      <a:endParaRPr sz="1200" b="0">
+                        <a:solidFill>
+                          <a:srgbClr val="000000"/>
+                        </a:solidFill>
+                        <a:latin typeface="微软雅黑" panose="020B0503020204020204" charset="-122"/>
+                      </a:endParaRPr>
                     </a:p>
                   </a:txBody>
                   <a:tcPr>
@@ -7957,10 +8557,16 @@
                           <a:solidFill>
                             <a:srgbClr val="000000"/>
                           </a:solidFill>
-                          <a:latin typeface="Microsoft YaHei"/>
+                          <a:latin typeface="微软雅黑" panose="020B0503020204020204" charset="-122"/>
                         </a:rPr>
                         <a:t>4</a:t>
                       </a:r>
+                      <a:endParaRPr sz="1200" b="0">
+                        <a:solidFill>
+                          <a:srgbClr val="000000"/>
+                        </a:solidFill>
+                        <a:latin typeface="微软雅黑" panose="020B0503020204020204" charset="-122"/>
+                      </a:endParaRPr>
                     </a:p>
                   </a:txBody>
                   <a:tcPr>
@@ -7980,10 +8586,16 @@
                           <a:solidFill>
                             <a:srgbClr val="000000"/>
                           </a:solidFill>
-                          <a:latin typeface="Microsoft YaHei"/>
+                          <a:latin typeface="微软雅黑" panose="020B0503020204020204" charset="-122"/>
                         </a:rPr>
                         <a:t>留言服务</a:t>
                       </a:r>
+                      <a:endParaRPr sz="1200" b="0">
+                        <a:solidFill>
+                          <a:srgbClr val="000000"/>
+                        </a:solidFill>
+                        <a:latin typeface="微软雅黑" panose="020B0503020204020204" charset="-122"/>
+                      </a:endParaRPr>
                     </a:p>
                   </a:txBody>
                   <a:tcPr>
@@ -8003,10 +8615,16 @@
                           <a:solidFill>
                             <a:srgbClr val="000000"/>
                           </a:solidFill>
-                          <a:latin typeface="Microsoft YaHei"/>
+                          <a:latin typeface="微软雅黑" panose="020B0503020204020204" charset="-122"/>
                         </a:rPr>
                         <a:t>11</a:t>
                       </a:r>
+                      <a:endParaRPr sz="1200" b="0">
+                        <a:solidFill>
+                          <a:srgbClr val="000000"/>
+                        </a:solidFill>
+                        <a:latin typeface="微软雅黑" panose="020B0503020204020204" charset="-122"/>
+                      </a:endParaRPr>
                     </a:p>
                   </a:txBody>
                   <a:tcPr>
@@ -8026,10 +8644,16 @@
                           <a:solidFill>
                             <a:srgbClr val="000000"/>
                           </a:solidFill>
-                          <a:latin typeface="Microsoft YaHei"/>
+                          <a:latin typeface="微软雅黑" panose="020B0503020204020204" charset="-122"/>
                         </a:rPr>
                         <a:t>留言发布、审核、删除</a:t>
                       </a:r>
+                      <a:endParaRPr sz="1200" b="0">
+                        <a:solidFill>
+                          <a:srgbClr val="000000"/>
+                        </a:solidFill>
+                        <a:latin typeface="微软雅黑" panose="020B0503020204020204" charset="-122"/>
+                      </a:endParaRPr>
                     </a:p>
                   </a:txBody>
                   <a:tcPr>
@@ -8051,10 +8675,16 @@
                           <a:solidFill>
                             <a:srgbClr val="000000"/>
                           </a:solidFill>
-                          <a:latin typeface="Microsoft YaHei"/>
+                          <a:latin typeface="微软雅黑" panose="020B0503020204020204" charset="-122"/>
                         </a:rPr>
                         <a:t>5</a:t>
                       </a:r>
+                      <a:endParaRPr sz="1200" b="0">
+                        <a:solidFill>
+                          <a:srgbClr val="000000"/>
+                        </a:solidFill>
+                        <a:latin typeface="微软雅黑" panose="020B0503020204020204" charset="-122"/>
+                      </a:endParaRPr>
                     </a:p>
                   </a:txBody>
                   <a:tcPr>
@@ -8074,10 +8704,16 @@
                           <a:solidFill>
                             <a:srgbClr val="000000"/>
                           </a:solidFill>
-                          <a:latin typeface="Microsoft YaHei"/>
+                          <a:latin typeface="微软雅黑" panose="020B0503020204020204" charset="-122"/>
                         </a:rPr>
                         <a:t>新闻服务</a:t>
                       </a:r>
+                      <a:endParaRPr sz="1200" b="0">
+                        <a:solidFill>
+                          <a:srgbClr val="000000"/>
+                        </a:solidFill>
+                        <a:latin typeface="微软雅黑" panose="020B0503020204020204" charset="-122"/>
+                      </a:endParaRPr>
                     </a:p>
                   </a:txBody>
                   <a:tcPr>
@@ -8097,10 +8733,16 @@
                           <a:solidFill>
                             <a:srgbClr val="000000"/>
                           </a:solidFill>
-                          <a:latin typeface="Microsoft YaHei"/>
+                          <a:latin typeface="微软雅黑" panose="020B0503020204020204" charset="-122"/>
                         </a:rPr>
                         <a:t>5</a:t>
                       </a:r>
+                      <a:endParaRPr sz="1200" b="0">
+                        <a:solidFill>
+                          <a:srgbClr val="000000"/>
+                        </a:solidFill>
+                        <a:latin typeface="微软雅黑" panose="020B0503020204020204" charset="-122"/>
+                      </a:endParaRPr>
                     </a:p>
                   </a:txBody>
                   <a:tcPr>
@@ -8120,10 +8762,16 @@
                           <a:solidFill>
                             <a:srgbClr val="000000"/>
                           </a:solidFill>
-                          <a:latin typeface="Microsoft YaHei"/>
+                          <a:latin typeface="微软雅黑" panose="020B0503020204020204" charset="-122"/>
                         </a:rPr>
                         <a:t>新闻列表、详情、维护</a:t>
                       </a:r>
+                      <a:endParaRPr sz="1200" b="0">
+                        <a:solidFill>
+                          <a:srgbClr val="000000"/>
+                        </a:solidFill>
+                        <a:latin typeface="微软雅黑" panose="020B0503020204020204" charset="-122"/>
+                      </a:endParaRPr>
                     </a:p>
                   </a:txBody>
                   <a:tcPr>
@@ -8145,10 +8793,16 @@
                           <a:solidFill>
                             <a:srgbClr val="000000"/>
                           </a:solidFill>
-                          <a:latin typeface="Microsoft YaHei"/>
+                          <a:latin typeface="微软雅黑" panose="020B0503020204020204" charset="-122"/>
                         </a:rPr>
                         <a:t>6</a:t>
                       </a:r>
+                      <a:endParaRPr sz="1200" b="0">
+                        <a:solidFill>
+                          <a:srgbClr val="000000"/>
+                        </a:solidFill>
+                        <a:latin typeface="微软雅黑" panose="020B0503020204020204" charset="-122"/>
+                      </a:endParaRPr>
                     </a:p>
                   </a:txBody>
                   <a:tcPr>
@@ -8168,10 +8822,16 @@
                           <a:solidFill>
                             <a:srgbClr val="000000"/>
                           </a:solidFill>
-                          <a:latin typeface="Microsoft YaHei"/>
+                          <a:latin typeface="微软雅黑" panose="020B0503020204020204" charset="-122"/>
                         </a:rPr>
                         <a:t>聚合查询服务</a:t>
                       </a:r>
+                      <a:endParaRPr sz="1200" b="0">
+                        <a:solidFill>
+                          <a:srgbClr val="000000"/>
+                        </a:solidFill>
+                        <a:latin typeface="微软雅黑" panose="020B0503020204020204" charset="-122"/>
+                      </a:endParaRPr>
                     </a:p>
                   </a:txBody>
                   <a:tcPr>
@@ -8191,10 +8851,16 @@
                           <a:solidFill>
                             <a:srgbClr val="000000"/>
                           </a:solidFill>
-                          <a:latin typeface="Microsoft YaHei"/>
+                          <a:latin typeface="微软雅黑" panose="020B0503020204020204" charset="-122"/>
                         </a:rPr>
                         <a:t>4</a:t>
                       </a:r>
+                      <a:endParaRPr sz="1200" b="0">
+                        <a:solidFill>
+                          <a:srgbClr val="000000"/>
+                        </a:solidFill>
+                        <a:latin typeface="微软雅黑" panose="020B0503020204020204" charset="-122"/>
+                      </a:endParaRPr>
                     </a:p>
                   </a:txBody>
                   <a:tcPr>
@@ -8214,10 +8880,16 @@
                           <a:solidFill>
                             <a:srgbClr val="000000"/>
                           </a:solidFill>
-                          <a:latin typeface="Microsoft YaHei"/>
+                          <a:latin typeface="微软雅黑" panose="020B0503020204020204" charset="-122"/>
                         </a:rPr>
                         <a:t>VO 聚合查询与边界路径</a:t>
                       </a:r>
+                      <a:endParaRPr sz="1200" b="0">
+                        <a:solidFill>
+                          <a:srgbClr val="000000"/>
+                        </a:solidFill>
+                        <a:latin typeface="微软雅黑" panose="020B0503020204020204" charset="-122"/>
+                      </a:endParaRPr>
                     </a:p>
                   </a:txBody>
                   <a:tcPr>
@@ -8240,7 +8912,7 @@
 </file>
 
 <file path=ppt/slides/slide16.xml><?xml version="1.0" encoding="utf-8"?>
-<p:sld xmlns:a="http://schemas.openxmlformats.org/drawingml/2006/main" xmlns:p="http://schemas.openxmlformats.org/presentationml/2006/main" xmlns:r="http://schemas.openxmlformats.org/officeDocument/2006/relationships">
+<p:sld xmlns:a="http://schemas.openxmlformats.org/drawingml/2006/main" xmlns:r="http://schemas.openxmlformats.org/officeDocument/2006/relationships" xmlns:p="http://schemas.openxmlformats.org/presentationml/2006/main">
   <p:cSld>
     <p:spTree>
       <p:nvGrpSpPr>
@@ -8577,10 +9249,16 @@
                 <a:solidFill>
                   <a:srgbClr val="000000"/>
                 </a:solidFill>
-                <a:latin typeface="Microsoft YaHei"/>
+                <a:latin typeface="微软雅黑" panose="020B0503020204020204" charset="-122"/>
               </a:rPr>
               <a:t>图表16</a:t>
             </a:r>
+            <a:endParaRPr sz="700" b="0">
+              <a:solidFill>
+                <a:srgbClr val="000000"/>
+              </a:solidFill>
+              <a:latin typeface="微软雅黑" panose="020B0503020204020204" charset="-122"/>
+            </a:endParaRPr>
           </a:p>
         </p:txBody>
       </p:sp>
@@ -8601,7 +9279,7 @@
           <a:noFill/>
         </p:spPr>
         <p:txBody>
-          <a:bodyPr wrap="none" lIns="0" rIns="0" tIns="0" bIns="0">
+          <a:bodyPr wrap="none" lIns="0" tIns="0" rIns="0" bIns="0">
             <a:spAutoFit/>
           </a:bodyPr>
           <a:lstStyle/>
@@ -8619,10 +9297,16 @@
                 <a:solidFill>
                   <a:srgbClr val="000000"/>
                 </a:solidFill>
-                <a:latin typeface="Microsoft YaHei"/>
+                <a:latin typeface="微软雅黑" panose="020B0503020204020204" charset="-122"/>
               </a:rPr>
               <a:t>公</a:t>
             </a:r>
+            <a:endParaRPr sz="2200" b="1">
+              <a:solidFill>
+                <a:srgbClr val="000000"/>
+              </a:solidFill>
+              <a:latin typeface="微软雅黑" panose="020B0503020204020204" charset="-122"/>
+            </a:endParaRPr>
           </a:p>
           <a:p>
             <a:pPr algn="ctr">
@@ -8638,10 +9322,16 @@
                 <a:solidFill>
                   <a:srgbClr val="000000"/>
                 </a:solidFill>
-                <a:latin typeface="Microsoft YaHei"/>
+                <a:latin typeface="微软雅黑" panose="020B0503020204020204" charset="-122"/>
               </a:rPr>
               <a:t>共</a:t>
             </a:r>
+            <a:endParaRPr sz="2200" b="1">
+              <a:solidFill>
+                <a:srgbClr val="000000"/>
+              </a:solidFill>
+              <a:latin typeface="微软雅黑" panose="020B0503020204020204" charset="-122"/>
+            </a:endParaRPr>
           </a:p>
           <a:p>
             <a:pPr algn="ctr">
@@ -8657,10 +9347,16 @@
                 <a:solidFill>
                   <a:srgbClr val="000000"/>
                 </a:solidFill>
-                <a:latin typeface="Microsoft YaHei"/>
+                <a:latin typeface="微软雅黑" panose="020B0503020204020204" charset="-122"/>
               </a:rPr>
               <a:t>展</a:t>
             </a:r>
+            <a:endParaRPr sz="2200" b="1">
+              <a:solidFill>
+                <a:srgbClr val="000000"/>
+              </a:solidFill>
+              <a:latin typeface="微软雅黑" panose="020B0503020204020204" charset="-122"/>
+            </a:endParaRPr>
           </a:p>
           <a:p>
             <a:pPr algn="ctr">
@@ -8676,10 +9372,16 @@
                 <a:solidFill>
                   <a:srgbClr val="000000"/>
                 </a:solidFill>
-                <a:latin typeface="Microsoft YaHei"/>
+                <a:latin typeface="微软雅黑" panose="020B0503020204020204" charset="-122"/>
               </a:rPr>
               <a:t>示</a:t>
             </a:r>
+            <a:endParaRPr sz="2200" b="1">
+              <a:solidFill>
+                <a:srgbClr val="000000"/>
+              </a:solidFill>
+              <a:latin typeface="微软雅黑" panose="020B0503020204020204" charset="-122"/>
+            </a:endParaRPr>
           </a:p>
           <a:p>
             <a:pPr algn="ctr">
@@ -8695,10 +9397,16 @@
                 <a:solidFill>
                   <a:srgbClr val="000000"/>
                 </a:solidFill>
-                <a:latin typeface="Microsoft YaHei"/>
+                <a:latin typeface="微软雅黑" panose="020B0503020204020204" charset="-122"/>
               </a:rPr>
               <a:t>模</a:t>
             </a:r>
+            <a:endParaRPr sz="2200" b="1">
+              <a:solidFill>
+                <a:srgbClr val="000000"/>
+              </a:solidFill>
+              <a:latin typeface="微软雅黑" panose="020B0503020204020204" charset="-122"/>
+            </a:endParaRPr>
           </a:p>
           <a:p>
             <a:pPr algn="ctr">
@@ -8714,10 +9422,16 @@
                 <a:solidFill>
                   <a:srgbClr val="000000"/>
                 </a:solidFill>
-                <a:latin typeface="Microsoft YaHei"/>
+                <a:latin typeface="微软雅黑" panose="020B0503020204020204" charset="-122"/>
               </a:rPr>
               <a:t>块</a:t>
             </a:r>
+            <a:endParaRPr sz="2200" b="1">
+              <a:solidFill>
+                <a:srgbClr val="000000"/>
+              </a:solidFill>
+              <a:latin typeface="微软雅黑" panose="020B0503020204020204" charset="-122"/>
+            </a:endParaRPr>
           </a:p>
         </p:txBody>
       </p:sp>
@@ -8757,10 +9471,16 @@
                           <a:solidFill>
                             <a:srgbClr val="FFFFFF"/>
                           </a:solidFill>
-                          <a:latin typeface="Microsoft YaHei"/>
+                          <a:latin typeface="微软雅黑" panose="020B0503020204020204" charset="-122"/>
                         </a:rPr>
                         <a:t>序号</a:t>
                       </a:r>
+                      <a:endParaRPr sz="1300" b="1">
+                        <a:solidFill>
+                          <a:srgbClr val="FFFFFF"/>
+                        </a:solidFill>
+                        <a:latin typeface="微软雅黑" panose="020B0503020204020204" charset="-122"/>
+                      </a:endParaRPr>
                     </a:p>
                   </a:txBody>
                   <a:tcPr>
@@ -8780,10 +9500,16 @@
                           <a:solidFill>
                             <a:srgbClr val="FFFFFF"/>
                           </a:solidFill>
-                          <a:latin typeface="Microsoft YaHei"/>
+                          <a:latin typeface="微软雅黑" panose="020B0503020204020204" charset="-122"/>
                         </a:rPr>
                         <a:t>特性</a:t>
                       </a:r>
+                      <a:endParaRPr sz="1300" b="1">
+                        <a:solidFill>
+                          <a:srgbClr val="FFFFFF"/>
+                        </a:solidFill>
+                        <a:latin typeface="微软雅黑" panose="020B0503020204020204" charset="-122"/>
+                      </a:endParaRPr>
                     </a:p>
                   </a:txBody>
                   <a:tcPr>
@@ -8803,10 +9529,16 @@
                           <a:solidFill>
                             <a:srgbClr val="FFFFFF"/>
                           </a:solidFill>
-                          <a:latin typeface="Microsoft YaHei"/>
+                          <a:latin typeface="微软雅黑" panose="020B0503020204020204" charset="-122"/>
                         </a:rPr>
                         <a:t>代表场景</a:t>
                       </a:r>
+                      <a:endParaRPr sz="1300" b="1">
+                        <a:solidFill>
+                          <a:srgbClr val="FFFFFF"/>
+                        </a:solidFill>
+                        <a:latin typeface="微软雅黑" panose="020B0503020204020204" charset="-122"/>
+                      </a:endParaRPr>
                     </a:p>
                   </a:txBody>
                   <a:tcPr>
@@ -8826,10 +9558,16 @@
                           <a:solidFill>
                             <a:srgbClr val="FFFFFF"/>
                           </a:solidFill>
-                          <a:latin typeface="Microsoft YaHei"/>
+                          <a:latin typeface="微软雅黑" panose="020B0503020204020204" charset="-122"/>
                         </a:rPr>
                         <a:t>测试设计技术</a:t>
                       </a:r>
+                      <a:endParaRPr sz="1300" b="1">
+                        <a:solidFill>
+                          <a:srgbClr val="FFFFFF"/>
+                        </a:solidFill>
+                        <a:latin typeface="微软雅黑" panose="020B0503020204020204" charset="-122"/>
+                      </a:endParaRPr>
                     </a:p>
                   </a:txBody>
                   <a:tcPr>
@@ -8851,10 +9589,16 @@
                           <a:solidFill>
                             <a:srgbClr val="000000"/>
                           </a:solidFill>
-                          <a:latin typeface="Microsoft YaHei"/>
+                          <a:latin typeface="微软雅黑" panose="020B0503020204020204" charset="-122"/>
                         </a:rPr>
                         <a:t>1</a:t>
                       </a:r>
+                      <a:endParaRPr sz="1200" b="0">
+                        <a:solidFill>
+                          <a:srgbClr val="000000"/>
+                        </a:solidFill>
+                        <a:latin typeface="微软雅黑" panose="020B0503020204020204" charset="-122"/>
+                      </a:endParaRPr>
                     </a:p>
                   </a:txBody>
                   <a:tcPr>
@@ -8874,10 +9618,16 @@
                           <a:solidFill>
                             <a:srgbClr val="000000"/>
                           </a:solidFill>
-                          <a:latin typeface="Microsoft YaHei"/>
+                          <a:latin typeface="微软雅黑" panose="020B0503020204020204" charset="-122"/>
                         </a:rPr>
                         <a:t>首页展示</a:t>
                       </a:r>
+                      <a:endParaRPr sz="1200" b="0">
+                        <a:solidFill>
+                          <a:srgbClr val="000000"/>
+                        </a:solidFill>
+                        <a:latin typeface="微软雅黑" panose="020B0503020204020204" charset="-122"/>
+                      </a:endParaRPr>
                     </a:p>
                   </a:txBody>
                   <a:tcPr>
@@ -8897,10 +9647,16 @@
                           <a:solidFill>
                             <a:srgbClr val="000000"/>
                           </a:solidFill>
-                          <a:latin typeface="Microsoft YaHei"/>
+                          <a:latin typeface="微软雅黑" panose="020B0503020204020204" charset="-122"/>
                         </a:rPr>
                         <a:t>首页内容正常加载</a:t>
                       </a:r>
+                      <a:endParaRPr sz="1200" b="0">
+                        <a:solidFill>
+                          <a:srgbClr val="000000"/>
+                        </a:solidFill>
+                        <a:latin typeface="微软雅黑" panose="020B0503020204020204" charset="-122"/>
+                      </a:endParaRPr>
                     </a:p>
                   </a:txBody>
                   <a:tcPr>
@@ -8920,10 +9676,16 @@
                           <a:solidFill>
                             <a:srgbClr val="000000"/>
                           </a:solidFill>
-                          <a:latin typeface="Microsoft YaHei"/>
+                          <a:latin typeface="微软雅黑" panose="020B0503020204020204" charset="-122"/>
                         </a:rPr>
                         <a:t>集成测试</a:t>
                       </a:r>
+                      <a:endParaRPr sz="1200" b="0">
+                        <a:solidFill>
+                          <a:srgbClr val="000000"/>
+                        </a:solidFill>
+                        <a:latin typeface="微软雅黑" panose="020B0503020204020204" charset="-122"/>
+                      </a:endParaRPr>
                     </a:p>
                   </a:txBody>
                   <a:tcPr>
@@ -8945,10 +9707,16 @@
                           <a:solidFill>
                             <a:srgbClr val="000000"/>
                           </a:solidFill>
-                          <a:latin typeface="Microsoft YaHei"/>
+                          <a:latin typeface="微软雅黑" panose="020B0503020204020204" charset="-122"/>
                         </a:rPr>
                         <a:t>2</a:t>
                       </a:r>
+                      <a:endParaRPr sz="1200" b="0">
+                        <a:solidFill>
+                          <a:srgbClr val="000000"/>
+                        </a:solidFill>
+                        <a:latin typeface="微软雅黑" panose="020B0503020204020204" charset="-122"/>
+                      </a:endParaRPr>
                     </a:p>
                   </a:txBody>
                   <a:tcPr>
@@ -8968,10 +9736,16 @@
                           <a:solidFill>
                             <a:srgbClr val="000000"/>
                           </a:solidFill>
-                          <a:latin typeface="Microsoft YaHei"/>
+                          <a:latin typeface="微软雅黑" panose="020B0503020204020204" charset="-122"/>
                         </a:rPr>
                         <a:t>新闻列表</a:t>
                       </a:r>
+                      <a:endParaRPr sz="1200" b="0">
+                        <a:solidFill>
+                          <a:srgbClr val="000000"/>
+                        </a:solidFill>
+                        <a:latin typeface="微软雅黑" panose="020B0503020204020204" charset="-122"/>
+                      </a:endParaRPr>
                     </a:p>
                   </a:txBody>
                   <a:tcPr>
@@ -8991,10 +9765,16 @@
                           <a:solidFill>
                             <a:srgbClr val="000000"/>
                           </a:solidFill>
-                          <a:latin typeface="Microsoft YaHei"/>
+                          <a:latin typeface="微软雅黑" panose="020B0503020204020204" charset="-122"/>
                         </a:rPr>
                         <a:t>按页展示新闻数据</a:t>
                       </a:r>
+                      <a:endParaRPr sz="1200" b="0">
+                        <a:solidFill>
+                          <a:srgbClr val="000000"/>
+                        </a:solidFill>
+                        <a:latin typeface="微软雅黑" panose="020B0503020204020204" charset="-122"/>
+                      </a:endParaRPr>
                     </a:p>
                   </a:txBody>
                   <a:tcPr>
@@ -9014,10 +9794,16 @@
                           <a:solidFill>
                             <a:srgbClr val="000000"/>
                           </a:solidFill>
-                          <a:latin typeface="Microsoft YaHei"/>
+                          <a:latin typeface="微软雅黑" panose="020B0503020204020204" charset="-122"/>
                         </a:rPr>
                         <a:t>等价类 + 边界值</a:t>
                       </a:r>
+                      <a:endParaRPr sz="1200" b="0">
+                        <a:solidFill>
+                          <a:srgbClr val="000000"/>
+                        </a:solidFill>
+                        <a:latin typeface="微软雅黑" panose="020B0503020204020204" charset="-122"/>
+                      </a:endParaRPr>
                     </a:p>
                   </a:txBody>
                   <a:tcPr>
@@ -9039,10 +9825,16 @@
                           <a:solidFill>
                             <a:srgbClr val="000000"/>
                           </a:solidFill>
-                          <a:latin typeface="Microsoft YaHei"/>
+                          <a:latin typeface="微软雅黑" panose="020B0503020204020204" charset="-122"/>
                         </a:rPr>
                         <a:t>3</a:t>
                       </a:r>
+                      <a:endParaRPr sz="1200" b="0">
+                        <a:solidFill>
+                          <a:srgbClr val="000000"/>
+                        </a:solidFill>
+                        <a:latin typeface="微软雅黑" panose="020B0503020204020204" charset="-122"/>
+                      </a:endParaRPr>
                     </a:p>
                   </a:txBody>
                   <a:tcPr>
@@ -9062,10 +9854,16 @@
                           <a:solidFill>
                             <a:srgbClr val="000000"/>
                           </a:solidFill>
-                          <a:latin typeface="Microsoft YaHei"/>
+                          <a:latin typeface="微软雅黑" panose="020B0503020204020204" charset="-122"/>
                         </a:rPr>
                         <a:t>新闻详情</a:t>
                       </a:r>
+                      <a:endParaRPr sz="1200" b="0">
+                        <a:solidFill>
+                          <a:srgbClr val="000000"/>
+                        </a:solidFill>
+                        <a:latin typeface="微软雅黑" panose="020B0503020204020204" charset="-122"/>
+                      </a:endParaRPr>
                     </a:p>
                   </a:txBody>
                   <a:tcPr>
@@ -9085,10 +9883,16 @@
                           <a:solidFill>
                             <a:srgbClr val="000000"/>
                           </a:solidFill>
-                          <a:latin typeface="Microsoft YaHei"/>
+                          <a:latin typeface="微软雅黑" panose="020B0503020204020204" charset="-122"/>
                         </a:rPr>
                         <a:t>查看存在 / 不存在新闻</a:t>
                       </a:r>
+                      <a:endParaRPr sz="1200" b="0">
+                        <a:solidFill>
+                          <a:srgbClr val="000000"/>
+                        </a:solidFill>
+                        <a:latin typeface="微软雅黑" panose="020B0503020204020204" charset="-122"/>
+                      </a:endParaRPr>
                     </a:p>
                   </a:txBody>
                   <a:tcPr>
@@ -9108,10 +9912,16 @@
                           <a:solidFill>
                             <a:srgbClr val="000000"/>
                           </a:solidFill>
-                          <a:latin typeface="Microsoft YaHei"/>
+                          <a:latin typeface="微软雅黑" panose="020B0503020204020204" charset="-122"/>
                         </a:rPr>
                         <a:t>边界值</a:t>
                       </a:r>
+                      <a:endParaRPr sz="1200" b="0">
+                        <a:solidFill>
+                          <a:srgbClr val="000000"/>
+                        </a:solidFill>
+                        <a:latin typeface="微软雅黑" panose="020B0503020204020204" charset="-122"/>
+                      </a:endParaRPr>
                     </a:p>
                   </a:txBody>
                   <a:tcPr>
@@ -9133,10 +9943,16 @@
                           <a:solidFill>
                             <a:srgbClr val="000000"/>
                           </a:solidFill>
-                          <a:latin typeface="Microsoft YaHei"/>
+                          <a:latin typeface="微软雅黑" panose="020B0503020204020204" charset="-122"/>
                         </a:rPr>
                         <a:t>4</a:t>
                       </a:r>
+                      <a:endParaRPr sz="1200" b="0">
+                        <a:solidFill>
+                          <a:srgbClr val="000000"/>
+                        </a:solidFill>
+                        <a:latin typeface="微软雅黑" panose="020B0503020204020204" charset="-122"/>
+                      </a:endParaRPr>
                     </a:p>
                   </a:txBody>
                   <a:tcPr>
@@ -9156,10 +9972,16 @@
                           <a:solidFill>
                             <a:srgbClr val="000000"/>
                           </a:solidFill>
-                          <a:latin typeface="Microsoft YaHei"/>
+                          <a:latin typeface="微软雅黑" panose="020B0503020204020204" charset="-122"/>
                         </a:rPr>
                         <a:t>场馆列表</a:t>
                       </a:r>
+                      <a:endParaRPr sz="1200" b="0">
+                        <a:solidFill>
+                          <a:srgbClr val="000000"/>
+                        </a:solidFill>
+                        <a:latin typeface="微软雅黑" panose="020B0503020204020204" charset="-122"/>
+                      </a:endParaRPr>
                     </a:p>
                   </a:txBody>
                   <a:tcPr>
@@ -9179,10 +10001,16 @@
                           <a:solidFill>
                             <a:srgbClr val="000000"/>
                           </a:solidFill>
-                          <a:latin typeface="Microsoft YaHei"/>
+                          <a:latin typeface="微软雅黑" panose="020B0503020204020204" charset="-122"/>
                         </a:rPr>
                         <a:t>展示场馆与分页信息</a:t>
                       </a:r>
+                      <a:endParaRPr sz="1200" b="0">
+                        <a:solidFill>
+                          <a:srgbClr val="000000"/>
+                        </a:solidFill>
+                        <a:latin typeface="微软雅黑" panose="020B0503020204020204" charset="-122"/>
+                      </a:endParaRPr>
                     </a:p>
                   </a:txBody>
                   <a:tcPr>
@@ -9202,10 +10030,16 @@
                           <a:solidFill>
                             <a:srgbClr val="000000"/>
                           </a:solidFill>
-                          <a:latin typeface="Microsoft YaHei"/>
+                          <a:latin typeface="微软雅黑" panose="020B0503020204020204" charset="-122"/>
                         </a:rPr>
                         <a:t>等价类</a:t>
                       </a:r>
+                      <a:endParaRPr sz="1200" b="0">
+                        <a:solidFill>
+                          <a:srgbClr val="000000"/>
+                        </a:solidFill>
+                        <a:latin typeface="微软雅黑" panose="020B0503020204020204" charset="-122"/>
+                      </a:endParaRPr>
                     </a:p>
                   </a:txBody>
                   <a:tcPr>
@@ -9227,10 +10061,16 @@
                           <a:solidFill>
                             <a:srgbClr val="000000"/>
                           </a:solidFill>
-                          <a:latin typeface="Microsoft YaHei"/>
+                          <a:latin typeface="微软雅黑" panose="020B0503020204020204" charset="-122"/>
                         </a:rPr>
                         <a:t>5</a:t>
                       </a:r>
+                      <a:endParaRPr sz="1200" b="0">
+                        <a:solidFill>
+                          <a:srgbClr val="000000"/>
+                        </a:solidFill>
+                        <a:latin typeface="微软雅黑" panose="020B0503020204020204" charset="-122"/>
+                      </a:endParaRPr>
                     </a:p>
                   </a:txBody>
                   <a:tcPr>
@@ -9250,10 +10090,16 @@
                           <a:solidFill>
                             <a:srgbClr val="000000"/>
                           </a:solidFill>
-                          <a:latin typeface="Microsoft YaHei"/>
+                          <a:latin typeface="微软雅黑" panose="020B0503020204020204" charset="-122"/>
                         </a:rPr>
                         <a:t>预约入口</a:t>
                       </a:r>
+                      <a:endParaRPr sz="1200" b="0">
+                        <a:solidFill>
+                          <a:srgbClr val="000000"/>
+                        </a:solidFill>
+                        <a:latin typeface="微软雅黑" panose="020B0503020204020204" charset="-122"/>
+                      </a:endParaRPr>
                     </a:p>
                   </a:txBody>
                   <a:tcPr>
@@ -9273,10 +10119,16 @@
                           <a:solidFill>
                             <a:srgbClr val="000000"/>
                           </a:solidFill>
-                          <a:latin typeface="Microsoft YaHei"/>
+                          <a:latin typeface="微软雅黑" panose="020B0503020204020204" charset="-122"/>
                         </a:rPr>
                         <a:t>登录与未登录访问分流</a:t>
                       </a:r>
+                      <a:endParaRPr sz="1200" b="0">
+                        <a:solidFill>
+                          <a:srgbClr val="000000"/>
+                        </a:solidFill>
+                        <a:latin typeface="微软雅黑" panose="020B0503020204020204" charset="-122"/>
+                      </a:endParaRPr>
                     </a:p>
                   </a:txBody>
                   <a:tcPr>
@@ -9296,10 +10148,16 @@
                           <a:solidFill>
                             <a:srgbClr val="000000"/>
                           </a:solidFill>
-                          <a:latin typeface="Microsoft YaHei"/>
+                          <a:latin typeface="微软雅黑" panose="020B0503020204020204" charset="-122"/>
                         </a:rPr>
                         <a:t>判定覆盖</a:t>
                       </a:r>
+                      <a:endParaRPr sz="1200" b="0">
+                        <a:solidFill>
+                          <a:srgbClr val="000000"/>
+                        </a:solidFill>
+                        <a:latin typeface="微软雅黑" panose="020B0503020204020204" charset="-122"/>
+                      </a:endParaRPr>
                     </a:p>
                   </a:txBody>
                   <a:tcPr>
@@ -9321,10 +10179,16 @@
                           <a:solidFill>
                             <a:srgbClr val="000000"/>
                           </a:solidFill>
-                          <a:latin typeface="Microsoft YaHei"/>
+                          <a:latin typeface="微软雅黑" panose="020B0503020204020204" charset="-122"/>
                         </a:rPr>
                         <a:t>6</a:t>
                       </a:r>
+                      <a:endParaRPr sz="1200" b="0">
+                        <a:solidFill>
+                          <a:srgbClr val="000000"/>
+                        </a:solidFill>
+                        <a:latin typeface="微软雅黑" panose="020B0503020204020204" charset="-122"/>
+                      </a:endParaRPr>
                     </a:p>
                   </a:txBody>
                   <a:tcPr>
@@ -9344,10 +10208,16 @@
                           <a:solidFill>
                             <a:srgbClr val="000000"/>
                           </a:solidFill>
-                          <a:latin typeface="Microsoft YaHei"/>
+                          <a:latin typeface="微软雅黑" panose="020B0503020204020204" charset="-122"/>
                         </a:rPr>
                         <a:t>场馆查询</a:t>
                       </a:r>
+                      <a:endParaRPr sz="1200" b="0">
+                        <a:solidFill>
+                          <a:srgbClr val="000000"/>
+                        </a:solidFill>
+                        <a:latin typeface="微软雅黑" panose="020B0503020204020204" charset="-122"/>
+                      </a:endParaRPr>
                     </a:p>
                   </a:txBody>
                   <a:tcPr>
@@ -9367,10 +10237,16 @@
                           <a:solidFill>
                             <a:srgbClr val="000000"/>
                           </a:solidFill>
-                          <a:latin typeface="Microsoft YaHei"/>
+                          <a:latin typeface="微软雅黑" panose="020B0503020204020204" charset="-122"/>
                         </a:rPr>
                         <a:t>按名称查询有效/无效场馆</a:t>
                       </a:r>
+                      <a:endParaRPr sz="1200" b="0">
+                        <a:solidFill>
+                          <a:srgbClr val="000000"/>
+                        </a:solidFill>
+                        <a:latin typeface="微软雅黑" panose="020B0503020204020204" charset="-122"/>
+                      </a:endParaRPr>
                     </a:p>
                   </a:txBody>
                   <a:tcPr>
@@ -9390,10 +10266,16 @@
                           <a:solidFill>
                             <a:srgbClr val="000000"/>
                           </a:solidFill>
-                          <a:latin typeface="Microsoft YaHei"/>
+                          <a:latin typeface="微软雅黑" panose="020B0503020204020204" charset="-122"/>
                         </a:rPr>
                         <a:t>等价类</a:t>
                       </a:r>
+                      <a:endParaRPr sz="1200" b="0">
+                        <a:solidFill>
+                          <a:srgbClr val="000000"/>
+                        </a:solidFill>
+                        <a:latin typeface="微软雅黑" panose="020B0503020204020204" charset="-122"/>
+                      </a:endParaRPr>
                     </a:p>
                   </a:txBody>
                   <a:tcPr>
@@ -9416,7 +10298,7 @@
 </file>
 
 <file path=ppt/slides/slide17.xml><?xml version="1.0" encoding="utf-8"?>
-<p:sld xmlns:a="http://schemas.openxmlformats.org/drawingml/2006/main" xmlns:p="http://schemas.openxmlformats.org/presentationml/2006/main" xmlns:r="http://schemas.openxmlformats.org/officeDocument/2006/relationships">
+<p:sld xmlns:a="http://schemas.openxmlformats.org/drawingml/2006/main" xmlns:r="http://schemas.openxmlformats.org/officeDocument/2006/relationships" xmlns:p="http://schemas.openxmlformats.org/presentationml/2006/main">
   <p:cSld>
     <p:spTree>
       <p:nvGrpSpPr>
@@ -9753,10 +10635,16 @@
                 <a:solidFill>
                   <a:srgbClr val="000000"/>
                 </a:solidFill>
-                <a:latin typeface="Microsoft YaHei"/>
+                <a:latin typeface="微软雅黑" panose="020B0503020204020204" charset="-122"/>
               </a:rPr>
               <a:t>图表17</a:t>
             </a:r>
+            <a:endParaRPr sz="700" b="0">
+              <a:solidFill>
+                <a:srgbClr val="000000"/>
+              </a:solidFill>
+              <a:latin typeface="微软雅黑" panose="020B0503020204020204" charset="-122"/>
+            </a:endParaRPr>
           </a:p>
         </p:txBody>
       </p:sp>
@@ -9777,7 +10665,7 @@
           <a:noFill/>
         </p:spPr>
         <p:txBody>
-          <a:bodyPr wrap="none" lIns="0" rIns="0" tIns="0" bIns="0">
+          <a:bodyPr wrap="none" lIns="0" tIns="0" rIns="0" bIns="0">
             <a:spAutoFit/>
           </a:bodyPr>
           <a:lstStyle/>
@@ -9795,10 +10683,16 @@
                 <a:solidFill>
                   <a:srgbClr val="000000"/>
                 </a:solidFill>
-                <a:latin typeface="Microsoft YaHei"/>
+                <a:latin typeface="微软雅黑" panose="020B0503020204020204" charset="-122"/>
               </a:rPr>
               <a:t>预</a:t>
             </a:r>
+            <a:endParaRPr sz="2200" b="1">
+              <a:solidFill>
+                <a:srgbClr val="000000"/>
+              </a:solidFill>
+              <a:latin typeface="微软雅黑" panose="020B0503020204020204" charset="-122"/>
+            </a:endParaRPr>
           </a:p>
           <a:p>
             <a:pPr algn="ctr">
@@ -9814,10 +10708,16 @@
                 <a:solidFill>
                   <a:srgbClr val="000000"/>
                 </a:solidFill>
-                <a:latin typeface="Microsoft YaHei"/>
+                <a:latin typeface="微软雅黑" panose="020B0503020204020204" charset="-122"/>
               </a:rPr>
               <a:t>约</a:t>
             </a:r>
+            <a:endParaRPr sz="2200" b="1">
+              <a:solidFill>
+                <a:srgbClr val="000000"/>
+              </a:solidFill>
+              <a:latin typeface="微软雅黑" panose="020B0503020204020204" charset="-122"/>
+            </a:endParaRPr>
           </a:p>
           <a:p>
             <a:pPr algn="ctr">
@@ -9833,10 +10733,16 @@
                 <a:solidFill>
                   <a:srgbClr val="000000"/>
                 </a:solidFill>
-                <a:latin typeface="Microsoft YaHei"/>
+                <a:latin typeface="微软雅黑" panose="020B0503020204020204" charset="-122"/>
               </a:rPr>
               <a:t>订</a:t>
             </a:r>
+            <a:endParaRPr sz="2200" b="1">
+              <a:solidFill>
+                <a:srgbClr val="000000"/>
+              </a:solidFill>
+              <a:latin typeface="微软雅黑" panose="020B0503020204020204" charset="-122"/>
+            </a:endParaRPr>
           </a:p>
           <a:p>
             <a:pPr algn="ctr">
@@ -9852,10 +10758,16 @@
                 <a:solidFill>
                   <a:srgbClr val="000000"/>
                 </a:solidFill>
-                <a:latin typeface="Microsoft YaHei"/>
+                <a:latin typeface="微软雅黑" panose="020B0503020204020204" charset="-122"/>
               </a:rPr>
               <a:t>单</a:t>
             </a:r>
+            <a:endParaRPr sz="2200" b="1">
+              <a:solidFill>
+                <a:srgbClr val="000000"/>
+              </a:solidFill>
+              <a:latin typeface="微软雅黑" panose="020B0503020204020204" charset="-122"/>
+            </a:endParaRPr>
           </a:p>
           <a:p>
             <a:pPr algn="ctr">
@@ -9871,10 +10783,16 @@
                 <a:solidFill>
                   <a:srgbClr val="000000"/>
                 </a:solidFill>
-                <a:latin typeface="Microsoft YaHei"/>
+                <a:latin typeface="微软雅黑" panose="020B0503020204020204" charset="-122"/>
               </a:rPr>
               <a:t>模</a:t>
             </a:r>
+            <a:endParaRPr sz="2200" b="1">
+              <a:solidFill>
+                <a:srgbClr val="000000"/>
+              </a:solidFill>
+              <a:latin typeface="微软雅黑" panose="020B0503020204020204" charset="-122"/>
+            </a:endParaRPr>
           </a:p>
           <a:p>
             <a:pPr algn="ctr">
@@ -9890,10 +10808,16 @@
                 <a:solidFill>
                   <a:srgbClr val="000000"/>
                 </a:solidFill>
-                <a:latin typeface="Microsoft YaHei"/>
+                <a:latin typeface="微软雅黑" panose="020B0503020204020204" charset="-122"/>
               </a:rPr>
               <a:t>块</a:t>
             </a:r>
+            <a:endParaRPr sz="2200" b="1">
+              <a:solidFill>
+                <a:srgbClr val="000000"/>
+              </a:solidFill>
+              <a:latin typeface="微软雅黑" panose="020B0503020204020204" charset="-122"/>
+            </a:endParaRPr>
           </a:p>
         </p:txBody>
       </p:sp>
@@ -9933,10 +10857,16 @@
                           <a:solidFill>
                             <a:srgbClr val="FFFFFF"/>
                           </a:solidFill>
-                          <a:latin typeface="Microsoft YaHei"/>
+                          <a:latin typeface="微软雅黑" panose="020B0503020204020204" charset="-122"/>
                         </a:rPr>
                         <a:t>序号</a:t>
                       </a:r>
+                      <a:endParaRPr sz="1300" b="1">
+                        <a:solidFill>
+                          <a:srgbClr val="FFFFFF"/>
+                        </a:solidFill>
+                        <a:latin typeface="微软雅黑" panose="020B0503020204020204" charset="-122"/>
+                      </a:endParaRPr>
                     </a:p>
                   </a:txBody>
                   <a:tcPr>
@@ -9956,10 +10886,16 @@
                           <a:solidFill>
                             <a:srgbClr val="FFFFFF"/>
                           </a:solidFill>
-                          <a:latin typeface="Microsoft YaHei"/>
+                          <a:latin typeface="微软雅黑" panose="020B0503020204020204" charset="-122"/>
                         </a:rPr>
                         <a:t>特性</a:t>
                       </a:r>
+                      <a:endParaRPr sz="1300" b="1">
+                        <a:solidFill>
+                          <a:srgbClr val="FFFFFF"/>
+                        </a:solidFill>
+                        <a:latin typeface="微软雅黑" panose="020B0503020204020204" charset="-122"/>
+                      </a:endParaRPr>
                     </a:p>
                   </a:txBody>
                   <a:tcPr>
@@ -9979,10 +10915,16 @@
                           <a:solidFill>
                             <a:srgbClr val="FFFFFF"/>
                           </a:solidFill>
-                          <a:latin typeface="Microsoft YaHei"/>
+                          <a:latin typeface="微软雅黑" panose="020B0503020204020204" charset="-122"/>
                         </a:rPr>
                         <a:t>代表场景</a:t>
                       </a:r>
+                      <a:endParaRPr sz="1300" b="1">
+                        <a:solidFill>
+                          <a:srgbClr val="FFFFFF"/>
+                        </a:solidFill>
+                        <a:latin typeface="微软雅黑" panose="020B0503020204020204" charset="-122"/>
+                      </a:endParaRPr>
                     </a:p>
                   </a:txBody>
                   <a:tcPr>
@@ -10002,10 +10944,16 @@
                           <a:solidFill>
                             <a:srgbClr val="FFFFFF"/>
                           </a:solidFill>
-                          <a:latin typeface="Microsoft YaHei"/>
+                          <a:latin typeface="微软雅黑" panose="020B0503020204020204" charset="-122"/>
                         </a:rPr>
                         <a:t>覆盖重点</a:t>
                       </a:r>
+                      <a:endParaRPr sz="1300" b="1">
+                        <a:solidFill>
+                          <a:srgbClr val="FFFFFF"/>
+                        </a:solidFill>
+                        <a:latin typeface="微软雅黑" panose="020B0503020204020204" charset="-122"/>
+                      </a:endParaRPr>
                     </a:p>
                   </a:txBody>
                   <a:tcPr>
@@ -10027,10 +10975,16 @@
                           <a:solidFill>
                             <a:srgbClr val="000000"/>
                           </a:solidFill>
-                          <a:latin typeface="Microsoft YaHei"/>
+                          <a:latin typeface="微软雅黑" panose="020B0503020204020204" charset="-122"/>
                         </a:rPr>
                         <a:t>1</a:t>
                       </a:r>
+                      <a:endParaRPr sz="1200" b="0">
+                        <a:solidFill>
+                          <a:srgbClr val="000000"/>
+                        </a:solidFill>
+                        <a:latin typeface="微软雅黑" panose="020B0503020204020204" charset="-122"/>
+                      </a:endParaRPr>
                     </a:p>
                   </a:txBody>
                   <a:tcPr>
@@ -10050,10 +11004,16 @@
                           <a:solidFill>
                             <a:srgbClr val="000000"/>
                           </a:solidFill>
-                          <a:latin typeface="Microsoft YaHei"/>
+                          <a:latin typeface="微软雅黑" panose="020B0503020204020204" charset="-122"/>
                         </a:rPr>
                         <a:t>订单列表</a:t>
                       </a:r>
+                      <a:endParaRPr sz="1200" b="0">
+                        <a:solidFill>
+                          <a:srgbClr val="000000"/>
+                        </a:solidFill>
+                        <a:latin typeface="微软雅黑" panose="020B0503020204020204" charset="-122"/>
+                      </a:endParaRPr>
                     </a:p>
                   </a:txBody>
                   <a:tcPr>
@@ -10073,10 +11033,16 @@
                           <a:solidFill>
                             <a:srgbClr val="000000"/>
                           </a:solidFill>
-                          <a:latin typeface="Microsoft YaHei"/>
+                          <a:latin typeface="微软雅黑" panose="020B0503020204020204" charset="-122"/>
                         </a:rPr>
                         <a:t>分页查看个人订单</a:t>
                       </a:r>
+                      <a:endParaRPr sz="1200" b="0">
+                        <a:solidFill>
+                          <a:srgbClr val="000000"/>
+                        </a:solidFill>
+                        <a:latin typeface="微软雅黑" panose="020B0503020204020204" charset="-122"/>
+                      </a:endParaRPr>
                     </a:p>
                   </a:txBody>
                   <a:tcPr>
@@ -10096,10 +11062,16 @@
                           <a:solidFill>
                             <a:srgbClr val="000000"/>
                           </a:solidFill>
-                          <a:latin typeface="Microsoft YaHei"/>
+                          <a:latin typeface="微软雅黑" panose="020B0503020204020204" charset="-122"/>
                         </a:rPr>
                         <a:t>登录态 + page 边界</a:t>
                       </a:r>
+                      <a:endParaRPr sz="1200" b="0">
+                        <a:solidFill>
+                          <a:srgbClr val="000000"/>
+                        </a:solidFill>
+                        <a:latin typeface="微软雅黑" panose="020B0503020204020204" charset="-122"/>
+                      </a:endParaRPr>
                     </a:p>
                   </a:txBody>
                   <a:tcPr>
@@ -10121,10 +11093,16 @@
                           <a:solidFill>
                             <a:srgbClr val="000000"/>
                           </a:solidFill>
-                          <a:latin typeface="Microsoft YaHei"/>
+                          <a:latin typeface="微软雅黑" panose="020B0503020204020204" charset="-122"/>
                         </a:rPr>
                         <a:t>2</a:t>
                       </a:r>
+                      <a:endParaRPr sz="1200" b="0">
+                        <a:solidFill>
+                          <a:srgbClr val="000000"/>
+                        </a:solidFill>
+                        <a:latin typeface="微软雅黑" panose="020B0503020204020204" charset="-122"/>
+                      </a:endParaRPr>
                     </a:p>
                   </a:txBody>
                   <a:tcPr>
@@ -10144,10 +11122,16 @@
                           <a:solidFill>
                             <a:srgbClr val="000000"/>
                           </a:solidFill>
-                          <a:latin typeface="Microsoft YaHei"/>
+                          <a:latin typeface="微软雅黑" panose="020B0503020204020204" charset="-122"/>
                         </a:rPr>
                         <a:t>创建订单</a:t>
                       </a:r>
+                      <a:endParaRPr sz="1200" b="0">
+                        <a:solidFill>
+                          <a:srgbClr val="000000"/>
+                        </a:solidFill>
+                        <a:latin typeface="微软雅黑" panose="020B0503020204020204" charset="-122"/>
+                      </a:endParaRPr>
                     </a:p>
                   </a:txBody>
                   <a:tcPr>
@@ -10167,10 +11151,16 @@
                           <a:solidFill>
                             <a:srgbClr val="000000"/>
                           </a:solidFill>
-                          <a:latin typeface="Microsoft YaHei"/>
+                          <a:latin typeface="微软雅黑" panose="020B0503020204020204" charset="-122"/>
                         </a:rPr>
                         <a:t>合法预约 / 无效输入</a:t>
                       </a:r>
+                      <a:endParaRPr sz="1200" b="0">
+                        <a:solidFill>
+                          <a:srgbClr val="000000"/>
+                        </a:solidFill>
+                        <a:latin typeface="微软雅黑" panose="020B0503020204020204" charset="-122"/>
+                      </a:endParaRPr>
                     </a:p>
                   </a:txBody>
                   <a:tcPr>
@@ -10190,10 +11180,16 @@
                           <a:solidFill>
                             <a:srgbClr val="000000"/>
                           </a:solidFill>
-                          <a:latin typeface="Microsoft YaHei"/>
+                          <a:latin typeface="微软雅黑" panose="020B0503020204020204" charset="-122"/>
                         </a:rPr>
                         <a:t>有效类 / 无效类</a:t>
                       </a:r>
+                      <a:endParaRPr sz="1200" b="0">
+                        <a:solidFill>
+                          <a:srgbClr val="000000"/>
+                        </a:solidFill>
+                        <a:latin typeface="微软雅黑" panose="020B0503020204020204" charset="-122"/>
+                      </a:endParaRPr>
                     </a:p>
                   </a:txBody>
                   <a:tcPr>
@@ -10215,10 +11211,16 @@
                           <a:solidFill>
                             <a:srgbClr val="000000"/>
                           </a:solidFill>
-                          <a:latin typeface="Microsoft YaHei"/>
+                          <a:latin typeface="微软雅黑" panose="020B0503020204020204" charset="-122"/>
                         </a:rPr>
                         <a:t>3</a:t>
                       </a:r>
+                      <a:endParaRPr sz="1200" b="0">
+                        <a:solidFill>
+                          <a:srgbClr val="000000"/>
+                        </a:solidFill>
+                        <a:latin typeface="微软雅黑" panose="020B0503020204020204" charset="-122"/>
+                      </a:endParaRPr>
                     </a:p>
                   </a:txBody>
                   <a:tcPr>
@@ -10238,10 +11240,16 @@
                           <a:solidFill>
                             <a:srgbClr val="000000"/>
                           </a:solidFill>
-                          <a:latin typeface="Microsoft YaHei"/>
+                          <a:latin typeface="微软雅黑" panose="020B0503020204020204" charset="-122"/>
                         </a:rPr>
                         <a:t>取消订单</a:t>
                       </a:r>
+                      <a:endParaRPr sz="1200" b="0">
+                        <a:solidFill>
+                          <a:srgbClr val="000000"/>
+                        </a:solidFill>
+                        <a:latin typeface="微软雅黑" panose="020B0503020204020204" charset="-122"/>
+                      </a:endParaRPr>
                     </a:p>
                   </a:txBody>
                   <a:tcPr>
@@ -10261,10 +11269,16 @@
                           <a:solidFill>
                             <a:srgbClr val="000000"/>
                           </a:solidFill>
-                          <a:latin typeface="Microsoft YaHei"/>
+                          <a:latin typeface="微软雅黑" panose="020B0503020204020204" charset="-122"/>
                         </a:rPr>
                         <a:t>本人订单与非本人订单</a:t>
                       </a:r>
+                      <a:endParaRPr sz="1200" b="0">
+                        <a:solidFill>
+                          <a:srgbClr val="000000"/>
+                        </a:solidFill>
+                        <a:latin typeface="微软雅黑" panose="020B0503020204020204" charset="-122"/>
+                      </a:endParaRPr>
                     </a:p>
                   </a:txBody>
                   <a:tcPr>
@@ -10284,10 +11298,16 @@
                           <a:solidFill>
                             <a:srgbClr val="000000"/>
                           </a:solidFill>
-                          <a:latin typeface="Microsoft YaHei"/>
+                          <a:latin typeface="微软雅黑" panose="020B0503020204020204" charset="-122"/>
                         </a:rPr>
                         <a:t>权限与状态流转</a:t>
                       </a:r>
+                      <a:endParaRPr sz="1200" b="0">
+                        <a:solidFill>
+                          <a:srgbClr val="000000"/>
+                        </a:solidFill>
+                        <a:latin typeface="微软雅黑" panose="020B0503020204020204" charset="-122"/>
+                      </a:endParaRPr>
                     </a:p>
                   </a:txBody>
                   <a:tcPr>
@@ -10309,10 +11329,16 @@
                           <a:solidFill>
                             <a:srgbClr val="000000"/>
                           </a:solidFill>
-                          <a:latin typeface="Microsoft YaHei"/>
+                          <a:latin typeface="微软雅黑" panose="020B0503020204020204" charset="-122"/>
                         </a:rPr>
                         <a:t>4</a:t>
                       </a:r>
+                      <a:endParaRPr sz="1200" b="0">
+                        <a:solidFill>
+                          <a:srgbClr val="000000"/>
+                        </a:solidFill>
+                        <a:latin typeface="微软雅黑" panose="020B0503020204020204" charset="-122"/>
+                      </a:endParaRPr>
                     </a:p>
                   </a:txBody>
                   <a:tcPr>
@@ -10332,10 +11358,16 @@
                           <a:solidFill>
                             <a:srgbClr val="000000"/>
                           </a:solidFill>
-                          <a:latin typeface="Microsoft YaHei"/>
+                          <a:latin typeface="微软雅黑" panose="020B0503020204020204" charset="-122"/>
                         </a:rPr>
                         <a:t>管理员列表</a:t>
                       </a:r>
+                      <a:endParaRPr sz="1200" b="0">
+                        <a:solidFill>
+                          <a:srgbClr val="000000"/>
+                        </a:solidFill>
+                        <a:latin typeface="微软雅黑" panose="020B0503020204020204" charset="-122"/>
+                      </a:endParaRPr>
                     </a:p>
                   </a:txBody>
                   <a:tcPr>
@@ -10355,10 +11387,16 @@
                           <a:solidFill>
                             <a:srgbClr val="000000"/>
                           </a:solidFill>
-                          <a:latin typeface="Microsoft YaHei"/>
+                          <a:latin typeface="微软雅黑" panose="020B0503020204020204" charset="-122"/>
                         </a:rPr>
                         <a:t>按状态筛选订单</a:t>
                       </a:r>
+                      <a:endParaRPr sz="1200" b="0">
+                        <a:solidFill>
+                          <a:srgbClr val="000000"/>
+                        </a:solidFill>
+                        <a:latin typeface="微软雅黑" panose="020B0503020204020204" charset="-122"/>
+                      </a:endParaRPr>
                     </a:p>
                   </a:txBody>
                   <a:tcPr>
@@ -10378,10 +11416,16 @@
                           <a:solidFill>
                             <a:srgbClr val="000000"/>
                           </a:solidFill>
-                          <a:latin typeface="Microsoft YaHei"/>
+                          <a:latin typeface="微软雅黑" panose="020B0503020204020204" charset="-122"/>
                         </a:rPr>
                         <a:t>筛选与分页</a:t>
                       </a:r>
+                      <a:endParaRPr sz="1200" b="0">
+                        <a:solidFill>
+                          <a:srgbClr val="000000"/>
+                        </a:solidFill>
+                        <a:latin typeface="微软雅黑" panose="020B0503020204020204" charset="-122"/>
+                      </a:endParaRPr>
                     </a:p>
                   </a:txBody>
                   <a:tcPr>
@@ -10403,10 +11447,16 @@
                           <a:solidFill>
                             <a:srgbClr val="000000"/>
                           </a:solidFill>
-                          <a:latin typeface="Microsoft YaHei"/>
+                          <a:latin typeface="微软雅黑" panose="020B0503020204020204" charset="-122"/>
                         </a:rPr>
                         <a:t>5</a:t>
                       </a:r>
+                      <a:endParaRPr sz="1200" b="0">
+                        <a:solidFill>
+                          <a:srgbClr val="000000"/>
+                        </a:solidFill>
+                        <a:latin typeface="微软雅黑" panose="020B0503020204020204" charset="-122"/>
+                      </a:endParaRPr>
                     </a:p>
                   </a:txBody>
                   <a:tcPr>
@@ -10426,10 +11476,16 @@
                           <a:solidFill>
                             <a:srgbClr val="000000"/>
                           </a:solidFill>
-                          <a:latin typeface="Microsoft YaHei"/>
+                          <a:latin typeface="微软雅黑" panose="020B0503020204020204" charset="-122"/>
                         </a:rPr>
                         <a:t>审核订单</a:t>
                       </a:r>
+                      <a:endParaRPr sz="1200" b="0">
+                        <a:solidFill>
+                          <a:srgbClr val="000000"/>
+                        </a:solidFill>
+                        <a:latin typeface="微软雅黑" panose="020B0503020204020204" charset="-122"/>
+                      </a:endParaRPr>
                     </a:p>
                   </a:txBody>
                   <a:tcPr>
@@ -10449,10 +11505,16 @@
                           <a:solidFill>
                             <a:srgbClr val="000000"/>
                           </a:solidFill>
-                          <a:latin typeface="Microsoft YaHei"/>
+                          <a:latin typeface="微软雅黑" panose="020B0503020204020204" charset="-122"/>
                         </a:rPr>
                         <a:t>通过 / 拒绝两类结果</a:t>
                       </a:r>
+                      <a:endParaRPr sz="1200" b="0">
+                        <a:solidFill>
+                          <a:srgbClr val="000000"/>
+                        </a:solidFill>
+                        <a:latin typeface="微软雅黑" panose="020B0503020204020204" charset="-122"/>
+                      </a:endParaRPr>
                     </a:p>
                   </a:txBody>
                   <a:tcPr>
@@ -10472,10 +11534,16 @@
                           <a:solidFill>
                             <a:srgbClr val="000000"/>
                           </a:solidFill>
-                          <a:latin typeface="Microsoft YaHei"/>
+                          <a:latin typeface="微软雅黑" panose="020B0503020204020204" charset="-122"/>
                         </a:rPr>
                         <a:t>判定覆盖 true/false</a:t>
                       </a:r>
+                      <a:endParaRPr sz="1200" b="0">
+                        <a:solidFill>
+                          <a:srgbClr val="000000"/>
+                        </a:solidFill>
+                        <a:latin typeface="微软雅黑" panose="020B0503020204020204" charset="-122"/>
+                      </a:endParaRPr>
                     </a:p>
                   </a:txBody>
                   <a:tcPr>
@@ -10497,10 +11565,16 @@
                           <a:solidFill>
                             <a:srgbClr val="000000"/>
                           </a:solidFill>
-                          <a:latin typeface="Microsoft YaHei"/>
+                          <a:latin typeface="微软雅黑" panose="020B0503020204020204" charset="-122"/>
                         </a:rPr>
                         <a:t>6</a:t>
                       </a:r>
+                      <a:endParaRPr sz="1200" b="0">
+                        <a:solidFill>
+                          <a:srgbClr val="000000"/>
+                        </a:solidFill>
+                        <a:latin typeface="微软雅黑" panose="020B0503020204020204" charset="-122"/>
+                      </a:endParaRPr>
                     </a:p>
                   </a:txBody>
                   <a:tcPr>
@@ -10520,10 +11594,16 @@
                           <a:solidFill>
                             <a:srgbClr val="000000"/>
                           </a:solidFill>
-                          <a:latin typeface="Microsoft YaHei"/>
+                          <a:latin typeface="微软雅黑" panose="020B0503020204020204" charset="-122"/>
                         </a:rPr>
                         <a:t>状态推进</a:t>
                       </a:r>
+                      <a:endParaRPr sz="1200" b="0">
+                        <a:solidFill>
+                          <a:srgbClr val="000000"/>
+                        </a:solidFill>
+                        <a:latin typeface="微软雅黑" panose="020B0503020204020204" charset="-122"/>
+                      </a:endParaRPr>
                     </a:p>
                   </a:txBody>
                   <a:tcPr>
@@ -10543,10 +11623,16 @@
                           <a:solidFill>
                             <a:srgbClr val="000000"/>
                           </a:solidFill>
-                          <a:latin typeface="Microsoft YaHei"/>
+                          <a:latin typeface="微软雅黑" panose="020B0503020204020204" charset="-122"/>
                         </a:rPr>
                         <a:t>创建、取消、审核全流程</a:t>
                       </a:r>
+                      <a:endParaRPr sz="1200" b="0">
+                        <a:solidFill>
+                          <a:srgbClr val="000000"/>
+                        </a:solidFill>
+                        <a:latin typeface="微软雅黑" panose="020B0503020204020204" charset="-122"/>
+                      </a:endParaRPr>
                     </a:p>
                   </a:txBody>
                   <a:tcPr>
@@ -10566,10 +11652,16 @@
                           <a:solidFill>
                             <a:srgbClr val="000000"/>
                           </a:solidFill>
-                          <a:latin typeface="Microsoft YaHei"/>
+                          <a:latin typeface="微软雅黑" panose="020B0503020204020204" charset="-122"/>
                         </a:rPr>
                         <a:t>语句覆盖 + 异常路径</a:t>
                       </a:r>
+                      <a:endParaRPr sz="1200" b="0">
+                        <a:solidFill>
+                          <a:srgbClr val="000000"/>
+                        </a:solidFill>
+                        <a:latin typeface="微软雅黑" panose="020B0503020204020204" charset="-122"/>
+                      </a:endParaRPr>
                     </a:p>
                   </a:txBody>
                   <a:tcPr>
@@ -10592,7 +11684,7 @@
 </file>
 
 <file path=ppt/slides/slide18.xml><?xml version="1.0" encoding="utf-8"?>
-<p:sld xmlns:a="http://schemas.openxmlformats.org/drawingml/2006/main" xmlns:p="http://schemas.openxmlformats.org/presentationml/2006/main" xmlns:r="http://schemas.openxmlformats.org/officeDocument/2006/relationships">
+<p:sld xmlns:a="http://schemas.openxmlformats.org/drawingml/2006/main" xmlns:r="http://schemas.openxmlformats.org/officeDocument/2006/relationships" xmlns:p="http://schemas.openxmlformats.org/presentationml/2006/main">
   <p:cSld>
     <p:spTree>
       <p:nvGrpSpPr>
@@ -10929,10 +12021,16 @@
                 <a:solidFill>
                   <a:srgbClr val="000000"/>
                 </a:solidFill>
-                <a:latin typeface="Microsoft YaHei"/>
+                <a:latin typeface="微软雅黑" panose="020B0503020204020204" charset="-122"/>
               </a:rPr>
               <a:t>图表18</a:t>
             </a:r>
+            <a:endParaRPr sz="700" b="0">
+              <a:solidFill>
+                <a:srgbClr val="000000"/>
+              </a:solidFill>
+              <a:latin typeface="微软雅黑" panose="020B0503020204020204" charset="-122"/>
+            </a:endParaRPr>
           </a:p>
         </p:txBody>
       </p:sp>
@@ -10953,7 +12051,7 @@
           <a:noFill/>
         </p:spPr>
         <p:txBody>
-          <a:bodyPr wrap="none" lIns="0" rIns="0" tIns="0" bIns="0">
+          <a:bodyPr wrap="none" lIns="0" tIns="0" rIns="0" bIns="0">
             <a:spAutoFit/>
           </a:bodyPr>
           <a:lstStyle/>
@@ -10971,10 +12069,16 @@
                 <a:solidFill>
                   <a:srgbClr val="000000"/>
                 </a:solidFill>
-                <a:latin typeface="Microsoft YaHei"/>
+                <a:latin typeface="微软雅黑" panose="020B0503020204020204" charset="-122"/>
               </a:rPr>
               <a:t>用</a:t>
             </a:r>
+            <a:endParaRPr sz="2200" b="1">
+              <a:solidFill>
+                <a:srgbClr val="000000"/>
+              </a:solidFill>
+              <a:latin typeface="微软雅黑" panose="020B0503020204020204" charset="-122"/>
+            </a:endParaRPr>
           </a:p>
           <a:p>
             <a:pPr algn="ctr">
@@ -10990,10 +12094,16 @@
                 <a:solidFill>
                   <a:srgbClr val="000000"/>
                 </a:solidFill>
-                <a:latin typeface="Microsoft YaHei"/>
+                <a:latin typeface="微软雅黑" panose="020B0503020204020204" charset="-122"/>
               </a:rPr>
               <a:t>户</a:t>
             </a:r>
+            <a:endParaRPr sz="2200" b="1">
+              <a:solidFill>
+                <a:srgbClr val="000000"/>
+              </a:solidFill>
+              <a:latin typeface="微软雅黑" panose="020B0503020204020204" charset="-122"/>
+            </a:endParaRPr>
           </a:p>
           <a:p>
             <a:pPr algn="ctr">
@@ -11009,10 +12119,16 @@
                 <a:solidFill>
                   <a:srgbClr val="000000"/>
                 </a:solidFill>
-                <a:latin typeface="Microsoft YaHei"/>
+                <a:latin typeface="微软雅黑" panose="020B0503020204020204" charset="-122"/>
               </a:rPr>
               <a:t>登</a:t>
             </a:r>
+            <a:endParaRPr sz="2200" b="1">
+              <a:solidFill>
+                <a:srgbClr val="000000"/>
+              </a:solidFill>
+              <a:latin typeface="微软雅黑" panose="020B0503020204020204" charset="-122"/>
+            </a:endParaRPr>
           </a:p>
           <a:p>
             <a:pPr algn="ctr">
@@ -11028,10 +12144,16 @@
                 <a:solidFill>
                   <a:srgbClr val="000000"/>
                 </a:solidFill>
-                <a:latin typeface="Microsoft YaHei"/>
+                <a:latin typeface="微软雅黑" panose="020B0503020204020204" charset="-122"/>
               </a:rPr>
               <a:t>录</a:t>
             </a:r>
+            <a:endParaRPr sz="2200" b="1">
+              <a:solidFill>
+                <a:srgbClr val="000000"/>
+              </a:solidFill>
+              <a:latin typeface="微软雅黑" panose="020B0503020204020204" charset="-122"/>
+            </a:endParaRPr>
           </a:p>
           <a:p>
             <a:pPr algn="ctr">
@@ -11047,10 +12169,16 @@
                 <a:solidFill>
                   <a:srgbClr val="000000"/>
                 </a:solidFill>
-                <a:latin typeface="Microsoft YaHei"/>
+                <a:latin typeface="微软雅黑" panose="020B0503020204020204" charset="-122"/>
               </a:rPr>
               <a:t>模</a:t>
             </a:r>
+            <a:endParaRPr sz="2200" b="1">
+              <a:solidFill>
+                <a:srgbClr val="000000"/>
+              </a:solidFill>
+              <a:latin typeface="微软雅黑" panose="020B0503020204020204" charset="-122"/>
+            </a:endParaRPr>
           </a:p>
           <a:p>
             <a:pPr algn="ctr">
@@ -11066,10 +12194,16 @@
                 <a:solidFill>
                   <a:srgbClr val="000000"/>
                 </a:solidFill>
-                <a:latin typeface="Microsoft YaHei"/>
+                <a:latin typeface="微软雅黑" panose="020B0503020204020204" charset="-122"/>
               </a:rPr>
               <a:t>块</a:t>
             </a:r>
+            <a:endParaRPr sz="2200" b="1">
+              <a:solidFill>
+                <a:srgbClr val="000000"/>
+              </a:solidFill>
+              <a:latin typeface="微软雅黑" panose="020B0503020204020204" charset="-122"/>
+            </a:endParaRPr>
           </a:p>
         </p:txBody>
       </p:sp>
@@ -11109,10 +12243,16 @@
                           <a:solidFill>
                             <a:srgbClr val="FFFFFF"/>
                           </a:solidFill>
-                          <a:latin typeface="Microsoft YaHei"/>
+                          <a:latin typeface="微软雅黑" panose="020B0503020204020204" charset="-122"/>
                         </a:rPr>
                         <a:t>序号</a:t>
                       </a:r>
+                      <a:endParaRPr sz="1300" b="1">
+                        <a:solidFill>
+                          <a:srgbClr val="FFFFFF"/>
+                        </a:solidFill>
+                        <a:latin typeface="微软雅黑" panose="020B0503020204020204" charset="-122"/>
+                      </a:endParaRPr>
                     </a:p>
                   </a:txBody>
                   <a:tcPr>
@@ -11132,10 +12272,16 @@
                           <a:solidFill>
                             <a:srgbClr val="FFFFFF"/>
                           </a:solidFill>
-                          <a:latin typeface="Microsoft YaHei"/>
+                          <a:latin typeface="微软雅黑" panose="020B0503020204020204" charset="-122"/>
                         </a:rPr>
                         <a:t>特性</a:t>
                       </a:r>
+                      <a:endParaRPr sz="1300" b="1">
+                        <a:solidFill>
+                          <a:srgbClr val="FFFFFF"/>
+                        </a:solidFill>
+                        <a:latin typeface="微软雅黑" panose="020B0503020204020204" charset="-122"/>
+                      </a:endParaRPr>
                     </a:p>
                   </a:txBody>
                   <a:tcPr>
@@ -11155,10 +12301,16 @@
                           <a:solidFill>
                             <a:srgbClr val="FFFFFF"/>
                           </a:solidFill>
-                          <a:latin typeface="Microsoft YaHei"/>
+                          <a:latin typeface="微软雅黑" panose="020B0503020204020204" charset="-122"/>
                         </a:rPr>
                         <a:t>代表场景</a:t>
                       </a:r>
+                      <a:endParaRPr sz="1300" b="1">
+                        <a:solidFill>
+                          <a:srgbClr val="FFFFFF"/>
+                        </a:solidFill>
+                        <a:latin typeface="微软雅黑" panose="020B0503020204020204" charset="-122"/>
+                      </a:endParaRPr>
                     </a:p>
                   </a:txBody>
                   <a:tcPr>
@@ -11178,10 +12330,16 @@
                           <a:solidFill>
                             <a:srgbClr val="FFFFFF"/>
                           </a:solidFill>
-                          <a:latin typeface="Microsoft YaHei"/>
+                          <a:latin typeface="微软雅黑" panose="020B0503020204020204" charset="-122"/>
                         </a:rPr>
                         <a:t>测试设计技术</a:t>
                       </a:r>
+                      <a:endParaRPr sz="1300" b="1">
+                        <a:solidFill>
+                          <a:srgbClr val="FFFFFF"/>
+                        </a:solidFill>
+                        <a:latin typeface="微软雅黑" panose="020B0503020204020204" charset="-122"/>
+                      </a:endParaRPr>
                     </a:p>
                   </a:txBody>
                   <a:tcPr>
@@ -11203,10 +12361,16 @@
                           <a:solidFill>
                             <a:srgbClr val="000000"/>
                           </a:solidFill>
-                          <a:latin typeface="Microsoft YaHei"/>
+                          <a:latin typeface="微软雅黑" panose="020B0503020204020204" charset="-122"/>
                         </a:rPr>
                         <a:t>1</a:t>
                       </a:r>
+                      <a:endParaRPr sz="1200" b="0">
+                        <a:solidFill>
+                          <a:srgbClr val="000000"/>
+                        </a:solidFill>
+                        <a:latin typeface="微软雅黑" panose="020B0503020204020204" charset="-122"/>
+                      </a:endParaRPr>
                     </a:p>
                   </a:txBody>
                   <a:tcPr>
@@ -11226,10 +12390,16 @@
                           <a:solidFill>
                             <a:srgbClr val="000000"/>
                           </a:solidFill>
-                          <a:latin typeface="Microsoft YaHei"/>
+                          <a:latin typeface="微软雅黑" panose="020B0503020204020204" charset="-122"/>
                         </a:rPr>
                         <a:t>登录成功</a:t>
                       </a:r>
+                      <a:endParaRPr sz="1200" b="0">
+                        <a:solidFill>
+                          <a:srgbClr val="000000"/>
+                        </a:solidFill>
+                        <a:latin typeface="微软雅黑" panose="020B0503020204020204" charset="-122"/>
+                      </a:endParaRPr>
                     </a:p>
                   </a:txBody>
                   <a:tcPr>
@@ -11249,10 +12419,16 @@
                           <a:solidFill>
                             <a:srgbClr val="000000"/>
                           </a:solidFill>
-                          <a:latin typeface="Microsoft YaHei"/>
+                          <a:latin typeface="微软雅黑" panose="020B0503020204020204" charset="-122"/>
                         </a:rPr>
                         <a:t>合法账号与密码</a:t>
                       </a:r>
+                      <a:endParaRPr sz="1200" b="0">
+                        <a:solidFill>
+                          <a:srgbClr val="000000"/>
+                        </a:solidFill>
+                        <a:latin typeface="微软雅黑" panose="020B0503020204020204" charset="-122"/>
+                      </a:endParaRPr>
                     </a:p>
                   </a:txBody>
                   <a:tcPr>
@@ -11272,10 +12448,16 @@
                           <a:solidFill>
                             <a:srgbClr val="000000"/>
                           </a:solidFill>
-                          <a:latin typeface="Microsoft YaHei"/>
+                          <a:latin typeface="微软雅黑" panose="020B0503020204020204" charset="-122"/>
                         </a:rPr>
                         <a:t>有效等价类</a:t>
                       </a:r>
+                      <a:endParaRPr sz="1200" b="0">
+                        <a:solidFill>
+                          <a:srgbClr val="000000"/>
+                        </a:solidFill>
+                        <a:latin typeface="微软雅黑" panose="020B0503020204020204" charset="-122"/>
+                      </a:endParaRPr>
                     </a:p>
                   </a:txBody>
                   <a:tcPr>
@@ -11297,10 +12479,16 @@
                           <a:solidFill>
                             <a:srgbClr val="000000"/>
                           </a:solidFill>
-                          <a:latin typeface="Microsoft YaHei"/>
+                          <a:latin typeface="微软雅黑" panose="020B0503020204020204" charset="-122"/>
                         </a:rPr>
                         <a:t>2</a:t>
                       </a:r>
+                      <a:endParaRPr sz="1200" b="0">
+                        <a:solidFill>
+                          <a:srgbClr val="000000"/>
+                        </a:solidFill>
+                        <a:latin typeface="微软雅黑" panose="020B0503020204020204" charset="-122"/>
+                      </a:endParaRPr>
                     </a:p>
                   </a:txBody>
                   <a:tcPr>
@@ -11320,10 +12508,16 @@
                           <a:solidFill>
                             <a:srgbClr val="000000"/>
                           </a:solidFill>
-                          <a:latin typeface="Microsoft YaHei"/>
+                          <a:latin typeface="微软雅黑" panose="020B0503020204020204" charset="-122"/>
                         </a:rPr>
                         <a:t>登录失败</a:t>
                       </a:r>
+                      <a:endParaRPr sz="1200" b="0">
+                        <a:solidFill>
+                          <a:srgbClr val="000000"/>
+                        </a:solidFill>
+                        <a:latin typeface="微软雅黑" panose="020B0503020204020204" charset="-122"/>
+                      </a:endParaRPr>
                     </a:p>
                   </a:txBody>
                   <a:tcPr>
@@ -11343,10 +12537,16 @@
                           <a:solidFill>
                             <a:srgbClr val="000000"/>
                           </a:solidFill>
-                          <a:latin typeface="Microsoft YaHei"/>
+                          <a:latin typeface="微软雅黑" panose="020B0503020204020204" charset="-122"/>
                         </a:rPr>
                         <a:t>错误密码 / 不存在账号</a:t>
                       </a:r>
+                      <a:endParaRPr sz="1200" b="0">
+                        <a:solidFill>
+                          <a:srgbClr val="000000"/>
+                        </a:solidFill>
+                        <a:latin typeface="微软雅黑" panose="020B0503020204020204" charset="-122"/>
+                      </a:endParaRPr>
                     </a:p>
                   </a:txBody>
                   <a:tcPr>
@@ -11366,10 +12566,16 @@
                           <a:solidFill>
                             <a:srgbClr val="000000"/>
                           </a:solidFill>
-                          <a:latin typeface="Microsoft YaHei"/>
+                          <a:latin typeface="微软雅黑" panose="020B0503020204020204" charset="-122"/>
                         </a:rPr>
                         <a:t>无效等价类</a:t>
                       </a:r>
+                      <a:endParaRPr sz="1200" b="0">
+                        <a:solidFill>
+                          <a:srgbClr val="000000"/>
+                        </a:solidFill>
+                        <a:latin typeface="微软雅黑" panose="020B0503020204020204" charset="-122"/>
+                      </a:endParaRPr>
                     </a:p>
                   </a:txBody>
                   <a:tcPr>
@@ -11391,10 +12597,16 @@
                           <a:solidFill>
                             <a:srgbClr val="000000"/>
                           </a:solidFill>
-                          <a:latin typeface="Microsoft YaHei"/>
+                          <a:latin typeface="微软雅黑" panose="020B0503020204020204" charset="-122"/>
                         </a:rPr>
                         <a:t>3</a:t>
                       </a:r>
+                      <a:endParaRPr sz="1200" b="0">
+                        <a:solidFill>
+                          <a:srgbClr val="000000"/>
+                        </a:solidFill>
+                        <a:latin typeface="微软雅黑" panose="020B0503020204020204" charset="-122"/>
+                      </a:endParaRPr>
                     </a:p>
                   </a:txBody>
                   <a:tcPr>
@@ -11414,10 +12626,16 @@
                           <a:solidFill>
                             <a:srgbClr val="000000"/>
                           </a:solidFill>
-                          <a:latin typeface="Microsoft YaHei"/>
+                          <a:latin typeface="微软雅黑" panose="020B0503020204020204" charset="-122"/>
                         </a:rPr>
                         <a:t>注册用户</a:t>
                       </a:r>
+                      <a:endParaRPr sz="1200" b="0">
+                        <a:solidFill>
+                          <a:srgbClr val="000000"/>
+                        </a:solidFill>
+                        <a:latin typeface="微软雅黑" panose="020B0503020204020204" charset="-122"/>
+                      </a:endParaRPr>
                     </a:p>
                   </a:txBody>
                   <a:tcPr>
@@ -11437,10 +12655,16 @@
                           <a:solidFill>
                             <a:srgbClr val="000000"/>
                           </a:solidFill>
-                          <a:latin typeface="Microsoft YaHei"/>
+                          <a:latin typeface="微软雅黑" panose="020B0503020204020204" charset="-122"/>
                         </a:rPr>
                         <a:t>新账号 / 重复账号</a:t>
                       </a:r>
+                      <a:endParaRPr sz="1200" b="0">
+                        <a:solidFill>
+                          <a:srgbClr val="000000"/>
+                        </a:solidFill>
+                        <a:latin typeface="微软雅黑" panose="020B0503020204020204" charset="-122"/>
+                      </a:endParaRPr>
                     </a:p>
                   </a:txBody>
                   <a:tcPr>
@@ -11460,10 +12684,16 @@
                           <a:solidFill>
                             <a:srgbClr val="000000"/>
                           </a:solidFill>
-                          <a:latin typeface="Microsoft YaHei"/>
+                          <a:latin typeface="微软雅黑" panose="020B0503020204020204" charset="-122"/>
                         </a:rPr>
                         <a:t>边界值 + 重复值</a:t>
                       </a:r>
+                      <a:endParaRPr sz="1200" b="0">
+                        <a:solidFill>
+                          <a:srgbClr val="000000"/>
+                        </a:solidFill>
+                        <a:latin typeface="微软雅黑" panose="020B0503020204020204" charset="-122"/>
+                      </a:endParaRPr>
                     </a:p>
                   </a:txBody>
                   <a:tcPr>
@@ -11485,10 +12715,16 @@
                           <a:solidFill>
                             <a:srgbClr val="000000"/>
                           </a:solidFill>
-                          <a:latin typeface="Microsoft YaHei"/>
+                          <a:latin typeface="微软雅黑" panose="020B0503020204020204" charset="-122"/>
                         </a:rPr>
                         <a:t>4</a:t>
                       </a:r>
+                      <a:endParaRPr sz="1200" b="0">
+                        <a:solidFill>
+                          <a:srgbClr val="000000"/>
+                        </a:solidFill>
+                        <a:latin typeface="微软雅黑" panose="020B0503020204020204" charset="-122"/>
+                      </a:endParaRPr>
                     </a:p>
                   </a:txBody>
                   <a:tcPr>
@@ -11508,10 +12744,16 @@
                           <a:solidFill>
                             <a:srgbClr val="000000"/>
                           </a:solidFill>
-                          <a:latin typeface="Microsoft YaHei"/>
+                          <a:latin typeface="微软雅黑" panose="020B0503020204020204" charset="-122"/>
                         </a:rPr>
                         <a:t>退出登录</a:t>
                       </a:r>
+                      <a:endParaRPr sz="1200" b="0">
+                        <a:solidFill>
+                          <a:srgbClr val="000000"/>
+                        </a:solidFill>
+                        <a:latin typeface="微软雅黑" panose="020B0503020204020204" charset="-122"/>
+                      </a:endParaRPr>
                     </a:p>
                   </a:txBody>
                   <a:tcPr>
@@ -11531,10 +12773,16 @@
                           <a:solidFill>
                             <a:srgbClr val="000000"/>
                           </a:solidFill>
-                          <a:latin typeface="Microsoft YaHei"/>
+                          <a:latin typeface="微软雅黑" panose="020B0503020204020204" charset="-122"/>
                         </a:rPr>
                         <a:t>清理会话状态</a:t>
                       </a:r>
+                      <a:endParaRPr sz="1200" b="0">
+                        <a:solidFill>
+                          <a:srgbClr val="000000"/>
+                        </a:solidFill>
+                        <a:latin typeface="微软雅黑" panose="020B0503020204020204" charset="-122"/>
+                      </a:endParaRPr>
                     </a:p>
                   </a:txBody>
                   <a:tcPr>
@@ -11554,10 +12802,16 @@
                           <a:solidFill>
                             <a:srgbClr val="000000"/>
                           </a:solidFill>
-                          <a:latin typeface="Microsoft YaHei"/>
+                          <a:latin typeface="微软雅黑" panose="020B0503020204020204" charset="-122"/>
                         </a:rPr>
                         <a:t>状态校验</a:t>
                       </a:r>
+                      <a:endParaRPr sz="1200" b="0">
+                        <a:solidFill>
+                          <a:srgbClr val="000000"/>
+                        </a:solidFill>
+                        <a:latin typeface="微软雅黑" panose="020B0503020204020204" charset="-122"/>
+                      </a:endParaRPr>
                     </a:p>
                   </a:txBody>
                   <a:tcPr>
@@ -11579,10 +12833,16 @@
                           <a:solidFill>
                             <a:srgbClr val="000000"/>
                           </a:solidFill>
-                          <a:latin typeface="Microsoft YaHei"/>
+                          <a:latin typeface="微软雅黑" panose="020B0503020204020204" charset="-122"/>
                         </a:rPr>
                         <a:t>5</a:t>
                       </a:r>
+                      <a:endParaRPr sz="1200" b="0">
+                        <a:solidFill>
+                          <a:srgbClr val="000000"/>
+                        </a:solidFill>
+                        <a:latin typeface="微软雅黑" panose="020B0503020204020204" charset="-122"/>
+                      </a:endParaRPr>
                     </a:p>
                   </a:txBody>
                   <a:tcPr>
@@ -11602,10 +12862,16 @@
                           <a:solidFill>
                             <a:srgbClr val="000000"/>
                           </a:solidFill>
-                          <a:latin typeface="Microsoft YaHei"/>
+                          <a:latin typeface="微软雅黑" panose="020B0503020204020204" charset="-122"/>
                         </a:rPr>
                         <a:t>管理员维护</a:t>
                       </a:r>
+                      <a:endParaRPr sz="1200" b="0">
+                        <a:solidFill>
+                          <a:srgbClr val="000000"/>
+                        </a:solidFill>
+                        <a:latin typeface="微软雅黑" panose="020B0503020204020204" charset="-122"/>
+                      </a:endParaRPr>
                     </a:p>
                   </a:txBody>
                   <a:tcPr>
@@ -11625,10 +12891,16 @@
                           <a:solidFill>
                             <a:srgbClr val="000000"/>
                           </a:solidFill>
-                          <a:latin typeface="Microsoft YaHei"/>
+                          <a:latin typeface="微软雅黑" panose="020B0503020204020204" charset="-122"/>
                         </a:rPr>
                         <a:t>用户增删改查</a:t>
                       </a:r>
+                      <a:endParaRPr sz="1200" b="0">
+                        <a:solidFill>
+                          <a:srgbClr val="000000"/>
+                        </a:solidFill>
+                        <a:latin typeface="微软雅黑" panose="020B0503020204020204" charset="-122"/>
+                      </a:endParaRPr>
                     </a:p>
                   </a:txBody>
                   <a:tcPr>
@@ -11648,10 +12920,16 @@
                           <a:solidFill>
                             <a:srgbClr val="000000"/>
                           </a:solidFill>
-                          <a:latin typeface="Microsoft YaHei"/>
+                          <a:latin typeface="微软雅黑" panose="020B0503020204020204" charset="-122"/>
                         </a:rPr>
                         <a:t>判定覆盖</a:t>
                       </a:r>
+                      <a:endParaRPr sz="1200" b="0">
+                        <a:solidFill>
+                          <a:srgbClr val="000000"/>
+                        </a:solidFill>
+                        <a:latin typeface="微软雅黑" panose="020B0503020204020204" charset="-122"/>
+                      </a:endParaRPr>
                     </a:p>
                   </a:txBody>
                   <a:tcPr>
@@ -11673,10 +12951,16 @@
                           <a:solidFill>
                             <a:srgbClr val="000000"/>
                           </a:solidFill>
-                          <a:latin typeface="Microsoft YaHei"/>
+                          <a:latin typeface="微软雅黑" panose="020B0503020204020204" charset="-122"/>
                         </a:rPr>
                         <a:t>6</a:t>
                       </a:r>
+                      <a:endParaRPr sz="1200" b="0">
+                        <a:solidFill>
+                          <a:srgbClr val="000000"/>
+                        </a:solidFill>
+                        <a:latin typeface="微软雅黑" panose="020B0503020204020204" charset="-122"/>
+                      </a:endParaRPr>
                     </a:p>
                   </a:txBody>
                   <a:tcPr>
@@ -11696,10 +12980,16 @@
                           <a:solidFill>
                             <a:srgbClr val="000000"/>
                           </a:solidFill>
-                          <a:latin typeface="Microsoft YaHei"/>
+                          <a:latin typeface="微软雅黑" panose="020B0503020204020204" charset="-122"/>
                         </a:rPr>
                         <a:t>服务校验</a:t>
                       </a:r>
+                      <a:endParaRPr sz="1200" b="0">
+                        <a:solidFill>
+                          <a:srgbClr val="000000"/>
+                        </a:solidFill>
+                        <a:latin typeface="微软雅黑" panose="020B0503020204020204" charset="-122"/>
+                      </a:endParaRPr>
                     </a:p>
                   </a:txBody>
                   <a:tcPr>
@@ -11719,10 +13009,16 @@
                           <a:solidFill>
                             <a:srgbClr val="000000"/>
                           </a:solidFill>
-                          <a:latin typeface="Microsoft YaHei"/>
+                          <a:latin typeface="微软雅黑" panose="020B0503020204020204" charset="-122"/>
                         </a:rPr>
                         <a:t>登录、注册、删除、更新</a:t>
                       </a:r>
+                      <a:endParaRPr sz="1200" b="0">
+                        <a:solidFill>
+                          <a:srgbClr val="000000"/>
+                        </a:solidFill>
+                        <a:latin typeface="微软雅黑" panose="020B0503020204020204" charset="-122"/>
+                      </a:endParaRPr>
                     </a:p>
                   </a:txBody>
                   <a:tcPr>
@@ -11742,10 +13038,16 @@
                           <a:solidFill>
                             <a:srgbClr val="000000"/>
                           </a:solidFill>
-                          <a:latin typeface="Microsoft YaHei"/>
+                          <a:latin typeface="微软雅黑" panose="020B0503020204020204" charset="-122"/>
                         </a:rPr>
                         <a:t>语句覆盖</a:t>
                       </a:r>
+                      <a:endParaRPr sz="1200" b="0">
+                        <a:solidFill>
+                          <a:srgbClr val="000000"/>
+                        </a:solidFill>
+                        <a:latin typeface="微软雅黑" panose="020B0503020204020204" charset="-122"/>
+                      </a:endParaRPr>
                     </a:p>
                   </a:txBody>
                   <a:tcPr>
@@ -11768,7 +13070,7 @@
 </file>
 
 <file path=ppt/slides/slide19.xml><?xml version="1.0" encoding="utf-8"?>
-<p:sld xmlns:a="http://schemas.openxmlformats.org/drawingml/2006/main" xmlns:p="http://schemas.openxmlformats.org/presentationml/2006/main" xmlns:r="http://schemas.openxmlformats.org/officeDocument/2006/relationships">
+<p:sld xmlns:a="http://schemas.openxmlformats.org/drawingml/2006/main" xmlns:r="http://schemas.openxmlformats.org/officeDocument/2006/relationships" xmlns:p="http://schemas.openxmlformats.org/presentationml/2006/main">
   <p:cSld>
     <p:spTree>
       <p:nvGrpSpPr>
@@ -12105,10 +13407,16 @@
                 <a:solidFill>
                   <a:srgbClr val="000000"/>
                 </a:solidFill>
-                <a:latin typeface="Microsoft YaHei"/>
+                <a:latin typeface="微软雅黑" panose="020B0503020204020204" charset="-122"/>
               </a:rPr>
               <a:t>图表19</a:t>
             </a:r>
+            <a:endParaRPr sz="700" b="0">
+              <a:solidFill>
+                <a:srgbClr val="000000"/>
+              </a:solidFill>
+              <a:latin typeface="微软雅黑" panose="020B0503020204020204" charset="-122"/>
+            </a:endParaRPr>
           </a:p>
         </p:txBody>
       </p:sp>
@@ -12129,7 +13437,7 @@
           <a:noFill/>
         </p:spPr>
         <p:txBody>
-          <a:bodyPr wrap="none" lIns="0" rIns="0" tIns="0" bIns="0">
+          <a:bodyPr wrap="none" lIns="0" tIns="0" rIns="0" bIns="0">
             <a:spAutoFit/>
           </a:bodyPr>
           <a:lstStyle/>
@@ -12147,10 +13455,16 @@
                 <a:solidFill>
                   <a:srgbClr val="000000"/>
                 </a:solidFill>
-                <a:latin typeface="Microsoft YaHei"/>
+                <a:latin typeface="微软雅黑" panose="020B0503020204020204" charset="-122"/>
               </a:rPr>
               <a:t>留</a:t>
             </a:r>
+            <a:endParaRPr sz="2300" b="1">
+              <a:solidFill>
+                <a:srgbClr val="000000"/>
+              </a:solidFill>
+              <a:latin typeface="微软雅黑" panose="020B0503020204020204" charset="-122"/>
+            </a:endParaRPr>
           </a:p>
           <a:p>
             <a:pPr algn="ctr">
@@ -12166,10 +13480,16 @@
                 <a:solidFill>
                   <a:srgbClr val="000000"/>
                 </a:solidFill>
-                <a:latin typeface="Microsoft YaHei"/>
+                <a:latin typeface="微软雅黑" panose="020B0503020204020204" charset="-122"/>
               </a:rPr>
               <a:t>言</a:t>
             </a:r>
+            <a:endParaRPr sz="2300" b="1">
+              <a:solidFill>
+                <a:srgbClr val="000000"/>
+              </a:solidFill>
+              <a:latin typeface="微软雅黑" panose="020B0503020204020204" charset="-122"/>
+            </a:endParaRPr>
           </a:p>
           <a:p>
             <a:pPr algn="ctr">
@@ -12185,10 +13505,16 @@
                 <a:solidFill>
                   <a:srgbClr val="000000"/>
                 </a:solidFill>
-                <a:latin typeface="Microsoft YaHei"/>
+                <a:latin typeface="微软雅黑" panose="020B0503020204020204" charset="-122"/>
               </a:rPr>
               <a:t>板</a:t>
             </a:r>
+            <a:endParaRPr sz="2300" b="1">
+              <a:solidFill>
+                <a:srgbClr val="000000"/>
+              </a:solidFill>
+              <a:latin typeface="微软雅黑" panose="020B0503020204020204" charset="-122"/>
+            </a:endParaRPr>
           </a:p>
           <a:p>
             <a:pPr algn="ctr">
@@ -12204,10 +13530,16 @@
                 <a:solidFill>
                   <a:srgbClr val="000000"/>
                 </a:solidFill>
-                <a:latin typeface="Microsoft YaHei"/>
+                <a:latin typeface="微软雅黑" panose="020B0503020204020204" charset="-122"/>
               </a:rPr>
               <a:t>模</a:t>
             </a:r>
+            <a:endParaRPr sz="2300" b="1">
+              <a:solidFill>
+                <a:srgbClr val="000000"/>
+              </a:solidFill>
+              <a:latin typeface="微软雅黑" panose="020B0503020204020204" charset="-122"/>
+            </a:endParaRPr>
           </a:p>
           <a:p>
             <a:pPr algn="ctr">
@@ -12223,10 +13555,16 @@
                 <a:solidFill>
                   <a:srgbClr val="000000"/>
                 </a:solidFill>
-                <a:latin typeface="Microsoft YaHei"/>
+                <a:latin typeface="微软雅黑" panose="020B0503020204020204" charset="-122"/>
               </a:rPr>
               <a:t>块</a:t>
             </a:r>
+            <a:endParaRPr sz="2300" b="1">
+              <a:solidFill>
+                <a:srgbClr val="000000"/>
+              </a:solidFill>
+              <a:latin typeface="微软雅黑" panose="020B0503020204020204" charset="-122"/>
+            </a:endParaRPr>
           </a:p>
         </p:txBody>
       </p:sp>
@@ -12266,10 +13604,16 @@
                           <a:solidFill>
                             <a:srgbClr val="FFFFFF"/>
                           </a:solidFill>
-                          <a:latin typeface="Microsoft YaHei"/>
+                          <a:latin typeface="微软雅黑" panose="020B0503020204020204" charset="-122"/>
                         </a:rPr>
                         <a:t>序号</a:t>
                       </a:r>
+                      <a:endParaRPr sz="1300" b="1">
+                        <a:solidFill>
+                          <a:srgbClr val="FFFFFF"/>
+                        </a:solidFill>
+                        <a:latin typeface="微软雅黑" panose="020B0503020204020204" charset="-122"/>
+                      </a:endParaRPr>
                     </a:p>
                   </a:txBody>
                   <a:tcPr>
@@ -12289,10 +13633,16 @@
                           <a:solidFill>
                             <a:srgbClr val="FFFFFF"/>
                           </a:solidFill>
-                          <a:latin typeface="Microsoft YaHei"/>
+                          <a:latin typeface="微软雅黑" panose="020B0503020204020204" charset="-122"/>
                         </a:rPr>
                         <a:t>特性</a:t>
                       </a:r>
+                      <a:endParaRPr sz="1300" b="1">
+                        <a:solidFill>
+                          <a:srgbClr val="FFFFFF"/>
+                        </a:solidFill>
+                        <a:latin typeface="微软雅黑" panose="020B0503020204020204" charset="-122"/>
+                      </a:endParaRPr>
                     </a:p>
                   </a:txBody>
                   <a:tcPr>
@@ -12312,10 +13662,16 @@
                           <a:solidFill>
                             <a:srgbClr val="FFFFFF"/>
                           </a:solidFill>
-                          <a:latin typeface="Microsoft YaHei"/>
+                          <a:latin typeface="微软雅黑" panose="020B0503020204020204" charset="-122"/>
                         </a:rPr>
                         <a:t>代表场景</a:t>
                       </a:r>
+                      <a:endParaRPr sz="1300" b="1">
+                        <a:solidFill>
+                          <a:srgbClr val="FFFFFF"/>
+                        </a:solidFill>
+                        <a:latin typeface="微软雅黑" panose="020B0503020204020204" charset="-122"/>
+                      </a:endParaRPr>
                     </a:p>
                   </a:txBody>
                   <a:tcPr>
@@ -12335,10 +13691,16 @@
                           <a:solidFill>
                             <a:srgbClr val="FFFFFF"/>
                           </a:solidFill>
-                          <a:latin typeface="Microsoft YaHei"/>
+                          <a:latin typeface="微软雅黑" panose="020B0503020204020204" charset="-122"/>
                         </a:rPr>
                         <a:t>覆盖重点</a:t>
                       </a:r>
+                      <a:endParaRPr sz="1300" b="1">
+                        <a:solidFill>
+                          <a:srgbClr val="FFFFFF"/>
+                        </a:solidFill>
+                        <a:latin typeface="微软雅黑" panose="020B0503020204020204" charset="-122"/>
+                      </a:endParaRPr>
                     </a:p>
                   </a:txBody>
                   <a:tcPr>
@@ -12360,10 +13722,16 @@
                           <a:solidFill>
                             <a:srgbClr val="000000"/>
                           </a:solidFill>
-                          <a:latin typeface="Microsoft YaHei"/>
+                          <a:latin typeface="微软雅黑" panose="020B0503020204020204" charset="-122"/>
                         </a:rPr>
                         <a:t>1</a:t>
                       </a:r>
+                      <a:endParaRPr sz="1200" b="0">
+                        <a:solidFill>
+                          <a:srgbClr val="000000"/>
+                        </a:solidFill>
+                        <a:latin typeface="微软雅黑" panose="020B0503020204020204" charset="-122"/>
+                      </a:endParaRPr>
                     </a:p>
                   </a:txBody>
                   <a:tcPr>
@@ -12383,10 +13751,16 @@
                           <a:solidFill>
                             <a:srgbClr val="000000"/>
                           </a:solidFill>
-                          <a:latin typeface="Microsoft YaHei"/>
+                          <a:latin typeface="微软雅黑" panose="020B0503020204020204" charset="-122"/>
                         </a:rPr>
                         <a:t>留言列表</a:t>
                       </a:r>
+                      <a:endParaRPr sz="1200" b="0">
+                        <a:solidFill>
+                          <a:srgbClr val="000000"/>
+                        </a:solidFill>
+                        <a:latin typeface="微软雅黑" panose="020B0503020204020204" charset="-122"/>
+                      </a:endParaRPr>
                     </a:p>
                   </a:txBody>
                   <a:tcPr>
@@ -12406,10 +13780,16 @@
                           <a:solidFill>
                             <a:srgbClr val="000000"/>
                           </a:solidFill>
-                          <a:latin typeface="Microsoft YaHei"/>
+                          <a:latin typeface="微软雅黑" panose="020B0503020204020204" charset="-122"/>
                         </a:rPr>
                         <a:t>分页查看留言</a:t>
                       </a:r>
+                      <a:endParaRPr sz="1200" b="0">
+                        <a:solidFill>
+                          <a:srgbClr val="000000"/>
+                        </a:solidFill>
+                        <a:latin typeface="微软雅黑" panose="020B0503020204020204" charset="-122"/>
+                      </a:endParaRPr>
                     </a:p>
                   </a:txBody>
                   <a:tcPr>
@@ -12429,10 +13809,16 @@
                           <a:solidFill>
                             <a:srgbClr val="000000"/>
                           </a:solidFill>
-                          <a:latin typeface="Microsoft YaHei"/>
+                          <a:latin typeface="微软雅黑" panose="020B0503020204020204" charset="-122"/>
                         </a:rPr>
                         <a:t>分页边界</a:t>
                       </a:r>
+                      <a:endParaRPr sz="1200" b="0">
+                        <a:solidFill>
+                          <a:srgbClr val="000000"/>
+                        </a:solidFill>
+                        <a:latin typeface="微软雅黑" panose="020B0503020204020204" charset="-122"/>
+                      </a:endParaRPr>
                     </a:p>
                   </a:txBody>
                   <a:tcPr>
@@ -12454,10 +13840,16 @@
                           <a:solidFill>
                             <a:srgbClr val="000000"/>
                           </a:solidFill>
-                          <a:latin typeface="Microsoft YaHei"/>
+                          <a:latin typeface="微软雅黑" panose="020B0503020204020204" charset="-122"/>
                         </a:rPr>
                         <a:t>2</a:t>
                       </a:r>
+                      <a:endParaRPr sz="1200" b="0">
+                        <a:solidFill>
+                          <a:srgbClr val="000000"/>
+                        </a:solidFill>
+                        <a:latin typeface="微软雅黑" panose="020B0503020204020204" charset="-122"/>
+                      </a:endParaRPr>
                     </a:p>
                   </a:txBody>
                   <a:tcPr>
@@ -12477,10 +13869,16 @@
                           <a:solidFill>
                             <a:srgbClr val="000000"/>
                           </a:solidFill>
-                          <a:latin typeface="Microsoft YaHei"/>
+                          <a:latin typeface="微软雅黑" panose="020B0503020204020204" charset="-122"/>
                         </a:rPr>
                         <a:t>发布留言</a:t>
                       </a:r>
+                      <a:endParaRPr sz="1200" b="0">
+                        <a:solidFill>
+                          <a:srgbClr val="000000"/>
+                        </a:solidFill>
+                        <a:latin typeface="微软雅黑" panose="020B0503020204020204" charset="-122"/>
+                      </a:endParaRPr>
                     </a:p>
                   </a:txBody>
                   <a:tcPr>
@@ -12500,10 +13898,16 @@
                           <a:solidFill>
                             <a:srgbClr val="000000"/>
                           </a:solidFill>
-                          <a:latin typeface="Microsoft YaHei"/>
+                          <a:latin typeface="微软雅黑" panose="020B0503020204020204" charset="-122"/>
                         </a:rPr>
                         <a:t>登录用户发布有效内容</a:t>
                       </a:r>
+                      <a:endParaRPr sz="1200" b="0">
+                        <a:solidFill>
+                          <a:srgbClr val="000000"/>
+                        </a:solidFill>
+                        <a:latin typeface="微软雅黑" panose="020B0503020204020204" charset="-122"/>
+                      </a:endParaRPr>
                     </a:p>
                   </a:txBody>
                   <a:tcPr>
@@ -12523,10 +13927,16 @@
                           <a:solidFill>
                             <a:srgbClr val="000000"/>
                           </a:solidFill>
-                          <a:latin typeface="Microsoft YaHei"/>
+                          <a:latin typeface="微软雅黑" panose="020B0503020204020204" charset="-122"/>
                         </a:rPr>
                         <a:t>登录态 + 有效输入</a:t>
                       </a:r>
+                      <a:endParaRPr sz="1200" b="0">
+                        <a:solidFill>
+                          <a:srgbClr val="000000"/>
+                        </a:solidFill>
+                        <a:latin typeface="微软雅黑" panose="020B0503020204020204" charset="-122"/>
+                      </a:endParaRPr>
                     </a:p>
                   </a:txBody>
                   <a:tcPr>
@@ -12548,10 +13958,16 @@
                           <a:solidFill>
                             <a:srgbClr val="000000"/>
                           </a:solidFill>
-                          <a:latin typeface="Microsoft YaHei"/>
+                          <a:latin typeface="微软雅黑" panose="020B0503020204020204" charset="-122"/>
                         </a:rPr>
                         <a:t>3</a:t>
                       </a:r>
+                      <a:endParaRPr sz="1200" b="0">
+                        <a:solidFill>
+                          <a:srgbClr val="000000"/>
+                        </a:solidFill>
+                        <a:latin typeface="微软雅黑" panose="020B0503020204020204" charset="-122"/>
+                      </a:endParaRPr>
                     </a:p>
                   </a:txBody>
                   <a:tcPr>
@@ -12571,10 +13987,16 @@
                           <a:solidFill>
                             <a:srgbClr val="000000"/>
                           </a:solidFill>
-                          <a:latin typeface="Microsoft YaHei"/>
+                          <a:latin typeface="微软雅黑" panose="020B0503020204020204" charset="-122"/>
                         </a:rPr>
                         <a:t>空内容留言</a:t>
                       </a:r>
+                      <a:endParaRPr sz="1200" b="0">
+                        <a:solidFill>
+                          <a:srgbClr val="000000"/>
+                        </a:solidFill>
+                        <a:latin typeface="微软雅黑" panose="020B0503020204020204" charset="-122"/>
+                      </a:endParaRPr>
                     </a:p>
                   </a:txBody>
                   <a:tcPr>
@@ -12594,10 +14016,16 @@
                           <a:solidFill>
                             <a:srgbClr val="000000"/>
                           </a:solidFill>
-                          <a:latin typeface="Microsoft YaHei"/>
+                          <a:latin typeface="微软雅黑" panose="020B0503020204020204" charset="-122"/>
                         </a:rPr>
                         <a:t>空内容 / 缺少参数</a:t>
                       </a:r>
+                      <a:endParaRPr sz="1200" b="0">
+                        <a:solidFill>
+                          <a:srgbClr val="000000"/>
+                        </a:solidFill>
+                        <a:latin typeface="微软雅黑" panose="020B0503020204020204" charset="-122"/>
+                      </a:endParaRPr>
                     </a:p>
                   </a:txBody>
                   <a:tcPr>
@@ -12617,10 +14045,16 @@
                           <a:solidFill>
                             <a:srgbClr val="000000"/>
                           </a:solidFill>
-                          <a:latin typeface="Microsoft YaHei"/>
+                          <a:latin typeface="微软雅黑" panose="020B0503020204020204" charset="-122"/>
                         </a:rPr>
                         <a:t>无效等价类</a:t>
                       </a:r>
+                      <a:endParaRPr sz="1200" b="0">
+                        <a:solidFill>
+                          <a:srgbClr val="000000"/>
+                        </a:solidFill>
+                        <a:latin typeface="微软雅黑" panose="020B0503020204020204" charset="-122"/>
+                      </a:endParaRPr>
                     </a:p>
                   </a:txBody>
                   <a:tcPr>
@@ -12642,10 +14076,16 @@
                           <a:solidFill>
                             <a:srgbClr val="000000"/>
                           </a:solidFill>
-                          <a:latin typeface="Microsoft YaHei"/>
+                          <a:latin typeface="微软雅黑" panose="020B0503020204020204" charset="-122"/>
                         </a:rPr>
                         <a:t>4</a:t>
                       </a:r>
+                      <a:endParaRPr sz="1200" b="0">
+                        <a:solidFill>
+                          <a:srgbClr val="000000"/>
+                        </a:solidFill>
+                        <a:latin typeface="微软雅黑" panose="020B0503020204020204" charset="-122"/>
+                      </a:endParaRPr>
                     </a:p>
                   </a:txBody>
                   <a:tcPr>
@@ -12665,10 +14105,16 @@
                           <a:solidFill>
                             <a:srgbClr val="000000"/>
                           </a:solidFill>
-                          <a:latin typeface="Microsoft YaHei"/>
+                          <a:latin typeface="微软雅黑" panose="020B0503020204020204" charset="-122"/>
                         </a:rPr>
                         <a:t>删除留言</a:t>
                       </a:r>
+                      <a:endParaRPr sz="1200" b="0">
+                        <a:solidFill>
+                          <a:srgbClr val="000000"/>
+                        </a:solidFill>
+                        <a:latin typeface="微软雅黑" panose="020B0503020204020204" charset="-122"/>
+                      </a:endParaRPr>
                     </a:p>
                   </a:txBody>
                   <a:tcPr>
@@ -12688,10 +14134,16 @@
                           <a:solidFill>
                             <a:srgbClr val="000000"/>
                           </a:solidFill>
-                          <a:latin typeface="Microsoft YaHei"/>
+                          <a:latin typeface="微软雅黑" panose="020B0503020204020204" charset="-122"/>
                         </a:rPr>
                         <a:t>本人删除 / 非法删除</a:t>
                       </a:r>
+                      <a:endParaRPr sz="1200" b="0">
+                        <a:solidFill>
+                          <a:srgbClr val="000000"/>
+                        </a:solidFill>
+                        <a:latin typeface="微软雅黑" panose="020B0503020204020204" charset="-122"/>
+                      </a:endParaRPr>
                     </a:p>
                   </a:txBody>
                   <a:tcPr>
@@ -12711,10 +14163,16 @@
                           <a:solidFill>
                             <a:srgbClr val="000000"/>
                           </a:solidFill>
-                          <a:latin typeface="Microsoft YaHei"/>
+                          <a:latin typeface="微软雅黑" panose="020B0503020204020204" charset="-122"/>
                         </a:rPr>
                         <a:t>权限路径</a:t>
                       </a:r>
+                      <a:endParaRPr sz="1200" b="0">
+                        <a:solidFill>
+                          <a:srgbClr val="000000"/>
+                        </a:solidFill>
+                        <a:latin typeface="微软雅黑" panose="020B0503020204020204" charset="-122"/>
+                      </a:endParaRPr>
                     </a:p>
                   </a:txBody>
                   <a:tcPr>
@@ -12736,10 +14194,16 @@
                           <a:solidFill>
                             <a:srgbClr val="000000"/>
                           </a:solidFill>
-                          <a:latin typeface="Microsoft YaHei"/>
+                          <a:latin typeface="微软雅黑" panose="020B0503020204020204" charset="-122"/>
                         </a:rPr>
                         <a:t>5</a:t>
                       </a:r>
+                      <a:endParaRPr sz="1200" b="0">
+                        <a:solidFill>
+                          <a:srgbClr val="000000"/>
+                        </a:solidFill>
+                        <a:latin typeface="微软雅黑" panose="020B0503020204020204" charset="-122"/>
+                      </a:endParaRPr>
                     </a:p>
                   </a:txBody>
                   <a:tcPr>
@@ -12759,10 +14223,16 @@
                           <a:solidFill>
                             <a:srgbClr val="000000"/>
                           </a:solidFill>
-                          <a:latin typeface="Microsoft YaHei"/>
+                          <a:latin typeface="微软雅黑" panose="020B0503020204020204" charset="-122"/>
                         </a:rPr>
                         <a:t>管理员审核</a:t>
                       </a:r>
+                      <a:endParaRPr sz="1200" b="0">
+                        <a:solidFill>
+                          <a:srgbClr val="000000"/>
+                        </a:solidFill>
+                        <a:latin typeface="微软雅黑" panose="020B0503020204020204" charset="-122"/>
+                      </a:endParaRPr>
                     </a:p>
                   </a:txBody>
                   <a:tcPr>
@@ -12782,10 +14252,16 @@
                           <a:solidFill>
                             <a:srgbClr val="000000"/>
                           </a:solidFill>
-                          <a:latin typeface="Microsoft YaHei"/>
+                          <a:latin typeface="微软雅黑" panose="020B0503020204020204" charset="-122"/>
                         </a:rPr>
                         <a:t>通过 / 拒绝留言</a:t>
                       </a:r>
+                      <a:endParaRPr sz="1200" b="0">
+                        <a:solidFill>
+                          <a:srgbClr val="000000"/>
+                        </a:solidFill>
+                        <a:latin typeface="微软雅黑" panose="020B0503020204020204" charset="-122"/>
+                      </a:endParaRPr>
                     </a:p>
                   </a:txBody>
                   <a:tcPr>
@@ -12805,10 +14281,16 @@
                           <a:solidFill>
                             <a:srgbClr val="000000"/>
                           </a:solidFill>
-                          <a:latin typeface="Microsoft YaHei"/>
+                          <a:latin typeface="微软雅黑" panose="020B0503020204020204" charset="-122"/>
                         </a:rPr>
                         <a:t>判定覆盖</a:t>
                       </a:r>
+                      <a:endParaRPr sz="1200" b="0">
+                        <a:solidFill>
+                          <a:srgbClr val="000000"/>
+                        </a:solidFill>
+                        <a:latin typeface="微软雅黑" panose="020B0503020204020204" charset="-122"/>
+                      </a:endParaRPr>
                     </a:p>
                   </a:txBody>
                   <a:tcPr>
@@ -12830,10 +14312,16 @@
                           <a:solidFill>
                             <a:srgbClr val="000000"/>
                           </a:solidFill>
-                          <a:latin typeface="Microsoft YaHei"/>
+                          <a:latin typeface="微软雅黑" panose="020B0503020204020204" charset="-122"/>
                         </a:rPr>
                         <a:t>6</a:t>
                       </a:r>
+                      <a:endParaRPr sz="1200" b="0">
+                        <a:solidFill>
+                          <a:srgbClr val="000000"/>
+                        </a:solidFill>
+                        <a:latin typeface="微软雅黑" panose="020B0503020204020204" charset="-122"/>
+                      </a:endParaRPr>
                     </a:p>
                   </a:txBody>
                   <a:tcPr>
@@ -12853,10 +14341,16 @@
                           <a:solidFill>
                             <a:srgbClr val="000000"/>
                           </a:solidFill>
-                          <a:latin typeface="Microsoft YaHei"/>
+                          <a:latin typeface="微软雅黑" panose="020B0503020204020204" charset="-122"/>
                         </a:rPr>
                         <a:t>聚合查询</a:t>
                       </a:r>
+                      <a:endParaRPr sz="1200" b="0">
+                        <a:solidFill>
+                          <a:srgbClr val="000000"/>
+                        </a:solidFill>
+                        <a:latin typeface="微软雅黑" panose="020B0503020204020204" charset="-122"/>
+                      </a:endParaRPr>
                     </a:p>
                   </a:txBody>
                   <a:tcPr>
@@ -12876,10 +14370,16 @@
                           <a:solidFill>
                             <a:srgbClr val="000000"/>
                           </a:solidFill>
-                          <a:latin typeface="Microsoft YaHei"/>
+                          <a:latin typeface="微软雅黑" panose="020B0503020204020204" charset="-122"/>
                         </a:rPr>
                         <a:t>留言与用户信息组合</a:t>
                       </a:r>
+                      <a:endParaRPr sz="1200" b="0">
+                        <a:solidFill>
+                          <a:srgbClr val="000000"/>
+                        </a:solidFill>
+                        <a:latin typeface="微软雅黑" panose="020B0503020204020204" charset="-122"/>
+                      </a:endParaRPr>
                     </a:p>
                   </a:txBody>
                   <a:tcPr>
@@ -12899,10 +14399,16 @@
                           <a:solidFill>
                             <a:srgbClr val="000000"/>
                           </a:solidFill>
-                          <a:latin typeface="Microsoft YaHei"/>
+                          <a:latin typeface="微软雅黑" panose="020B0503020204020204" charset="-122"/>
                         </a:rPr>
                         <a:t>聚合查询</a:t>
                       </a:r>
+                      <a:endParaRPr sz="1200" b="0">
+                        <a:solidFill>
+                          <a:srgbClr val="000000"/>
+                        </a:solidFill>
+                        <a:latin typeface="微软雅黑" panose="020B0503020204020204" charset="-122"/>
+                      </a:endParaRPr>
                     </a:p>
                   </a:txBody>
                   <a:tcPr>
@@ -12925,7 +14431,7 @@
 </file>
 
 <file path=ppt/slides/slide2.xml><?xml version="1.0" encoding="utf-8"?>
-<p:sld xmlns:a="http://schemas.openxmlformats.org/drawingml/2006/main" xmlns:p="http://schemas.openxmlformats.org/presentationml/2006/main" xmlns:r="http://schemas.openxmlformats.org/officeDocument/2006/relationships">
+<p:sld xmlns:a="http://schemas.openxmlformats.org/drawingml/2006/main" xmlns:r="http://schemas.openxmlformats.org/officeDocument/2006/relationships" xmlns:p="http://schemas.openxmlformats.org/presentationml/2006/main">
   <p:cSld>
     <p:spTree>
       <p:nvGrpSpPr>
@@ -13262,10 +14768,16 @@
                 <a:solidFill>
                   <a:srgbClr val="000000"/>
                 </a:solidFill>
-                <a:latin typeface="Microsoft YaHei"/>
+                <a:latin typeface="微软雅黑" panose="020B0503020204020204" charset="-122"/>
               </a:rPr>
               <a:t>图表2</a:t>
             </a:r>
+            <a:endParaRPr sz="700" b="0">
+              <a:solidFill>
+                <a:srgbClr val="000000"/>
+              </a:solidFill>
+              <a:latin typeface="微软雅黑" panose="020B0503020204020204" charset="-122"/>
+            </a:endParaRPr>
           </a:p>
         </p:txBody>
       </p:sp>
@@ -13296,10 +14808,16 @@
                 <a:solidFill>
                   <a:srgbClr val="000000"/>
                 </a:solidFill>
-                <a:latin typeface="Microsoft YaHei"/>
+                <a:latin typeface="微软雅黑" panose="020B0503020204020204" charset="-122"/>
               </a:rPr>
               <a:t>PJ1主要内容</a:t>
             </a:r>
+            <a:endParaRPr sz="3000" b="1">
+              <a:solidFill>
+                <a:srgbClr val="000000"/>
+              </a:solidFill>
+              <a:latin typeface="微软雅黑" panose="020B0503020204020204" charset="-122"/>
+            </a:endParaRPr>
           </a:p>
         </p:txBody>
       </p:sp>
@@ -13330,10 +14848,16 @@
                 <a:solidFill>
                   <a:srgbClr val="000000"/>
                 </a:solidFill>
-                <a:latin typeface="Microsoft YaHei"/>
+                <a:latin typeface="微软雅黑" panose="020B0503020204020204" charset="-122"/>
               </a:rPr>
               <a:t>1. 测试计划规定</a:t>
             </a:r>
+            <a:endParaRPr sz="1900" b="1">
+              <a:solidFill>
+                <a:srgbClr val="000000"/>
+              </a:solidFill>
+              <a:latin typeface="微软雅黑" panose="020B0503020204020204" charset="-122"/>
+            </a:endParaRPr>
           </a:p>
           <a:p>
             <a:r>
@@ -13341,10 +14865,16 @@
                 <a:solidFill>
                   <a:srgbClr val="000000"/>
                 </a:solidFill>
-                <a:latin typeface="Microsoft YaHei"/>
+                <a:latin typeface="微软雅黑" panose="020B0503020204020204" charset="-122"/>
               </a:rPr>
               <a:t>• 测试项与先决条件</a:t>
             </a:r>
+            <a:endParaRPr sz="1700" b="0">
+              <a:solidFill>
+                <a:srgbClr val="000000"/>
+              </a:solidFill>
+              <a:latin typeface="微软雅黑" panose="020B0503020204020204" charset="-122"/>
+            </a:endParaRPr>
           </a:p>
           <a:p>
             <a:r>
@@ -13352,10 +14882,16 @@
                 <a:solidFill>
                   <a:srgbClr val="000000"/>
                 </a:solidFill>
-                <a:latin typeface="Microsoft YaHei"/>
+                <a:latin typeface="微软雅黑" panose="020B0503020204020204" charset="-122"/>
               </a:rPr>
               <a:t>• 通过/失败准则与风险管控</a:t>
             </a:r>
+            <a:endParaRPr sz="1700" b="0">
+              <a:solidFill>
+                <a:srgbClr val="000000"/>
+              </a:solidFill>
+              <a:latin typeface="微软雅黑" panose="020B0503020204020204" charset="-122"/>
+            </a:endParaRPr>
           </a:p>
           <a:p>
             <a:r>
@@ -13363,10 +14899,16 @@
                 <a:solidFill>
                   <a:srgbClr val="000000"/>
                 </a:solidFill>
-                <a:latin typeface="Microsoft YaHei"/>
+                <a:latin typeface="微软雅黑" panose="020B0503020204020204" charset="-122"/>
               </a:rPr>
               <a:t>• 小组分工与时间安排</a:t>
             </a:r>
+            <a:endParaRPr sz="1700" b="0">
+              <a:solidFill>
+                <a:srgbClr val="000000"/>
+              </a:solidFill>
+              <a:latin typeface="微软雅黑" panose="020B0503020204020204" charset="-122"/>
+            </a:endParaRPr>
           </a:p>
           <a:p>
             <a:r>
@@ -13374,10 +14916,16 @@
                 <a:solidFill>
                   <a:srgbClr val="000000"/>
                 </a:solidFill>
-                <a:latin typeface="Microsoft YaHei"/>
+                <a:latin typeface="微软雅黑" panose="020B0503020204020204" charset="-122"/>
               </a:rPr>
               <a:t>• 交付物与可复现环境</a:t>
             </a:r>
+            <a:endParaRPr sz="1700" b="0">
+              <a:solidFill>
+                <a:srgbClr val="000000"/>
+              </a:solidFill>
+              <a:latin typeface="微软雅黑" panose="020B0503020204020204" charset="-122"/>
+            </a:endParaRPr>
           </a:p>
         </p:txBody>
       </p:sp>
@@ -13408,10 +14956,16 @@
                 <a:solidFill>
                   <a:srgbClr val="000000"/>
                 </a:solidFill>
-                <a:latin typeface="Microsoft YaHei"/>
+                <a:latin typeface="微软雅黑" panose="020B0503020204020204" charset="-122"/>
               </a:rPr>
               <a:t>2. 测试本身完成</a:t>
             </a:r>
+            <a:endParaRPr sz="1900" b="1">
+              <a:solidFill>
+                <a:srgbClr val="000000"/>
+              </a:solidFill>
+              <a:latin typeface="微软雅黑" panose="020B0503020204020204" charset="-122"/>
+            </a:endParaRPr>
           </a:p>
           <a:p>
             <a:r>
@@ -13419,10 +14973,16 @@
                 <a:solidFill>
                   <a:srgbClr val="000000"/>
                 </a:solidFill>
-                <a:latin typeface="Microsoft YaHei"/>
+                <a:latin typeface="微软雅黑" panose="020B0503020204020204" charset="-122"/>
               </a:rPr>
               <a:t>• service 单元测试与 controller 集成测试</a:t>
             </a:r>
+            <a:endParaRPr sz="1700" b="0">
+              <a:solidFill>
+                <a:srgbClr val="000000"/>
+              </a:solidFill>
+              <a:latin typeface="微软雅黑" panose="020B0503020204020204" charset="-122"/>
+            </a:endParaRPr>
           </a:p>
           <a:p>
             <a:r>
@@ -13430,10 +14990,16 @@
                 <a:solidFill>
                   <a:srgbClr val="000000"/>
                 </a:solidFill>
-                <a:latin typeface="Microsoft YaHei"/>
+                <a:latin typeface="微软雅黑" panose="020B0503020204020204" charset="-122"/>
               </a:rPr>
               <a:t>• 黑盒等价类/边界值 + 白盒语句/判定覆盖</a:t>
             </a:r>
+            <a:endParaRPr sz="1700" b="0">
+              <a:solidFill>
+                <a:srgbClr val="000000"/>
+              </a:solidFill>
+              <a:latin typeface="微软雅黑" panose="020B0503020204020204" charset="-122"/>
+            </a:endParaRPr>
           </a:p>
           <a:p>
             <a:r>
@@ -13441,10 +15007,16 @@
                 <a:solidFill>
                   <a:srgbClr val="000000"/>
                 </a:solidFill>
-                <a:latin typeface="Microsoft YaHei"/>
+                <a:latin typeface="微软雅黑" panose="020B0503020204020204" charset="-122"/>
               </a:rPr>
               <a:t>• JUnit5、Mockito、MockMvc、H2、JaCoCo</a:t>
             </a:r>
+            <a:endParaRPr sz="1700" b="0">
+              <a:solidFill>
+                <a:srgbClr val="000000"/>
+              </a:solidFill>
+              <a:latin typeface="微软雅黑" panose="020B0503020204020204" charset="-122"/>
+            </a:endParaRPr>
           </a:p>
           <a:p>
             <a:r>
@@ -13452,10 +15024,16 @@
                 <a:solidFill>
                   <a:srgbClr val="000000"/>
                 </a:solidFill>
-                <a:latin typeface="Microsoft YaHei"/>
+                <a:latin typeface="微软雅黑" panose="020B0503020204020204" charset="-122"/>
               </a:rPr>
               <a:t>• 执行结果、覆盖率与测试小结</a:t>
             </a:r>
+            <a:endParaRPr sz="1700" b="0">
+              <a:solidFill>
+                <a:srgbClr val="000000"/>
+              </a:solidFill>
+              <a:latin typeface="微软雅黑" panose="020B0503020204020204" charset="-122"/>
+            </a:endParaRPr>
           </a:p>
         </p:txBody>
       </p:sp>
@@ -13468,7 +15046,7 @@
 </file>
 
 <file path=ppt/slides/slide20.xml><?xml version="1.0" encoding="utf-8"?>
-<p:sld xmlns:a="http://schemas.openxmlformats.org/drawingml/2006/main" xmlns:p="http://schemas.openxmlformats.org/presentationml/2006/main" xmlns:r="http://schemas.openxmlformats.org/officeDocument/2006/relationships">
+<p:sld xmlns:a="http://schemas.openxmlformats.org/drawingml/2006/main" xmlns:r="http://schemas.openxmlformats.org/officeDocument/2006/relationships" xmlns:p="http://schemas.openxmlformats.org/presentationml/2006/main">
   <p:cSld>
     <p:spTree>
       <p:nvGrpSpPr>
@@ -13805,10 +15383,16 @@
                 <a:solidFill>
                   <a:srgbClr val="000000"/>
                 </a:solidFill>
-                <a:latin typeface="Microsoft YaHei"/>
+                <a:latin typeface="微软雅黑" panose="020B0503020204020204" charset="-122"/>
               </a:rPr>
               <a:t>图表20</a:t>
             </a:r>
+            <a:endParaRPr sz="700" b="0">
+              <a:solidFill>
+                <a:srgbClr val="000000"/>
+              </a:solidFill>
+              <a:latin typeface="微软雅黑" panose="020B0503020204020204" charset="-122"/>
+            </a:endParaRPr>
           </a:p>
         </p:txBody>
       </p:sp>
@@ -13829,7 +15413,7 @@
           <a:noFill/>
         </p:spPr>
         <p:txBody>
-          <a:bodyPr wrap="none" lIns="0" rIns="0" tIns="0" bIns="0">
+          <a:bodyPr wrap="none" lIns="0" tIns="0" rIns="0" bIns="0">
             <a:spAutoFit/>
           </a:bodyPr>
           <a:lstStyle/>
@@ -13847,10 +15431,16 @@
                 <a:solidFill>
                   <a:srgbClr val="000000"/>
                 </a:solidFill>
-                <a:latin typeface="Microsoft YaHei"/>
+                <a:latin typeface="微软雅黑" panose="020B0503020204020204" charset="-122"/>
               </a:rPr>
               <a:t>后</a:t>
             </a:r>
+            <a:endParaRPr sz="2200" b="1">
+              <a:solidFill>
+                <a:srgbClr val="000000"/>
+              </a:solidFill>
+              <a:latin typeface="微软雅黑" panose="020B0503020204020204" charset="-122"/>
+            </a:endParaRPr>
           </a:p>
           <a:p>
             <a:pPr algn="ctr">
@@ -13866,10 +15456,16 @@
                 <a:solidFill>
                   <a:srgbClr val="000000"/>
                 </a:solidFill>
-                <a:latin typeface="Microsoft YaHei"/>
+                <a:latin typeface="微软雅黑" panose="020B0503020204020204" charset="-122"/>
               </a:rPr>
               <a:t>台</a:t>
             </a:r>
+            <a:endParaRPr sz="2200" b="1">
+              <a:solidFill>
+                <a:srgbClr val="000000"/>
+              </a:solidFill>
+              <a:latin typeface="微软雅黑" panose="020B0503020204020204" charset="-122"/>
+            </a:endParaRPr>
           </a:p>
           <a:p>
             <a:pPr algn="ctr">
@@ -13885,10 +15481,16 @@
                 <a:solidFill>
                   <a:srgbClr val="000000"/>
                 </a:solidFill>
-                <a:latin typeface="Microsoft YaHei"/>
+                <a:latin typeface="微软雅黑" panose="020B0503020204020204" charset="-122"/>
               </a:rPr>
               <a:t>管</a:t>
             </a:r>
+            <a:endParaRPr sz="2200" b="1">
+              <a:solidFill>
+                <a:srgbClr val="000000"/>
+              </a:solidFill>
+              <a:latin typeface="微软雅黑" panose="020B0503020204020204" charset="-122"/>
+            </a:endParaRPr>
           </a:p>
           <a:p>
             <a:pPr algn="ctr">
@@ -13904,10 +15506,16 @@
                 <a:solidFill>
                   <a:srgbClr val="000000"/>
                 </a:solidFill>
-                <a:latin typeface="Microsoft YaHei"/>
+                <a:latin typeface="微软雅黑" panose="020B0503020204020204" charset="-122"/>
               </a:rPr>
               <a:t>理</a:t>
             </a:r>
+            <a:endParaRPr sz="2200" b="1">
+              <a:solidFill>
+                <a:srgbClr val="000000"/>
+              </a:solidFill>
+              <a:latin typeface="微软雅黑" panose="020B0503020204020204" charset="-122"/>
+            </a:endParaRPr>
           </a:p>
           <a:p>
             <a:pPr algn="ctr">
@@ -13923,10 +15531,16 @@
                 <a:solidFill>
                   <a:srgbClr val="000000"/>
                 </a:solidFill>
-                <a:latin typeface="Microsoft YaHei"/>
+                <a:latin typeface="微软雅黑" panose="020B0503020204020204" charset="-122"/>
               </a:rPr>
               <a:t>模</a:t>
             </a:r>
+            <a:endParaRPr sz="2200" b="1">
+              <a:solidFill>
+                <a:srgbClr val="000000"/>
+              </a:solidFill>
+              <a:latin typeface="微软雅黑" panose="020B0503020204020204" charset="-122"/>
+            </a:endParaRPr>
           </a:p>
           <a:p>
             <a:pPr algn="ctr">
@@ -13942,10 +15556,16 @@
                 <a:solidFill>
                   <a:srgbClr val="000000"/>
                 </a:solidFill>
-                <a:latin typeface="Microsoft YaHei"/>
+                <a:latin typeface="微软雅黑" panose="020B0503020204020204" charset="-122"/>
               </a:rPr>
               <a:t>块</a:t>
             </a:r>
+            <a:endParaRPr sz="2200" b="1">
+              <a:solidFill>
+                <a:srgbClr val="000000"/>
+              </a:solidFill>
+              <a:latin typeface="微软雅黑" panose="020B0503020204020204" charset="-122"/>
+            </a:endParaRPr>
           </a:p>
         </p:txBody>
       </p:sp>
@@ -13985,10 +15605,16 @@
                           <a:solidFill>
                             <a:srgbClr val="FFFFFF"/>
                           </a:solidFill>
-                          <a:latin typeface="Microsoft YaHei"/>
+                          <a:latin typeface="微软雅黑" panose="020B0503020204020204" charset="-122"/>
                         </a:rPr>
                         <a:t>序号</a:t>
                       </a:r>
+                      <a:endParaRPr sz="1300" b="1">
+                        <a:solidFill>
+                          <a:srgbClr val="FFFFFF"/>
+                        </a:solidFill>
+                        <a:latin typeface="微软雅黑" panose="020B0503020204020204" charset="-122"/>
+                      </a:endParaRPr>
                     </a:p>
                   </a:txBody>
                   <a:tcPr>
@@ -14008,10 +15634,16 @@
                           <a:solidFill>
                             <a:srgbClr val="FFFFFF"/>
                           </a:solidFill>
-                          <a:latin typeface="Microsoft YaHei"/>
+                          <a:latin typeface="微软雅黑" panose="020B0503020204020204" charset="-122"/>
                         </a:rPr>
                         <a:t>特性</a:t>
                       </a:r>
+                      <a:endParaRPr sz="1300" b="1">
+                        <a:solidFill>
+                          <a:srgbClr val="FFFFFF"/>
+                        </a:solidFill>
+                        <a:latin typeface="微软雅黑" panose="020B0503020204020204" charset="-122"/>
+                      </a:endParaRPr>
                     </a:p>
                   </a:txBody>
                   <a:tcPr>
@@ -14031,10 +15663,16 @@
                           <a:solidFill>
                             <a:srgbClr val="FFFFFF"/>
                           </a:solidFill>
-                          <a:latin typeface="Microsoft YaHei"/>
+                          <a:latin typeface="微软雅黑" panose="020B0503020204020204" charset="-122"/>
                         </a:rPr>
                         <a:t>代表场景</a:t>
                       </a:r>
+                      <a:endParaRPr sz="1300" b="1">
+                        <a:solidFill>
+                          <a:srgbClr val="FFFFFF"/>
+                        </a:solidFill>
+                        <a:latin typeface="微软雅黑" panose="020B0503020204020204" charset="-122"/>
+                      </a:endParaRPr>
                     </a:p>
                   </a:txBody>
                   <a:tcPr>
@@ -14054,10 +15692,16 @@
                           <a:solidFill>
                             <a:srgbClr val="FFFFFF"/>
                           </a:solidFill>
-                          <a:latin typeface="Microsoft YaHei"/>
+                          <a:latin typeface="微软雅黑" panose="020B0503020204020204" charset="-122"/>
                         </a:rPr>
                         <a:t>覆盖重点</a:t>
                       </a:r>
+                      <a:endParaRPr sz="1300" b="1">
+                        <a:solidFill>
+                          <a:srgbClr val="FFFFFF"/>
+                        </a:solidFill>
+                        <a:latin typeface="微软雅黑" panose="020B0503020204020204" charset="-122"/>
+                      </a:endParaRPr>
                     </a:p>
                   </a:txBody>
                   <a:tcPr>
@@ -14079,10 +15723,16 @@
                           <a:solidFill>
                             <a:srgbClr val="000000"/>
                           </a:solidFill>
-                          <a:latin typeface="Microsoft YaHei"/>
+                          <a:latin typeface="微软雅黑" panose="020B0503020204020204" charset="-122"/>
                         </a:rPr>
                         <a:t>1</a:t>
                       </a:r>
+                      <a:endParaRPr sz="1200" b="0">
+                        <a:solidFill>
+                          <a:srgbClr val="000000"/>
+                        </a:solidFill>
+                        <a:latin typeface="微软雅黑" panose="020B0503020204020204" charset="-122"/>
+                      </a:endParaRPr>
                     </a:p>
                   </a:txBody>
                   <a:tcPr>
@@ -14102,10 +15752,16 @@
                           <a:solidFill>
                             <a:srgbClr val="000000"/>
                           </a:solidFill>
-                          <a:latin typeface="Microsoft YaHei"/>
+                          <a:latin typeface="微软雅黑" panose="020B0503020204020204" charset="-122"/>
                         </a:rPr>
                         <a:t>场馆新增/修改</a:t>
                       </a:r>
+                      <a:endParaRPr sz="1200" b="0">
+                        <a:solidFill>
+                          <a:srgbClr val="000000"/>
+                        </a:solidFill>
+                        <a:latin typeface="微软雅黑" panose="020B0503020204020204" charset="-122"/>
+                      </a:endParaRPr>
                     </a:p>
                   </a:txBody>
                   <a:tcPr>
@@ -14125,10 +15781,16 @@
                           <a:solidFill>
                             <a:srgbClr val="000000"/>
                           </a:solidFill>
-                          <a:latin typeface="Microsoft YaHei"/>
+                          <a:latin typeface="微软雅黑" panose="020B0503020204020204" charset="-122"/>
                         </a:rPr>
                         <a:t>合法数据 / 边界价格</a:t>
                       </a:r>
+                      <a:endParaRPr sz="1200" b="0">
+                        <a:solidFill>
+                          <a:srgbClr val="000000"/>
+                        </a:solidFill>
+                        <a:latin typeface="微软雅黑" panose="020B0503020204020204" charset="-122"/>
+                      </a:endParaRPr>
                     </a:p>
                   </a:txBody>
                   <a:tcPr>
@@ -14148,10 +15810,16 @@
                           <a:solidFill>
                             <a:srgbClr val="000000"/>
                           </a:solidFill>
-                          <a:latin typeface="Microsoft YaHei"/>
+                          <a:latin typeface="微软雅黑" panose="020B0503020204020204" charset="-122"/>
                         </a:rPr>
                         <a:t>有效类 + 边界值</a:t>
                       </a:r>
+                      <a:endParaRPr sz="1200" b="0">
+                        <a:solidFill>
+                          <a:srgbClr val="000000"/>
+                        </a:solidFill>
+                        <a:latin typeface="微软雅黑" panose="020B0503020204020204" charset="-122"/>
+                      </a:endParaRPr>
                     </a:p>
                   </a:txBody>
                   <a:tcPr>
@@ -14173,10 +15841,16 @@
                           <a:solidFill>
                             <a:srgbClr val="000000"/>
                           </a:solidFill>
-                          <a:latin typeface="Microsoft YaHei"/>
+                          <a:latin typeface="微软雅黑" panose="020B0503020204020204" charset="-122"/>
                         </a:rPr>
                         <a:t>2</a:t>
                       </a:r>
+                      <a:endParaRPr sz="1200" b="0">
+                        <a:solidFill>
+                          <a:srgbClr val="000000"/>
+                        </a:solidFill>
+                        <a:latin typeface="微软雅黑" panose="020B0503020204020204" charset="-122"/>
+                      </a:endParaRPr>
                     </a:p>
                   </a:txBody>
                   <a:tcPr>
@@ -14196,10 +15870,16 @@
                           <a:solidFill>
                             <a:srgbClr val="000000"/>
                           </a:solidFill>
-                          <a:latin typeface="Microsoft YaHei"/>
+                          <a:latin typeface="微软雅黑" panose="020B0503020204020204" charset="-122"/>
                         </a:rPr>
                         <a:t>场馆删除</a:t>
                       </a:r>
+                      <a:endParaRPr sz="1200" b="0">
+                        <a:solidFill>
+                          <a:srgbClr val="000000"/>
+                        </a:solidFill>
+                        <a:latin typeface="微软雅黑" panose="020B0503020204020204" charset="-122"/>
+                      </a:endParaRPr>
                     </a:p>
                   </a:txBody>
                   <a:tcPr>
@@ -14219,10 +15899,16 @@
                           <a:solidFill>
                             <a:srgbClr val="000000"/>
                           </a:solidFill>
-                          <a:latin typeface="Microsoft YaHei"/>
+                          <a:latin typeface="微软雅黑" panose="020B0503020204020204" charset="-122"/>
                         </a:rPr>
                         <a:t>存在 ID / 不存在 ID</a:t>
                       </a:r>
+                      <a:endParaRPr sz="1200" b="0">
+                        <a:solidFill>
+                          <a:srgbClr val="000000"/>
+                        </a:solidFill>
+                        <a:latin typeface="微软雅黑" panose="020B0503020204020204" charset="-122"/>
+                      </a:endParaRPr>
                     </a:p>
                   </a:txBody>
                   <a:tcPr>
@@ -14242,10 +15928,16 @@
                           <a:solidFill>
                             <a:srgbClr val="000000"/>
                           </a:solidFill>
-                          <a:latin typeface="Microsoft YaHei"/>
+                          <a:latin typeface="微软雅黑" panose="020B0503020204020204" charset="-122"/>
                         </a:rPr>
                         <a:t>异常路径</a:t>
                       </a:r>
+                      <a:endParaRPr sz="1200" b="0">
+                        <a:solidFill>
+                          <a:srgbClr val="000000"/>
+                        </a:solidFill>
+                        <a:latin typeface="微软雅黑" panose="020B0503020204020204" charset="-122"/>
+                      </a:endParaRPr>
                     </a:p>
                   </a:txBody>
                   <a:tcPr>
@@ -14267,10 +15959,16 @@
                           <a:solidFill>
                             <a:srgbClr val="000000"/>
                           </a:solidFill>
-                          <a:latin typeface="Microsoft YaHei"/>
+                          <a:latin typeface="微软雅黑" panose="020B0503020204020204" charset="-122"/>
                         </a:rPr>
                         <a:t>3</a:t>
                       </a:r>
+                      <a:endParaRPr sz="1200" b="0">
+                        <a:solidFill>
+                          <a:srgbClr val="000000"/>
+                        </a:solidFill>
+                        <a:latin typeface="微软雅黑" panose="020B0503020204020204" charset="-122"/>
+                      </a:endParaRPr>
                     </a:p>
                   </a:txBody>
                   <a:tcPr>
@@ -14290,10 +15988,16 @@
                           <a:solidFill>
                             <a:srgbClr val="000000"/>
                           </a:solidFill>
-                          <a:latin typeface="Microsoft YaHei"/>
+                          <a:latin typeface="微软雅黑" panose="020B0503020204020204" charset="-122"/>
                         </a:rPr>
                         <a:t>新闻新增/修改</a:t>
                       </a:r>
+                      <a:endParaRPr sz="1200" b="0">
+                        <a:solidFill>
+                          <a:srgbClr val="000000"/>
+                        </a:solidFill>
+                        <a:latin typeface="微软雅黑" panose="020B0503020204020204" charset="-122"/>
+                      </a:endParaRPr>
                     </a:p>
                   </a:txBody>
                   <a:tcPr>
@@ -14313,10 +16017,16 @@
                           <a:solidFill>
                             <a:srgbClr val="000000"/>
                           </a:solidFill>
-                          <a:latin typeface="Microsoft YaHei"/>
+                          <a:latin typeface="微软雅黑" panose="020B0503020204020204" charset="-122"/>
                         </a:rPr>
                         <a:t>空标题 / 有效内容</a:t>
                       </a:r>
+                      <a:endParaRPr sz="1200" b="0">
+                        <a:solidFill>
+                          <a:srgbClr val="000000"/>
+                        </a:solidFill>
+                        <a:latin typeface="微软雅黑" panose="020B0503020204020204" charset="-122"/>
+                      </a:endParaRPr>
                     </a:p>
                   </a:txBody>
                   <a:tcPr>
@@ -14336,10 +16046,16 @@
                           <a:solidFill>
                             <a:srgbClr val="000000"/>
                           </a:solidFill>
-                          <a:latin typeface="Microsoft YaHei"/>
+                          <a:latin typeface="微软雅黑" panose="020B0503020204020204" charset="-122"/>
                         </a:rPr>
                         <a:t>无效类 + 有效类</a:t>
                       </a:r>
+                      <a:endParaRPr sz="1200" b="0">
+                        <a:solidFill>
+                          <a:srgbClr val="000000"/>
+                        </a:solidFill>
+                        <a:latin typeface="微软雅黑" panose="020B0503020204020204" charset="-122"/>
+                      </a:endParaRPr>
                     </a:p>
                   </a:txBody>
                   <a:tcPr>
@@ -14361,10 +16077,16 @@
                           <a:solidFill>
                             <a:srgbClr val="000000"/>
                           </a:solidFill>
-                          <a:latin typeface="Microsoft YaHei"/>
+                          <a:latin typeface="微软雅黑" panose="020B0503020204020204" charset="-122"/>
                         </a:rPr>
                         <a:t>4</a:t>
                       </a:r>
+                      <a:endParaRPr sz="1200" b="0">
+                        <a:solidFill>
+                          <a:srgbClr val="000000"/>
+                        </a:solidFill>
+                        <a:latin typeface="微软雅黑" panose="020B0503020204020204" charset="-122"/>
+                      </a:endParaRPr>
                     </a:p>
                   </a:txBody>
                   <a:tcPr>
@@ -14384,10 +16106,16 @@
                           <a:solidFill>
                             <a:srgbClr val="000000"/>
                           </a:solidFill>
-                          <a:latin typeface="Microsoft YaHei"/>
+                          <a:latin typeface="微软雅黑" panose="020B0503020204020204" charset="-122"/>
                         </a:rPr>
                         <a:t>新闻删除</a:t>
                       </a:r>
+                      <a:endParaRPr sz="1200" b="0">
+                        <a:solidFill>
+                          <a:srgbClr val="000000"/>
+                        </a:solidFill>
+                        <a:latin typeface="微软雅黑" panose="020B0503020204020204" charset="-122"/>
+                      </a:endParaRPr>
                     </a:p>
                   </a:txBody>
                   <a:tcPr>
@@ -14407,10 +16135,16 @@
                           <a:solidFill>
                             <a:srgbClr val="000000"/>
                           </a:solidFill>
-                          <a:latin typeface="Microsoft YaHei"/>
+                          <a:latin typeface="微软雅黑" panose="020B0503020204020204" charset="-122"/>
                         </a:rPr>
                         <a:t>删除后重定向</a:t>
                       </a:r>
+                      <a:endParaRPr sz="1200" b="0">
+                        <a:solidFill>
+                          <a:srgbClr val="000000"/>
+                        </a:solidFill>
+                        <a:latin typeface="微软雅黑" panose="020B0503020204020204" charset="-122"/>
+                      </a:endParaRPr>
                     </a:p>
                   </a:txBody>
                   <a:tcPr>
@@ -14430,10 +16164,16 @@
                           <a:solidFill>
                             <a:srgbClr val="000000"/>
                           </a:solidFill>
-                          <a:latin typeface="Microsoft YaHei"/>
+                          <a:latin typeface="微软雅黑" panose="020B0503020204020204" charset="-122"/>
                         </a:rPr>
                         <a:t>状态码与跳转</a:t>
                       </a:r>
+                      <a:endParaRPr sz="1200" b="0">
+                        <a:solidFill>
+                          <a:srgbClr val="000000"/>
+                        </a:solidFill>
+                        <a:latin typeface="微软雅黑" panose="020B0503020204020204" charset="-122"/>
+                      </a:endParaRPr>
                     </a:p>
                   </a:txBody>
                   <a:tcPr>
@@ -14455,10 +16195,16 @@
                           <a:solidFill>
                             <a:srgbClr val="000000"/>
                           </a:solidFill>
-                          <a:latin typeface="Microsoft YaHei"/>
+                          <a:latin typeface="微软雅黑" panose="020B0503020204020204" charset="-122"/>
                         </a:rPr>
                         <a:t>5</a:t>
                       </a:r>
+                      <a:endParaRPr sz="1200" b="0">
+                        <a:solidFill>
+                          <a:srgbClr val="000000"/>
+                        </a:solidFill>
+                        <a:latin typeface="微软雅黑" panose="020B0503020204020204" charset="-122"/>
+                      </a:endParaRPr>
                     </a:p>
                   </a:txBody>
                   <a:tcPr>
@@ -14478,10 +16224,16 @@
                           <a:solidFill>
                             <a:srgbClr val="000000"/>
                           </a:solidFill>
-                          <a:latin typeface="Microsoft YaHei"/>
+                          <a:latin typeface="微软雅黑" panose="020B0503020204020204" charset="-122"/>
                         </a:rPr>
                         <a:t>用户管理</a:t>
                       </a:r>
+                      <a:endParaRPr sz="1200" b="0">
+                        <a:solidFill>
+                          <a:srgbClr val="000000"/>
+                        </a:solidFill>
+                        <a:latin typeface="微软雅黑" panose="020B0503020204020204" charset="-122"/>
+                      </a:endParaRPr>
                     </a:p>
                   </a:txBody>
                   <a:tcPr>
@@ -14501,10 +16253,16 @@
                           <a:solidFill>
                             <a:srgbClr val="000000"/>
                           </a:solidFill>
-                          <a:latin typeface="Microsoft YaHei"/>
+                          <a:latin typeface="微软雅黑" panose="020B0503020204020204" charset="-122"/>
                         </a:rPr>
                         <a:t>重复账号与无效 ID</a:t>
                       </a:r>
+                      <a:endParaRPr sz="1200" b="0">
+                        <a:solidFill>
+                          <a:srgbClr val="000000"/>
+                        </a:solidFill>
+                        <a:latin typeface="微软雅黑" panose="020B0503020204020204" charset="-122"/>
+                      </a:endParaRPr>
                     </a:p>
                   </a:txBody>
                   <a:tcPr>
@@ -14524,10 +16282,16 @@
                           <a:solidFill>
                             <a:srgbClr val="000000"/>
                           </a:solidFill>
-                          <a:latin typeface="Microsoft YaHei"/>
+                          <a:latin typeface="微软雅黑" panose="020B0503020204020204" charset="-122"/>
                         </a:rPr>
                         <a:t>重复值 + 边界值</a:t>
                       </a:r>
+                      <a:endParaRPr sz="1200" b="0">
+                        <a:solidFill>
+                          <a:srgbClr val="000000"/>
+                        </a:solidFill>
+                        <a:latin typeface="微软雅黑" panose="020B0503020204020204" charset="-122"/>
+                      </a:endParaRPr>
                     </a:p>
                   </a:txBody>
                   <a:tcPr>
@@ -14549,10 +16313,16 @@
                           <a:solidFill>
                             <a:srgbClr val="000000"/>
                           </a:solidFill>
-                          <a:latin typeface="Microsoft YaHei"/>
+                          <a:latin typeface="微软雅黑" panose="020B0503020204020204" charset="-122"/>
                         </a:rPr>
                         <a:t>6</a:t>
                       </a:r>
+                      <a:endParaRPr sz="1200" b="0">
+                        <a:solidFill>
+                          <a:srgbClr val="000000"/>
+                        </a:solidFill>
+                        <a:latin typeface="微软雅黑" panose="020B0503020204020204" charset="-122"/>
+                      </a:endParaRPr>
                     </a:p>
                   </a:txBody>
                   <a:tcPr>
@@ -14572,10 +16342,16 @@
                           <a:solidFill>
                             <a:srgbClr val="000000"/>
                           </a:solidFill>
-                          <a:latin typeface="Microsoft YaHei"/>
+                          <a:latin typeface="微软雅黑" panose="020B0503020204020204" charset="-122"/>
                         </a:rPr>
                         <a:t>公共跳转</a:t>
                       </a:r>
+                      <a:endParaRPr sz="1200" b="0">
+                        <a:solidFill>
+                          <a:srgbClr val="000000"/>
+                        </a:solidFill>
+                        <a:latin typeface="微软雅黑" panose="020B0503020204020204" charset="-122"/>
+                      </a:endParaRPr>
                     </a:p>
                   </a:txBody>
                   <a:tcPr>
@@ -14595,10 +16371,16 @@
                           <a:solidFill>
                             <a:srgbClr val="000000"/>
                           </a:solidFill>
-                          <a:latin typeface="Microsoft YaHei"/>
+                          <a:latin typeface="微软雅黑" panose="020B0503020204020204" charset="-122"/>
                         </a:rPr>
                         <a:t>视图、模型、重定向</a:t>
                       </a:r>
+                      <a:endParaRPr sz="1200" b="0">
+                        <a:solidFill>
+                          <a:srgbClr val="000000"/>
+                        </a:solidFill>
+                        <a:latin typeface="微软雅黑" panose="020B0503020204020204" charset="-122"/>
+                      </a:endParaRPr>
                     </a:p>
                   </a:txBody>
                   <a:tcPr>
@@ -14618,10 +16400,16 @@
                           <a:solidFill>
                             <a:srgbClr val="000000"/>
                           </a:solidFill>
-                          <a:latin typeface="Microsoft YaHei"/>
+                          <a:latin typeface="微软雅黑" panose="020B0503020204020204" charset="-122"/>
                         </a:rPr>
                         <a:t>集成链路验证</a:t>
                       </a:r>
+                      <a:endParaRPr sz="1200" b="0">
+                        <a:solidFill>
+                          <a:srgbClr val="000000"/>
+                        </a:solidFill>
+                        <a:latin typeface="微软雅黑" panose="020B0503020204020204" charset="-122"/>
+                      </a:endParaRPr>
                     </a:p>
                   </a:txBody>
                   <a:tcPr>
@@ -14644,7 +16432,7 @@
 </file>
 
 <file path=ppt/slides/slide21.xml><?xml version="1.0" encoding="utf-8"?>
-<p:sld xmlns:a="http://schemas.openxmlformats.org/drawingml/2006/main" xmlns:p="http://schemas.openxmlformats.org/presentationml/2006/main" xmlns:r="http://schemas.openxmlformats.org/officeDocument/2006/relationships">
+<p:sld xmlns:a="http://schemas.openxmlformats.org/drawingml/2006/main" xmlns:r="http://schemas.openxmlformats.org/officeDocument/2006/relationships" xmlns:p="http://schemas.openxmlformats.org/presentationml/2006/main">
   <p:cSld>
     <p:spTree>
       <p:nvGrpSpPr>
@@ -14981,10 +16769,16 @@
                 <a:solidFill>
                   <a:srgbClr val="000000"/>
                 </a:solidFill>
-                <a:latin typeface="Microsoft YaHei"/>
+                <a:latin typeface="微软雅黑" panose="020B0503020204020204" charset="-122"/>
               </a:rPr>
               <a:t>图表21</a:t>
             </a:r>
+            <a:endParaRPr sz="700" b="0">
+              <a:solidFill>
+                <a:srgbClr val="000000"/>
+              </a:solidFill>
+              <a:latin typeface="微软雅黑" panose="020B0503020204020204" charset="-122"/>
+            </a:endParaRPr>
           </a:p>
         </p:txBody>
       </p:sp>
@@ -15015,10 +16809,16 @@
                 <a:solidFill>
                   <a:srgbClr val="000000"/>
                 </a:solidFill>
-                <a:latin typeface="Microsoft YaHei"/>
+                <a:latin typeface="微软雅黑" panose="020B0503020204020204" charset="-122"/>
               </a:rPr>
               <a:t>测试小结</a:t>
             </a:r>
+            <a:endParaRPr sz="2800" b="1">
+              <a:solidFill>
+                <a:srgbClr val="000000"/>
+              </a:solidFill>
+              <a:latin typeface="微软雅黑" panose="020B0503020204020204" charset="-122"/>
+            </a:endParaRPr>
           </a:p>
         </p:txBody>
       </p:sp>
@@ -15049,10 +16849,16 @@
                 <a:solidFill>
                   <a:srgbClr val="000000"/>
                 </a:solidFill>
-                <a:latin typeface="Microsoft YaHei"/>
+                <a:latin typeface="微软雅黑" panose="020B0503020204020204" charset="-122"/>
               </a:rPr>
               <a:t>• 本次测试已覆盖 service 与 controller 的核心功能链路，自动化脚本可重复执行。</a:t>
             </a:r>
+            <a:endParaRPr sz="1500" b="0">
+              <a:solidFill>
+                <a:srgbClr val="000000"/>
+              </a:solidFill>
+              <a:latin typeface="微软雅黑" panose="020B0503020204020204" charset="-122"/>
+            </a:endParaRPr>
           </a:p>
           <a:p>
             <a:r>
@@ -15060,10 +16866,16 @@
                 <a:solidFill>
                   <a:srgbClr val="000000"/>
                 </a:solidFill>
-                <a:latin typeface="Microsoft YaHei"/>
+                <a:latin typeface="微软雅黑" panose="020B0503020204020204" charset="-122"/>
               </a:rPr>
               <a:t>• 128 条测试全部通过，整体指令覆盖率 92.54%，分支覆盖率 80.77%，满足测试计划出口准则。</a:t>
             </a:r>
+            <a:endParaRPr sz="1500" b="0">
+              <a:solidFill>
+                <a:srgbClr val="000000"/>
+              </a:solidFill>
+              <a:latin typeface="微软雅黑" panose="020B0503020204020204" charset="-122"/>
+            </a:endParaRPr>
           </a:p>
           <a:p>
             <a:r>
@@ -15071,10 +16883,16 @@
                 <a:solidFill>
                   <a:srgbClr val="000000"/>
                 </a:solidFill>
-                <a:latin typeface="Microsoft YaHei"/>
+                <a:latin typeface="微软雅黑" panose="020B0503020204020204" charset="-122"/>
               </a:rPr>
               <a:t>• 用例设计同时体现等价类划分、边界值分析、语句覆盖与判定覆盖，兼顾完整性与冗余控制。</a:t>
             </a:r>
+            <a:endParaRPr sz="1500" b="0">
+              <a:solidFill>
+                <a:srgbClr val="000000"/>
+              </a:solidFill>
+              <a:latin typeface="微软雅黑" panose="020B0503020204020204" charset="-122"/>
+            </a:endParaRPr>
           </a:p>
           <a:p>
             <a:r>
@@ -15082,10 +16900,16 @@
                 <a:solidFill>
                   <a:srgbClr val="000000"/>
                 </a:solidFill>
-                <a:latin typeface="Microsoft YaHei"/>
+                <a:latin typeface="微软雅黑" panose="020B0503020204020204" charset="-122"/>
               </a:rPr>
               <a:t>• 当前范围不包含浏览器 UI 自动化、性能测试和真实 MySQL 差异验证，这些已在《测试总结》中列为后续优化方向。</a:t>
             </a:r>
+            <a:endParaRPr sz="1500" b="0">
+              <a:solidFill>
+                <a:srgbClr val="000000"/>
+              </a:solidFill>
+              <a:latin typeface="微软雅黑" panose="020B0503020204020204" charset="-122"/>
+            </a:endParaRPr>
           </a:p>
           <a:p>
             <a:r>
@@ -15093,10 +16917,16 @@
                 <a:solidFill>
                   <a:srgbClr val="000000"/>
                 </a:solidFill>
-                <a:latin typeface="Microsoft YaHei"/>
+                <a:latin typeface="微软雅黑" panose="020B0503020204020204" charset="-122"/>
               </a:rPr>
               <a:t>• 提交前建议再次执行 mvn test，并将三份文档 PDF 与源码统一打包为 PJ1-小组编号.zip。</a:t>
             </a:r>
+            <a:endParaRPr sz="1500" b="0">
+              <a:solidFill>
+                <a:srgbClr val="000000"/>
+              </a:solidFill>
+              <a:latin typeface="微软雅黑" panose="020B0503020204020204" charset="-122"/>
+            </a:endParaRPr>
           </a:p>
         </p:txBody>
       </p:sp>
@@ -15109,7 +16939,7 @@
 </file>
 
 <file path=ppt/slides/slide3.xml><?xml version="1.0" encoding="utf-8"?>
-<p:sld xmlns:a="http://schemas.openxmlformats.org/drawingml/2006/main" xmlns:p="http://schemas.openxmlformats.org/presentationml/2006/main" xmlns:r="http://schemas.openxmlformats.org/officeDocument/2006/relationships">
+<p:sld xmlns:a="http://schemas.openxmlformats.org/drawingml/2006/main" xmlns:r="http://schemas.openxmlformats.org/officeDocument/2006/relationships" xmlns:p="http://schemas.openxmlformats.org/presentationml/2006/main">
   <p:cSld>
     <p:spTree>
       <p:nvGrpSpPr>
@@ -15446,10 +17276,16 @@
                 <a:solidFill>
                   <a:srgbClr val="000000"/>
                 </a:solidFill>
-                <a:latin typeface="Microsoft YaHei"/>
+                <a:latin typeface="微软雅黑" panose="020B0503020204020204" charset="-122"/>
               </a:rPr>
               <a:t>图表3</a:t>
             </a:r>
+            <a:endParaRPr sz="700" b="0">
+              <a:solidFill>
+                <a:srgbClr val="000000"/>
+              </a:solidFill>
+              <a:latin typeface="微软雅黑" panose="020B0503020204020204" charset="-122"/>
+            </a:endParaRPr>
           </a:p>
         </p:txBody>
       </p:sp>
@@ -15480,10 +17316,16 @@
                 <a:solidFill>
                   <a:srgbClr val="000000"/>
                 </a:solidFill>
-                <a:latin typeface="Microsoft YaHei"/>
+                <a:latin typeface="微软雅黑" panose="020B0503020204020204" charset="-122"/>
               </a:rPr>
               <a:t>测试项 &amp; 先决条件</a:t>
             </a:r>
+            <a:endParaRPr sz="3000" b="1">
+              <a:solidFill>
+                <a:srgbClr val="000000"/>
+              </a:solidFill>
+              <a:latin typeface="微软雅黑" panose="020B0503020204020204" charset="-122"/>
+            </a:endParaRPr>
           </a:p>
         </p:txBody>
       </p:sp>
@@ -15514,10 +17356,16 @@
                 <a:solidFill>
                   <a:srgbClr val="000000"/>
                 </a:solidFill>
-                <a:latin typeface="Microsoft YaHei"/>
+                <a:latin typeface="微软雅黑" panose="020B0503020204020204" charset="-122"/>
               </a:rPr>
               <a:t>测试项版本/修订号</a:t>
             </a:r>
+            <a:endParaRPr sz="1700" b="1">
+              <a:solidFill>
+                <a:srgbClr val="000000"/>
+              </a:solidFill>
+              <a:latin typeface="微软雅黑" panose="020B0503020204020204" charset="-122"/>
+            </a:endParaRPr>
           </a:p>
           <a:p>
             <a:r>
@@ -15525,10 +17373,16 @@
                 <a:solidFill>
                   <a:srgbClr val="000000"/>
                 </a:solidFill>
-                <a:latin typeface="Microsoft YaHei"/>
+                <a:latin typeface="微软雅黑" panose="020B0503020204020204" charset="-122"/>
               </a:rPr>
               <a:t>• service 层：7 个实现类，覆盖核心业务方法 45 个</a:t>
             </a:r>
+            <a:endParaRPr sz="1500" b="0">
+              <a:solidFill>
+                <a:srgbClr val="000000"/>
+              </a:solidFill>
+              <a:latin typeface="微软雅黑" panose="020B0503020204020204" charset="-122"/>
+            </a:endParaRPr>
           </a:p>
           <a:p>
             <a:r>
@@ -15536,10 +17390,16 @@
                 <a:solidFill>
                   <a:srgbClr val="000000"/>
                 </a:solidFill>
-                <a:latin typeface="Microsoft YaHei"/>
+                <a:latin typeface="微软雅黑" panose="020B0503020204020204" charset="-122"/>
               </a:rPr>
               <a:t>• controller 层：11 类控制器，覆盖 65 个请求映射</a:t>
             </a:r>
+            <a:endParaRPr sz="1500" b="0">
+              <a:solidFill>
+                <a:srgbClr val="000000"/>
+              </a:solidFill>
+              <a:latin typeface="微软雅黑" panose="020B0503020204020204" charset="-122"/>
+            </a:endParaRPr>
           </a:p>
           <a:p>
             <a:r>
@@ -15547,10 +17407,16 @@
                 <a:solidFill>
                   <a:srgbClr val="000000"/>
                 </a:solidFill>
-                <a:latin typeface="Microsoft YaHei"/>
+                <a:latin typeface="微软雅黑" panose="020B0503020204020204" charset="-122"/>
               </a:rPr>
               <a:t>• 测试脚本：7 个 service 测试类 + 8 个 controller 集成测试类</a:t>
             </a:r>
+            <a:endParaRPr sz="1500" b="0">
+              <a:solidFill>
+                <a:srgbClr val="000000"/>
+              </a:solidFill>
+              <a:latin typeface="微软雅黑" panose="020B0503020204020204" charset="-122"/>
+            </a:endParaRPr>
           </a:p>
           <a:p>
             <a:r>
@@ -15558,10 +17424,16 @@
                 <a:solidFill>
                   <a:srgbClr val="000000"/>
                 </a:solidFill>
-                <a:latin typeface="Microsoft YaHei"/>
+                <a:latin typeface="微软雅黑" panose="020B0503020204020204" charset="-122"/>
               </a:rPr>
               <a:t>• 测试入口：项目根目录执行 mvn test</a:t>
             </a:r>
+            <a:endParaRPr sz="1500" b="0">
+              <a:solidFill>
+                <a:srgbClr val="000000"/>
+              </a:solidFill>
+              <a:latin typeface="微软雅黑" panose="020B0503020204020204" charset="-122"/>
+            </a:endParaRPr>
           </a:p>
         </p:txBody>
       </p:sp>
@@ -15592,10 +17464,16 @@
                 <a:solidFill>
                   <a:srgbClr val="000000"/>
                 </a:solidFill>
-                <a:latin typeface="Microsoft YaHei"/>
+                <a:latin typeface="微软雅黑" panose="020B0503020204020204" charset="-122"/>
               </a:rPr>
               <a:t>其中的环境需求</a:t>
             </a:r>
+            <a:endParaRPr sz="1700" b="1">
+              <a:solidFill>
+                <a:srgbClr val="000000"/>
+              </a:solidFill>
+              <a:latin typeface="微软雅黑" panose="020B0503020204020204" charset="-122"/>
+            </a:endParaRPr>
           </a:p>
           <a:p>
             <a:r>
@@ -15603,10 +17481,16 @@
                 <a:solidFill>
                   <a:srgbClr val="000000"/>
                 </a:solidFill>
-                <a:latin typeface="Microsoft YaHei"/>
+                <a:latin typeface="微软雅黑" panose="020B0503020204020204" charset="-122"/>
               </a:rPr>
               <a:t>• JDK 8+、Maven、Spring Boot 2.2.2</a:t>
             </a:r>
+            <a:endParaRPr sz="1500" b="0">
+              <a:solidFill>
+                <a:srgbClr val="000000"/>
+              </a:solidFill>
+              <a:latin typeface="微软雅黑" panose="020B0503020204020204" charset="-122"/>
+            </a:endParaRPr>
           </a:p>
           <a:p>
             <a:r>
@@ -15614,10 +17498,16 @@
                 <a:solidFill>
                   <a:srgbClr val="000000"/>
                 </a:solidFill>
-                <a:latin typeface="Microsoft YaHei"/>
+                <a:latin typeface="微软雅黑" panose="020B0503020204020204" charset="-122"/>
               </a:rPr>
               <a:t>• H2 内存库启用 MySQL 兼容模式，不依赖本机 MySQL</a:t>
             </a:r>
+            <a:endParaRPr sz="1500" b="0">
+              <a:solidFill>
+                <a:srgbClr val="000000"/>
+              </a:solidFill>
+              <a:latin typeface="微软雅黑" panose="020B0503020204020204" charset="-122"/>
+            </a:endParaRPr>
           </a:p>
           <a:p>
             <a:r>
@@ -15625,10 +17515,16 @@
                 <a:solidFill>
                   <a:srgbClr val="000000"/>
                 </a:solidFill>
-                <a:latin typeface="Microsoft YaHei"/>
+                <a:latin typeface="微软雅黑" panose="020B0503020204020204" charset="-122"/>
               </a:rPr>
               <a:t>• JUnit5 + Mockito + MockMvc 作为自动化测试基座</a:t>
             </a:r>
+            <a:endParaRPr sz="1500" b="0">
+              <a:solidFill>
+                <a:srgbClr val="000000"/>
+              </a:solidFill>
+              <a:latin typeface="微软雅黑" panose="020B0503020204020204" charset="-122"/>
+            </a:endParaRPr>
           </a:p>
           <a:p>
             <a:r>
@@ -15636,10 +17532,16 @@
                 <a:solidFill>
                   <a:srgbClr val="000000"/>
                 </a:solidFill>
-                <a:latin typeface="Microsoft YaHei"/>
+                <a:latin typeface="微软雅黑" panose="020B0503020204020204" charset="-122"/>
               </a:rPr>
               <a:t>• JaCoCo 报告生成到 target/site/jacoco/index.html</a:t>
             </a:r>
+            <a:endParaRPr sz="1500" b="0">
+              <a:solidFill>
+                <a:srgbClr val="000000"/>
+              </a:solidFill>
+              <a:latin typeface="微软雅黑" panose="020B0503020204020204" charset="-122"/>
+            </a:endParaRPr>
           </a:p>
         </p:txBody>
       </p:sp>
@@ -15652,7 +17554,7 @@
 </file>
 
 <file path=ppt/slides/slide4.xml><?xml version="1.0" encoding="utf-8"?>
-<p:sld xmlns:a="http://schemas.openxmlformats.org/drawingml/2006/main" xmlns:p="http://schemas.openxmlformats.org/presentationml/2006/main" xmlns:r="http://schemas.openxmlformats.org/officeDocument/2006/relationships">
+<p:sld xmlns:a="http://schemas.openxmlformats.org/drawingml/2006/main" xmlns:r="http://schemas.openxmlformats.org/officeDocument/2006/relationships" xmlns:p="http://schemas.openxmlformats.org/presentationml/2006/main">
   <p:cSld>
     <p:spTree>
       <p:nvGrpSpPr>
@@ -15989,10 +17891,16 @@
                 <a:solidFill>
                   <a:srgbClr val="000000"/>
                 </a:solidFill>
-                <a:latin typeface="Microsoft YaHei"/>
+                <a:latin typeface="微软雅黑" panose="020B0503020204020204" charset="-122"/>
               </a:rPr>
               <a:t>图表4</a:t>
             </a:r>
+            <a:endParaRPr sz="700" b="0">
+              <a:solidFill>
+                <a:srgbClr val="000000"/>
+              </a:solidFill>
+              <a:latin typeface="微软雅黑" panose="020B0503020204020204" charset="-122"/>
+            </a:endParaRPr>
           </a:p>
         </p:txBody>
       </p:sp>
@@ -16023,10 +17931,16 @@
                 <a:solidFill>
                   <a:srgbClr val="000000"/>
                 </a:solidFill>
-                <a:latin typeface="Microsoft YaHei"/>
+                <a:latin typeface="微软雅黑" panose="020B0503020204020204" charset="-122"/>
               </a:rPr>
               <a:t>测试项通过/失败准则</a:t>
             </a:r>
+            <a:endParaRPr sz="1700" b="1">
+              <a:solidFill>
+                <a:srgbClr val="000000"/>
+              </a:solidFill>
+              <a:latin typeface="微软雅黑" panose="020B0503020204020204" charset="-122"/>
+            </a:endParaRPr>
           </a:p>
           <a:p>
             <a:r>
@@ -16034,10 +17948,16 @@
                 <a:solidFill>
                   <a:srgbClr val="000000"/>
                 </a:solidFill>
-                <a:latin typeface="Microsoft YaHei"/>
+                <a:latin typeface="微软雅黑" panose="020B0503020204020204" charset="-122"/>
               </a:rPr>
               <a:t>• 全部自动化用例通过</a:t>
             </a:r>
+            <a:endParaRPr sz="1500" b="0">
+              <a:solidFill>
+                <a:srgbClr val="000000"/>
+              </a:solidFill>
+              <a:latin typeface="微软雅黑" panose="020B0503020204020204" charset="-122"/>
+            </a:endParaRPr>
           </a:p>
           <a:p>
             <a:r>
@@ -16045,10 +17965,16 @@
                 <a:solidFill>
                   <a:srgbClr val="000000"/>
                 </a:solidFill>
-                <a:latin typeface="Microsoft YaHei"/>
+                <a:latin typeface="微软雅黑" panose="020B0503020204020204" charset="-122"/>
               </a:rPr>
               <a:t>• JaCoCo 报告正常生成</a:t>
             </a:r>
+            <a:endParaRPr sz="1500" b="0">
+              <a:solidFill>
+                <a:srgbClr val="000000"/>
+              </a:solidFill>
+              <a:latin typeface="微软雅黑" panose="020B0503020204020204" charset="-122"/>
+            </a:endParaRPr>
           </a:p>
           <a:p>
             <a:r>
@@ -16056,10 +17982,16 @@
                 <a:solidFill>
                   <a:srgbClr val="000000"/>
                 </a:solidFill>
-                <a:latin typeface="Microsoft YaHei"/>
+                <a:latin typeface="微软雅黑" panose="020B0503020204020204" charset="-122"/>
               </a:rPr>
               <a:t>• 整体指令覆盖率 ≥ 85%，分支覆盖率 ≥ 75%</a:t>
             </a:r>
+            <a:endParaRPr sz="1500" b="0">
+              <a:solidFill>
+                <a:srgbClr val="000000"/>
+              </a:solidFill>
+              <a:latin typeface="微软雅黑" panose="020B0503020204020204" charset="-122"/>
+            </a:endParaRPr>
           </a:p>
           <a:p>
             <a:r>
@@ -16067,10 +17999,16 @@
                 <a:solidFill>
                   <a:srgbClr val="000000"/>
                 </a:solidFill>
-                <a:latin typeface="Microsoft YaHei"/>
+                <a:latin typeface="微软雅黑" panose="020B0503020204020204" charset="-122"/>
               </a:rPr>
               <a:t>• 新克隆环境可重复执行</a:t>
             </a:r>
+            <a:endParaRPr sz="1500" b="0">
+              <a:solidFill>
+                <a:srgbClr val="000000"/>
+              </a:solidFill>
+              <a:latin typeface="微软雅黑" panose="020B0503020204020204" charset="-122"/>
+            </a:endParaRPr>
           </a:p>
         </p:txBody>
       </p:sp>
@@ -16101,10 +18039,16 @@
                 <a:solidFill>
                   <a:srgbClr val="000000"/>
                 </a:solidFill>
-                <a:latin typeface="Microsoft YaHei"/>
+                <a:latin typeface="微软雅黑" panose="020B0503020204020204" charset="-122"/>
               </a:rPr>
               <a:t>暂停准则和继续准则</a:t>
             </a:r>
+            <a:endParaRPr sz="1700" b="1">
+              <a:solidFill>
+                <a:srgbClr val="000000"/>
+              </a:solidFill>
+              <a:latin typeface="微软雅黑" panose="020B0503020204020204" charset="-122"/>
+            </a:endParaRPr>
           </a:p>
           <a:p>
             <a:r>
@@ -16112,10 +18056,16 @@
                 <a:solidFill>
                   <a:srgbClr val="000000"/>
                 </a:solidFill>
-                <a:latin typeface="Microsoft YaHei"/>
+                <a:latin typeface="微软雅黑" panose="020B0503020204020204" charset="-122"/>
               </a:rPr>
               <a:t>• 测试基座或依赖失效时暂停</a:t>
             </a:r>
+            <a:endParaRPr sz="1500" b="0">
+              <a:solidFill>
+                <a:srgbClr val="000000"/>
+              </a:solidFill>
+              <a:latin typeface="微软雅黑" panose="020B0503020204020204" charset="-122"/>
+            </a:endParaRPr>
           </a:p>
           <a:p>
             <a:r>
@@ -16123,10 +18073,16 @@
                 <a:solidFill>
                   <a:srgbClr val="000000"/>
                 </a:solidFill>
-                <a:latin typeface="Microsoft YaHei"/>
+                <a:latin typeface="微软雅黑" panose="020B0503020204020204" charset="-122"/>
               </a:rPr>
               <a:t>• 核心模块无法编译时暂停</a:t>
             </a:r>
+            <a:endParaRPr sz="1500" b="0">
+              <a:solidFill>
+                <a:srgbClr val="000000"/>
+              </a:solidFill>
+              <a:latin typeface="微软雅黑" panose="020B0503020204020204" charset="-122"/>
+            </a:endParaRPr>
           </a:p>
           <a:p>
             <a:r>
@@ -16134,10 +18090,16 @@
                 <a:solidFill>
                   <a:srgbClr val="000000"/>
                 </a:solidFill>
-                <a:latin typeface="Microsoft YaHei"/>
+                <a:latin typeface="微软雅黑" panose="020B0503020204020204" charset="-122"/>
               </a:rPr>
               <a:t>• 严重缺陷修复、环境恢复后继续</a:t>
             </a:r>
+            <a:endParaRPr sz="1500" b="0">
+              <a:solidFill>
+                <a:srgbClr val="000000"/>
+              </a:solidFill>
+              <a:latin typeface="微软雅黑" panose="020B0503020204020204" charset="-122"/>
+            </a:endParaRPr>
           </a:p>
           <a:p>
             <a:r>
@@ -16145,10 +18107,16 @@
                 <a:solidFill>
                   <a:srgbClr val="000000"/>
                 </a:solidFill>
-                <a:latin typeface="Microsoft YaHei"/>
+                <a:latin typeface="微软雅黑" panose="020B0503020204020204" charset="-122"/>
               </a:rPr>
               <a:t>• 需求或范围变化后同步更新用例与文档</a:t>
             </a:r>
+            <a:endParaRPr sz="1500" b="0">
+              <a:solidFill>
+                <a:srgbClr val="000000"/>
+              </a:solidFill>
+              <a:latin typeface="微软雅黑" panose="020B0503020204020204" charset="-122"/>
+            </a:endParaRPr>
           </a:p>
         </p:txBody>
       </p:sp>
@@ -16179,10 +18147,16 @@
                 <a:solidFill>
                   <a:srgbClr val="AB4824"/>
                 </a:solidFill>
-                <a:latin typeface="Microsoft YaHei"/>
+                <a:latin typeface="微软雅黑" panose="020B0503020204020204" charset="-122"/>
               </a:rPr>
               <a:t>通过：128 条测试全部通过；失败：出现阻断缺陷、报告缺失或环境不可复现。</a:t>
             </a:r>
+            <a:endParaRPr sz="1400" b="0">
+              <a:solidFill>
+                <a:srgbClr val="AB4824"/>
+              </a:solidFill>
+              <a:latin typeface="微软雅黑" panose="020B0503020204020204" charset="-122"/>
+            </a:endParaRPr>
           </a:p>
         </p:txBody>
       </p:sp>
@@ -16195,7 +18169,7 @@
 </file>
 
 <file path=ppt/slides/slide5.xml><?xml version="1.0" encoding="utf-8"?>
-<p:sld xmlns:a="http://schemas.openxmlformats.org/drawingml/2006/main" xmlns:p="http://schemas.openxmlformats.org/presentationml/2006/main" xmlns:r="http://schemas.openxmlformats.org/officeDocument/2006/relationships">
+<p:sld xmlns:a="http://schemas.openxmlformats.org/drawingml/2006/main" xmlns:r="http://schemas.openxmlformats.org/officeDocument/2006/relationships" xmlns:p="http://schemas.openxmlformats.org/presentationml/2006/main">
   <p:cSld>
     <p:spTree>
       <p:nvGrpSpPr>
@@ -16532,10 +18506,16 @@
                 <a:solidFill>
                   <a:srgbClr val="000000"/>
                 </a:solidFill>
-                <a:latin typeface="Microsoft YaHei"/>
+                <a:latin typeface="微软雅黑" panose="020B0503020204020204" charset="-122"/>
               </a:rPr>
               <a:t>图表5</a:t>
             </a:r>
+            <a:endParaRPr sz="700" b="0">
+              <a:solidFill>
+                <a:srgbClr val="000000"/>
+              </a:solidFill>
+              <a:latin typeface="微软雅黑" panose="020B0503020204020204" charset="-122"/>
+            </a:endParaRPr>
           </a:p>
         </p:txBody>
       </p:sp>
@@ -16566,10 +18546,16 @@
                 <a:solidFill>
                   <a:srgbClr val="000000"/>
                 </a:solidFill>
-                <a:latin typeface="Microsoft YaHei"/>
+                <a:latin typeface="微软雅黑" panose="020B0503020204020204" charset="-122"/>
               </a:rPr>
               <a:t>风险管控</a:t>
             </a:r>
+            <a:endParaRPr sz="3000" b="1">
+              <a:solidFill>
+                <a:srgbClr val="000000"/>
+              </a:solidFill>
+              <a:latin typeface="微软雅黑" panose="020B0503020204020204" charset="-122"/>
+            </a:endParaRPr>
           </a:p>
         </p:txBody>
       </p:sp>
@@ -16608,10 +18594,16 @@
                           <a:solidFill>
                             <a:srgbClr val="FFFFFF"/>
                           </a:solidFill>
-                          <a:latin typeface="Microsoft YaHei"/>
+                          <a:latin typeface="微软雅黑" panose="020B0503020204020204" charset="-122"/>
                         </a:rPr>
                         <a:t>风险类型</a:t>
                       </a:r>
+                      <a:endParaRPr sz="1300" b="1">
+                        <a:solidFill>
+                          <a:srgbClr val="FFFFFF"/>
+                        </a:solidFill>
+                        <a:latin typeface="微软雅黑" panose="020B0503020204020204" charset="-122"/>
+                      </a:endParaRPr>
                     </a:p>
                   </a:txBody>
                   <a:tcPr>
@@ -16631,10 +18623,16 @@
                           <a:solidFill>
                             <a:srgbClr val="FFFFFF"/>
                           </a:solidFill>
-                          <a:latin typeface="Microsoft YaHei"/>
+                          <a:latin typeface="微软雅黑" panose="020B0503020204020204" charset="-122"/>
                         </a:rPr>
                         <a:t>本项目表现</a:t>
                       </a:r>
+                      <a:endParaRPr sz="1300" b="1">
+                        <a:solidFill>
+                          <a:srgbClr val="FFFFFF"/>
+                        </a:solidFill>
+                        <a:latin typeface="微软雅黑" panose="020B0503020204020204" charset="-122"/>
+                      </a:endParaRPr>
                     </a:p>
                   </a:txBody>
                   <a:tcPr>
@@ -16654,10 +18652,16 @@
                           <a:solidFill>
                             <a:srgbClr val="FFFFFF"/>
                           </a:solidFill>
-                          <a:latin typeface="Microsoft YaHei"/>
+                          <a:latin typeface="微软雅黑" panose="020B0503020204020204" charset="-122"/>
                         </a:rPr>
                         <a:t>应急措施</a:t>
                       </a:r>
+                      <a:endParaRPr sz="1300" b="1">
+                        <a:solidFill>
+                          <a:srgbClr val="FFFFFF"/>
+                        </a:solidFill>
+                        <a:latin typeface="微软雅黑" panose="020B0503020204020204" charset="-122"/>
+                      </a:endParaRPr>
                     </a:p>
                   </a:txBody>
                   <a:tcPr>
@@ -16679,10 +18683,16 @@
                           <a:solidFill>
                             <a:srgbClr val="000000"/>
                           </a:solidFill>
-                          <a:latin typeface="Microsoft YaHei"/>
+                          <a:latin typeface="微软雅黑" panose="020B0503020204020204" charset="-122"/>
                         </a:rPr>
                         <a:t>数据库差异</a:t>
                       </a:r>
+                      <a:endParaRPr sz="1200" b="0">
+                        <a:solidFill>
+                          <a:srgbClr val="000000"/>
+                        </a:solidFill>
+                        <a:latin typeface="微软雅黑" panose="020B0503020204020204" charset="-122"/>
+                      </a:endParaRPr>
                     </a:p>
                   </a:txBody>
                   <a:tcPr>
@@ -16702,10 +18712,16 @@
                           <a:solidFill>
                             <a:srgbClr val="000000"/>
                           </a:solidFill>
-                          <a:latin typeface="Microsoft YaHei"/>
+                          <a:latin typeface="微软雅黑" panose="020B0503020204020204" charset="-122"/>
                         </a:rPr>
                         <a:t>H2 与 MySQL 可能存在少量行为差异</a:t>
                       </a:r>
+                      <a:endParaRPr sz="1200" b="0">
+                        <a:solidFill>
+                          <a:srgbClr val="000000"/>
+                        </a:solidFill>
+                        <a:latin typeface="微软雅黑" panose="020B0503020204020204" charset="-122"/>
+                      </a:endParaRPr>
                     </a:p>
                   </a:txBody>
                   <a:tcPr>
@@ -16725,10 +18741,16 @@
                           <a:solidFill>
                             <a:srgbClr val="000000"/>
                           </a:solidFill>
-                          <a:latin typeface="Microsoft YaHei"/>
+                          <a:latin typeface="微软雅黑" panose="020B0503020204020204" charset="-122"/>
                         </a:rPr>
                         <a:t>启用 MySQL 模式；差异写入测试总结</a:t>
                       </a:r>
+                      <a:endParaRPr sz="1200" b="0">
+                        <a:solidFill>
+                          <a:srgbClr val="000000"/>
+                        </a:solidFill>
+                        <a:latin typeface="微软雅黑" panose="020B0503020204020204" charset="-122"/>
+                      </a:endParaRPr>
                     </a:p>
                   </a:txBody>
                   <a:tcPr>
@@ -16750,10 +18772,16 @@
                           <a:solidFill>
                             <a:srgbClr val="000000"/>
                           </a:solidFill>
-                          <a:latin typeface="Microsoft YaHei"/>
+                          <a:latin typeface="微软雅黑" panose="020B0503020204020204" charset="-122"/>
                         </a:rPr>
                         <a:t>覆盖盲区</a:t>
                       </a:r>
+                      <a:endParaRPr sz="1200" b="0">
+                        <a:solidFill>
+                          <a:srgbClr val="000000"/>
+                        </a:solidFill>
+                        <a:latin typeface="微软雅黑" panose="020B0503020204020204" charset="-122"/>
+                      </a:endParaRPr>
                     </a:p>
                   </a:txBody>
                   <a:tcPr>
@@ -16773,10 +18801,16 @@
                           <a:solidFill>
                             <a:srgbClr val="000000"/>
                           </a:solidFill>
-                          <a:latin typeface="Microsoft YaHei"/>
+                          <a:latin typeface="微软雅黑" panose="020B0503020204020204" charset="-122"/>
                         </a:rPr>
                         <a:t>FileUtil 真实落盘未完全覆盖</a:t>
                       </a:r>
+                      <a:endParaRPr sz="1200" b="0">
+                        <a:solidFill>
+                          <a:srgbClr val="000000"/>
+                        </a:solidFill>
+                        <a:latin typeface="微软雅黑" panose="020B0503020204020204" charset="-122"/>
+                      </a:endParaRPr>
                     </a:p>
                   </a:txBody>
                   <a:tcPr>
@@ -16796,10 +18830,16 @@
                           <a:solidFill>
                             <a:srgbClr val="000000"/>
                           </a:solidFill>
-                          <a:latin typeface="Microsoft YaHei"/>
+                          <a:latin typeface="微软雅黑" panose="020B0503020204020204" charset="-122"/>
                         </a:rPr>
                         <a:t>列为已知限制；后续隔离文件系统</a:t>
                       </a:r>
+                      <a:endParaRPr sz="1200" b="0">
+                        <a:solidFill>
+                          <a:srgbClr val="000000"/>
+                        </a:solidFill>
+                        <a:latin typeface="微软雅黑" panose="020B0503020204020204" charset="-122"/>
+                      </a:endParaRPr>
                     </a:p>
                   </a:txBody>
                   <a:tcPr>
@@ -16821,10 +18861,16 @@
                           <a:solidFill>
                             <a:srgbClr val="000000"/>
                           </a:solidFill>
-                          <a:latin typeface="Microsoft YaHei"/>
+                          <a:latin typeface="微软雅黑" panose="020B0503020204020204" charset="-122"/>
                         </a:rPr>
                         <a:t>脚本维护</a:t>
                       </a:r>
+                      <a:endParaRPr sz="1200" b="0">
+                        <a:solidFill>
+                          <a:srgbClr val="000000"/>
+                        </a:solidFill>
+                        <a:latin typeface="微软雅黑" panose="020B0503020204020204" charset="-122"/>
+                      </a:endParaRPr>
                     </a:p>
                   </a:txBody>
                   <a:tcPr>
@@ -16844,10 +18890,16 @@
                           <a:solidFill>
                             <a:srgbClr val="000000"/>
                           </a:solidFill>
-                          <a:latin typeface="Microsoft YaHei"/>
+                          <a:latin typeface="微软雅黑" panose="020B0503020204020204" charset="-122"/>
                         </a:rPr>
                         <a:t>文档和脚本可能不同步</a:t>
                       </a:r>
+                      <a:endParaRPr sz="1200" b="0">
+                        <a:solidFill>
+                          <a:srgbClr val="000000"/>
+                        </a:solidFill>
+                        <a:latin typeface="微软雅黑" panose="020B0503020204020204" charset="-122"/>
+                      </a:endParaRPr>
                     </a:p>
                   </a:txBody>
                   <a:tcPr>
@@ -16867,10 +18919,16 @@
                           <a:solidFill>
                             <a:srgbClr val="000000"/>
                           </a:solidFill>
-                          <a:latin typeface="Microsoft YaHei"/>
+                          <a:latin typeface="微软雅黑" panose="020B0503020204020204" charset="-122"/>
                         </a:rPr>
                         <a:t>统一编号；提交前执行 mvn test</a:t>
                       </a:r>
+                      <a:endParaRPr sz="1200" b="0">
+                        <a:solidFill>
+                          <a:srgbClr val="000000"/>
+                        </a:solidFill>
+                        <a:latin typeface="微软雅黑" panose="020B0503020204020204" charset="-122"/>
+                      </a:endParaRPr>
                     </a:p>
                   </a:txBody>
                   <a:tcPr>
@@ -16892,10 +18950,16 @@
                           <a:solidFill>
                             <a:srgbClr val="000000"/>
                           </a:solidFill>
-                          <a:latin typeface="Microsoft YaHei"/>
+                          <a:latin typeface="微软雅黑" panose="020B0503020204020204" charset="-122"/>
                         </a:rPr>
                         <a:t>UI 风险</a:t>
                       </a:r>
+                      <a:endParaRPr sz="1200" b="0">
+                        <a:solidFill>
+                          <a:srgbClr val="000000"/>
+                        </a:solidFill>
+                        <a:latin typeface="微软雅黑" panose="020B0503020204020204" charset="-122"/>
+                      </a:endParaRPr>
                     </a:p>
                   </a:txBody>
                   <a:tcPr>
@@ -16915,10 +18979,16 @@
                           <a:solidFill>
                             <a:srgbClr val="000000"/>
                           </a:solidFill>
-                          <a:latin typeface="Microsoft YaHei"/>
+                          <a:latin typeface="微软雅黑" panose="020B0503020204020204" charset="-122"/>
                         </a:rPr>
                         <a:t>未做浏览器级 UI 自动化</a:t>
                       </a:r>
+                      <a:endParaRPr sz="1200" b="0">
+                        <a:solidFill>
+                          <a:srgbClr val="000000"/>
+                        </a:solidFill>
+                        <a:latin typeface="微软雅黑" panose="020B0503020204020204" charset="-122"/>
+                      </a:endParaRPr>
                     </a:p>
                   </a:txBody>
                   <a:tcPr>
@@ -16938,10 +19008,16 @@
                           <a:solidFill>
                             <a:srgbClr val="000000"/>
                           </a:solidFill>
-                          <a:latin typeface="Microsoft YaHei"/>
+                          <a:latin typeface="微软雅黑" panose="020B0503020204020204" charset="-122"/>
                         </a:rPr>
                         <a:t>明确范围外；后续补 E2E 回归</a:t>
                       </a:r>
+                      <a:endParaRPr sz="1200" b="0">
+                        <a:solidFill>
+                          <a:srgbClr val="000000"/>
+                        </a:solidFill>
+                        <a:latin typeface="微软雅黑" panose="020B0503020204020204" charset="-122"/>
+                      </a:endParaRPr>
                     </a:p>
                   </a:txBody>
                   <a:tcPr>
@@ -16964,7 +19040,7 @@
 </file>
 
 <file path=ppt/slides/slide6.xml><?xml version="1.0" encoding="utf-8"?>
-<p:sld xmlns:a="http://schemas.openxmlformats.org/drawingml/2006/main" xmlns:p="http://schemas.openxmlformats.org/presentationml/2006/main" xmlns:r="http://schemas.openxmlformats.org/officeDocument/2006/relationships">
+<p:sld xmlns:a="http://schemas.openxmlformats.org/drawingml/2006/main" xmlns:r="http://schemas.openxmlformats.org/officeDocument/2006/relationships" xmlns:p="http://schemas.openxmlformats.org/presentationml/2006/main">
   <p:cSld>
     <p:spTree>
       <p:nvGrpSpPr>
@@ -17301,10 +19377,16 @@
                 <a:solidFill>
                   <a:srgbClr val="000000"/>
                 </a:solidFill>
-                <a:latin typeface="Microsoft YaHei"/>
+                <a:latin typeface="微软雅黑" panose="020B0503020204020204" charset="-122"/>
               </a:rPr>
               <a:t>图表6</a:t>
             </a:r>
+            <a:endParaRPr sz="700" b="0">
+              <a:solidFill>
+                <a:srgbClr val="000000"/>
+              </a:solidFill>
+              <a:latin typeface="微软雅黑" panose="020B0503020204020204" charset="-122"/>
+            </a:endParaRPr>
           </a:p>
         </p:txBody>
       </p:sp>
@@ -17335,10 +19417,16 @@
                 <a:solidFill>
                   <a:srgbClr val="000000"/>
                 </a:solidFill>
-                <a:latin typeface="Microsoft YaHei"/>
+                <a:latin typeface="微软雅黑" panose="020B0503020204020204" charset="-122"/>
               </a:rPr>
               <a:t>组员</a:t>
             </a:r>
+            <a:endParaRPr sz="2700" b="1">
+              <a:solidFill>
+                <a:srgbClr val="000000"/>
+              </a:solidFill>
+              <a:latin typeface="微软雅黑" panose="020B0503020204020204" charset="-122"/>
+            </a:endParaRPr>
           </a:p>
           <a:p>
             <a:r>
@@ -17346,10 +19434,16 @@
                 <a:solidFill>
                   <a:srgbClr val="000000"/>
                 </a:solidFill>
-                <a:latin typeface="Microsoft YaHei"/>
+                <a:latin typeface="微软雅黑" panose="020B0503020204020204" charset="-122"/>
               </a:rPr>
               <a:t>分工</a:t>
             </a:r>
+            <a:endParaRPr sz="2700" b="1">
+              <a:solidFill>
+                <a:srgbClr val="000000"/>
+              </a:solidFill>
+              <a:latin typeface="微软雅黑" panose="020B0503020204020204" charset="-122"/>
+            </a:endParaRPr>
           </a:p>
         </p:txBody>
       </p:sp>
@@ -17389,10 +19483,16 @@
                           <a:solidFill>
                             <a:srgbClr val="FFFFFF"/>
                           </a:solidFill>
-                          <a:latin typeface="Microsoft YaHei"/>
+                          <a:latin typeface="微软雅黑" panose="020B0503020204020204" charset="-122"/>
                         </a:rPr>
                         <a:t>序号</a:t>
                       </a:r>
+                      <a:endParaRPr sz="1200" b="1">
+                        <a:solidFill>
+                          <a:srgbClr val="FFFFFF"/>
+                        </a:solidFill>
+                        <a:latin typeface="微软雅黑" panose="020B0503020204020204" charset="-122"/>
+                      </a:endParaRPr>
                     </a:p>
                   </a:txBody>
                   <a:tcPr>
@@ -17412,10 +19512,16 @@
                           <a:solidFill>
                             <a:srgbClr val="FFFFFF"/>
                           </a:solidFill>
-                          <a:latin typeface="Microsoft YaHei"/>
+                          <a:latin typeface="微软雅黑" panose="020B0503020204020204" charset="-122"/>
                         </a:rPr>
                         <a:t>小组成员</a:t>
                       </a:r>
+                      <a:endParaRPr sz="1200" b="1">
+                        <a:solidFill>
+                          <a:srgbClr val="FFFFFF"/>
+                        </a:solidFill>
+                        <a:latin typeface="微软雅黑" panose="020B0503020204020204" charset="-122"/>
+                      </a:endParaRPr>
                     </a:p>
                   </a:txBody>
                   <a:tcPr>
@@ -17435,10 +19541,16 @@
                           <a:solidFill>
                             <a:srgbClr val="FFFFFF"/>
                           </a:solidFill>
-                          <a:latin typeface="Microsoft YaHei"/>
+                          <a:latin typeface="微软雅黑" panose="020B0503020204020204" charset="-122"/>
                         </a:rPr>
                         <a:t>职责</a:t>
                       </a:r>
+                      <a:endParaRPr sz="1200" b="1">
+                        <a:solidFill>
+                          <a:srgbClr val="FFFFFF"/>
+                        </a:solidFill>
+                        <a:latin typeface="微软雅黑" panose="020B0503020204020204" charset="-122"/>
+                      </a:endParaRPr>
                     </a:p>
                   </a:txBody>
                   <a:tcPr>
@@ -17458,10 +19570,16 @@
                           <a:solidFill>
                             <a:srgbClr val="FFFFFF"/>
                           </a:solidFill>
-                          <a:latin typeface="Microsoft YaHei"/>
+                          <a:latin typeface="微软雅黑" panose="020B0503020204020204" charset="-122"/>
                         </a:rPr>
                         <a:t>任务占比</a:t>
                       </a:r>
+                      <a:endParaRPr sz="1200" b="1">
+                        <a:solidFill>
+                          <a:srgbClr val="FFFFFF"/>
+                        </a:solidFill>
+                        <a:latin typeface="微软雅黑" panose="020B0503020204020204" charset="-122"/>
+                      </a:endParaRPr>
                     </a:p>
                   </a:txBody>
                   <a:tcPr>
@@ -17483,10 +19601,16 @@
                           <a:solidFill>
                             <a:srgbClr val="000000"/>
                           </a:solidFill>
-                          <a:latin typeface="Microsoft YaHei"/>
+                          <a:latin typeface="微软雅黑" panose="020B0503020204020204" charset="-122"/>
                         </a:rPr>
                         <a:t>1</a:t>
                       </a:r>
+                      <a:endParaRPr sz="1100" b="0">
+                        <a:solidFill>
+                          <a:srgbClr val="000000"/>
+                        </a:solidFill>
+                        <a:latin typeface="微软雅黑" panose="020B0503020204020204" charset="-122"/>
+                      </a:endParaRPr>
                     </a:p>
                   </a:txBody>
                   <a:tcPr>
@@ -17506,10 +19630,16 @@
                           <a:solidFill>
                             <a:srgbClr val="000000"/>
                           </a:solidFill>
-                          <a:latin typeface="Microsoft YaHei"/>
+                          <a:latin typeface="微软雅黑" panose="020B0503020204020204" charset="-122"/>
                         </a:rPr>
                         <a:t>胡彬泽</a:t>
                       </a:r>
+                      <a:endParaRPr sz="1100" b="0">
+                        <a:solidFill>
+                          <a:srgbClr val="000000"/>
+                        </a:solidFill>
+                        <a:latin typeface="微软雅黑" panose="020B0503020204020204" charset="-122"/>
+                      </a:endParaRPr>
                     </a:p>
                   </a:txBody>
                   <a:tcPr>
@@ -17529,10 +19659,16 @@
                           <a:solidFill>
                             <a:srgbClr val="000000"/>
                           </a:solidFill>
-                          <a:latin typeface="Microsoft YaHei"/>
+                          <a:latin typeface="微软雅黑" panose="020B0503020204020204" charset="-122"/>
                         </a:rPr>
                         <a:t>环境搭建；service 单测；controller 集成测试；覆盖率报告</a:t>
                       </a:r>
+                      <a:endParaRPr sz="1100" b="0">
+                        <a:solidFill>
+                          <a:srgbClr val="000000"/>
+                        </a:solidFill>
+                        <a:latin typeface="微软雅黑" panose="020B0503020204020204" charset="-122"/>
+                      </a:endParaRPr>
                     </a:p>
                   </a:txBody>
                   <a:tcPr>
@@ -17548,14 +19684,29 @@
                     <a:p>
                       <a:pPr algn="ctr"/>
                       <a:r>
+                        <a:rPr lang="en-US" sz="1100" b="0">
+                          <a:solidFill>
+                            <a:srgbClr val="000000"/>
+                          </a:solidFill>
+                          <a:latin typeface="微软雅黑" panose="020B0503020204020204" charset="-122"/>
+                        </a:rPr>
+                        <a:t>25</a:t>
+                      </a:r>
+                      <a:r>
                         <a:rPr sz="1100" b="0">
                           <a:solidFill>
                             <a:srgbClr val="000000"/>
                           </a:solidFill>
-                          <a:latin typeface="Microsoft YaHei"/>
-                        </a:rPr>
-                        <a:t>40%</a:t>
-                      </a:r>
+                          <a:latin typeface="微软雅黑" panose="020B0503020204020204" charset="-122"/>
+                        </a:rPr>
+                        <a:t>%</a:t>
+                      </a:r>
+                      <a:endParaRPr sz="1100" b="0">
+                        <a:solidFill>
+                          <a:srgbClr val="000000"/>
+                        </a:solidFill>
+                        <a:latin typeface="微软雅黑" panose="020B0503020204020204" charset="-122"/>
+                      </a:endParaRPr>
                     </a:p>
                   </a:txBody>
                   <a:tcPr>
@@ -17577,10 +19728,16 @@
                           <a:solidFill>
                             <a:srgbClr val="000000"/>
                           </a:solidFill>
-                          <a:latin typeface="Microsoft YaHei"/>
+                          <a:latin typeface="微软雅黑" panose="020B0503020204020204" charset="-122"/>
                         </a:rPr>
                         <a:t>2</a:t>
                       </a:r>
+                      <a:endParaRPr sz="1100" b="0">
+                        <a:solidFill>
+                          <a:srgbClr val="000000"/>
+                        </a:solidFill>
+                        <a:latin typeface="微软雅黑" panose="020B0503020204020204" charset="-122"/>
+                      </a:endParaRPr>
                     </a:p>
                   </a:txBody>
                   <a:tcPr>
@@ -17600,10 +19757,16 @@
                           <a:solidFill>
                             <a:srgbClr val="000000"/>
                           </a:solidFill>
-                          <a:latin typeface="Microsoft YaHei"/>
+                          <a:latin typeface="微软雅黑" panose="020B0503020204020204" charset="-122"/>
                         </a:rPr>
                         <a:t>沙华煜</a:t>
                       </a:r>
+                      <a:endParaRPr sz="1100" b="0">
+                        <a:solidFill>
+                          <a:srgbClr val="000000"/>
+                        </a:solidFill>
+                        <a:latin typeface="微软雅黑" panose="020B0503020204020204" charset="-122"/>
+                      </a:endParaRPr>
                     </a:p>
                   </a:txBody>
                   <a:tcPr>
@@ -17623,10 +19786,16 @@
                           <a:solidFill>
                             <a:srgbClr val="000000"/>
                           </a:solidFill>
-                          <a:latin typeface="Microsoft YaHei"/>
+                          <a:latin typeface="微软雅黑" panose="020B0503020204020204" charset="-122"/>
                         </a:rPr>
                         <a:t>项目测试计划书；统一团队口径；交付清单</a:t>
                       </a:r>
+                      <a:endParaRPr sz="1100" b="0">
+                        <a:solidFill>
+                          <a:srgbClr val="000000"/>
+                        </a:solidFill>
+                        <a:latin typeface="微软雅黑" panose="020B0503020204020204" charset="-122"/>
+                      </a:endParaRPr>
                     </a:p>
                   </a:txBody>
                   <a:tcPr>
@@ -17642,14 +19811,29 @@
                     <a:p>
                       <a:pPr algn="ctr"/>
                       <a:r>
+                        <a:rPr lang="en-US" sz="1100" b="0">
+                          <a:solidFill>
+                            <a:srgbClr val="000000"/>
+                          </a:solidFill>
+                          <a:latin typeface="微软雅黑" panose="020B0503020204020204" charset="-122"/>
+                        </a:rPr>
+                        <a:t>20</a:t>
+                      </a:r>
+                      <a:r>
                         <a:rPr sz="1100" b="0">
                           <a:solidFill>
                             <a:srgbClr val="000000"/>
                           </a:solidFill>
-                          <a:latin typeface="Microsoft YaHei"/>
-                        </a:rPr>
-                        <a:t>15%</a:t>
-                      </a:r>
+                          <a:latin typeface="微软雅黑" panose="020B0503020204020204" charset="-122"/>
+                        </a:rPr>
+                        <a:t>%</a:t>
+                      </a:r>
+                      <a:endParaRPr sz="1100" b="0">
+                        <a:solidFill>
+                          <a:srgbClr val="000000"/>
+                        </a:solidFill>
+                        <a:latin typeface="微软雅黑" panose="020B0503020204020204" charset="-122"/>
+                      </a:endParaRPr>
                     </a:p>
                   </a:txBody>
                   <a:tcPr>
@@ -17671,10 +19855,16 @@
                           <a:solidFill>
                             <a:srgbClr val="000000"/>
                           </a:solidFill>
-                          <a:latin typeface="Microsoft YaHei"/>
+                          <a:latin typeface="微软雅黑" panose="020B0503020204020204" charset="-122"/>
                         </a:rPr>
                         <a:t>3</a:t>
                       </a:r>
+                      <a:endParaRPr sz="1100" b="0">
+                        <a:solidFill>
+                          <a:srgbClr val="000000"/>
+                        </a:solidFill>
+                        <a:latin typeface="微软雅黑" panose="020B0503020204020204" charset="-122"/>
+                      </a:endParaRPr>
                     </a:p>
                   </a:txBody>
                   <a:tcPr>
@@ -17694,10 +19884,16 @@
                           <a:solidFill>
                             <a:srgbClr val="000000"/>
                           </a:solidFill>
-                          <a:latin typeface="Microsoft YaHei"/>
+                          <a:latin typeface="微软雅黑" panose="020B0503020204020204" charset="-122"/>
                         </a:rPr>
                         <a:t>彭祈元</a:t>
                       </a:r>
+                      <a:endParaRPr sz="1100" b="0">
+                        <a:solidFill>
+                          <a:srgbClr val="000000"/>
+                        </a:solidFill>
+                        <a:latin typeface="微软雅黑" panose="020B0503020204020204" charset="-122"/>
+                      </a:endParaRPr>
                     </a:p>
                   </a:txBody>
                   <a:tcPr>
@@ -17717,10 +19913,16 @@
                           <a:solidFill>
                             <a:srgbClr val="000000"/>
                           </a:solidFill>
-                          <a:latin typeface="Microsoft YaHei"/>
+                          <a:latin typeface="微软雅黑" panose="020B0503020204020204" charset="-122"/>
                         </a:rPr>
                         <a:t>单元测试用例文档；维护 UT 编号</a:t>
                       </a:r>
+                      <a:endParaRPr sz="1100" b="0">
+                        <a:solidFill>
+                          <a:srgbClr val="000000"/>
+                        </a:solidFill>
+                        <a:latin typeface="微软雅黑" panose="020B0503020204020204" charset="-122"/>
+                      </a:endParaRPr>
                     </a:p>
                   </a:txBody>
                   <a:tcPr>
@@ -17736,14 +19938,29 @@
                     <a:p>
                       <a:pPr algn="ctr"/>
                       <a:r>
+                        <a:rPr lang="en-US" sz="1100" b="0">
+                          <a:solidFill>
+                            <a:srgbClr val="000000"/>
+                          </a:solidFill>
+                          <a:latin typeface="微软雅黑" panose="020B0503020204020204" charset="-122"/>
+                        </a:rPr>
+                        <a:t>20</a:t>
+                      </a:r>
+                      <a:r>
                         <a:rPr sz="1100" b="0">
                           <a:solidFill>
                             <a:srgbClr val="000000"/>
                           </a:solidFill>
-                          <a:latin typeface="Microsoft YaHei"/>
-                        </a:rPr>
-                        <a:t>15%</a:t>
-                      </a:r>
+                          <a:latin typeface="微软雅黑" panose="020B0503020204020204" charset="-122"/>
+                        </a:rPr>
+                        <a:t>%</a:t>
+                      </a:r>
+                      <a:endParaRPr sz="1100" b="0">
+                        <a:solidFill>
+                          <a:srgbClr val="000000"/>
+                        </a:solidFill>
+                        <a:latin typeface="微软雅黑" panose="020B0503020204020204" charset="-122"/>
+                      </a:endParaRPr>
                     </a:p>
                   </a:txBody>
                   <a:tcPr>
@@ -17765,10 +19982,16 @@
                           <a:solidFill>
                             <a:srgbClr val="000000"/>
                           </a:solidFill>
-                          <a:latin typeface="Microsoft YaHei"/>
+                          <a:latin typeface="微软雅黑" panose="020B0503020204020204" charset="-122"/>
                         </a:rPr>
                         <a:t>4</a:t>
                       </a:r>
+                      <a:endParaRPr sz="1100" b="0">
+                        <a:solidFill>
+                          <a:srgbClr val="000000"/>
+                        </a:solidFill>
+                        <a:latin typeface="微软雅黑" panose="020B0503020204020204" charset="-122"/>
+                      </a:endParaRPr>
                     </a:p>
                   </a:txBody>
                   <a:tcPr>
@@ -17788,10 +20011,16 @@
                           <a:solidFill>
                             <a:srgbClr val="000000"/>
                           </a:solidFill>
-                          <a:latin typeface="Microsoft YaHei"/>
+                          <a:latin typeface="微软雅黑" panose="020B0503020204020204" charset="-122"/>
                         </a:rPr>
                         <a:t>郭政颖</a:t>
                       </a:r>
+                      <a:endParaRPr sz="1100" b="0">
+                        <a:solidFill>
+                          <a:srgbClr val="000000"/>
+                        </a:solidFill>
+                        <a:latin typeface="微软雅黑" panose="020B0503020204020204" charset="-122"/>
+                      </a:endParaRPr>
                     </a:p>
                   </a:txBody>
                   <a:tcPr>
@@ -17811,10 +20040,16 @@
                           <a:solidFill>
                             <a:srgbClr val="000000"/>
                           </a:solidFill>
-                          <a:latin typeface="Microsoft YaHei"/>
+                          <a:latin typeface="微软雅黑" panose="020B0503020204020204" charset="-122"/>
                         </a:rPr>
                         <a:t>集成测试用例文档；维护 controller 编号</a:t>
                       </a:r>
+                      <a:endParaRPr sz="1100" b="0">
+                        <a:solidFill>
+                          <a:srgbClr val="000000"/>
+                        </a:solidFill>
+                        <a:latin typeface="微软雅黑" panose="020B0503020204020204" charset="-122"/>
+                      </a:endParaRPr>
                     </a:p>
                   </a:txBody>
                   <a:tcPr>
@@ -17830,14 +20065,29 @@
                     <a:p>
                       <a:pPr algn="ctr"/>
                       <a:r>
+                        <a:rPr lang="en-US" sz="1100" b="0">
+                          <a:solidFill>
+                            <a:srgbClr val="000000"/>
+                          </a:solidFill>
+                          <a:latin typeface="微软雅黑" panose="020B0503020204020204" charset="-122"/>
+                        </a:rPr>
+                        <a:t>20</a:t>
+                      </a:r>
+                      <a:r>
                         <a:rPr sz="1100" b="0">
                           <a:solidFill>
                             <a:srgbClr val="000000"/>
                           </a:solidFill>
-                          <a:latin typeface="Microsoft YaHei"/>
-                        </a:rPr>
-                        <a:t>15%</a:t>
-                      </a:r>
+                          <a:latin typeface="微软雅黑" panose="020B0503020204020204" charset="-122"/>
+                        </a:rPr>
+                        <a:t>%</a:t>
+                      </a:r>
+                      <a:endParaRPr sz="1100" b="0">
+                        <a:solidFill>
+                          <a:srgbClr val="000000"/>
+                        </a:solidFill>
+                        <a:latin typeface="微软雅黑" panose="020B0503020204020204" charset="-122"/>
+                      </a:endParaRPr>
                     </a:p>
                   </a:txBody>
                   <a:tcPr>
@@ -17859,10 +20109,16 @@
                           <a:solidFill>
                             <a:srgbClr val="000000"/>
                           </a:solidFill>
-                          <a:latin typeface="Microsoft YaHei"/>
+                          <a:latin typeface="微软雅黑" panose="020B0503020204020204" charset="-122"/>
                         </a:rPr>
                         <a:t>5</a:t>
                       </a:r>
+                      <a:endParaRPr sz="1100" b="0">
+                        <a:solidFill>
+                          <a:srgbClr val="000000"/>
+                        </a:solidFill>
+                        <a:latin typeface="微软雅黑" panose="020B0503020204020204" charset="-122"/>
+                      </a:endParaRPr>
                     </a:p>
                   </a:txBody>
                   <a:tcPr>
@@ -17882,10 +20138,16 @@
                           <a:solidFill>
                             <a:srgbClr val="000000"/>
                           </a:solidFill>
-                          <a:latin typeface="Microsoft YaHei"/>
+                          <a:latin typeface="微软雅黑" panose="020B0503020204020204" charset="-122"/>
                         </a:rPr>
                         <a:t>周宇尘</a:t>
                       </a:r>
+                      <a:endParaRPr sz="1100" b="0">
+                        <a:solidFill>
+                          <a:srgbClr val="000000"/>
+                        </a:solidFill>
+                        <a:latin typeface="微软雅黑" panose="020B0503020204020204" charset="-122"/>
+                      </a:endParaRPr>
                     </a:p>
                   </a:txBody>
                   <a:tcPr>
@@ -17905,10 +20167,16 @@
                           <a:solidFill>
                             <a:srgbClr val="000000"/>
                           </a:solidFill>
-                          <a:latin typeface="Microsoft YaHei"/>
+                          <a:latin typeface="微软雅黑" panose="020B0503020204020204" charset="-122"/>
                         </a:rPr>
                         <a:t>测试总结；结果汇总；改进建议</a:t>
                       </a:r>
+                      <a:endParaRPr sz="1100" b="0">
+                        <a:solidFill>
+                          <a:srgbClr val="000000"/>
+                        </a:solidFill>
+                        <a:latin typeface="微软雅黑" panose="020B0503020204020204" charset="-122"/>
+                      </a:endParaRPr>
                     </a:p>
                   </a:txBody>
                   <a:tcPr>
@@ -17924,14 +20192,29 @@
                     <a:p>
                       <a:pPr algn="ctr"/>
                       <a:r>
+                        <a:rPr lang="en-US" sz="1100" b="0">
+                          <a:solidFill>
+                            <a:srgbClr val="000000"/>
+                          </a:solidFill>
+                          <a:latin typeface="微软雅黑" panose="020B0503020204020204" charset="-122"/>
+                        </a:rPr>
+                        <a:t>15</a:t>
+                      </a:r>
+                      <a:r>
                         <a:rPr sz="1100" b="0">
                           <a:solidFill>
                             <a:srgbClr val="000000"/>
                           </a:solidFill>
-                          <a:latin typeface="Microsoft YaHei"/>
-                        </a:rPr>
-                        <a:t>15%</a:t>
-                      </a:r>
+                          <a:latin typeface="微软雅黑" panose="020B0503020204020204" charset="-122"/>
+                        </a:rPr>
+                        <a:t>%</a:t>
+                      </a:r>
+                      <a:endParaRPr sz="1100" b="0">
+                        <a:solidFill>
+                          <a:srgbClr val="000000"/>
+                        </a:solidFill>
+                        <a:latin typeface="微软雅黑" panose="020B0503020204020204" charset="-122"/>
+                      </a:endParaRPr>
                     </a:p>
                   </a:txBody>
                   <a:tcPr>
@@ -17954,7 +20237,7 @@
 </file>
 
 <file path=ppt/slides/slide7.xml><?xml version="1.0" encoding="utf-8"?>
-<p:sld xmlns:a="http://schemas.openxmlformats.org/drawingml/2006/main" xmlns:p="http://schemas.openxmlformats.org/presentationml/2006/main" xmlns:r="http://schemas.openxmlformats.org/officeDocument/2006/relationships">
+<p:sld xmlns:a="http://schemas.openxmlformats.org/drawingml/2006/main" xmlns:r="http://schemas.openxmlformats.org/officeDocument/2006/relationships" xmlns:p="http://schemas.openxmlformats.org/presentationml/2006/main">
   <p:cSld>
     <p:spTree>
       <p:nvGrpSpPr>
@@ -18291,10 +20574,16 @@
                 <a:solidFill>
                   <a:srgbClr val="000000"/>
                 </a:solidFill>
-                <a:latin typeface="Microsoft YaHei"/>
+                <a:latin typeface="微软雅黑" panose="020B0503020204020204" charset="-122"/>
               </a:rPr>
               <a:t>图表7</a:t>
             </a:r>
+            <a:endParaRPr sz="700" b="0">
+              <a:solidFill>
+                <a:srgbClr val="000000"/>
+              </a:solidFill>
+              <a:latin typeface="微软雅黑" panose="020B0503020204020204" charset="-122"/>
+            </a:endParaRPr>
           </a:p>
         </p:txBody>
       </p:sp>
@@ -18325,10 +20614,16 @@
                 <a:solidFill>
                   <a:srgbClr val="000000"/>
                 </a:solidFill>
-                <a:latin typeface="Microsoft YaHei"/>
+                <a:latin typeface="微软雅黑" panose="020B0503020204020204" charset="-122"/>
               </a:rPr>
               <a:t>时间安排</a:t>
             </a:r>
+            <a:endParaRPr sz="3000" b="1">
+              <a:solidFill>
+                <a:srgbClr val="000000"/>
+              </a:solidFill>
+              <a:latin typeface="微软雅黑" panose="020B0503020204020204" charset="-122"/>
+            </a:endParaRPr>
           </a:p>
         </p:txBody>
       </p:sp>
@@ -18367,10 +20662,16 @@
                           <a:solidFill>
                             <a:srgbClr val="FFFFFF"/>
                           </a:solidFill>
-                          <a:latin typeface="Microsoft YaHei"/>
+                          <a:latin typeface="微软雅黑" panose="020B0503020204020204" charset="-122"/>
                         </a:rPr>
                         <a:t>日期</a:t>
                       </a:r>
+                      <a:endParaRPr sz="1400" b="1">
+                        <a:solidFill>
+                          <a:srgbClr val="FFFFFF"/>
+                        </a:solidFill>
+                        <a:latin typeface="微软雅黑" panose="020B0503020204020204" charset="-122"/>
+                      </a:endParaRPr>
                     </a:p>
                   </a:txBody>
                   <a:tcPr>
@@ -18390,10 +20691,16 @@
                           <a:solidFill>
                             <a:srgbClr val="FFFFFF"/>
                           </a:solidFill>
-                          <a:latin typeface="Microsoft YaHei"/>
+                          <a:latin typeface="微软雅黑" panose="020B0503020204020204" charset="-122"/>
                         </a:rPr>
                         <a:t>任务安排</a:t>
                       </a:r>
+                      <a:endParaRPr sz="1400" b="1">
+                        <a:solidFill>
+                          <a:srgbClr val="FFFFFF"/>
+                        </a:solidFill>
+                        <a:latin typeface="微软雅黑" panose="020B0503020204020204" charset="-122"/>
+                      </a:endParaRPr>
                     </a:p>
                   </a:txBody>
                   <a:tcPr>
@@ -18413,10 +20720,16 @@
                           <a:solidFill>
                             <a:srgbClr val="FFFFFF"/>
                           </a:solidFill>
-                          <a:latin typeface="Microsoft YaHei"/>
+                          <a:latin typeface="微软雅黑" panose="020B0503020204020204" charset="-122"/>
                         </a:rPr>
                         <a:t>输出成果</a:t>
                       </a:r>
+                      <a:endParaRPr sz="1400" b="1">
+                        <a:solidFill>
+                          <a:srgbClr val="FFFFFF"/>
+                        </a:solidFill>
+                        <a:latin typeface="微软雅黑" panose="020B0503020204020204" charset="-122"/>
+                      </a:endParaRPr>
                     </a:p>
                   </a:txBody>
                   <a:tcPr>
@@ -18438,10 +20751,16 @@
                           <a:solidFill>
                             <a:srgbClr val="000000"/>
                           </a:solidFill>
-                          <a:latin typeface="Microsoft YaHei"/>
+                          <a:latin typeface="微软雅黑" panose="020B0503020204020204" charset="-122"/>
                         </a:rPr>
                         <a:t>04.06-04.12</a:t>
                       </a:r>
+                      <a:endParaRPr sz="1300" b="0">
+                        <a:solidFill>
+                          <a:srgbClr val="000000"/>
+                        </a:solidFill>
+                        <a:latin typeface="微软雅黑" panose="020B0503020204020204" charset="-122"/>
+                      </a:endParaRPr>
                     </a:p>
                   </a:txBody>
                   <a:tcPr>
@@ -18461,10 +20780,16 @@
                           <a:solidFill>
                             <a:srgbClr val="000000"/>
                           </a:solidFill>
-                          <a:latin typeface="Microsoft YaHei"/>
+                          <a:latin typeface="微软雅黑" panose="020B0503020204020204" charset="-122"/>
                         </a:rPr>
                         <a:t>service 单元测试编写</a:t>
                       </a:r>
+                      <a:endParaRPr sz="1300" b="0">
+                        <a:solidFill>
+                          <a:srgbClr val="000000"/>
+                        </a:solidFill>
+                        <a:latin typeface="微软雅黑" panose="020B0503020204020204" charset="-122"/>
+                      </a:endParaRPr>
                     </a:p>
                   </a:txBody>
                   <a:tcPr>
@@ -18484,10 +20809,16 @@
                           <a:solidFill>
                             <a:srgbClr val="000000"/>
                           </a:solidFill>
-                          <a:latin typeface="Microsoft YaHei"/>
+                          <a:latin typeface="微软雅黑" panose="020B0503020204020204" charset="-122"/>
                         </a:rPr>
                         <a:t>7 个 service 测试类</a:t>
                       </a:r>
+                      <a:endParaRPr sz="1300" b="0">
+                        <a:solidFill>
+                          <a:srgbClr val="000000"/>
+                        </a:solidFill>
+                        <a:latin typeface="微软雅黑" panose="020B0503020204020204" charset="-122"/>
+                      </a:endParaRPr>
                     </a:p>
                   </a:txBody>
                   <a:tcPr>
@@ -18509,10 +20840,16 @@
                           <a:solidFill>
                             <a:srgbClr val="000000"/>
                           </a:solidFill>
-                          <a:latin typeface="Microsoft YaHei"/>
+                          <a:latin typeface="微软雅黑" panose="020B0503020204020204" charset="-122"/>
                         </a:rPr>
                         <a:t>04.10-04.16</a:t>
                       </a:r>
+                      <a:endParaRPr sz="1300" b="0">
+                        <a:solidFill>
+                          <a:srgbClr val="000000"/>
+                        </a:solidFill>
+                        <a:latin typeface="微软雅黑" panose="020B0503020204020204" charset="-122"/>
+                      </a:endParaRPr>
                     </a:p>
                   </a:txBody>
                   <a:tcPr>
@@ -18532,10 +20869,16 @@
                           <a:solidFill>
                             <a:srgbClr val="000000"/>
                           </a:solidFill>
-                          <a:latin typeface="Microsoft YaHei"/>
+                          <a:latin typeface="微软雅黑" panose="020B0503020204020204" charset="-122"/>
                         </a:rPr>
                         <a:t>controller 集成测试编写</a:t>
                       </a:r>
+                      <a:endParaRPr sz="1300" b="0">
+                        <a:solidFill>
+                          <a:srgbClr val="000000"/>
+                        </a:solidFill>
+                        <a:latin typeface="微软雅黑" panose="020B0503020204020204" charset="-122"/>
+                      </a:endParaRPr>
                     </a:p>
                   </a:txBody>
                   <a:tcPr>
@@ -18555,10 +20898,16 @@
                           <a:solidFill>
                             <a:srgbClr val="000000"/>
                           </a:solidFill>
-                          <a:latin typeface="Microsoft YaHei"/>
+                          <a:latin typeface="微软雅黑" panose="020B0503020204020204" charset="-122"/>
                         </a:rPr>
                         <a:t>8 个集成测试脚本</a:t>
                       </a:r>
+                      <a:endParaRPr sz="1300" b="0">
+                        <a:solidFill>
+                          <a:srgbClr val="000000"/>
+                        </a:solidFill>
+                        <a:latin typeface="微软雅黑" panose="020B0503020204020204" charset="-122"/>
+                      </a:endParaRPr>
                     </a:p>
                   </a:txBody>
                   <a:tcPr>
@@ -18580,10 +20929,16 @@
                           <a:solidFill>
                             <a:srgbClr val="000000"/>
                           </a:solidFill>
-                          <a:latin typeface="Microsoft YaHei"/>
+                          <a:latin typeface="微软雅黑" panose="020B0503020204020204" charset="-122"/>
                         </a:rPr>
                         <a:t>04.17-04.18</a:t>
                       </a:r>
+                      <a:endParaRPr sz="1300" b="0">
+                        <a:solidFill>
+                          <a:srgbClr val="000000"/>
+                        </a:solidFill>
+                        <a:latin typeface="微软雅黑" panose="020B0503020204020204" charset="-122"/>
+                      </a:endParaRPr>
                     </a:p>
                   </a:txBody>
                   <a:tcPr>
@@ -18603,10 +20958,16 @@
                           <a:solidFill>
                             <a:srgbClr val="000000"/>
                           </a:solidFill>
-                          <a:latin typeface="Microsoft YaHei"/>
+                          <a:latin typeface="微软雅黑" panose="020B0503020204020204" charset="-122"/>
                         </a:rPr>
                         <a:t>全量 mvn test 与覆盖率收集</a:t>
                       </a:r>
+                      <a:endParaRPr sz="1300" b="0">
+                        <a:solidFill>
+                          <a:srgbClr val="000000"/>
+                        </a:solidFill>
+                        <a:latin typeface="微软雅黑" panose="020B0503020204020204" charset="-122"/>
+                      </a:endParaRPr>
                     </a:p>
                   </a:txBody>
                   <a:tcPr>
@@ -18626,10 +20987,16 @@
                           <a:solidFill>
                             <a:srgbClr val="000000"/>
                           </a:solidFill>
-                          <a:latin typeface="Microsoft YaHei"/>
+                          <a:latin typeface="微软雅黑" panose="020B0503020204020204" charset="-122"/>
                         </a:rPr>
                         <a:t>JaCoCo + Surefire 报告</a:t>
                       </a:r>
+                      <a:endParaRPr sz="1300" b="0">
+                        <a:solidFill>
+                          <a:srgbClr val="000000"/>
+                        </a:solidFill>
+                        <a:latin typeface="微软雅黑" panose="020B0503020204020204" charset="-122"/>
+                      </a:endParaRPr>
                     </a:p>
                   </a:txBody>
                   <a:tcPr>
@@ -18651,10 +21018,16 @@
                           <a:solidFill>
                             <a:srgbClr val="000000"/>
                           </a:solidFill>
-                          <a:latin typeface="Microsoft YaHei"/>
+                          <a:latin typeface="微软雅黑" panose="020B0503020204020204" charset="-122"/>
                         </a:rPr>
                         <a:t>04.19-04.22</a:t>
                       </a:r>
+                      <a:endParaRPr sz="1300" b="0">
+                        <a:solidFill>
+                          <a:srgbClr val="000000"/>
+                        </a:solidFill>
+                        <a:latin typeface="微软雅黑" panose="020B0503020204020204" charset="-122"/>
+                      </a:endParaRPr>
                     </a:p>
                   </a:txBody>
                   <a:tcPr>
@@ -18674,10 +21047,16 @@
                           <a:solidFill>
                             <a:srgbClr val="000000"/>
                           </a:solidFill>
-                          <a:latin typeface="Microsoft YaHei"/>
+                          <a:latin typeface="微软雅黑" panose="020B0503020204020204" charset="-122"/>
                         </a:rPr>
                         <a:t>测试计划、用例文档、总结对齐</a:t>
                       </a:r>
+                      <a:endParaRPr sz="1300" b="0">
+                        <a:solidFill>
+                          <a:srgbClr val="000000"/>
+                        </a:solidFill>
+                        <a:latin typeface="微软雅黑" panose="020B0503020204020204" charset="-122"/>
+                      </a:endParaRPr>
                     </a:p>
                   </a:txBody>
                   <a:tcPr>
@@ -18697,10 +21076,16 @@
                           <a:solidFill>
                             <a:srgbClr val="000000"/>
                           </a:solidFill>
-                          <a:latin typeface="Microsoft YaHei"/>
+                          <a:latin typeface="微软雅黑" panose="020B0503020204020204" charset="-122"/>
                         </a:rPr>
                         <a:t>三份课程文档</a:t>
                       </a:r>
+                      <a:endParaRPr sz="1300" b="0">
+                        <a:solidFill>
+                          <a:srgbClr val="000000"/>
+                        </a:solidFill>
+                        <a:latin typeface="微软雅黑" panose="020B0503020204020204" charset="-122"/>
+                      </a:endParaRPr>
                     </a:p>
                   </a:txBody>
                   <a:tcPr>
@@ -18722,10 +21107,16 @@
                           <a:solidFill>
                             <a:srgbClr val="000000"/>
                           </a:solidFill>
-                          <a:latin typeface="Microsoft YaHei"/>
+                          <a:latin typeface="微软雅黑" panose="020B0503020204020204" charset="-122"/>
                         </a:rPr>
                         <a:t>04.23-04.26</a:t>
                       </a:r>
+                      <a:endParaRPr sz="1300" b="0">
+                        <a:solidFill>
+                          <a:srgbClr val="000000"/>
+                        </a:solidFill>
+                        <a:latin typeface="微软雅黑" panose="020B0503020204020204" charset="-122"/>
+                      </a:endParaRPr>
                     </a:p>
                   </a:txBody>
                   <a:tcPr>
@@ -18745,10 +21136,16 @@
                           <a:solidFill>
                             <a:srgbClr val="000000"/>
                           </a:solidFill>
-                          <a:latin typeface="Microsoft YaHei"/>
+                          <a:latin typeface="微软雅黑" panose="020B0503020204020204" charset="-122"/>
                         </a:rPr>
                         <a:t>PPT 汇报与提交包整理</a:t>
                       </a:r>
+                      <a:endParaRPr sz="1300" b="0">
+                        <a:solidFill>
+                          <a:srgbClr val="000000"/>
+                        </a:solidFill>
+                        <a:latin typeface="微软雅黑" panose="020B0503020204020204" charset="-122"/>
+                      </a:endParaRPr>
                     </a:p>
                   </a:txBody>
                   <a:tcPr>
@@ -18768,10 +21165,16 @@
                           <a:solidFill>
                             <a:srgbClr val="000000"/>
                           </a:solidFill>
-                          <a:latin typeface="Microsoft YaHei"/>
+                          <a:latin typeface="微软雅黑" panose="020B0503020204020204" charset="-122"/>
                         </a:rPr>
                         <a:t>PDF + 源码压缩包</a:t>
                       </a:r>
+                      <a:endParaRPr sz="1300" b="0">
+                        <a:solidFill>
+                          <a:srgbClr val="000000"/>
+                        </a:solidFill>
+                        <a:latin typeface="微软雅黑" panose="020B0503020204020204" charset="-122"/>
+                      </a:endParaRPr>
                     </a:p>
                   </a:txBody>
                   <a:tcPr>
@@ -18794,7 +21197,7 @@
 </file>
 
 <file path=ppt/slides/slide8.xml><?xml version="1.0" encoding="utf-8"?>
-<p:sld xmlns:a="http://schemas.openxmlformats.org/drawingml/2006/main" xmlns:p="http://schemas.openxmlformats.org/presentationml/2006/main" xmlns:r="http://schemas.openxmlformats.org/officeDocument/2006/relationships">
+<p:sld xmlns:a="http://schemas.openxmlformats.org/drawingml/2006/main" xmlns:r="http://schemas.openxmlformats.org/officeDocument/2006/relationships" xmlns:p="http://schemas.openxmlformats.org/presentationml/2006/main">
   <p:cSld>
     <p:spTree>
       <p:nvGrpSpPr>
@@ -19131,10 +21534,16 @@
                 <a:solidFill>
                   <a:srgbClr val="000000"/>
                 </a:solidFill>
-                <a:latin typeface="Microsoft YaHei"/>
+                <a:latin typeface="微软雅黑" panose="020B0503020204020204" charset="-122"/>
               </a:rPr>
               <a:t>图表8</a:t>
             </a:r>
+            <a:endParaRPr sz="700" b="0">
+              <a:solidFill>
+                <a:srgbClr val="000000"/>
+              </a:solidFill>
+              <a:latin typeface="微软雅黑" panose="020B0503020204020204" charset="-122"/>
+            </a:endParaRPr>
           </a:p>
         </p:txBody>
       </p:sp>
@@ -19165,10 +21574,16 @@
                 <a:solidFill>
                   <a:srgbClr val="000000"/>
                 </a:solidFill>
-                <a:latin typeface="Microsoft YaHei"/>
+                <a:latin typeface="微软雅黑" panose="020B0503020204020204" charset="-122"/>
               </a:rPr>
               <a:t>PJ1测试的主要方法</a:t>
             </a:r>
+            <a:endParaRPr sz="1900" b="1">
+              <a:solidFill>
+                <a:srgbClr val="000000"/>
+              </a:solidFill>
+              <a:latin typeface="微软雅黑" panose="020B0503020204020204" charset="-122"/>
+            </a:endParaRPr>
           </a:p>
         </p:txBody>
       </p:sp>
@@ -19199,10 +21614,16 @@
                 <a:solidFill>
                   <a:srgbClr val="000000"/>
                 </a:solidFill>
-                <a:latin typeface="Microsoft YaHei"/>
+                <a:latin typeface="微软雅黑" panose="020B0503020204020204" charset="-122"/>
               </a:rPr>
               <a:t>• 主要活动：编写测试脚本、执行测试用例、分析覆盖率与结果</a:t>
             </a:r>
+            <a:endParaRPr sz="1500" b="0">
+              <a:solidFill>
+                <a:srgbClr val="000000"/>
+              </a:solidFill>
+              <a:latin typeface="微软雅黑" panose="020B0503020204020204" charset="-122"/>
+            </a:endParaRPr>
           </a:p>
           <a:p>
             <a:r>
@@ -19210,10 +21631,16 @@
                 <a:solidFill>
                   <a:srgbClr val="000000"/>
                 </a:solidFill>
-                <a:latin typeface="Microsoft YaHei"/>
+                <a:latin typeface="微软雅黑" panose="020B0503020204020204" charset="-122"/>
               </a:rPr>
               <a:t>• 技术：JUnit5、SpringBootTest、Mockito、MockMvc、H2、JaCoCo</a:t>
             </a:r>
+            <a:endParaRPr sz="1500" b="0">
+              <a:solidFill>
+                <a:srgbClr val="000000"/>
+              </a:solidFill>
+              <a:latin typeface="微软雅黑" panose="020B0503020204020204" charset="-122"/>
+            </a:endParaRPr>
           </a:p>
           <a:p>
             <a:r>
@@ -19221,10 +21648,16 @@
                 <a:solidFill>
                   <a:srgbClr val="000000"/>
                 </a:solidFill>
-                <a:latin typeface="Microsoft YaHei"/>
+                <a:latin typeface="微软雅黑" panose="020B0503020204020204" charset="-122"/>
               </a:rPr>
               <a:t>• 黑盒：等价类划分、边界值分析，用于参数、ID、状态值、页码等输入</a:t>
             </a:r>
+            <a:endParaRPr sz="1500" b="0">
+              <a:solidFill>
+                <a:srgbClr val="000000"/>
+              </a:solidFill>
+              <a:latin typeface="微软雅黑" panose="020B0503020204020204" charset="-122"/>
+            </a:endParaRPr>
           </a:p>
           <a:p>
             <a:r>
@@ -19232,10 +21665,16 @@
                 <a:solidFill>
                   <a:srgbClr val="000000"/>
                 </a:solidFill>
-                <a:latin typeface="Microsoft YaHei"/>
+                <a:latin typeface="微软雅黑" panose="020B0503020204020204" charset="-122"/>
               </a:rPr>
               <a:t>• 白盒：语句覆盖、判定覆盖，用于 service 分支与 controller 登录/跳转逻辑</a:t>
             </a:r>
+            <a:endParaRPr sz="1500" b="0">
+              <a:solidFill>
+                <a:srgbClr val="000000"/>
+              </a:solidFill>
+              <a:latin typeface="微软雅黑" panose="020B0503020204020204" charset="-122"/>
+            </a:endParaRPr>
           </a:p>
           <a:p>
             <a:r>
@@ -19243,10 +21682,16 @@
                 <a:solidFill>
                   <a:srgbClr val="000000"/>
                 </a:solidFill>
-                <a:latin typeface="Microsoft YaHei"/>
+                <a:latin typeface="微软雅黑" panose="020B0503020204020204" charset="-122"/>
               </a:rPr>
               <a:t>• 冗余控制：合并同等价类和相同结果路径，保留代表性用例</a:t>
             </a:r>
+            <a:endParaRPr sz="1500" b="0">
+              <a:solidFill>
+                <a:srgbClr val="000000"/>
+              </a:solidFill>
+              <a:latin typeface="微软雅黑" panose="020B0503020204020204" charset="-122"/>
+            </a:endParaRPr>
           </a:p>
         </p:txBody>
       </p:sp>
@@ -19259,7 +21704,7 @@
 </file>
 
 <file path=ppt/slides/slide9.xml><?xml version="1.0" encoding="utf-8"?>
-<p:sld xmlns:a="http://schemas.openxmlformats.org/drawingml/2006/main" xmlns:p="http://schemas.openxmlformats.org/presentationml/2006/main" xmlns:r="http://schemas.openxmlformats.org/officeDocument/2006/relationships">
+<p:sld xmlns:a="http://schemas.openxmlformats.org/drawingml/2006/main" xmlns:r="http://schemas.openxmlformats.org/officeDocument/2006/relationships" xmlns:p="http://schemas.openxmlformats.org/presentationml/2006/main">
   <p:cSld>
     <p:spTree>
       <p:nvGrpSpPr>
@@ -19596,10 +22041,16 @@
                 <a:solidFill>
                   <a:srgbClr val="000000"/>
                 </a:solidFill>
-                <a:latin typeface="Microsoft YaHei"/>
+                <a:latin typeface="微软雅黑" panose="020B0503020204020204" charset="-122"/>
               </a:rPr>
               <a:t>图表9</a:t>
             </a:r>
+            <a:endParaRPr sz="700" b="0">
+              <a:solidFill>
+                <a:srgbClr val="000000"/>
+              </a:solidFill>
+              <a:latin typeface="微软雅黑" panose="020B0503020204020204" charset="-122"/>
+            </a:endParaRPr>
           </a:p>
         </p:txBody>
       </p:sp>
@@ -19630,10 +22081,16 @@
                 <a:solidFill>
                   <a:srgbClr val="000000"/>
                 </a:solidFill>
-                <a:latin typeface="Microsoft YaHei"/>
+                <a:latin typeface="微软雅黑" panose="020B0503020204020204" charset="-122"/>
               </a:rPr>
               <a:t>测试覆盖 service 与 controller 两层核心模块</a:t>
             </a:r>
+            <a:endParaRPr sz="3000" b="1">
+              <a:solidFill>
+                <a:srgbClr val="000000"/>
+              </a:solidFill>
+              <a:latin typeface="微软雅黑" panose="020B0503020204020204" charset="-122"/>
+            </a:endParaRPr>
           </a:p>
         </p:txBody>
       </p:sp>
@@ -19727,10 +22184,16 @@
                 <a:solidFill>
                   <a:srgbClr val="FFFFFF"/>
                 </a:solidFill>
-                <a:latin typeface="Microsoft YaHei"/>
+                <a:latin typeface="微软雅黑" panose="020B0503020204020204" charset="-122"/>
               </a:rPr>
               <a:t>用户与登录</a:t>
             </a:r>
+            <a:endParaRPr sz="1200" b="1">
+              <a:solidFill>
+                <a:srgbClr val="FFFFFF"/>
+              </a:solidFill>
+              <a:latin typeface="微软雅黑" panose="020B0503020204020204" charset="-122"/>
+            </a:endParaRPr>
           </a:p>
         </p:txBody>
       </p:sp>
@@ -19762,10 +22225,16 @@
                 <a:solidFill>
                   <a:srgbClr val="000000"/>
                 </a:solidFill>
-                <a:latin typeface="Microsoft YaHei"/>
+                <a:latin typeface="微软雅黑" panose="020B0503020204020204" charset="-122"/>
               </a:rPr>
               <a:t>UserService</a:t>
             </a:r>
+            <a:endParaRPr sz="1000" b="0">
+              <a:solidFill>
+                <a:srgbClr val="000000"/>
+              </a:solidFill>
+              <a:latin typeface="微软雅黑" panose="020B0503020204020204" charset="-122"/>
+            </a:endParaRPr>
           </a:p>
           <a:p>
             <a:pPr algn="ctr"/>
@@ -19774,10 +22243,16 @@
                 <a:solidFill>
                   <a:srgbClr val="000000"/>
                 </a:solidFill>
-                <a:latin typeface="Microsoft YaHei"/>
+                <a:latin typeface="微软雅黑" panose="020B0503020204020204" charset="-122"/>
               </a:rPr>
               <a:t>UserController</a:t>
             </a:r>
+            <a:endParaRPr sz="1000" b="0">
+              <a:solidFill>
+                <a:srgbClr val="000000"/>
+              </a:solidFill>
+              <a:latin typeface="微软雅黑" panose="020B0503020204020204" charset="-122"/>
+            </a:endParaRPr>
           </a:p>
           <a:p>
             <a:pPr algn="ctr"/>
@@ -19786,10 +22261,16 @@
                 <a:solidFill>
                   <a:srgbClr val="000000"/>
                 </a:solidFill>
-                <a:latin typeface="Microsoft YaHei"/>
+                <a:latin typeface="微软雅黑" panose="020B0503020204020204" charset="-122"/>
               </a:rPr>
               <a:t>AdminUserController</a:t>
             </a:r>
+            <a:endParaRPr sz="1000" b="0">
+              <a:solidFill>
+                <a:srgbClr val="000000"/>
+              </a:solidFill>
+              <a:latin typeface="微软雅黑" panose="020B0503020204020204" charset="-122"/>
+            </a:endParaRPr>
           </a:p>
         </p:txBody>
       </p:sp>
@@ -19883,10 +22364,16 @@
                 <a:solidFill>
                   <a:srgbClr val="FFFFFF"/>
                 </a:solidFill>
-                <a:latin typeface="Microsoft YaHei"/>
+                <a:latin typeface="微软雅黑" panose="020B0503020204020204" charset="-122"/>
               </a:rPr>
               <a:t>场馆信息</a:t>
             </a:r>
+            <a:endParaRPr sz="1200" b="1">
+              <a:solidFill>
+                <a:srgbClr val="FFFFFF"/>
+              </a:solidFill>
+              <a:latin typeface="微软雅黑" panose="020B0503020204020204" charset="-122"/>
+            </a:endParaRPr>
           </a:p>
         </p:txBody>
       </p:sp>
@@ -19918,10 +22405,16 @@
                 <a:solidFill>
                   <a:srgbClr val="000000"/>
                 </a:solidFill>
-                <a:latin typeface="Microsoft YaHei"/>
+                <a:latin typeface="微软雅黑" panose="020B0503020204020204" charset="-122"/>
               </a:rPr>
               <a:t>VenueService</a:t>
             </a:r>
+            <a:endParaRPr sz="1000" b="0">
+              <a:solidFill>
+                <a:srgbClr val="000000"/>
+              </a:solidFill>
+              <a:latin typeface="微软雅黑" panose="020B0503020204020204" charset="-122"/>
+            </a:endParaRPr>
           </a:p>
           <a:p>
             <a:pPr algn="ctr"/>
@@ -19930,10 +22423,16 @@
                 <a:solidFill>
                   <a:srgbClr val="000000"/>
                 </a:solidFill>
-                <a:latin typeface="Microsoft YaHei"/>
+                <a:latin typeface="微软雅黑" panose="020B0503020204020204" charset="-122"/>
               </a:rPr>
               <a:t>VenueController</a:t>
             </a:r>
+            <a:endParaRPr sz="1000" b="0">
+              <a:solidFill>
+                <a:srgbClr val="000000"/>
+              </a:solidFill>
+              <a:latin typeface="微软雅黑" panose="020B0503020204020204" charset="-122"/>
+            </a:endParaRPr>
           </a:p>
           <a:p>
             <a:pPr algn="ctr"/>
@@ -19942,10 +22441,16 @@
                 <a:solidFill>
                   <a:srgbClr val="000000"/>
                 </a:solidFill>
-                <a:latin typeface="Microsoft YaHei"/>
+                <a:latin typeface="微软雅黑" panose="020B0503020204020204" charset="-122"/>
               </a:rPr>
               <a:t>AdminVenueController</a:t>
             </a:r>
+            <a:endParaRPr sz="1000" b="0">
+              <a:solidFill>
+                <a:srgbClr val="000000"/>
+              </a:solidFill>
+              <a:latin typeface="微软雅黑" panose="020B0503020204020204" charset="-122"/>
+            </a:endParaRPr>
           </a:p>
         </p:txBody>
       </p:sp>
@@ -20039,10 +22544,16 @@
                 <a:solidFill>
                   <a:srgbClr val="FFFFFF"/>
                 </a:solidFill>
-                <a:latin typeface="Microsoft YaHei"/>
+                <a:latin typeface="微软雅黑" panose="020B0503020204020204" charset="-122"/>
               </a:rPr>
               <a:t>预约订单</a:t>
             </a:r>
+            <a:endParaRPr sz="1200" b="1">
+              <a:solidFill>
+                <a:srgbClr val="FFFFFF"/>
+              </a:solidFill>
+              <a:latin typeface="微软雅黑" panose="020B0503020204020204" charset="-122"/>
+            </a:endParaRPr>
           </a:p>
         </p:txBody>
       </p:sp>
@@ -20074,10 +22585,16 @@
                 <a:solidFill>
                   <a:srgbClr val="000000"/>
                 </a:solidFill>
-                <a:latin typeface="Microsoft YaHei"/>
+                <a:latin typeface="微软雅黑" panose="020B0503020204020204" charset="-122"/>
               </a:rPr>
               <a:t>OrderService</a:t>
             </a:r>
+            <a:endParaRPr sz="1000" b="0">
+              <a:solidFill>
+                <a:srgbClr val="000000"/>
+              </a:solidFill>
+              <a:latin typeface="微软雅黑" panose="020B0503020204020204" charset="-122"/>
+            </a:endParaRPr>
           </a:p>
           <a:p>
             <a:pPr algn="ctr"/>
@@ -20086,10 +22603,16 @@
                 <a:solidFill>
                   <a:srgbClr val="000000"/>
                 </a:solidFill>
-                <a:latin typeface="Microsoft YaHei"/>
+                <a:latin typeface="微软雅黑" panose="020B0503020204020204" charset="-122"/>
               </a:rPr>
               <a:t>OrderVoService</a:t>
             </a:r>
+            <a:endParaRPr sz="1000" b="0">
+              <a:solidFill>
+                <a:srgbClr val="000000"/>
+              </a:solidFill>
+              <a:latin typeface="微软雅黑" panose="020B0503020204020204" charset="-122"/>
+            </a:endParaRPr>
           </a:p>
           <a:p>
             <a:pPr algn="ctr"/>
@@ -20098,10 +22621,16 @@
                 <a:solidFill>
                   <a:srgbClr val="000000"/>
                 </a:solidFill>
-                <a:latin typeface="Microsoft YaHei"/>
+                <a:latin typeface="微软雅黑" panose="020B0503020204020204" charset="-122"/>
               </a:rPr>
               <a:t>OrderController</a:t>
             </a:r>
+            <a:endParaRPr sz="1000" b="0">
+              <a:solidFill>
+                <a:srgbClr val="000000"/>
+              </a:solidFill>
+              <a:latin typeface="微软雅黑" panose="020B0503020204020204" charset="-122"/>
+            </a:endParaRPr>
           </a:p>
         </p:txBody>
       </p:sp>
@@ -20195,10 +22724,16 @@
                 <a:solidFill>
                   <a:srgbClr val="FFFFFF"/>
                 </a:solidFill>
-                <a:latin typeface="Microsoft YaHei"/>
+                <a:latin typeface="微软雅黑" panose="020B0503020204020204" charset="-122"/>
               </a:rPr>
               <a:t>留言板</a:t>
             </a:r>
+            <a:endParaRPr sz="1200" b="1">
+              <a:solidFill>
+                <a:srgbClr val="FFFFFF"/>
+              </a:solidFill>
+              <a:latin typeface="微软雅黑" panose="020B0503020204020204" charset="-122"/>
+            </a:endParaRPr>
           </a:p>
         </p:txBody>
       </p:sp>
@@ -20230,10 +22765,16 @@
                 <a:solidFill>
                   <a:srgbClr val="000000"/>
                 </a:solidFill>
-                <a:latin typeface="Microsoft YaHei"/>
+                <a:latin typeface="微软雅黑" panose="020B0503020204020204" charset="-122"/>
               </a:rPr>
               <a:t>MessageService</a:t>
             </a:r>
+            <a:endParaRPr sz="1000" b="0">
+              <a:solidFill>
+                <a:srgbClr val="000000"/>
+              </a:solidFill>
+              <a:latin typeface="微软雅黑" panose="020B0503020204020204" charset="-122"/>
+            </a:endParaRPr>
           </a:p>
           <a:p>
             <a:pPr algn="ctr"/>
@@ -20242,10 +22783,16 @@
                 <a:solidFill>
                   <a:srgbClr val="000000"/>
                 </a:solidFill>
-                <a:latin typeface="Microsoft YaHei"/>
+                <a:latin typeface="微软雅黑" panose="020B0503020204020204" charset="-122"/>
               </a:rPr>
               <a:t>MessageVoService</a:t>
             </a:r>
+            <a:endParaRPr sz="1000" b="0">
+              <a:solidFill>
+                <a:srgbClr val="000000"/>
+              </a:solidFill>
+              <a:latin typeface="微软雅黑" panose="020B0503020204020204" charset="-122"/>
+            </a:endParaRPr>
           </a:p>
           <a:p>
             <a:pPr algn="ctr"/>
@@ -20254,10 +22801,16 @@
                 <a:solidFill>
                   <a:srgbClr val="000000"/>
                 </a:solidFill>
-                <a:latin typeface="Microsoft YaHei"/>
+                <a:latin typeface="微软雅黑" panose="020B0503020204020204" charset="-122"/>
               </a:rPr>
               <a:t>MessageController</a:t>
             </a:r>
+            <a:endParaRPr sz="1000" b="0">
+              <a:solidFill>
+                <a:srgbClr val="000000"/>
+              </a:solidFill>
+              <a:latin typeface="微软雅黑" panose="020B0503020204020204" charset="-122"/>
+            </a:endParaRPr>
           </a:p>
         </p:txBody>
       </p:sp>
@@ -20351,10 +22904,16 @@
                 <a:solidFill>
                   <a:srgbClr val="FFFFFF"/>
                 </a:solidFill>
-                <a:latin typeface="Microsoft YaHei"/>
+                <a:latin typeface="微软雅黑" panose="020B0503020204020204" charset="-122"/>
               </a:rPr>
               <a:t>新闻展示</a:t>
             </a:r>
+            <a:endParaRPr sz="1200" b="1">
+              <a:solidFill>
+                <a:srgbClr val="FFFFFF"/>
+              </a:solidFill>
+              <a:latin typeface="微软雅黑" panose="020B0503020204020204" charset="-122"/>
+            </a:endParaRPr>
           </a:p>
         </p:txBody>
       </p:sp>
@@ -20386,10 +22945,16 @@
                 <a:solidFill>
                   <a:srgbClr val="000000"/>
                 </a:solidFill>
-                <a:latin typeface="Microsoft YaHei"/>
+                <a:latin typeface="微软雅黑" panose="020B0503020204020204" charset="-122"/>
               </a:rPr>
               <a:t>NewsService</a:t>
             </a:r>
+            <a:endParaRPr sz="1000" b="0">
+              <a:solidFill>
+                <a:srgbClr val="000000"/>
+              </a:solidFill>
+              <a:latin typeface="微软雅黑" panose="020B0503020204020204" charset="-122"/>
+            </a:endParaRPr>
           </a:p>
           <a:p>
             <a:pPr algn="ctr"/>
@@ -20398,10 +22963,16 @@
                 <a:solidFill>
                   <a:srgbClr val="000000"/>
                 </a:solidFill>
-                <a:latin typeface="Microsoft YaHei"/>
+                <a:latin typeface="微软雅黑" panose="020B0503020204020204" charset="-122"/>
               </a:rPr>
               <a:t>NewsController</a:t>
             </a:r>
+            <a:endParaRPr sz="1000" b="0">
+              <a:solidFill>
+                <a:srgbClr val="000000"/>
+              </a:solidFill>
+              <a:latin typeface="微软雅黑" panose="020B0503020204020204" charset="-122"/>
+            </a:endParaRPr>
           </a:p>
           <a:p>
             <a:pPr algn="ctr"/>
@@ -20410,10 +22981,16 @@
                 <a:solidFill>
                   <a:srgbClr val="000000"/>
                 </a:solidFill>
-                <a:latin typeface="Microsoft YaHei"/>
+                <a:latin typeface="微软雅黑" panose="020B0503020204020204" charset="-122"/>
               </a:rPr>
               <a:t>AdminNewsController</a:t>
             </a:r>
+            <a:endParaRPr sz="1000" b="0">
+              <a:solidFill>
+                <a:srgbClr val="000000"/>
+              </a:solidFill>
+              <a:latin typeface="微软雅黑" panose="020B0503020204020204" charset="-122"/>
+            </a:endParaRPr>
           </a:p>
         </p:txBody>
       </p:sp>
@@ -20507,10 +23084,16 @@
                 <a:solidFill>
                   <a:srgbClr val="FFFFFF"/>
                 </a:solidFill>
-                <a:latin typeface="Microsoft YaHei"/>
+                <a:latin typeface="微软雅黑" panose="020B0503020204020204" charset="-122"/>
               </a:rPr>
               <a:t>公共首页</a:t>
             </a:r>
+            <a:endParaRPr sz="1200" b="1">
+              <a:solidFill>
+                <a:srgbClr val="FFFFFF"/>
+              </a:solidFill>
+              <a:latin typeface="微软雅黑" panose="020B0503020204020204" charset="-122"/>
+            </a:endParaRPr>
           </a:p>
         </p:txBody>
       </p:sp>
@@ -20542,10 +23125,16 @@
                 <a:solidFill>
                   <a:srgbClr val="000000"/>
                 </a:solidFill>
-                <a:latin typeface="Microsoft YaHei"/>
+                <a:latin typeface="微软雅黑" panose="020B0503020204020204" charset="-122"/>
               </a:rPr>
               <a:t>IndexController</a:t>
             </a:r>
+            <a:endParaRPr sz="1000" b="0">
+              <a:solidFill>
+                <a:srgbClr val="000000"/>
+              </a:solidFill>
+              <a:latin typeface="微软雅黑" panose="020B0503020204020204" charset="-122"/>
+            </a:endParaRPr>
           </a:p>
           <a:p>
             <a:pPr algn="ctr"/>
@@ -20554,10 +23143,16 @@
                 <a:solidFill>
                   <a:srgbClr val="000000"/>
                 </a:solidFill>
-                <a:latin typeface="Microsoft YaHei"/>
+                <a:latin typeface="微软雅黑" panose="020B0503020204020204" charset="-122"/>
               </a:rPr>
               <a:t>公共内容展示</a:t>
             </a:r>
+            <a:endParaRPr sz="1000" b="0">
+              <a:solidFill>
+                <a:srgbClr val="000000"/>
+              </a:solidFill>
+              <a:latin typeface="微软雅黑" panose="020B0503020204020204" charset="-122"/>
+            </a:endParaRPr>
           </a:p>
           <a:p>
             <a:pPr algn="ctr"/>
@@ -20566,10 +23161,16 @@
                 <a:solidFill>
                   <a:srgbClr val="000000"/>
                 </a:solidFill>
-                <a:latin typeface="Microsoft YaHei"/>
+                <a:latin typeface="微软雅黑" panose="020B0503020204020204" charset="-122"/>
               </a:rPr>
               <a:t>首页数据聚合</a:t>
             </a:r>
+            <a:endParaRPr sz="1000" b="0">
+              <a:solidFill>
+                <a:srgbClr val="000000"/>
+              </a:solidFill>
+              <a:latin typeface="微软雅黑" panose="020B0503020204020204" charset="-122"/>
+            </a:endParaRPr>
           </a:p>
         </p:txBody>
       </p:sp>
@@ -20579,6 +23180,12 @@
     <a:masterClrMapping/>
   </p:clrMapOvr>
 </p:sld>
+</file>
+
+<file path=ppt/tags/tag1.xml><?xml version="1.0" encoding="utf-8"?>
+<p:tagLst xmlns:p="http://schemas.openxmlformats.org/presentationml/2006/main">
+  <p:tag name="commondata" val="eyJoZGlkIjoiODE3NzM4YjVmNGQ5YWQ1MWY4MzgxZGM1ZWEyZWIzN2IifQ=="/>
+</p:tagLst>
 </file>
 
 <file path=ppt/theme/theme1.xml><?xml version="1.0" encoding="utf-8"?>
@@ -20897,6 +23504,10 @@
       </a:style>
     </a:lnDef>
   </a:objectDefaults>
-  <a:extraClrSchemeLst/>
+  <a:extLst>
+    <a:ext uri="{05A4C25C-085E-4340-85A3-A5531E510DB2}">
+      <thm15:themeFamily xmlns:thm15="http://schemas.microsoft.com/office/thememl/2012/main" name="Office Theme" id="{62F939B6-93AF-4DB8-9C6B-D6C7DFDC589F}" vid="{4A3C46E8-61CC-4603-A589-7422A47A8E4A}"/>
+    </a:ext>
+  </a:extLst>
 </a:theme>
 </file>
--- a/docs/output/PJ1测试汇报_成果展示风格版_优化版.pptx
+++ b/docs/output/PJ1测试汇报_成果展示风格版_优化版.pptx
@@ -5,32 +5,32 @@
     <p:sldMasterId id="2147483648" r:id="rId1"/>
   </p:sldMasterIdLst>
   <p:sldIdLst>
-    <p:sldId id="256" r:id="rId3"/>
-    <p:sldId id="257" r:id="rId4"/>
-    <p:sldId id="258" r:id="rId5"/>
-    <p:sldId id="259" r:id="rId6"/>
-    <p:sldId id="260" r:id="rId7"/>
-    <p:sldId id="261" r:id="rId8"/>
-    <p:sldId id="262" r:id="rId9"/>
-    <p:sldId id="263" r:id="rId10"/>
-    <p:sldId id="264" r:id="rId11"/>
-    <p:sldId id="265" r:id="rId12"/>
-    <p:sldId id="266" r:id="rId13"/>
-    <p:sldId id="267" r:id="rId14"/>
-    <p:sldId id="268" r:id="rId15"/>
-    <p:sldId id="269" r:id="rId16"/>
-    <p:sldId id="270" r:id="rId17"/>
-    <p:sldId id="271" r:id="rId18"/>
-    <p:sldId id="272" r:id="rId19"/>
-    <p:sldId id="273" r:id="rId20"/>
-    <p:sldId id="274" r:id="rId21"/>
-    <p:sldId id="275" r:id="rId22"/>
-    <p:sldId id="276" r:id="rId23"/>
+    <p:sldId id="256" r:id="rId2"/>
+    <p:sldId id="257" r:id="rId3"/>
+    <p:sldId id="258" r:id="rId4"/>
+    <p:sldId id="259" r:id="rId5"/>
+    <p:sldId id="260" r:id="rId6"/>
+    <p:sldId id="261" r:id="rId7"/>
+    <p:sldId id="262" r:id="rId8"/>
+    <p:sldId id="263" r:id="rId9"/>
+    <p:sldId id="264" r:id="rId10"/>
+    <p:sldId id="265" r:id="rId11"/>
+    <p:sldId id="266" r:id="rId12"/>
+    <p:sldId id="267" r:id="rId13"/>
+    <p:sldId id="268" r:id="rId14"/>
+    <p:sldId id="269" r:id="rId15"/>
+    <p:sldId id="270" r:id="rId16"/>
+    <p:sldId id="271" r:id="rId17"/>
+    <p:sldId id="272" r:id="rId18"/>
+    <p:sldId id="273" r:id="rId19"/>
+    <p:sldId id="274" r:id="rId20"/>
+    <p:sldId id="275" r:id="rId21"/>
+    <p:sldId id="276" r:id="rId22"/>
   </p:sldIdLst>
-  <p:sldSz cx="12191365" cy="6858000" type="screen4x3"/>
+  <p:sldSz cx="12192000" cy="6858000"/>
   <p:notesSz cx="6858000" cy="9144000"/>
   <p:custDataLst>
-    <p:tags r:id="rId27"/>
+    <p:tags r:id="rId23"/>
   </p:custDataLst>
   <p:defaultTextStyle>
     <a:defPPr>
@@ -184,10 +184,9 @@
           <a:lstStyle/>
           <a:p>
             <a:r>
-              <a:rPr lang="en-US" smtClean="0"/>
+              <a:rPr lang="en-US"/>
               <a:t>Click to edit Master title style</a:t>
             </a:r>
-            <a:endParaRPr lang="en-US"/>
           </a:p>
         </p:txBody>
       </p:sp>
@@ -303,10 +302,9 @@
           </a:lstStyle>
           <a:p>
             <a:r>
-              <a:rPr lang="en-US" smtClean="0"/>
+              <a:rPr lang="en-US"/>
               <a:t>Click to edit Master subtitle style</a:t>
             </a:r>
-            <a:endParaRPr lang="en-US"/>
           </a:p>
         </p:txBody>
       </p:sp>
@@ -327,6 +325,7 @@
           <a:p>
             <a:fld id="{5BCAD085-E8A6-8845-BD4E-CB4CCA059FC4}" type="datetimeFigureOut">
               <a:rPr lang="en-US" smtClean="0"/>
+              <a:t>4/23/2026</a:t>
             </a:fld>
             <a:endParaRPr lang="en-US"/>
           </a:p>
@@ -368,6 +367,7 @@
           <a:p>
             <a:fld id="{C1FF6DA9-008F-8B48-92A6-B652298478BF}" type="slidenum">
               <a:rPr lang="en-US" smtClean="0"/>
+              <a:t>‹#›</a:t>
             </a:fld>
             <a:endParaRPr lang="en-US"/>
           </a:p>
@@ -414,10 +414,9 @@
           <a:lstStyle/>
           <a:p>
             <a:r>
-              <a:rPr lang="en-US" smtClean="0"/>
+              <a:rPr lang="en-US"/>
               <a:t>Click to edit Master title style</a:t>
             </a:r>
-            <a:endParaRPr lang="en-US"/>
           </a:p>
         </p:txBody>
       </p:sp>
@@ -438,42 +437,37 @@
           <a:p>
             <a:pPr lvl="0"/>
             <a:r>
-              <a:rPr lang="en-US" smtClean="0"/>
+              <a:rPr lang="en-US"/>
               <a:t>Click to edit Master text styles</a:t>
             </a:r>
-            <a:endParaRPr lang="en-US" smtClean="0"/>
           </a:p>
           <a:p>
             <a:pPr lvl="1"/>
             <a:r>
-              <a:rPr lang="en-US" smtClean="0"/>
+              <a:rPr lang="en-US"/>
               <a:t>Second level</a:t>
             </a:r>
-            <a:endParaRPr lang="en-US" smtClean="0"/>
           </a:p>
           <a:p>
             <a:pPr lvl="2"/>
             <a:r>
-              <a:rPr lang="en-US" smtClean="0"/>
+              <a:rPr lang="en-US"/>
               <a:t>Third level</a:t>
             </a:r>
-            <a:endParaRPr lang="en-US" smtClean="0"/>
           </a:p>
           <a:p>
             <a:pPr lvl="3"/>
             <a:r>
-              <a:rPr lang="en-US" smtClean="0"/>
+              <a:rPr lang="en-US"/>
               <a:t>Fourth level</a:t>
             </a:r>
-            <a:endParaRPr lang="en-US" smtClean="0"/>
           </a:p>
           <a:p>
             <a:pPr lvl="4"/>
             <a:r>
-              <a:rPr lang="en-US" smtClean="0"/>
+              <a:rPr lang="en-US"/>
               <a:t>Fifth level</a:t>
             </a:r>
-            <a:endParaRPr lang="en-US"/>
           </a:p>
         </p:txBody>
       </p:sp>
@@ -494,6 +488,7 @@
           <a:p>
             <a:fld id="{5BCAD085-E8A6-8845-BD4E-CB4CCA059FC4}" type="datetimeFigureOut">
               <a:rPr lang="en-US" smtClean="0"/>
+              <a:t>4/23/2026</a:t>
             </a:fld>
             <a:endParaRPr lang="en-US"/>
           </a:p>
@@ -535,6 +530,7 @@
           <a:p>
             <a:fld id="{C1FF6DA9-008F-8B48-92A6-B652298478BF}" type="slidenum">
               <a:rPr lang="en-US" smtClean="0"/>
+              <a:t>‹#›</a:t>
             </a:fld>
             <a:endParaRPr lang="en-US"/>
           </a:p>
@@ -586,10 +582,9 @@
           <a:lstStyle/>
           <a:p>
             <a:r>
-              <a:rPr lang="en-US" smtClean="0"/>
+              <a:rPr lang="en-US"/>
               <a:t>Click to edit Master title style</a:t>
             </a:r>
-            <a:endParaRPr lang="en-US"/>
           </a:p>
         </p:txBody>
       </p:sp>
@@ -615,42 +610,37 @@
           <a:p>
             <a:pPr lvl="0"/>
             <a:r>
-              <a:rPr lang="en-US" smtClean="0"/>
+              <a:rPr lang="en-US"/>
               <a:t>Click to edit Master text styles</a:t>
             </a:r>
-            <a:endParaRPr lang="en-US" smtClean="0"/>
           </a:p>
           <a:p>
             <a:pPr lvl="1"/>
             <a:r>
-              <a:rPr lang="en-US" smtClean="0"/>
+              <a:rPr lang="en-US"/>
               <a:t>Second level</a:t>
             </a:r>
-            <a:endParaRPr lang="en-US" smtClean="0"/>
           </a:p>
           <a:p>
             <a:pPr lvl="2"/>
             <a:r>
-              <a:rPr lang="en-US" smtClean="0"/>
+              <a:rPr lang="en-US"/>
               <a:t>Third level</a:t>
             </a:r>
-            <a:endParaRPr lang="en-US" smtClean="0"/>
           </a:p>
           <a:p>
             <a:pPr lvl="3"/>
             <a:r>
-              <a:rPr lang="en-US" smtClean="0"/>
+              <a:rPr lang="en-US"/>
               <a:t>Fourth level</a:t>
             </a:r>
-            <a:endParaRPr lang="en-US" smtClean="0"/>
           </a:p>
           <a:p>
             <a:pPr lvl="4"/>
             <a:r>
-              <a:rPr lang="en-US" smtClean="0"/>
+              <a:rPr lang="en-US"/>
               <a:t>Fifth level</a:t>
             </a:r>
-            <a:endParaRPr lang="en-US"/>
           </a:p>
         </p:txBody>
       </p:sp>
@@ -671,6 +661,7 @@
           <a:p>
             <a:fld id="{5BCAD085-E8A6-8845-BD4E-CB4CCA059FC4}" type="datetimeFigureOut">
               <a:rPr lang="en-US" smtClean="0"/>
+              <a:t>4/23/2026</a:t>
             </a:fld>
             <a:endParaRPr lang="en-US"/>
           </a:p>
@@ -712,6 +703,7 @@
           <a:p>
             <a:fld id="{C1FF6DA9-008F-8B48-92A6-B652298478BF}" type="slidenum">
               <a:rPr lang="en-US" smtClean="0"/>
+              <a:t>‹#›</a:t>
             </a:fld>
             <a:endParaRPr lang="en-US"/>
           </a:p>
@@ -758,10 +750,9 @@
           <a:lstStyle/>
           <a:p>
             <a:r>
-              <a:rPr lang="en-US" smtClean="0"/>
+              <a:rPr lang="en-US"/>
               <a:t>Click to edit Master title style</a:t>
             </a:r>
-            <a:endParaRPr lang="en-US"/>
           </a:p>
         </p:txBody>
       </p:sp>
@@ -782,42 +773,37 @@
           <a:p>
             <a:pPr lvl="0"/>
             <a:r>
-              <a:rPr lang="en-US" smtClean="0"/>
+              <a:rPr lang="en-US"/>
               <a:t>Click to edit Master text styles</a:t>
             </a:r>
-            <a:endParaRPr lang="en-US" smtClean="0"/>
           </a:p>
           <a:p>
             <a:pPr lvl="1"/>
             <a:r>
-              <a:rPr lang="en-US" smtClean="0"/>
+              <a:rPr lang="en-US"/>
               <a:t>Second level</a:t>
             </a:r>
-            <a:endParaRPr lang="en-US" smtClean="0"/>
           </a:p>
           <a:p>
             <a:pPr lvl="2"/>
             <a:r>
-              <a:rPr lang="en-US" smtClean="0"/>
+              <a:rPr lang="en-US"/>
               <a:t>Third level</a:t>
             </a:r>
-            <a:endParaRPr lang="en-US" smtClean="0"/>
           </a:p>
           <a:p>
             <a:pPr lvl="3"/>
             <a:r>
-              <a:rPr lang="en-US" smtClean="0"/>
+              <a:rPr lang="en-US"/>
               <a:t>Fourth level</a:t>
             </a:r>
-            <a:endParaRPr lang="en-US" smtClean="0"/>
           </a:p>
           <a:p>
             <a:pPr lvl="4"/>
             <a:r>
-              <a:rPr lang="en-US" smtClean="0"/>
+              <a:rPr lang="en-US"/>
               <a:t>Fifth level</a:t>
             </a:r>
-            <a:endParaRPr lang="en-US"/>
           </a:p>
         </p:txBody>
       </p:sp>
@@ -838,6 +824,7 @@
           <a:p>
             <a:fld id="{5BCAD085-E8A6-8845-BD4E-CB4CCA059FC4}" type="datetimeFigureOut">
               <a:rPr lang="en-US" smtClean="0"/>
+              <a:t>4/23/2026</a:t>
             </a:fld>
             <a:endParaRPr lang="en-US"/>
           </a:p>
@@ -879,6 +866,7 @@
           <a:p>
             <a:fld id="{C1FF6DA9-008F-8B48-92A6-B652298478BF}" type="slidenum">
               <a:rPr lang="en-US" smtClean="0"/>
+              <a:t>‹#›</a:t>
             </a:fld>
             <a:endParaRPr lang="en-US"/>
           </a:p>
@@ -934,10 +922,9 @@
           </a:lstStyle>
           <a:p>
             <a:r>
-              <a:rPr lang="en-US" smtClean="0"/>
+              <a:rPr lang="en-US"/>
               <a:t>Click to edit Master title style</a:t>
             </a:r>
-            <a:endParaRPr lang="en-US"/>
           </a:p>
         </p:txBody>
       </p:sp>
@@ -1054,10 +1041,9 @@
           <a:p>
             <a:pPr lvl="0"/>
             <a:r>
-              <a:rPr lang="en-US" smtClean="0"/>
+              <a:rPr lang="en-US"/>
               <a:t>Click to edit Master text styles</a:t>
             </a:r>
-            <a:endParaRPr lang="en-US" smtClean="0"/>
           </a:p>
         </p:txBody>
       </p:sp>
@@ -1078,6 +1064,7 @@
           <a:p>
             <a:fld id="{5BCAD085-E8A6-8845-BD4E-CB4CCA059FC4}" type="datetimeFigureOut">
               <a:rPr lang="en-US" smtClean="0"/>
+              <a:t>4/23/2026</a:t>
             </a:fld>
             <a:endParaRPr lang="en-US"/>
           </a:p>
@@ -1119,6 +1106,7 @@
           <a:p>
             <a:fld id="{C1FF6DA9-008F-8B48-92A6-B652298478BF}" type="slidenum">
               <a:rPr lang="en-US" smtClean="0"/>
+              <a:t>‹#›</a:t>
             </a:fld>
             <a:endParaRPr lang="en-US"/>
           </a:p>
@@ -1165,10 +1153,9 @@
           <a:lstStyle/>
           <a:p>
             <a:r>
-              <a:rPr lang="en-US" smtClean="0"/>
+              <a:rPr lang="en-US"/>
               <a:t>Click to edit Master title style</a:t>
             </a:r>
-            <a:endParaRPr lang="en-US"/>
           </a:p>
         </p:txBody>
       </p:sp>
@@ -1222,42 +1209,37 @@
           <a:p>
             <a:pPr lvl="0"/>
             <a:r>
-              <a:rPr lang="en-US" smtClean="0"/>
+              <a:rPr lang="en-US"/>
               <a:t>Click to edit Master text styles</a:t>
             </a:r>
-            <a:endParaRPr lang="en-US" smtClean="0"/>
           </a:p>
           <a:p>
             <a:pPr lvl="1"/>
             <a:r>
-              <a:rPr lang="en-US" smtClean="0"/>
+              <a:rPr lang="en-US"/>
               <a:t>Second level</a:t>
             </a:r>
-            <a:endParaRPr lang="en-US" smtClean="0"/>
           </a:p>
           <a:p>
             <a:pPr lvl="2"/>
             <a:r>
-              <a:rPr lang="en-US" smtClean="0"/>
+              <a:rPr lang="en-US"/>
               <a:t>Third level</a:t>
             </a:r>
-            <a:endParaRPr lang="en-US" smtClean="0"/>
           </a:p>
           <a:p>
             <a:pPr lvl="3"/>
             <a:r>
-              <a:rPr lang="en-US" smtClean="0"/>
+              <a:rPr lang="en-US"/>
               <a:t>Fourth level</a:t>
             </a:r>
-            <a:endParaRPr lang="en-US" smtClean="0"/>
           </a:p>
           <a:p>
             <a:pPr lvl="4"/>
             <a:r>
-              <a:rPr lang="en-US" smtClean="0"/>
+              <a:rPr lang="en-US"/>
               <a:t>Fifth level</a:t>
             </a:r>
-            <a:endParaRPr lang="en-US"/>
           </a:p>
         </p:txBody>
       </p:sp>
@@ -1311,42 +1293,37 @@
           <a:p>
             <a:pPr lvl="0"/>
             <a:r>
-              <a:rPr lang="en-US" smtClean="0"/>
+              <a:rPr lang="en-US"/>
               <a:t>Click to edit Master text styles</a:t>
             </a:r>
-            <a:endParaRPr lang="en-US" smtClean="0"/>
           </a:p>
           <a:p>
             <a:pPr lvl="1"/>
             <a:r>
-              <a:rPr lang="en-US" smtClean="0"/>
+              <a:rPr lang="en-US"/>
               <a:t>Second level</a:t>
             </a:r>
-            <a:endParaRPr lang="en-US" smtClean="0"/>
           </a:p>
           <a:p>
             <a:pPr lvl="2"/>
             <a:r>
-              <a:rPr lang="en-US" smtClean="0"/>
+              <a:rPr lang="en-US"/>
               <a:t>Third level</a:t>
             </a:r>
-            <a:endParaRPr lang="en-US" smtClean="0"/>
           </a:p>
           <a:p>
             <a:pPr lvl="3"/>
             <a:r>
-              <a:rPr lang="en-US" smtClean="0"/>
+              <a:rPr lang="en-US"/>
               <a:t>Fourth level</a:t>
             </a:r>
-            <a:endParaRPr lang="en-US" smtClean="0"/>
           </a:p>
           <a:p>
             <a:pPr lvl="4"/>
             <a:r>
-              <a:rPr lang="en-US" smtClean="0"/>
+              <a:rPr lang="en-US"/>
               <a:t>Fifth level</a:t>
             </a:r>
-            <a:endParaRPr lang="en-US"/>
           </a:p>
         </p:txBody>
       </p:sp>
@@ -1367,6 +1344,7 @@
           <a:p>
             <a:fld id="{5BCAD085-E8A6-8845-BD4E-CB4CCA059FC4}" type="datetimeFigureOut">
               <a:rPr lang="en-US" smtClean="0"/>
+              <a:t>4/23/2026</a:t>
             </a:fld>
             <a:endParaRPr lang="en-US"/>
           </a:p>
@@ -1408,6 +1386,7 @@
           <a:p>
             <a:fld id="{C1FF6DA9-008F-8B48-92A6-B652298478BF}" type="slidenum">
               <a:rPr lang="en-US" smtClean="0"/>
+              <a:t>‹#›</a:t>
             </a:fld>
             <a:endParaRPr lang="en-US"/>
           </a:p>
@@ -1458,10 +1437,9 @@
           </a:lstStyle>
           <a:p>
             <a:r>
-              <a:rPr lang="en-US" smtClean="0"/>
+              <a:rPr lang="en-US"/>
               <a:t>Click to edit Master title style</a:t>
             </a:r>
-            <a:endParaRPr lang="en-US"/>
           </a:p>
         </p:txBody>
       </p:sp>
@@ -1524,10 +1502,9 @@
           <a:p>
             <a:pPr lvl="0"/>
             <a:r>
-              <a:rPr lang="en-US" smtClean="0"/>
+              <a:rPr lang="en-US"/>
               <a:t>Click to edit Master text styles</a:t>
             </a:r>
-            <a:endParaRPr lang="en-US" smtClean="0"/>
           </a:p>
         </p:txBody>
       </p:sp>
@@ -1581,42 +1558,37 @@
           <a:p>
             <a:pPr lvl="0"/>
             <a:r>
-              <a:rPr lang="en-US" smtClean="0"/>
+              <a:rPr lang="en-US"/>
               <a:t>Click to edit Master text styles</a:t>
             </a:r>
-            <a:endParaRPr lang="en-US" smtClean="0"/>
           </a:p>
           <a:p>
             <a:pPr lvl="1"/>
             <a:r>
-              <a:rPr lang="en-US" smtClean="0"/>
+              <a:rPr lang="en-US"/>
               <a:t>Second level</a:t>
             </a:r>
-            <a:endParaRPr lang="en-US" smtClean="0"/>
           </a:p>
           <a:p>
             <a:pPr lvl="2"/>
             <a:r>
-              <a:rPr lang="en-US" smtClean="0"/>
+              <a:rPr lang="en-US"/>
               <a:t>Third level</a:t>
             </a:r>
-            <a:endParaRPr lang="en-US" smtClean="0"/>
           </a:p>
           <a:p>
             <a:pPr lvl="3"/>
             <a:r>
-              <a:rPr lang="en-US" smtClean="0"/>
+              <a:rPr lang="en-US"/>
               <a:t>Fourth level</a:t>
             </a:r>
-            <a:endParaRPr lang="en-US" smtClean="0"/>
           </a:p>
           <a:p>
             <a:pPr lvl="4"/>
             <a:r>
-              <a:rPr lang="en-US" smtClean="0"/>
+              <a:rPr lang="en-US"/>
               <a:t>Fifth level</a:t>
             </a:r>
-            <a:endParaRPr lang="en-US"/>
           </a:p>
         </p:txBody>
       </p:sp>
@@ -1679,10 +1651,9 @@
           <a:p>
             <a:pPr lvl="0"/>
             <a:r>
-              <a:rPr lang="en-US" smtClean="0"/>
+              <a:rPr lang="en-US"/>
               <a:t>Click to edit Master text styles</a:t>
             </a:r>
-            <a:endParaRPr lang="en-US" smtClean="0"/>
           </a:p>
         </p:txBody>
       </p:sp>
@@ -1736,42 +1707,37 @@
           <a:p>
             <a:pPr lvl="0"/>
             <a:r>
-              <a:rPr lang="en-US" smtClean="0"/>
+              <a:rPr lang="en-US"/>
               <a:t>Click to edit Master text styles</a:t>
             </a:r>
-            <a:endParaRPr lang="en-US" smtClean="0"/>
           </a:p>
           <a:p>
             <a:pPr lvl="1"/>
             <a:r>
-              <a:rPr lang="en-US" smtClean="0"/>
+              <a:rPr lang="en-US"/>
               <a:t>Second level</a:t>
             </a:r>
-            <a:endParaRPr lang="en-US" smtClean="0"/>
           </a:p>
           <a:p>
             <a:pPr lvl="2"/>
             <a:r>
-              <a:rPr lang="en-US" smtClean="0"/>
+              <a:rPr lang="en-US"/>
               <a:t>Third level</a:t>
             </a:r>
-            <a:endParaRPr lang="en-US" smtClean="0"/>
           </a:p>
           <a:p>
             <a:pPr lvl="3"/>
             <a:r>
-              <a:rPr lang="en-US" smtClean="0"/>
+              <a:rPr lang="en-US"/>
               <a:t>Fourth level</a:t>
             </a:r>
-            <a:endParaRPr lang="en-US" smtClean="0"/>
           </a:p>
           <a:p>
             <a:pPr lvl="4"/>
             <a:r>
-              <a:rPr lang="en-US" smtClean="0"/>
+              <a:rPr lang="en-US"/>
               <a:t>Fifth level</a:t>
             </a:r>
-            <a:endParaRPr lang="en-US"/>
           </a:p>
         </p:txBody>
       </p:sp>
@@ -1792,6 +1758,7 @@
           <a:p>
             <a:fld id="{5BCAD085-E8A6-8845-BD4E-CB4CCA059FC4}" type="datetimeFigureOut">
               <a:rPr lang="en-US" smtClean="0"/>
+              <a:t>4/23/2026</a:t>
             </a:fld>
             <a:endParaRPr lang="en-US"/>
           </a:p>
@@ -1833,6 +1800,7 @@
           <a:p>
             <a:fld id="{C1FF6DA9-008F-8B48-92A6-B652298478BF}" type="slidenum">
               <a:rPr lang="en-US" smtClean="0"/>
+              <a:t>‹#›</a:t>
             </a:fld>
             <a:endParaRPr lang="en-US"/>
           </a:p>
@@ -1879,10 +1847,9 @@
           <a:lstStyle/>
           <a:p>
             <a:r>
-              <a:rPr lang="en-US" smtClean="0"/>
+              <a:rPr lang="en-US"/>
               <a:t>Click to edit Master title style</a:t>
             </a:r>
-            <a:endParaRPr lang="en-US"/>
           </a:p>
         </p:txBody>
       </p:sp>
@@ -1903,6 +1870,7 @@
           <a:p>
             <a:fld id="{5BCAD085-E8A6-8845-BD4E-CB4CCA059FC4}" type="datetimeFigureOut">
               <a:rPr lang="en-US" smtClean="0"/>
+              <a:t>4/23/2026</a:t>
             </a:fld>
             <a:endParaRPr lang="en-US"/>
           </a:p>
@@ -1944,6 +1912,7 @@
           <a:p>
             <a:fld id="{C1FF6DA9-008F-8B48-92A6-B652298478BF}" type="slidenum">
               <a:rPr lang="en-US" smtClean="0"/>
+              <a:t>‹#›</a:t>
             </a:fld>
             <a:endParaRPr lang="en-US"/>
           </a:p>
@@ -1991,6 +1960,7 @@
           <a:p>
             <a:fld id="{5BCAD085-E8A6-8845-BD4E-CB4CCA059FC4}" type="datetimeFigureOut">
               <a:rPr lang="en-US" smtClean="0"/>
+              <a:t>4/23/2026</a:t>
             </a:fld>
             <a:endParaRPr lang="en-US"/>
           </a:p>
@@ -2032,6 +2002,7 @@
           <a:p>
             <a:fld id="{C1FF6DA9-008F-8B48-92A6-B652298478BF}" type="slidenum">
               <a:rPr lang="en-US" smtClean="0"/>
+              <a:t>‹#›</a:t>
             </a:fld>
             <a:endParaRPr lang="en-US"/>
           </a:p>
@@ -2087,10 +2058,9 @@
           </a:lstStyle>
           <a:p>
             <a:r>
-              <a:rPr lang="en-US" smtClean="0"/>
+              <a:rPr lang="en-US"/>
               <a:t>Click to edit Master title style</a:t>
             </a:r>
-            <a:endParaRPr lang="en-US"/>
           </a:p>
         </p:txBody>
       </p:sp>
@@ -2144,42 +2114,37 @@
           <a:p>
             <a:pPr lvl="0"/>
             <a:r>
-              <a:rPr lang="en-US" smtClean="0"/>
+              <a:rPr lang="en-US"/>
               <a:t>Click to edit Master text styles</a:t>
             </a:r>
-            <a:endParaRPr lang="en-US" smtClean="0"/>
           </a:p>
           <a:p>
             <a:pPr lvl="1"/>
             <a:r>
-              <a:rPr lang="en-US" smtClean="0"/>
+              <a:rPr lang="en-US"/>
               <a:t>Second level</a:t>
             </a:r>
-            <a:endParaRPr lang="en-US" smtClean="0"/>
           </a:p>
           <a:p>
             <a:pPr lvl="2"/>
             <a:r>
-              <a:rPr lang="en-US" smtClean="0"/>
+              <a:rPr lang="en-US"/>
               <a:t>Third level</a:t>
             </a:r>
-            <a:endParaRPr lang="en-US" smtClean="0"/>
           </a:p>
           <a:p>
             <a:pPr lvl="3"/>
             <a:r>
-              <a:rPr lang="en-US" smtClean="0"/>
+              <a:rPr lang="en-US"/>
               <a:t>Fourth level</a:t>
             </a:r>
-            <a:endParaRPr lang="en-US" smtClean="0"/>
           </a:p>
           <a:p>
             <a:pPr lvl="4"/>
             <a:r>
-              <a:rPr lang="en-US" smtClean="0"/>
+              <a:rPr lang="en-US"/>
               <a:t>Fifth level</a:t>
             </a:r>
-            <a:endParaRPr lang="en-US"/>
           </a:p>
         </p:txBody>
       </p:sp>
@@ -2242,10 +2207,9 @@
           <a:p>
             <a:pPr lvl="0"/>
             <a:r>
-              <a:rPr lang="en-US" smtClean="0"/>
+              <a:rPr lang="en-US"/>
               <a:t>Click to edit Master text styles</a:t>
             </a:r>
-            <a:endParaRPr lang="en-US" smtClean="0"/>
           </a:p>
         </p:txBody>
       </p:sp>
@@ -2266,6 +2230,7 @@
           <a:p>
             <a:fld id="{5BCAD085-E8A6-8845-BD4E-CB4CCA059FC4}" type="datetimeFigureOut">
               <a:rPr lang="en-US" smtClean="0"/>
+              <a:t>4/23/2026</a:t>
             </a:fld>
             <a:endParaRPr lang="en-US"/>
           </a:p>
@@ -2307,6 +2272,7 @@
           <a:p>
             <a:fld id="{C1FF6DA9-008F-8B48-92A6-B652298478BF}" type="slidenum">
               <a:rPr lang="en-US" smtClean="0"/>
+              <a:t>‹#›</a:t>
             </a:fld>
             <a:endParaRPr lang="en-US"/>
           </a:p>
@@ -2362,10 +2328,9 @@
           </a:lstStyle>
           <a:p>
             <a:r>
-              <a:rPr lang="en-US" smtClean="0"/>
+              <a:rPr lang="en-US"/>
               <a:t>Click to edit Master title style</a:t>
             </a:r>
-            <a:endParaRPr lang="en-US"/>
           </a:p>
         </p:txBody>
       </p:sp>
@@ -2489,10 +2454,9 @@
           <a:p>
             <a:pPr lvl="0"/>
             <a:r>
-              <a:rPr lang="en-US" smtClean="0"/>
+              <a:rPr lang="en-US"/>
               <a:t>Click to edit Master text styles</a:t>
             </a:r>
-            <a:endParaRPr lang="en-US" smtClean="0"/>
           </a:p>
         </p:txBody>
       </p:sp>
@@ -2513,6 +2477,7 @@
           <a:p>
             <a:fld id="{5BCAD085-E8A6-8845-BD4E-CB4CCA059FC4}" type="datetimeFigureOut">
               <a:rPr lang="en-US" smtClean="0"/>
+              <a:t>4/23/2026</a:t>
             </a:fld>
             <a:endParaRPr lang="en-US"/>
           </a:p>
@@ -2554,6 +2519,7 @@
           <a:p>
             <a:fld id="{C1FF6DA9-008F-8B48-92A6-B652298478BF}" type="slidenum">
               <a:rPr lang="en-US" smtClean="0"/>
+              <a:t>‹#›</a:t>
             </a:fld>
             <a:endParaRPr lang="en-US"/>
           </a:p>
@@ -2615,10 +2581,9 @@
           <a:lstStyle/>
           <a:p>
             <a:r>
-              <a:rPr lang="en-US" smtClean="0"/>
+              <a:rPr lang="en-US"/>
               <a:t>Click to edit Master title style</a:t>
             </a:r>
-            <a:endParaRPr lang="en-US"/>
           </a:p>
         </p:txBody>
       </p:sp>
@@ -2649,42 +2614,37 @@
           <a:p>
             <a:pPr lvl="0"/>
             <a:r>
-              <a:rPr lang="en-US" smtClean="0"/>
+              <a:rPr lang="en-US"/>
               <a:t>Click to edit Master text styles</a:t>
             </a:r>
-            <a:endParaRPr lang="en-US" smtClean="0"/>
           </a:p>
           <a:p>
             <a:pPr lvl="1"/>
             <a:r>
-              <a:rPr lang="en-US" smtClean="0"/>
+              <a:rPr lang="en-US"/>
               <a:t>Second level</a:t>
             </a:r>
-            <a:endParaRPr lang="en-US" smtClean="0"/>
           </a:p>
           <a:p>
             <a:pPr lvl="2"/>
             <a:r>
-              <a:rPr lang="en-US" smtClean="0"/>
+              <a:rPr lang="en-US"/>
               <a:t>Third level</a:t>
             </a:r>
-            <a:endParaRPr lang="en-US" smtClean="0"/>
           </a:p>
           <a:p>
             <a:pPr lvl="3"/>
             <a:r>
-              <a:rPr lang="en-US" smtClean="0"/>
+              <a:rPr lang="en-US"/>
               <a:t>Fourth level</a:t>
             </a:r>
-            <a:endParaRPr lang="en-US" smtClean="0"/>
           </a:p>
           <a:p>
             <a:pPr lvl="4"/>
             <a:r>
-              <a:rPr lang="en-US" smtClean="0"/>
+              <a:rPr lang="en-US"/>
               <a:t>Fifth level</a:t>
             </a:r>
-            <a:endParaRPr lang="en-US"/>
           </a:p>
         </p:txBody>
       </p:sp>
@@ -2723,6 +2683,7 @@
           <a:p>
             <a:fld id="{5BCAD085-E8A6-8845-BD4E-CB4CCA059FC4}" type="datetimeFigureOut">
               <a:rPr lang="en-US" smtClean="0"/>
+              <a:t>4/23/2026</a:t>
             </a:fld>
             <a:endParaRPr lang="en-US"/>
           </a:p>
@@ -2800,6 +2761,7 @@
           <a:p>
             <a:fld id="{C1FF6DA9-008F-8B48-92A6-B652298478BF}" type="slidenum">
               <a:rPr lang="en-US" smtClean="0"/>
+              <a:t>‹#›</a:t>
             </a:fld>
             <a:endParaRPr lang="en-US"/>
           </a:p>
@@ -3083,7 +3045,14 @@
         <p:cNvGrpSpPr/>
         <p:nvPr/>
       </p:nvGrpSpPr>
-      <p:grpSpPr/>
+      <p:grpSpPr>
+        <a:xfrm>
+          <a:off x="0" y="0"/>
+          <a:ext cx="0" cy="0"/>
+          <a:chOff x="0" y="0"/>
+          <a:chExt cx="0" cy="0"/>
+        </a:xfrm>
+      </p:grpSpPr>
       <p:sp>
         <p:nvSpPr>
           <p:cNvPr id="2" name="Rectangle 1"/>
@@ -3124,6 +3093,7 @@
           <a:lstStyle/>
           <a:p>
             <a:pPr algn="ctr"/>
+            <a:endParaRPr/>
           </a:p>
         </p:txBody>
       </p:sp>
@@ -3167,6 +3137,7 @@
           <a:lstStyle/>
           <a:p>
             <a:pPr algn="ctr"/>
+            <a:endParaRPr/>
           </a:p>
         </p:txBody>
       </p:sp>
@@ -3210,6 +3181,7 @@
           <a:lstStyle/>
           <a:p>
             <a:pPr algn="ctr"/>
+            <a:endParaRPr/>
           </a:p>
         </p:txBody>
       </p:sp>
@@ -3253,6 +3225,7 @@
           <a:lstStyle/>
           <a:p>
             <a:pPr algn="ctr"/>
+            <a:endParaRPr/>
           </a:p>
         </p:txBody>
       </p:sp>
@@ -3296,6 +3269,7 @@
           <a:lstStyle/>
           <a:p>
             <a:pPr algn="ctr"/>
+            <a:endParaRPr/>
           </a:p>
         </p:txBody>
       </p:sp>
@@ -3339,6 +3313,7 @@
           <a:lstStyle/>
           <a:p>
             <a:pPr algn="ctr"/>
+            <a:endParaRPr/>
           </a:p>
         </p:txBody>
       </p:sp>
@@ -3382,6 +3357,7 @@
           <a:lstStyle/>
           <a:p>
             <a:pPr algn="ctr"/>
+            <a:endParaRPr/>
           </a:p>
         </p:txBody>
       </p:sp>
@@ -3433,80 +3409,177 @@
               </a:rPr>
               <a:t>  测试成果展示</a:t>
             </a:r>
-            <a:endParaRPr sz="4400" b="1">
+          </a:p>
+        </p:txBody>
+      </p:sp>
+      <p:sp>
+        <p:nvSpPr>
+          <p:cNvPr id="11" name="TextBox 10"/>
+          <p:cNvSpPr txBox="1"/>
+          <p:nvPr/>
+        </p:nvSpPr>
+        <p:spPr>
+          <a:xfrm>
+            <a:off x="1097280" y="3108960"/>
+            <a:ext cx="9966960" cy="822960"/>
+          </a:xfrm>
+          <a:prstGeom prst="rect">
+            <a:avLst/>
+          </a:prstGeom>
+          <a:noFill/>
+        </p:spPr>
+        <p:txBody>
+          <a:bodyPr wrap="none">
+            <a:noAutofit/>
+          </a:bodyPr>
+          <a:lstStyle/>
+          <a:p>
+            <a:pPr algn="ctr"/>
+            <a:r>
+              <a:rPr sz="2800" b="0" dirty="0">
+                <a:solidFill>
+                  <a:srgbClr val="000000"/>
+                </a:solidFill>
+                <a:latin typeface="微软雅黑" panose="020B0503020204020204" charset="-122"/>
+              </a:rPr>
+              <a:t>第  </a:t>
+            </a:r>
+            <a:r>
+              <a:rPr sz="2800" b="0" dirty="0" err="1">
+                <a:solidFill>
+                  <a:srgbClr val="000000"/>
+                </a:solidFill>
+                <a:latin typeface="微软雅黑" panose="020B0503020204020204" charset="-122"/>
+              </a:rPr>
+              <a:t>小组</a:t>
+            </a:r>
+            <a:r>
+              <a:rPr sz="2800" b="0" dirty="0">
+                <a:solidFill>
+                  <a:srgbClr val="000000"/>
+                </a:solidFill>
+                <a:latin typeface="微软雅黑" panose="020B0503020204020204" charset="-122"/>
+              </a:rPr>
+              <a:t>   </a:t>
+            </a:r>
+            <a:r>
+              <a:rPr sz="2800" b="0" dirty="0" err="1">
+                <a:solidFill>
+                  <a:srgbClr val="000000"/>
+                </a:solidFill>
+                <a:latin typeface="微软雅黑" panose="020B0503020204020204" charset="-122"/>
+              </a:rPr>
+              <a:t>胡彬泽</a:t>
+            </a:r>
+            <a:r>
+              <a:rPr sz="2800" b="0" dirty="0">
+                <a:solidFill>
+                  <a:srgbClr val="000000"/>
+                </a:solidFill>
+                <a:latin typeface="微软雅黑" panose="020B0503020204020204" charset="-122"/>
+              </a:rPr>
+              <a:t> </a:t>
+            </a:r>
+            <a:r>
+              <a:rPr sz="2800" b="0" dirty="0" err="1">
+                <a:solidFill>
+                  <a:srgbClr val="000000"/>
+                </a:solidFill>
+                <a:latin typeface="微软雅黑" panose="020B0503020204020204" charset="-122"/>
+              </a:rPr>
+              <a:t>沙华煜</a:t>
+            </a:r>
+            <a:r>
+              <a:rPr sz="2800" b="0" dirty="0">
+                <a:solidFill>
+                  <a:srgbClr val="000000"/>
+                </a:solidFill>
+                <a:latin typeface="微软雅黑" panose="020B0503020204020204" charset="-122"/>
+              </a:rPr>
+              <a:t> </a:t>
+            </a:r>
+            <a:r>
+              <a:rPr sz="2800" b="0" dirty="0" err="1">
+                <a:solidFill>
+                  <a:srgbClr val="000000"/>
+                </a:solidFill>
+                <a:latin typeface="微软雅黑" panose="020B0503020204020204" charset="-122"/>
+              </a:rPr>
+              <a:t>彭祈元</a:t>
+            </a:r>
+            <a:r>
+              <a:rPr sz="2800" b="0" dirty="0">
+                <a:solidFill>
+                  <a:srgbClr val="000000"/>
+                </a:solidFill>
+                <a:latin typeface="微软雅黑" panose="020B0503020204020204" charset="-122"/>
+              </a:rPr>
+              <a:t> </a:t>
+            </a:r>
+            <a:r>
+              <a:rPr lang="zh-CN" altLang="en-US" sz="2800" dirty="0">
+                <a:latin typeface="微软雅黑" panose="020B0503020204020204" pitchFamily="34" charset="-122"/>
+                <a:ea typeface="微软雅黑" panose="020B0503020204020204" pitchFamily="34" charset="-122"/>
+              </a:rPr>
+              <a:t>郭政颍</a:t>
+            </a:r>
+          </a:p>
+          <a:p>
+            <a:pPr algn="ctr"/>
+            <a:r>
+              <a:rPr sz="2800" b="0" dirty="0">
+                <a:solidFill>
+                  <a:srgbClr val="000000"/>
+                </a:solidFill>
+                <a:latin typeface="微软雅黑" panose="020B0503020204020204" charset="-122"/>
+              </a:rPr>
+              <a:t> </a:t>
+            </a:r>
+            <a:r>
+              <a:rPr sz="2800" b="0" dirty="0" err="1">
+                <a:solidFill>
+                  <a:srgbClr val="000000"/>
+                </a:solidFill>
+                <a:latin typeface="微软雅黑" panose="020B0503020204020204" charset="-122"/>
+              </a:rPr>
+              <a:t>周宇尘</a:t>
+            </a:r>
+            <a:endParaRPr sz="2800" b="0" dirty="0">
               <a:solidFill>
                 <a:srgbClr val="000000"/>
               </a:solidFill>
               <a:latin typeface="微软雅黑" panose="020B0503020204020204" charset="-122"/>
             </a:endParaRPr>
           </a:p>
-        </p:txBody>
-      </p:sp>
-      <p:sp>
-        <p:nvSpPr>
-          <p:cNvPr id="11" name="TextBox 10"/>
-          <p:cNvSpPr txBox="1"/>
-          <p:nvPr/>
-        </p:nvSpPr>
-        <p:spPr>
-          <a:xfrm>
-            <a:off x="1097280" y="3108960"/>
-            <a:ext cx="9966960" cy="822960"/>
-          </a:xfrm>
-          <a:prstGeom prst="rect">
-            <a:avLst/>
-          </a:prstGeom>
-          <a:noFill/>
-        </p:spPr>
-        <p:txBody>
-          <a:bodyPr wrap="none">
-            <a:noAutofit/>
-          </a:bodyPr>
-          <a:lstStyle/>
           <a:p>
             <a:pPr algn="ctr"/>
-            <a:r>
-              <a:rPr sz="2800" b="0">
+            <a:endParaRPr sz="2800" b="0" dirty="0">
+              <a:solidFill>
+                <a:srgbClr val="000000"/>
+              </a:solidFill>
+              <a:latin typeface="微软雅黑" panose="020B0503020204020204" charset="-122"/>
+            </a:endParaRPr>
+          </a:p>
+          <a:p>
+            <a:pPr algn="ctr"/>
+            <a:r>
+              <a:rPr sz="2800" b="0" dirty="0" err="1">
                 <a:solidFill>
                   <a:srgbClr val="000000"/>
                 </a:solidFill>
                 <a:latin typeface="微软雅黑" panose="020B0503020204020204" charset="-122"/>
               </a:rPr>
-              <a:t>第  小组   胡彬泽 沙华煜 彭祈元 郭政颖 周宇尘</a:t>
-            </a:r>
-            <a:endParaRPr sz="2800" b="0">
-              <a:solidFill>
-                <a:srgbClr val="000000"/>
-              </a:solidFill>
-              <a:latin typeface="微软雅黑" panose="020B0503020204020204" charset="-122"/>
-            </a:endParaRPr>
-          </a:p>
-          <a:p>
-            <a:pPr algn="ctr"/>
-            <a:endParaRPr sz="2800" b="0">
-              <a:solidFill>
-                <a:srgbClr val="000000"/>
-              </a:solidFill>
-              <a:latin typeface="微软雅黑" panose="020B0503020204020204" charset="-122"/>
-            </a:endParaRPr>
-          </a:p>
-          <a:p>
-            <a:pPr algn="ctr"/>
-            <a:r>
-              <a:rPr sz="2800" b="0">
+              <a:t>测试计划标识</a:t>
+            </a:r>
+            <a:r>
+              <a:rPr sz="2800" b="0" dirty="0">
                 <a:solidFill>
                   <a:srgbClr val="000000"/>
                 </a:solidFill>
                 <a:latin typeface="微软雅黑" panose="020B0503020204020204" charset="-122"/>
               </a:rPr>
-              <a:t>测试计划标识   Project1_TestPlan_V1.2_20260423</a:t>
-            </a:r>
-            <a:endParaRPr sz="2800" b="0">
-              <a:solidFill>
-                <a:srgbClr val="000000"/>
-              </a:solidFill>
-              <a:latin typeface="微软雅黑" panose="020B0503020204020204" charset="-122"/>
-            </a:endParaRPr>
+              <a:t>   Project1_TestPlan_V1.2_20260423</a:t>
+            </a:r>
           </a:p>
         </p:txBody>
       </p:sp>
@@ -3527,7 +3600,14 @@
         <p:cNvGrpSpPr/>
         <p:nvPr/>
       </p:nvGrpSpPr>
-      <p:grpSpPr/>
+      <p:grpSpPr>
+        <a:xfrm>
+          <a:off x="0" y="0"/>
+          <a:ext cx="0" cy="0"/>
+          <a:chOff x="0" y="0"/>
+          <a:chExt cx="0" cy="0"/>
+        </a:xfrm>
+      </p:grpSpPr>
       <p:sp>
         <p:nvSpPr>
           <p:cNvPr id="2" name="Rectangle 1"/>
@@ -3568,6 +3648,7 @@
           <a:lstStyle/>
           <a:p>
             <a:pPr algn="ctr"/>
+            <a:endParaRPr/>
           </a:p>
         </p:txBody>
       </p:sp>
@@ -3611,6 +3692,7 @@
           <a:lstStyle/>
           <a:p>
             <a:pPr algn="ctr"/>
+            <a:endParaRPr/>
           </a:p>
         </p:txBody>
       </p:sp>
@@ -3654,6 +3736,7 @@
           <a:lstStyle/>
           <a:p>
             <a:pPr algn="ctr"/>
+            <a:endParaRPr/>
           </a:p>
         </p:txBody>
       </p:sp>
@@ -3697,6 +3780,7 @@
           <a:lstStyle/>
           <a:p>
             <a:pPr algn="ctr"/>
+            <a:endParaRPr/>
           </a:p>
         </p:txBody>
       </p:sp>
@@ -3740,6 +3824,7 @@
           <a:lstStyle/>
           <a:p>
             <a:pPr algn="ctr"/>
+            <a:endParaRPr/>
           </a:p>
         </p:txBody>
       </p:sp>
@@ -3783,6 +3868,7 @@
           <a:lstStyle/>
           <a:p>
             <a:pPr algn="ctr"/>
+            <a:endParaRPr/>
           </a:p>
         </p:txBody>
       </p:sp>
@@ -3826,6 +3912,7 @@
           <a:lstStyle/>
           <a:p>
             <a:pPr algn="ctr"/>
+            <a:endParaRPr/>
           </a:p>
         </p:txBody>
       </p:sp>
@@ -3855,7 +3942,6 @@
               <a:rPr sz="2800"/>
               <a:t>本轮未覆盖的测试范围</a:t>
             </a:r>
-            <a:endParaRPr sz="2800"/>
           </a:p>
         </p:txBody>
       </p:sp>
@@ -3878,9 +3964,27 @@
                 <a:tableStyleId>{5C22544A-7EE6-4342-B048-85BDC9FD1C3A}</a:tableStyleId>
               </a:tblPr>
               <a:tblGrid>
-                <a:gridCol w="3657600"/>
-                <a:gridCol w="3657600"/>
-                <a:gridCol w="3657600"/>
+                <a:gridCol w="3657600">
+                  <a:extLst>
+                    <a:ext uri="{9D8B030D-6E8A-4147-A177-3AD203B41FA5}">
+                      <a16:colId xmlns:a16="http://schemas.microsoft.com/office/drawing/2014/main" val="20000"/>
+                    </a:ext>
+                  </a:extLst>
+                </a:gridCol>
+                <a:gridCol w="3657600">
+                  <a:extLst>
+                    <a:ext uri="{9D8B030D-6E8A-4147-A177-3AD203B41FA5}">
+                      <a16:colId xmlns:a16="http://schemas.microsoft.com/office/drawing/2014/main" val="20001"/>
+                    </a:ext>
+                  </a:extLst>
+                </a:gridCol>
+                <a:gridCol w="3657600">
+                  <a:extLst>
+                    <a:ext uri="{9D8B030D-6E8A-4147-A177-3AD203B41FA5}">
+                      <a16:colId xmlns:a16="http://schemas.microsoft.com/office/drawing/2014/main" val="20002"/>
+                    </a:ext>
+                  </a:extLst>
+                </a:gridCol>
               </a:tblGrid>
               <a:tr h="594360">
                 <a:tc>
@@ -3970,6 +4074,11 @@
                     </a:solidFill>
                   </a:tcPr>
                 </a:tc>
+                <a:extLst>
+                  <a:ext uri="{0D108BD9-81ED-4DB2-BD59-A6C34878D82A}">
+                    <a16:rowId xmlns:a16="http://schemas.microsoft.com/office/drawing/2014/main" val="10000"/>
+                  </a:ext>
+                </a:extLst>
               </a:tr>
               <a:tr h="594360">
                 <a:tc>
@@ -3981,7 +4090,6 @@
                         <a:rPr sz="1700"/>
                         <a:t>1</a:t>
                       </a:r>
-                      <a:endParaRPr sz="1700"/>
                     </a:p>
                   </a:txBody>
                   <a:tcPr>
@@ -3999,7 +4107,6 @@
                         <a:rPr sz="1700"/>
                         <a:t>浏览器 UI 自动化</a:t>
                       </a:r>
-                      <a:endParaRPr sz="1700"/>
                     </a:p>
                   </a:txBody>
                   <a:tcPr>
@@ -4017,7 +4124,6 @@
                         <a:rPr sz="1700"/>
                         <a:t>PJ1 聚焦 service 单元测试与 controller 集成测试，不包含 E2E</a:t>
                       </a:r>
-                      <a:endParaRPr sz="1700"/>
                     </a:p>
                   </a:txBody>
                   <a:tcPr>
@@ -4026,6 +4132,11 @@
                     </a:solidFill>
                   </a:tcPr>
                 </a:tc>
+                <a:extLst>
+                  <a:ext uri="{0D108BD9-81ED-4DB2-BD59-A6C34878D82A}">
+                    <a16:rowId xmlns:a16="http://schemas.microsoft.com/office/drawing/2014/main" val="10001"/>
+                  </a:ext>
+                </a:extLst>
               </a:tr>
               <a:tr h="594360">
                 <a:tc>
@@ -4037,7 +4148,6 @@
                         <a:rPr sz="1700"/>
                         <a:t>2</a:t>
                       </a:r>
-                      <a:endParaRPr sz="1700"/>
                     </a:p>
                   </a:txBody>
                   <a:tcPr>
@@ -4055,7 +4165,6 @@
                         <a:rPr sz="1700"/>
                         <a:t>性能压测</a:t>
                       </a:r>
-                      <a:endParaRPr sz="1700"/>
                     </a:p>
                   </a:txBody>
                   <a:tcPr>
@@ -4073,7 +4182,6 @@
                         <a:rPr sz="1700"/>
                         <a:t>课程任务未要求吞吐、并发与响应时间指标</a:t>
                       </a:r>
-                      <a:endParaRPr sz="1700"/>
                     </a:p>
                   </a:txBody>
                   <a:tcPr>
@@ -4082,6 +4190,11 @@
                     </a:solidFill>
                   </a:tcPr>
                 </a:tc>
+                <a:extLst>
+                  <a:ext uri="{0D108BD9-81ED-4DB2-BD59-A6C34878D82A}">
+                    <a16:rowId xmlns:a16="http://schemas.microsoft.com/office/drawing/2014/main" val="10002"/>
+                  </a:ext>
+                </a:extLst>
               </a:tr>
               <a:tr h="594360">
                 <a:tc>
@@ -4093,7 +4206,6 @@
                         <a:rPr sz="1700"/>
                         <a:t>3</a:t>
                       </a:r>
-                      <a:endParaRPr sz="1700"/>
                     </a:p>
                   </a:txBody>
                   <a:tcPr>
@@ -4111,7 +4223,6 @@
                         <a:rPr sz="1700"/>
                         <a:t>安全渗透测试</a:t>
                       </a:r>
-                      <a:endParaRPr sz="1700"/>
                     </a:p>
                   </a:txBody>
                   <a:tcPr>
@@ -4129,7 +4240,6 @@
                         <a:rPr sz="1700"/>
                         <a:t>本轮只做功能测试与探索性缺陷记录，不做漏洞扫描</a:t>
                       </a:r>
-                      <a:endParaRPr sz="1700"/>
                     </a:p>
                   </a:txBody>
                   <a:tcPr>
@@ -4138,6 +4248,11 @@
                     </a:solidFill>
                   </a:tcPr>
                 </a:tc>
+                <a:extLst>
+                  <a:ext uri="{0D108BD9-81ED-4DB2-BD59-A6C34878D82A}">
+                    <a16:rowId xmlns:a16="http://schemas.microsoft.com/office/drawing/2014/main" val="10003"/>
+                  </a:ext>
+                </a:extLst>
               </a:tr>
               <a:tr h="594360">
                 <a:tc>
@@ -4149,7 +4264,6 @@
                         <a:rPr sz="1700"/>
                         <a:t>4</a:t>
                       </a:r>
-                      <a:endParaRPr sz="1700"/>
                     </a:p>
                   </a:txBody>
                   <a:tcPr>
@@ -4167,7 +4281,6 @@
                         <a:rPr sz="1700"/>
                         <a:t>真实 MySQL 专有行为</a:t>
                       </a:r>
-                      <a:endParaRPr sz="1700"/>
                     </a:p>
                   </a:txBody>
                   <a:tcPr>
@@ -4185,7 +4298,6 @@
                         <a:rPr sz="1700"/>
                         <a:t>测试环境用 H2 MySQL 模式保证可复现，真实库差异列为限制</a:t>
                       </a:r>
-                      <a:endParaRPr sz="1700"/>
                     </a:p>
                   </a:txBody>
                   <a:tcPr>
@@ -4194,6 +4306,11 @@
                     </a:solidFill>
                   </a:tcPr>
                 </a:tc>
+                <a:extLst>
+                  <a:ext uri="{0D108BD9-81ED-4DB2-BD59-A6C34878D82A}">
+                    <a16:rowId xmlns:a16="http://schemas.microsoft.com/office/drawing/2014/main" val="10004"/>
+                  </a:ext>
+                </a:extLst>
               </a:tr>
             </a:tbl>
           </a:graphicData>
@@ -4216,7 +4333,14 @@
         <p:cNvGrpSpPr/>
         <p:nvPr/>
       </p:nvGrpSpPr>
-      <p:grpSpPr/>
+      <p:grpSpPr>
+        <a:xfrm>
+          <a:off x="0" y="0"/>
+          <a:ext cx="0" cy="0"/>
+          <a:chOff x="0" y="0"/>
+          <a:chExt cx="0" cy="0"/>
+        </a:xfrm>
+      </p:grpSpPr>
       <p:sp>
         <p:nvSpPr>
           <p:cNvPr id="2" name="Rectangle 1"/>
@@ -4257,6 +4381,7 @@
           <a:lstStyle/>
           <a:p>
             <a:pPr algn="ctr"/>
+            <a:endParaRPr/>
           </a:p>
         </p:txBody>
       </p:sp>
@@ -4300,6 +4425,7 @@
           <a:lstStyle/>
           <a:p>
             <a:pPr algn="ctr"/>
+            <a:endParaRPr/>
           </a:p>
         </p:txBody>
       </p:sp>
@@ -4343,6 +4469,7 @@
           <a:lstStyle/>
           <a:p>
             <a:pPr algn="ctr"/>
+            <a:endParaRPr/>
           </a:p>
         </p:txBody>
       </p:sp>
@@ -4386,6 +4513,7 @@
           <a:lstStyle/>
           <a:p>
             <a:pPr algn="ctr"/>
+            <a:endParaRPr/>
           </a:p>
         </p:txBody>
       </p:sp>
@@ -4429,6 +4557,7 @@
           <a:lstStyle/>
           <a:p>
             <a:pPr algn="ctr"/>
+            <a:endParaRPr/>
           </a:p>
         </p:txBody>
       </p:sp>
@@ -4472,6 +4601,7 @@
           <a:lstStyle/>
           <a:p>
             <a:pPr algn="ctr"/>
+            <a:endParaRPr/>
           </a:p>
         </p:txBody>
       </p:sp>
@@ -4515,6 +4645,7 @@
           <a:lstStyle/>
           <a:p>
             <a:pPr algn="ctr"/>
+            <a:endParaRPr/>
           </a:p>
         </p:txBody>
       </p:sp>
@@ -4549,12 +4680,6 @@
               </a:rPr>
               <a:t>测试用例设计文档</a:t>
             </a:r>
-            <a:endParaRPr sz="2500" b="1">
-              <a:solidFill>
-                <a:srgbClr val="000000"/>
-              </a:solidFill>
-              <a:latin typeface="微软雅黑" panose="020B0503020204020204" charset="-122"/>
-            </a:endParaRPr>
           </a:p>
           <a:p>
             <a:r>
@@ -4566,12 +4691,6 @@
               </a:rPr>
               <a:t>以订单状态流转为例</a:t>
             </a:r>
-            <a:endParaRPr sz="2500" b="1">
-              <a:solidFill>
-                <a:srgbClr val="000000"/>
-              </a:solidFill>
-              <a:latin typeface="微软雅黑" panose="020B0503020204020204" charset="-122"/>
-            </a:endParaRPr>
           </a:p>
         </p:txBody>
       </p:sp>
@@ -4594,10 +4713,34 @@
                 <a:tableStyleId>{5C22544A-7EE6-4342-B048-85BDC9FD1C3A}</a:tableStyleId>
               </a:tblPr>
               <a:tblGrid>
-                <a:gridCol w="2777490"/>
-                <a:gridCol w="2777490"/>
-                <a:gridCol w="2777490"/>
-                <a:gridCol w="2777490"/>
+                <a:gridCol w="2777490">
+                  <a:extLst>
+                    <a:ext uri="{9D8B030D-6E8A-4147-A177-3AD203B41FA5}">
+                      <a16:colId xmlns:a16="http://schemas.microsoft.com/office/drawing/2014/main" val="20000"/>
+                    </a:ext>
+                  </a:extLst>
+                </a:gridCol>
+                <a:gridCol w="2777490">
+                  <a:extLst>
+                    <a:ext uri="{9D8B030D-6E8A-4147-A177-3AD203B41FA5}">
+                      <a16:colId xmlns:a16="http://schemas.microsoft.com/office/drawing/2014/main" val="20001"/>
+                    </a:ext>
+                  </a:extLst>
+                </a:gridCol>
+                <a:gridCol w="2777490">
+                  <a:extLst>
+                    <a:ext uri="{9D8B030D-6E8A-4147-A177-3AD203B41FA5}">
+                      <a16:colId xmlns:a16="http://schemas.microsoft.com/office/drawing/2014/main" val="20002"/>
+                    </a:ext>
+                  </a:extLst>
+                </a:gridCol>
+                <a:gridCol w="2777490">
+                  <a:extLst>
+                    <a:ext uri="{9D8B030D-6E8A-4147-A177-3AD203B41FA5}">
+                      <a16:colId xmlns:a16="http://schemas.microsoft.com/office/drawing/2014/main" val="20003"/>
+                    </a:ext>
+                  </a:extLst>
+                </a:gridCol>
               </a:tblGrid>
               <a:tr h="777240">
                 <a:tc>
@@ -4615,12 +4758,6 @@
                         </a:rPr>
                         <a:t>设计技术</a:t>
                       </a:r>
-                      <a:endParaRPr sz="1200" b="1">
-                        <a:solidFill>
-                          <a:srgbClr val="FFFFFF"/>
-                        </a:solidFill>
-                        <a:latin typeface="微软雅黑" panose="020B0503020204020204" charset="-122"/>
-                      </a:endParaRPr>
                     </a:p>
                   </a:txBody>
                   <a:tcPr>
@@ -4644,12 +4781,6 @@
                         </a:rPr>
                         <a:t>代表输入/场景</a:t>
                       </a:r>
-                      <a:endParaRPr sz="1200" b="1">
-                        <a:solidFill>
-                          <a:srgbClr val="FFFFFF"/>
-                        </a:solidFill>
-                        <a:latin typeface="微软雅黑" panose="020B0503020204020204" charset="-122"/>
-                      </a:endParaRPr>
                     </a:p>
                   </a:txBody>
                   <a:tcPr>
@@ -4673,12 +4804,6 @@
                         </a:rPr>
                         <a:t>预期结果</a:t>
                       </a:r>
-                      <a:endParaRPr sz="1200" b="1">
-                        <a:solidFill>
-                          <a:srgbClr val="FFFFFF"/>
-                        </a:solidFill>
-                        <a:latin typeface="微软雅黑" panose="020B0503020204020204" charset="-122"/>
-                      </a:endParaRPr>
                     </a:p>
                   </a:txBody>
                   <a:tcPr>
@@ -4702,12 +4827,6 @@
                         </a:rPr>
                         <a:t>编号口径</a:t>
                       </a:r>
-                      <a:endParaRPr sz="1200" b="1">
-                        <a:solidFill>
-                          <a:srgbClr val="FFFFFF"/>
-                        </a:solidFill>
-                        <a:latin typeface="微软雅黑" panose="020B0503020204020204" charset="-122"/>
-                      </a:endParaRPr>
                     </a:p>
                   </a:txBody>
                   <a:tcPr>
@@ -4716,6 +4835,11 @@
                     </a:solidFill>
                   </a:tcPr>
                 </a:tc>
+                <a:extLst>
+                  <a:ext uri="{0D108BD9-81ED-4DB2-BD59-A6C34878D82A}">
+                    <a16:rowId xmlns:a16="http://schemas.microsoft.com/office/drawing/2014/main" val="10000"/>
+                  </a:ext>
+                </a:extLst>
               </a:tr>
               <a:tr h="777240">
                 <a:tc>
@@ -4733,12 +4857,6 @@
                         </a:rPr>
                         <a:t>等价类划分</a:t>
                       </a:r>
-                      <a:endParaRPr sz="1100" b="0">
-                        <a:solidFill>
-                          <a:srgbClr val="000000"/>
-                        </a:solidFill>
-                        <a:latin typeface="微软雅黑" panose="020B0503020204020204" charset="-122"/>
-                      </a:endParaRPr>
                     </a:p>
                   </a:txBody>
                   <a:tcPr>
@@ -4762,12 +4880,6 @@
                         </a:rPr>
                         <a:t>合法用户、合法场馆、存在的订单 ID</a:t>
                       </a:r>
-                      <a:endParaRPr sz="1100" b="0">
-                        <a:solidFill>
-                          <a:srgbClr val="000000"/>
-                        </a:solidFill>
-                        <a:latin typeface="微软雅黑" panose="020B0503020204020204" charset="-122"/>
-                      </a:endParaRPr>
                     </a:p>
                   </a:txBody>
                   <a:tcPr>
@@ -4791,12 +4903,6 @@
                         </a:rPr>
                         <a:t>订单创建/查询成功</a:t>
                       </a:r>
-                      <a:endParaRPr sz="1100" b="0">
-                        <a:solidFill>
-                          <a:srgbClr val="000000"/>
-                        </a:solidFill>
-                        <a:latin typeface="微软雅黑" panose="020B0503020204020204" charset="-122"/>
-                      </a:endParaRPr>
                     </a:p>
                   </a:txBody>
                   <a:tcPr>
@@ -4820,12 +4926,6 @@
                         </a:rPr>
                         <a:t>订单相关用例</a:t>
                       </a:r>
-                      <a:endParaRPr sz="1100" b="0">
-                        <a:solidFill>
-                          <a:srgbClr val="000000"/>
-                        </a:solidFill>
-                        <a:latin typeface="微软雅黑" panose="020B0503020204020204" charset="-122"/>
-                      </a:endParaRPr>
                     </a:p>
                   </a:txBody>
                   <a:tcPr>
@@ -4834,6 +4934,11 @@
                     </a:solidFill>
                   </a:tcPr>
                 </a:tc>
+                <a:extLst>
+                  <a:ext uri="{0D108BD9-81ED-4DB2-BD59-A6C34878D82A}">
+                    <a16:rowId xmlns:a16="http://schemas.microsoft.com/office/drawing/2014/main" val="10001"/>
+                  </a:ext>
+                </a:extLst>
               </a:tr>
               <a:tr h="777240">
                 <a:tc>
@@ -4851,12 +4956,6 @@
                         </a:rPr>
                         <a:t>边界值分析</a:t>
                       </a:r>
-                      <a:endParaRPr sz="1100" b="0">
-                        <a:solidFill>
-                          <a:srgbClr val="000000"/>
-                        </a:solidFill>
-                        <a:latin typeface="微软雅黑" panose="020B0503020204020204" charset="-122"/>
-                      </a:endParaRPr>
                     </a:p>
                   </a:txBody>
                   <a:tcPr>
@@ -4880,12 +4979,6 @@
                         </a:rPr>
                         <a:t>page 默认值、非法页码、空参数</a:t>
                       </a:r>
-                      <a:endParaRPr sz="1100" b="0">
-                        <a:solidFill>
-                          <a:srgbClr val="000000"/>
-                        </a:solidFill>
-                        <a:latin typeface="微软雅黑" panose="020B0503020204020204" charset="-122"/>
-                      </a:endParaRPr>
                     </a:p>
                   </a:txBody>
                   <a:tcPr>
@@ -4909,12 +5002,6 @@
                         </a:rPr>
                         <a:t>返回默认页或异常路径被验证</a:t>
                       </a:r>
-                      <a:endParaRPr sz="1100" b="0">
-                        <a:solidFill>
-                          <a:srgbClr val="000000"/>
-                        </a:solidFill>
-                        <a:latin typeface="微软雅黑" panose="020B0503020204020204" charset="-122"/>
-                      </a:endParaRPr>
                     </a:p>
                   </a:txBody>
                   <a:tcPr>
@@ -4938,12 +5025,6 @@
                         </a:rPr>
                         <a:t>分页与参数用例</a:t>
                       </a:r>
-                      <a:endParaRPr sz="1100" b="0">
-                        <a:solidFill>
-                          <a:srgbClr val="000000"/>
-                        </a:solidFill>
-                        <a:latin typeface="微软雅黑" panose="020B0503020204020204" charset="-122"/>
-                      </a:endParaRPr>
                     </a:p>
                   </a:txBody>
                   <a:tcPr>
@@ -4952,6 +5033,11 @@
                     </a:solidFill>
                   </a:tcPr>
                 </a:tc>
+                <a:extLst>
+                  <a:ext uri="{0D108BD9-81ED-4DB2-BD59-A6C34878D82A}">
+                    <a16:rowId xmlns:a16="http://schemas.microsoft.com/office/drawing/2014/main" val="10002"/>
+                  </a:ext>
+                </a:extLst>
               </a:tr>
               <a:tr h="777240">
                 <a:tc>
@@ -4969,12 +5055,6 @@
                         </a:rPr>
                         <a:t>语句覆盖</a:t>
                       </a:r>
-                      <a:endParaRPr sz="1100" b="0">
-                        <a:solidFill>
-                          <a:srgbClr val="000000"/>
-                        </a:solidFill>
-                        <a:latin typeface="微软雅黑" panose="020B0503020204020204" charset="-122"/>
-                      </a:endParaRPr>
                     </a:p>
                   </a:txBody>
                   <a:tcPr>
@@ -4998,12 +5078,6 @@
                         </a:rPr>
                         <a:t>创建、取消、查询等核心业务路径</a:t>
                       </a:r>
-                      <a:endParaRPr sz="1100" b="0">
-                        <a:solidFill>
-                          <a:srgbClr val="000000"/>
-                        </a:solidFill>
-                        <a:latin typeface="微软雅黑" panose="020B0503020204020204" charset="-122"/>
-                      </a:endParaRPr>
                     </a:p>
                   </a:txBody>
                   <a:tcPr>
@@ -5027,12 +5101,6 @@
                         </a:rPr>
                         <a:t>可达语句至少执行一次</a:t>
                       </a:r>
-                      <a:endParaRPr sz="1100" b="0">
-                        <a:solidFill>
-                          <a:srgbClr val="000000"/>
-                        </a:solidFill>
-                        <a:latin typeface="微软雅黑" panose="020B0503020204020204" charset="-122"/>
-                      </a:endParaRPr>
                     </a:p>
                   </a:txBody>
                   <a:tcPr>
@@ -5056,12 +5124,6 @@
                         </a:rPr>
                         <a:t>单元测试用例</a:t>
                       </a:r>
-                      <a:endParaRPr sz="1100" b="0">
-                        <a:solidFill>
-                          <a:srgbClr val="000000"/>
-                        </a:solidFill>
-                        <a:latin typeface="微软雅黑" panose="020B0503020204020204" charset="-122"/>
-                      </a:endParaRPr>
                     </a:p>
                   </a:txBody>
                   <a:tcPr>
@@ -5070,6 +5132,11 @@
                     </a:solidFill>
                   </a:tcPr>
                 </a:tc>
+                <a:extLst>
+                  <a:ext uri="{0D108BD9-81ED-4DB2-BD59-A6C34878D82A}">
+                    <a16:rowId xmlns:a16="http://schemas.microsoft.com/office/drawing/2014/main" val="10003"/>
+                  </a:ext>
+                </a:extLst>
               </a:tr>
               <a:tr h="777240">
                 <a:tc>
@@ -5087,12 +5154,6 @@
                         </a:rPr>
                         <a:t>判定覆盖</a:t>
                       </a:r>
-                      <a:endParaRPr sz="1100" b="0">
-                        <a:solidFill>
-                          <a:srgbClr val="000000"/>
-                        </a:solidFill>
-                        <a:latin typeface="微软雅黑" panose="020B0503020204020204" charset="-122"/>
-                      </a:endParaRPr>
                     </a:p>
                   </a:txBody>
                   <a:tcPr>
@@ -5116,12 +5177,6 @@
                         </a:rPr>
                         <a:t>审核通过/拒绝、未登录/已登录</a:t>
                       </a:r>
-                      <a:endParaRPr sz="1100" b="0">
-                        <a:solidFill>
-                          <a:srgbClr val="000000"/>
-                        </a:solidFill>
-                        <a:latin typeface="微软雅黑" panose="020B0503020204020204" charset="-122"/>
-                      </a:endParaRPr>
                     </a:p>
                   </a:txBody>
                   <a:tcPr>
@@ -5145,12 +5200,6 @@
                         </a:rPr>
                         <a:t>true/false 两侧均被验证</a:t>
                       </a:r>
-                      <a:endParaRPr sz="1100" b="0">
-                        <a:solidFill>
-                          <a:srgbClr val="000000"/>
-                        </a:solidFill>
-                        <a:latin typeface="微软雅黑" panose="020B0503020204020204" charset="-122"/>
-                      </a:endParaRPr>
                     </a:p>
                   </a:txBody>
                   <a:tcPr>
@@ -5174,12 +5223,6 @@
                         </a:rPr>
                         <a:t>集成测试用例</a:t>
                       </a:r>
-                      <a:endParaRPr sz="1100" b="0">
-                        <a:solidFill>
-                          <a:srgbClr val="000000"/>
-                        </a:solidFill>
-                        <a:latin typeface="微软雅黑" panose="020B0503020204020204" charset="-122"/>
-                      </a:endParaRPr>
                     </a:p>
                   </a:txBody>
                   <a:tcPr>
@@ -5188,6 +5231,11 @@
                     </a:solidFill>
                   </a:tcPr>
                 </a:tc>
+                <a:extLst>
+                  <a:ext uri="{0D108BD9-81ED-4DB2-BD59-A6C34878D82A}">
+                    <a16:rowId xmlns:a16="http://schemas.microsoft.com/office/drawing/2014/main" val="10004"/>
+                  </a:ext>
+                </a:extLst>
               </a:tr>
             </a:tbl>
           </a:graphicData>
@@ -5210,7 +5258,14 @@
         <p:cNvGrpSpPr/>
         <p:nvPr/>
       </p:nvGrpSpPr>
-      <p:grpSpPr/>
+      <p:grpSpPr>
+        <a:xfrm>
+          <a:off x="0" y="0"/>
+          <a:ext cx="0" cy="0"/>
+          <a:chOff x="0" y="0"/>
+          <a:chExt cx="0" cy="0"/>
+        </a:xfrm>
+      </p:grpSpPr>
       <p:sp>
         <p:nvSpPr>
           <p:cNvPr id="2" name="Rectangle 1"/>
@@ -5251,6 +5306,7 @@
           <a:lstStyle/>
           <a:p>
             <a:pPr algn="ctr"/>
+            <a:endParaRPr/>
           </a:p>
         </p:txBody>
       </p:sp>
@@ -5294,6 +5350,7 @@
           <a:lstStyle/>
           <a:p>
             <a:pPr algn="ctr"/>
+            <a:endParaRPr/>
           </a:p>
         </p:txBody>
       </p:sp>
@@ -5337,6 +5394,7 @@
           <a:lstStyle/>
           <a:p>
             <a:pPr algn="ctr"/>
+            <a:endParaRPr/>
           </a:p>
         </p:txBody>
       </p:sp>
@@ -5380,6 +5438,7 @@
           <a:lstStyle/>
           <a:p>
             <a:pPr algn="ctr"/>
+            <a:endParaRPr/>
           </a:p>
         </p:txBody>
       </p:sp>
@@ -5423,6 +5482,7 @@
           <a:lstStyle/>
           <a:p>
             <a:pPr algn="ctr"/>
+            <a:endParaRPr/>
           </a:p>
         </p:txBody>
       </p:sp>
@@ -5466,6 +5526,7 @@
           <a:lstStyle/>
           <a:p>
             <a:pPr algn="ctr"/>
+            <a:endParaRPr/>
           </a:p>
         </p:txBody>
       </p:sp>
@@ -5509,6 +5570,7 @@
           <a:lstStyle/>
           <a:p>
             <a:pPr algn="ctr"/>
+            <a:endParaRPr/>
           </a:p>
         </p:txBody>
       </p:sp>
@@ -5543,12 +5605,6 @@
               </a:rPr>
               <a:t>覆盖率</a:t>
             </a:r>
-            <a:endParaRPr sz="3000" b="1">
-              <a:solidFill>
-                <a:srgbClr val="000000"/>
-              </a:solidFill>
-              <a:latin typeface="微软雅黑" panose="020B0503020204020204" charset="-122"/>
-            </a:endParaRPr>
           </a:p>
         </p:txBody>
       </p:sp>
@@ -5597,14 +5653,12 @@
               <a:rPr sz="2800" b="1"/>
               <a:t>147</a:t>
             </a:r>
-            <a:endParaRPr sz="2800" b="1"/>
           </a:p>
           <a:p>
             <a:r>
               <a:rPr sz="1300" b="0"/>
               <a:t>真实测试用例全部通过</a:t>
             </a:r>
-            <a:endParaRPr sz="1300" b="0"/>
           </a:p>
         </p:txBody>
       </p:sp>
@@ -5653,14 +5707,12 @@
               <a:rPr sz="2800" b="1"/>
               <a:t>100%</a:t>
             </a:r>
-            <a:endParaRPr sz="2800" b="1"/>
           </a:p>
           <a:p>
             <a:r>
               <a:rPr sz="1300" b="0"/>
               <a:t>整体指令覆盖率</a:t>
             </a:r>
-            <a:endParaRPr sz="1300" b="0"/>
           </a:p>
         </p:txBody>
       </p:sp>
@@ -5709,14 +5761,12 @@
               <a:rPr sz="2800" b="1"/>
               <a:t>100%</a:t>
             </a:r>
-            <a:endParaRPr sz="2800" b="1"/>
           </a:p>
           <a:p>
             <a:r>
               <a:rPr sz="1300" b="0"/>
               <a:t>整体分支覆盖率</a:t>
             </a:r>
-            <a:endParaRPr sz="1300" b="0"/>
           </a:p>
         </p:txBody>
       </p:sp>
@@ -5733,7 +5783,7 @@
           </p:nvPr>
         </p:nvPicPr>
         <p:blipFill>
-          <a:blip r:embed="rId2"/>
+          <a:blip r:embed="rId3"/>
           <a:stretch>
             <a:fillRect/>
           </a:stretch>
@@ -5774,7 +5824,6 @@
               <a:rPr sz="1500"/>
               <a:t>正式回归：147 条全通过；探索性失败用例：6 条，用于记录缺陷，不纳入默认统计。</a:t>
             </a:r>
-            <a:endParaRPr sz="1500"/>
           </a:p>
         </p:txBody>
       </p:sp>
@@ -5795,7 +5844,14 @@
         <p:cNvGrpSpPr/>
         <p:nvPr/>
       </p:nvGrpSpPr>
-      <p:grpSpPr/>
+      <p:grpSpPr>
+        <a:xfrm>
+          <a:off x="0" y="0"/>
+          <a:ext cx="0" cy="0"/>
+          <a:chOff x="0" y="0"/>
+          <a:chExt cx="0" cy="0"/>
+        </a:xfrm>
+      </p:grpSpPr>
       <p:sp>
         <p:nvSpPr>
           <p:cNvPr id="2" name="Rectangle 1"/>
@@ -5836,6 +5892,7 @@
           <a:lstStyle/>
           <a:p>
             <a:pPr algn="ctr"/>
+            <a:endParaRPr/>
           </a:p>
         </p:txBody>
       </p:sp>
@@ -5879,6 +5936,7 @@
           <a:lstStyle/>
           <a:p>
             <a:pPr algn="ctr"/>
+            <a:endParaRPr/>
           </a:p>
         </p:txBody>
       </p:sp>
@@ -5922,6 +5980,7 @@
           <a:lstStyle/>
           <a:p>
             <a:pPr algn="ctr"/>
+            <a:endParaRPr/>
           </a:p>
         </p:txBody>
       </p:sp>
@@ -5965,6 +6024,7 @@
           <a:lstStyle/>
           <a:p>
             <a:pPr algn="ctr"/>
+            <a:endParaRPr/>
           </a:p>
         </p:txBody>
       </p:sp>
@@ -6008,6 +6068,7 @@
           <a:lstStyle/>
           <a:p>
             <a:pPr algn="ctr"/>
+            <a:endParaRPr/>
           </a:p>
         </p:txBody>
       </p:sp>
@@ -6051,6 +6112,7 @@
           <a:lstStyle/>
           <a:p>
             <a:pPr algn="ctr"/>
+            <a:endParaRPr/>
           </a:p>
         </p:txBody>
       </p:sp>
@@ -6094,6 +6156,7 @@
           <a:lstStyle/>
           <a:p>
             <a:pPr algn="ctr"/>
+            <a:endParaRPr/>
           </a:p>
         </p:txBody>
       </p:sp>
@@ -6128,12 +6191,6 @@
               </a:rPr>
               <a:t>每个测试类里的基本思路</a:t>
             </a:r>
-            <a:endParaRPr sz="3000" b="1">
-              <a:solidFill>
-                <a:srgbClr val="000000"/>
-              </a:solidFill>
-              <a:latin typeface="微软雅黑" panose="020B0503020204020204" charset="-122"/>
-            </a:endParaRPr>
           </a:p>
         </p:txBody>
       </p:sp>
@@ -6163,35 +6220,30 @@
               <a:rPr sz="1800"/>
               <a:t>• service 单测：@ExtendWith + MockitoExtension 隔离 DAO，验证业务方法返回与状态变化</a:t>
             </a:r>
-            <a:endParaRPr sz="1800"/>
           </a:p>
           <a:p>
             <a:r>
               <a:rPr sz="1800"/>
               <a:t>• controller 集成：@SpringBootTest + @AutoConfigureMockMvc + H2，验证接口到数据库链路</a:t>
             </a:r>
-            <a:endParaRPr sz="1800"/>
           </a:p>
           <a:p>
             <a:r>
               <a:rPr sz="1800"/>
               <a:t>• TestDataFactory / BeforeEach 统一造数，每个用例独立、可重复执行</a:t>
             </a:r>
-            <a:endParaRPr sz="1800"/>
           </a:p>
           <a:p>
             <a:r>
               <a:rPr sz="1800"/>
               <a:t>• MockMvc 校验 status、content、view、redirect、session 与数据库结果</a:t>
             </a:r>
-            <a:endParaRPr sz="1800"/>
           </a:p>
           <a:p>
             <a:r>
               <a:rPr sz="1800"/>
               <a:t>• mvn test 输出 Surefire 报告，JaCoCo 汇总覆盖率到 target/site/jacoco</a:t>
             </a:r>
-            <a:endParaRPr sz="1800"/>
           </a:p>
         </p:txBody>
       </p:sp>
@@ -6212,7 +6264,14 @@
         <p:cNvGrpSpPr/>
         <p:nvPr/>
       </p:nvGrpSpPr>
-      <p:grpSpPr/>
+      <p:grpSpPr>
+        <a:xfrm>
+          <a:off x="0" y="0"/>
+          <a:ext cx="0" cy="0"/>
+          <a:chOff x="0" y="0"/>
+          <a:chExt cx="0" cy="0"/>
+        </a:xfrm>
+      </p:grpSpPr>
       <p:sp>
         <p:nvSpPr>
           <p:cNvPr id="2" name="Rectangle 1"/>
@@ -6253,6 +6312,7 @@
           <a:lstStyle/>
           <a:p>
             <a:pPr algn="ctr"/>
+            <a:endParaRPr/>
           </a:p>
         </p:txBody>
       </p:sp>
@@ -6296,6 +6356,7 @@
           <a:lstStyle/>
           <a:p>
             <a:pPr algn="ctr"/>
+            <a:endParaRPr/>
           </a:p>
         </p:txBody>
       </p:sp>
@@ -6339,6 +6400,7 @@
           <a:lstStyle/>
           <a:p>
             <a:pPr algn="ctr"/>
+            <a:endParaRPr/>
           </a:p>
         </p:txBody>
       </p:sp>
@@ -6382,6 +6444,7 @@
           <a:lstStyle/>
           <a:p>
             <a:pPr algn="ctr"/>
+            <a:endParaRPr/>
           </a:p>
         </p:txBody>
       </p:sp>
@@ -6425,6 +6488,7 @@
           <a:lstStyle/>
           <a:p>
             <a:pPr algn="ctr"/>
+            <a:endParaRPr/>
           </a:p>
         </p:txBody>
       </p:sp>
@@ -6468,6 +6532,7 @@
           <a:lstStyle/>
           <a:p>
             <a:pPr algn="ctr"/>
+            <a:endParaRPr/>
           </a:p>
         </p:txBody>
       </p:sp>
@@ -6511,6 +6576,7 @@
           <a:lstStyle/>
           <a:p>
             <a:pPr algn="ctr"/>
+            <a:endParaRPr/>
           </a:p>
         </p:txBody>
       </p:sp>
@@ -6545,12 +6611,6 @@
               </a:rPr>
               <a:t>示例</a:t>
             </a:r>
-            <a:endParaRPr sz="3000" b="1">
-              <a:solidFill>
-                <a:srgbClr val="000000"/>
-              </a:solidFill>
-              <a:latin typeface="微软雅黑" panose="020B0503020204020204" charset="-122"/>
-            </a:endParaRPr>
           </a:p>
         </p:txBody>
       </p:sp>
@@ -6601,9 +6661,6 @@
               </a:rPr>
               <a:t>@Test</a:t>
             </a:r>
-            <a:endParaRPr sz="1000">
-              <a:latin typeface="Consolas" panose="020B0609020204030204"/>
-            </a:endParaRPr>
           </a:p>
           <a:p>
             <a:r>
@@ -6612,9 +6669,6 @@
               </a:rPr>
               <a:t>void shouldLoginNormalUserAndStoreSession() throws Exception {</a:t>
             </a:r>
-            <a:endParaRPr sz="1000">
-              <a:latin typeface="Consolas" panose="020B0609020204030204"/>
-            </a:endParaRPr>
           </a:p>
           <a:p>
             <a:r>
@@ -6623,9 +6677,6 @@
               </a:rPr>
               <a:t>    MvcResult result = mockMvc.perform(post("/loginCheck.do")</a:t>
             </a:r>
-            <a:endParaRPr sz="1000">
-              <a:latin typeface="Consolas" panose="020B0609020204030204"/>
-            </a:endParaRPr>
           </a:p>
           <a:p>
             <a:r>
@@ -6634,9 +6685,6 @@
               </a:rPr>
               <a:t>            .param("userID", normalUser.getUserID())</a:t>
             </a:r>
-            <a:endParaRPr sz="1000">
-              <a:latin typeface="Consolas" panose="020B0609020204030204"/>
-            </a:endParaRPr>
           </a:p>
           <a:p>
             <a:r>
@@ -6645,9 +6693,6 @@
               </a:rPr>
               <a:t>            .param("password", "pwd1"))</a:t>
             </a:r>
-            <a:endParaRPr sz="1000">
-              <a:latin typeface="Consolas" panose="020B0609020204030204"/>
-            </a:endParaRPr>
           </a:p>
           <a:p>
             <a:r>
@@ -6656,9 +6701,6 @@
               </a:rPr>
               <a:t>        .andExpect(status().isOk())</a:t>
             </a:r>
-            <a:endParaRPr sz="1000">
-              <a:latin typeface="Consolas" panose="020B0609020204030204"/>
-            </a:endParaRPr>
           </a:p>
           <a:p>
             <a:r>
@@ -6667,9 +6709,6 @@
               </a:rPr>
               <a:t>        .andExpect(content().string("/index"))</a:t>
             </a:r>
-            <a:endParaRPr sz="1000">
-              <a:latin typeface="Consolas" panose="020B0609020204030204"/>
-            </a:endParaRPr>
           </a:p>
           <a:p>
             <a:r>
@@ -6678,9 +6717,6 @@
               </a:rPr>
               <a:t>        .andReturn();</a:t>
             </a:r>
-            <a:endParaRPr sz="1000">
-              <a:latin typeface="Consolas" panose="020B0609020204030204"/>
-            </a:endParaRPr>
           </a:p>
           <a:p>
             <a:r>
@@ -6689,9 +6725,6 @@
               </a:rPr>
               <a:t>    User sessionUser = (User) result.getRequest().getSession().getAttribute("user");</a:t>
             </a:r>
-            <a:endParaRPr sz="1000">
-              <a:latin typeface="Consolas" panose="020B0609020204030204"/>
-            </a:endParaRPr>
           </a:p>
           <a:p>
             <a:r>
@@ -6700,9 +6733,6 @@
               </a:rPr>
               <a:t>    assertThat(sessionUser.getUserID()).isEqualTo(normalUser.getUserID());</a:t>
             </a:r>
-            <a:endParaRPr sz="1000">
-              <a:latin typeface="Consolas" panose="020B0609020204030204"/>
-            </a:endParaRPr>
           </a:p>
           <a:p>
             <a:r>
@@ -6711,9 +6741,6 @@
               </a:rPr>
               <a:t>}</a:t>
             </a:r>
-            <a:endParaRPr sz="1000">
-              <a:latin typeface="Consolas" panose="020B0609020204030204"/>
-            </a:endParaRPr>
           </a:p>
         </p:txBody>
       </p:sp>
@@ -6793,14 +6820,12 @@
               <a:rPr sz="1600"/>
               <a:t>左侧： UserController 集成测试，校验登录返回和 session 写入</a:t>
             </a:r>
-            <a:endParaRPr sz="1600"/>
           </a:p>
           <a:p>
             <a:r>
               <a:rPr sz="1600"/>
               <a:t>右侧： UserServiceImpl 单元测试，校验 create 保存和计数逻辑</a:t>
             </a:r>
-            <a:endParaRPr sz="1600"/>
           </a:p>
         </p:txBody>
       </p:sp>
@@ -6817,7 +6842,7 @@
           </p:nvPr>
         </p:nvPicPr>
         <p:blipFill>
-          <a:blip r:embed="rId2"/>
+          <a:blip r:embed="rId4"/>
           <a:stretch>
             <a:fillRect/>
           </a:stretch>
@@ -6840,12 +6865,12 @@
           </p:cNvPicPr>
           <p:nvPr>
             <p:custDataLst>
-              <p:tags r:id="rId3"/>
+              <p:tags r:id="rId2"/>
             </p:custDataLst>
           </p:nvPr>
         </p:nvPicPr>
         <p:blipFill>
-          <a:blip r:embed="rId4"/>
+          <a:blip r:embed="rId5"/>
           <a:stretch>
             <a:fillRect/>
           </a:stretch>
@@ -6877,7 +6902,14 @@
         <p:cNvGrpSpPr/>
         <p:nvPr/>
       </p:nvGrpSpPr>
-      <p:grpSpPr/>
+      <p:grpSpPr>
+        <a:xfrm>
+          <a:off x="0" y="0"/>
+          <a:ext cx="0" cy="0"/>
+          <a:chOff x="0" y="0"/>
+          <a:chExt cx="0" cy="0"/>
+        </a:xfrm>
+      </p:grpSpPr>
       <p:sp>
         <p:nvSpPr>
           <p:cNvPr id="2" name="Rectangle 1"/>
@@ -6918,6 +6950,7 @@
           <a:lstStyle/>
           <a:p>
             <a:pPr algn="ctr"/>
+            <a:endParaRPr/>
           </a:p>
         </p:txBody>
       </p:sp>
@@ -6961,6 +6994,7 @@
           <a:lstStyle/>
           <a:p>
             <a:pPr algn="ctr"/>
+            <a:endParaRPr/>
           </a:p>
         </p:txBody>
       </p:sp>
@@ -7004,6 +7038,7 @@
           <a:lstStyle/>
           <a:p>
             <a:pPr algn="ctr"/>
+            <a:endParaRPr/>
           </a:p>
         </p:txBody>
       </p:sp>
@@ -7047,6 +7082,7 @@
           <a:lstStyle/>
           <a:p>
             <a:pPr algn="ctr"/>
+            <a:endParaRPr/>
           </a:p>
         </p:txBody>
       </p:sp>
@@ -7090,6 +7126,7 @@
           <a:lstStyle/>
           <a:p>
             <a:pPr algn="ctr"/>
+            <a:endParaRPr/>
           </a:p>
         </p:txBody>
       </p:sp>
@@ -7133,6 +7170,7 @@
           <a:lstStyle/>
           <a:p>
             <a:pPr algn="ctr"/>
+            <a:endParaRPr/>
           </a:p>
         </p:txBody>
       </p:sp>
@@ -7176,6 +7214,7 @@
           <a:lstStyle/>
           <a:p>
             <a:pPr algn="ctr"/>
+            <a:endParaRPr/>
           </a:p>
         </p:txBody>
       </p:sp>
@@ -7218,12 +7257,6 @@
               </a:rPr>
               <a:t>单</a:t>
             </a:r>
-            <a:endParaRPr sz="2200" b="1">
-              <a:solidFill>
-                <a:srgbClr val="000000"/>
-              </a:solidFill>
-              <a:latin typeface="微软雅黑" panose="020B0503020204020204" charset="-122"/>
-            </a:endParaRPr>
           </a:p>
           <a:p>
             <a:pPr algn="ctr">
@@ -7243,12 +7276,6 @@
               </a:rPr>
               <a:t>元</a:t>
             </a:r>
-            <a:endParaRPr sz="2200" b="1">
-              <a:solidFill>
-                <a:srgbClr val="000000"/>
-              </a:solidFill>
-              <a:latin typeface="微软雅黑" panose="020B0503020204020204" charset="-122"/>
-            </a:endParaRPr>
           </a:p>
           <a:p>
             <a:pPr algn="ctr">
@@ -7268,12 +7295,6 @@
               </a:rPr>
               <a:t>测</a:t>
             </a:r>
-            <a:endParaRPr sz="2200" b="1">
-              <a:solidFill>
-                <a:srgbClr val="000000"/>
-              </a:solidFill>
-              <a:latin typeface="微软雅黑" panose="020B0503020204020204" charset="-122"/>
-            </a:endParaRPr>
           </a:p>
           <a:p>
             <a:pPr algn="ctr">
@@ -7293,12 +7314,6 @@
               </a:rPr>
               <a:t>试</a:t>
             </a:r>
-            <a:endParaRPr sz="2200" b="1">
-              <a:solidFill>
-                <a:srgbClr val="000000"/>
-              </a:solidFill>
-              <a:latin typeface="微软雅黑" panose="020B0503020204020204" charset="-122"/>
-            </a:endParaRPr>
           </a:p>
           <a:p>
             <a:pPr algn="ctr">
@@ -7318,12 +7333,6 @@
               </a:rPr>
               <a:t>模</a:t>
             </a:r>
-            <a:endParaRPr sz="2200" b="1">
-              <a:solidFill>
-                <a:srgbClr val="000000"/>
-              </a:solidFill>
-              <a:latin typeface="微软雅黑" panose="020B0503020204020204" charset="-122"/>
-            </a:endParaRPr>
           </a:p>
           <a:p>
             <a:pPr algn="ctr">
@@ -7343,12 +7352,6 @@
               </a:rPr>
               <a:t>块</a:t>
             </a:r>
-            <a:endParaRPr sz="2200" b="1">
-              <a:solidFill>
-                <a:srgbClr val="000000"/>
-              </a:solidFill>
-              <a:latin typeface="微软雅黑" panose="020B0503020204020204" charset="-122"/>
-            </a:endParaRPr>
           </a:p>
         </p:txBody>
       </p:sp>
@@ -7371,10 +7374,34 @@
                 <a:tableStyleId>{5C22544A-7EE6-4342-B048-85BDC9FD1C3A}</a:tableStyleId>
               </a:tblPr>
               <a:tblGrid>
-                <a:gridCol w="2663190"/>
-                <a:gridCol w="2663190"/>
-                <a:gridCol w="2663190"/>
-                <a:gridCol w="2663190"/>
+                <a:gridCol w="2663190">
+                  <a:extLst>
+                    <a:ext uri="{9D8B030D-6E8A-4147-A177-3AD203B41FA5}">
+                      <a16:colId xmlns:a16="http://schemas.microsoft.com/office/drawing/2014/main" val="20000"/>
+                    </a:ext>
+                  </a:extLst>
+                </a:gridCol>
+                <a:gridCol w="2663190">
+                  <a:extLst>
+                    <a:ext uri="{9D8B030D-6E8A-4147-A177-3AD203B41FA5}">
+                      <a16:colId xmlns:a16="http://schemas.microsoft.com/office/drawing/2014/main" val="20001"/>
+                    </a:ext>
+                  </a:extLst>
+                </a:gridCol>
+                <a:gridCol w="2663190">
+                  <a:extLst>
+                    <a:ext uri="{9D8B030D-6E8A-4147-A177-3AD203B41FA5}">
+                      <a16:colId xmlns:a16="http://schemas.microsoft.com/office/drawing/2014/main" val="20002"/>
+                    </a:ext>
+                  </a:extLst>
+                </a:gridCol>
+                <a:gridCol w="2663190">
+                  <a:extLst>
+                    <a:ext uri="{9D8B030D-6E8A-4147-A177-3AD203B41FA5}">
+                      <a16:colId xmlns:a16="http://schemas.microsoft.com/office/drawing/2014/main" val="20003"/>
+                    </a:ext>
+                  </a:extLst>
+                </a:gridCol>
               </a:tblGrid>
               <a:tr h="738051">
                 <a:tc>
@@ -7392,12 +7419,6 @@
                         </a:rPr>
                         <a:t>序号</a:t>
                       </a:r>
-                      <a:endParaRPr sz="1300" b="1">
-                        <a:solidFill>
-                          <a:srgbClr val="FFFFFF"/>
-                        </a:solidFill>
-                        <a:latin typeface="微软雅黑" panose="020B0503020204020204" charset="-122"/>
-                      </a:endParaRPr>
                     </a:p>
                   </a:txBody>
                   <a:tcPr>
@@ -7421,12 +7442,6 @@
                         </a:rPr>
                         <a:t>测试模块</a:t>
                       </a:r>
-                      <a:endParaRPr sz="1300" b="1">
-                        <a:solidFill>
-                          <a:srgbClr val="FFFFFF"/>
-                        </a:solidFill>
-                        <a:latin typeface="微软雅黑" panose="020B0503020204020204" charset="-122"/>
-                      </a:endParaRPr>
                     </a:p>
                   </a:txBody>
                   <a:tcPr>
@@ -7450,12 +7465,6 @@
                         </a:rPr>
                         <a:t>用例数量</a:t>
                       </a:r>
-                      <a:endParaRPr sz="1300" b="1">
-                        <a:solidFill>
-                          <a:srgbClr val="FFFFFF"/>
-                        </a:solidFill>
-                        <a:latin typeface="微软雅黑" panose="020B0503020204020204" charset="-122"/>
-                      </a:endParaRPr>
                     </a:p>
                   </a:txBody>
                   <a:tcPr>
@@ -7479,12 +7488,6 @@
                         </a:rPr>
                         <a:t>覆盖重点</a:t>
                       </a:r>
-                      <a:endParaRPr sz="1300" b="1">
-                        <a:solidFill>
-                          <a:srgbClr val="FFFFFF"/>
-                        </a:solidFill>
-                        <a:latin typeface="微软雅黑" panose="020B0503020204020204" charset="-122"/>
-                      </a:endParaRPr>
                     </a:p>
                   </a:txBody>
                   <a:tcPr>
@@ -7493,6 +7496,11 @@
                     </a:solidFill>
                   </a:tcPr>
                 </a:tc>
+                <a:extLst>
+                  <a:ext uri="{0D108BD9-81ED-4DB2-BD59-A6C34878D82A}">
+                    <a16:rowId xmlns:a16="http://schemas.microsoft.com/office/drawing/2014/main" val="10000"/>
+                  </a:ext>
+                </a:extLst>
               </a:tr>
               <a:tr h="738051">
                 <a:tc>
@@ -7510,12 +7518,6 @@
                         </a:rPr>
                         <a:t>1</a:t>
                       </a:r>
-                      <a:endParaRPr sz="1200" b="0">
-                        <a:solidFill>
-                          <a:srgbClr val="000000"/>
-                        </a:solidFill>
-                        <a:latin typeface="微软雅黑" panose="020B0503020204020204" charset="-122"/>
-                      </a:endParaRPr>
                     </a:p>
                   </a:txBody>
                   <a:tcPr>
@@ -7539,12 +7541,6 @@
                         </a:rPr>
                         <a:t>用户服务</a:t>
                       </a:r>
-                      <a:endParaRPr sz="1200" b="0">
-                        <a:solidFill>
-                          <a:srgbClr val="000000"/>
-                        </a:solidFill>
-                        <a:latin typeface="微软雅黑" panose="020B0503020204020204" charset="-122"/>
-                      </a:endParaRPr>
                     </a:p>
                   </a:txBody>
                   <a:tcPr>
@@ -7568,12 +7564,6 @@
                         </a:rPr>
                         <a:t>8</a:t>
                       </a:r>
-                      <a:endParaRPr sz="1200" b="0">
-                        <a:solidFill>
-                          <a:srgbClr val="000000"/>
-                        </a:solidFill>
-                        <a:latin typeface="微软雅黑" panose="020B0503020204020204" charset="-122"/>
-                      </a:endParaRPr>
                     </a:p>
                   </a:txBody>
                   <a:tcPr>
@@ -7597,12 +7587,6 @@
                         </a:rPr>
                         <a:t>登录、注册、增删改查</a:t>
                       </a:r>
-                      <a:endParaRPr sz="1200" b="0">
-                        <a:solidFill>
-                          <a:srgbClr val="000000"/>
-                        </a:solidFill>
-                        <a:latin typeface="微软雅黑" panose="020B0503020204020204" charset="-122"/>
-                      </a:endParaRPr>
                     </a:p>
                   </a:txBody>
                   <a:tcPr>
@@ -7611,6 +7595,11 @@
                     </a:solidFill>
                   </a:tcPr>
                 </a:tc>
+                <a:extLst>
+                  <a:ext uri="{0D108BD9-81ED-4DB2-BD59-A6C34878D82A}">
+                    <a16:rowId xmlns:a16="http://schemas.microsoft.com/office/drawing/2014/main" val="10001"/>
+                  </a:ext>
+                </a:extLst>
               </a:tr>
               <a:tr h="738051">
                 <a:tc>
@@ -7628,12 +7617,6 @@
                         </a:rPr>
                         <a:t>2</a:t>
                       </a:r>
-                      <a:endParaRPr sz="1200" b="0">
-                        <a:solidFill>
-                          <a:srgbClr val="000000"/>
-                        </a:solidFill>
-                        <a:latin typeface="微软雅黑" panose="020B0503020204020204" charset="-122"/>
-                      </a:endParaRPr>
                     </a:p>
                   </a:txBody>
                   <a:tcPr>
@@ -7657,12 +7640,6 @@
                         </a:rPr>
                         <a:t>场馆服务</a:t>
                       </a:r>
-                      <a:endParaRPr sz="1200" b="0">
-                        <a:solidFill>
-                          <a:srgbClr val="000000"/>
-                        </a:solidFill>
-                        <a:latin typeface="微软雅黑" panose="020B0503020204020204" charset="-122"/>
-                      </a:endParaRPr>
                     </a:p>
                   </a:txBody>
                   <a:tcPr>
@@ -7686,12 +7663,6 @@
                         </a:rPr>
                         <a:t>8</a:t>
                       </a:r>
-                      <a:endParaRPr sz="1200" b="0">
-                        <a:solidFill>
-                          <a:srgbClr val="000000"/>
-                        </a:solidFill>
-                        <a:latin typeface="微软雅黑" panose="020B0503020204020204" charset="-122"/>
-                      </a:endParaRPr>
                     </a:p>
                   </a:txBody>
                   <a:tcPr>
@@ -7715,12 +7686,6 @@
                         </a:rPr>
                         <a:t>场馆查询、更新、删除</a:t>
                       </a:r>
-                      <a:endParaRPr sz="1200" b="0">
-                        <a:solidFill>
-                          <a:srgbClr val="000000"/>
-                        </a:solidFill>
-                        <a:latin typeface="微软雅黑" panose="020B0503020204020204" charset="-122"/>
-                      </a:endParaRPr>
                     </a:p>
                   </a:txBody>
                   <a:tcPr>
@@ -7729,6 +7694,11 @@
                     </a:solidFill>
                   </a:tcPr>
                 </a:tc>
+                <a:extLst>
+                  <a:ext uri="{0D108BD9-81ED-4DB2-BD59-A6C34878D82A}">
+                    <a16:rowId xmlns:a16="http://schemas.microsoft.com/office/drawing/2014/main" val="10002"/>
+                  </a:ext>
+                </a:extLst>
               </a:tr>
               <a:tr h="738051">
                 <a:tc>
@@ -7746,12 +7716,6 @@
                         </a:rPr>
                         <a:t>3</a:t>
                       </a:r>
-                      <a:endParaRPr sz="1200" b="0">
-                        <a:solidFill>
-                          <a:srgbClr val="000000"/>
-                        </a:solidFill>
-                        <a:latin typeface="微软雅黑" panose="020B0503020204020204" charset="-122"/>
-                      </a:endParaRPr>
                     </a:p>
                   </a:txBody>
                   <a:tcPr>
@@ -7775,12 +7739,6 @@
                         </a:rPr>
                         <a:t>订单服务</a:t>
                       </a:r>
-                      <a:endParaRPr sz="1200" b="0">
-                        <a:solidFill>
-                          <a:srgbClr val="000000"/>
-                        </a:solidFill>
-                        <a:latin typeface="微软雅黑" panose="020B0503020204020204" charset="-122"/>
-                      </a:endParaRPr>
                     </a:p>
                   </a:txBody>
                   <a:tcPr>
@@ -7804,12 +7762,6 @@
                         </a:rPr>
                         <a:t>14</a:t>
                       </a:r>
-                      <a:endParaRPr sz="1200" b="0">
-                        <a:solidFill>
-                          <a:srgbClr val="000000"/>
-                        </a:solidFill>
-                        <a:latin typeface="微软雅黑" panose="020B0503020204020204" charset="-122"/>
-                      </a:endParaRPr>
                     </a:p>
                   </a:txBody>
                   <a:tcPr>
@@ -7833,12 +7785,6 @@
                         </a:rPr>
                         <a:t>订单创建、取消、审核状态</a:t>
                       </a:r>
-                      <a:endParaRPr sz="1200" b="0">
-                        <a:solidFill>
-                          <a:srgbClr val="000000"/>
-                        </a:solidFill>
-                        <a:latin typeface="微软雅黑" panose="020B0503020204020204" charset="-122"/>
-                      </a:endParaRPr>
                     </a:p>
                   </a:txBody>
                   <a:tcPr>
@@ -7847,6 +7793,11 @@
                     </a:solidFill>
                   </a:tcPr>
                 </a:tc>
+                <a:extLst>
+                  <a:ext uri="{0D108BD9-81ED-4DB2-BD59-A6C34878D82A}">
+                    <a16:rowId xmlns:a16="http://schemas.microsoft.com/office/drawing/2014/main" val="10003"/>
+                  </a:ext>
+                </a:extLst>
               </a:tr>
               <a:tr h="738051">
                 <a:tc>
@@ -7864,12 +7815,6 @@
                         </a:rPr>
                         <a:t>4</a:t>
                       </a:r>
-                      <a:endParaRPr sz="1200" b="0">
-                        <a:solidFill>
-                          <a:srgbClr val="000000"/>
-                        </a:solidFill>
-                        <a:latin typeface="微软雅黑" panose="020B0503020204020204" charset="-122"/>
-                      </a:endParaRPr>
                     </a:p>
                   </a:txBody>
                   <a:tcPr>
@@ -7893,12 +7838,6 @@
                         </a:rPr>
                         <a:t>留言服务</a:t>
                       </a:r>
-                      <a:endParaRPr sz="1200" b="0">
-                        <a:solidFill>
-                          <a:srgbClr val="000000"/>
-                        </a:solidFill>
-                        <a:latin typeface="微软雅黑" panose="020B0503020204020204" charset="-122"/>
-                      </a:endParaRPr>
                     </a:p>
                   </a:txBody>
                   <a:tcPr>
@@ -7922,12 +7861,6 @@
                         </a:rPr>
                         <a:t>11</a:t>
                       </a:r>
-                      <a:endParaRPr sz="1200" b="0">
-                        <a:solidFill>
-                          <a:srgbClr val="000000"/>
-                        </a:solidFill>
-                        <a:latin typeface="微软雅黑" panose="020B0503020204020204" charset="-122"/>
-                      </a:endParaRPr>
                     </a:p>
                   </a:txBody>
                   <a:tcPr>
@@ -7951,12 +7884,6 @@
                         </a:rPr>
                         <a:t>留言发布、审核、删除</a:t>
                       </a:r>
-                      <a:endParaRPr sz="1200" b="0">
-                        <a:solidFill>
-                          <a:srgbClr val="000000"/>
-                        </a:solidFill>
-                        <a:latin typeface="微软雅黑" panose="020B0503020204020204" charset="-122"/>
-                      </a:endParaRPr>
                     </a:p>
                   </a:txBody>
                   <a:tcPr>
@@ -7965,6 +7892,11 @@
                     </a:solidFill>
                   </a:tcPr>
                 </a:tc>
+                <a:extLst>
+                  <a:ext uri="{0D108BD9-81ED-4DB2-BD59-A6C34878D82A}">
+                    <a16:rowId xmlns:a16="http://schemas.microsoft.com/office/drawing/2014/main" val="10004"/>
+                  </a:ext>
+                </a:extLst>
               </a:tr>
               <a:tr h="738051">
                 <a:tc>
@@ -7982,12 +7914,6 @@
                         </a:rPr>
                         <a:t>5</a:t>
                       </a:r>
-                      <a:endParaRPr sz="1200" b="0">
-                        <a:solidFill>
-                          <a:srgbClr val="000000"/>
-                        </a:solidFill>
-                        <a:latin typeface="微软雅黑" panose="020B0503020204020204" charset="-122"/>
-                      </a:endParaRPr>
                     </a:p>
                   </a:txBody>
                   <a:tcPr>
@@ -8011,12 +7937,6 @@
                         </a:rPr>
                         <a:t>新闻服务</a:t>
                       </a:r>
-                      <a:endParaRPr sz="1200" b="0">
-                        <a:solidFill>
-                          <a:srgbClr val="000000"/>
-                        </a:solidFill>
-                        <a:latin typeface="微软雅黑" panose="020B0503020204020204" charset="-122"/>
-                      </a:endParaRPr>
                     </a:p>
                   </a:txBody>
                   <a:tcPr>
@@ -8040,12 +7960,6 @@
                         </a:rPr>
                         <a:t>5</a:t>
                       </a:r>
-                      <a:endParaRPr sz="1200" b="0">
-                        <a:solidFill>
-                          <a:srgbClr val="000000"/>
-                        </a:solidFill>
-                        <a:latin typeface="微软雅黑" panose="020B0503020204020204" charset="-122"/>
-                      </a:endParaRPr>
                     </a:p>
                   </a:txBody>
                   <a:tcPr>
@@ -8069,12 +7983,6 @@
                         </a:rPr>
                         <a:t>新闻列表、详情、维护</a:t>
                       </a:r>
-                      <a:endParaRPr sz="1200" b="0">
-                        <a:solidFill>
-                          <a:srgbClr val="000000"/>
-                        </a:solidFill>
-                        <a:latin typeface="微软雅黑" panose="020B0503020204020204" charset="-122"/>
-                      </a:endParaRPr>
                     </a:p>
                   </a:txBody>
                   <a:tcPr>
@@ -8083,6 +7991,11 @@
                     </a:solidFill>
                   </a:tcPr>
                 </a:tc>
+                <a:extLst>
+                  <a:ext uri="{0D108BD9-81ED-4DB2-BD59-A6C34878D82A}">
+                    <a16:rowId xmlns:a16="http://schemas.microsoft.com/office/drawing/2014/main" val="10005"/>
+                  </a:ext>
+                </a:extLst>
               </a:tr>
               <a:tr h="738054">
                 <a:tc>
@@ -8100,12 +8013,6 @@
                         </a:rPr>
                         <a:t>6</a:t>
                       </a:r>
-                      <a:endParaRPr sz="1200" b="0">
-                        <a:solidFill>
-                          <a:srgbClr val="000000"/>
-                        </a:solidFill>
-                        <a:latin typeface="微软雅黑" panose="020B0503020204020204" charset="-122"/>
-                      </a:endParaRPr>
                     </a:p>
                   </a:txBody>
                   <a:tcPr>
@@ -8129,12 +8036,6 @@
                         </a:rPr>
                         <a:t>聚合查询服务</a:t>
                       </a:r>
-                      <a:endParaRPr sz="1200" b="0">
-                        <a:solidFill>
-                          <a:srgbClr val="000000"/>
-                        </a:solidFill>
-                        <a:latin typeface="微软雅黑" panose="020B0503020204020204" charset="-122"/>
-                      </a:endParaRPr>
                     </a:p>
                   </a:txBody>
                   <a:tcPr>
@@ -8158,12 +8059,6 @@
                         </a:rPr>
                         <a:t>4</a:t>
                       </a:r>
-                      <a:endParaRPr sz="1200" b="0">
-                        <a:solidFill>
-                          <a:srgbClr val="000000"/>
-                        </a:solidFill>
-                        <a:latin typeface="微软雅黑" panose="020B0503020204020204" charset="-122"/>
-                      </a:endParaRPr>
                     </a:p>
                   </a:txBody>
                   <a:tcPr>
@@ -8187,12 +8082,6 @@
                         </a:rPr>
                         <a:t>VO 聚合查询与边界路径</a:t>
                       </a:r>
-                      <a:endParaRPr sz="1200" b="0">
-                        <a:solidFill>
-                          <a:srgbClr val="000000"/>
-                        </a:solidFill>
-                        <a:latin typeface="微软雅黑" panose="020B0503020204020204" charset="-122"/>
-                      </a:endParaRPr>
                     </a:p>
                   </a:txBody>
                   <a:tcPr>
@@ -8201,6 +8090,11 @@
                     </a:solidFill>
                   </a:tcPr>
                 </a:tc>
+                <a:extLst>
+                  <a:ext uri="{0D108BD9-81ED-4DB2-BD59-A6C34878D82A}">
+                    <a16:rowId xmlns:a16="http://schemas.microsoft.com/office/drawing/2014/main" val="10006"/>
+                  </a:ext>
+                </a:extLst>
               </a:tr>
             </a:tbl>
           </a:graphicData>
@@ -8223,7 +8117,14 @@
         <p:cNvGrpSpPr/>
         <p:nvPr/>
       </p:nvGrpSpPr>
-      <p:grpSpPr/>
+      <p:grpSpPr>
+        <a:xfrm>
+          <a:off x="0" y="0"/>
+          <a:ext cx="0" cy="0"/>
+          <a:chOff x="0" y="0"/>
+          <a:chExt cx="0" cy="0"/>
+        </a:xfrm>
+      </p:grpSpPr>
       <p:sp>
         <p:nvSpPr>
           <p:cNvPr id="2" name="Rectangle 1"/>
@@ -8264,6 +8165,7 @@
           <a:lstStyle/>
           <a:p>
             <a:pPr algn="ctr"/>
+            <a:endParaRPr/>
           </a:p>
         </p:txBody>
       </p:sp>
@@ -8307,6 +8209,7 @@
           <a:lstStyle/>
           <a:p>
             <a:pPr algn="ctr"/>
+            <a:endParaRPr/>
           </a:p>
         </p:txBody>
       </p:sp>
@@ -8350,6 +8253,7 @@
           <a:lstStyle/>
           <a:p>
             <a:pPr algn="ctr"/>
+            <a:endParaRPr/>
           </a:p>
         </p:txBody>
       </p:sp>
@@ -8393,6 +8297,7 @@
           <a:lstStyle/>
           <a:p>
             <a:pPr algn="ctr"/>
+            <a:endParaRPr/>
           </a:p>
         </p:txBody>
       </p:sp>
@@ -8436,6 +8341,7 @@
           <a:lstStyle/>
           <a:p>
             <a:pPr algn="ctr"/>
+            <a:endParaRPr/>
           </a:p>
         </p:txBody>
       </p:sp>
@@ -8479,6 +8385,7 @@
           <a:lstStyle/>
           <a:p>
             <a:pPr algn="ctr"/>
+            <a:endParaRPr/>
           </a:p>
         </p:txBody>
       </p:sp>
@@ -8522,6 +8429,7 @@
           <a:lstStyle/>
           <a:p>
             <a:pPr algn="ctr"/>
+            <a:endParaRPr/>
           </a:p>
         </p:txBody>
       </p:sp>
@@ -8564,12 +8472,6 @@
               </a:rPr>
               <a:t>公</a:t>
             </a:r>
-            <a:endParaRPr sz="2200" b="1">
-              <a:solidFill>
-                <a:srgbClr val="000000"/>
-              </a:solidFill>
-              <a:latin typeface="微软雅黑" panose="020B0503020204020204" charset="-122"/>
-            </a:endParaRPr>
           </a:p>
           <a:p>
             <a:pPr algn="ctr">
@@ -8589,12 +8491,6 @@
               </a:rPr>
               <a:t>共</a:t>
             </a:r>
-            <a:endParaRPr sz="2200" b="1">
-              <a:solidFill>
-                <a:srgbClr val="000000"/>
-              </a:solidFill>
-              <a:latin typeface="微软雅黑" panose="020B0503020204020204" charset="-122"/>
-            </a:endParaRPr>
           </a:p>
           <a:p>
             <a:pPr algn="ctr">
@@ -8614,12 +8510,6 @@
               </a:rPr>
               <a:t>展</a:t>
             </a:r>
-            <a:endParaRPr sz="2200" b="1">
-              <a:solidFill>
-                <a:srgbClr val="000000"/>
-              </a:solidFill>
-              <a:latin typeface="微软雅黑" panose="020B0503020204020204" charset="-122"/>
-            </a:endParaRPr>
           </a:p>
           <a:p>
             <a:pPr algn="ctr">
@@ -8639,12 +8529,6 @@
               </a:rPr>
               <a:t>示</a:t>
             </a:r>
-            <a:endParaRPr sz="2200" b="1">
-              <a:solidFill>
-                <a:srgbClr val="000000"/>
-              </a:solidFill>
-              <a:latin typeface="微软雅黑" panose="020B0503020204020204" charset="-122"/>
-            </a:endParaRPr>
           </a:p>
           <a:p>
             <a:pPr algn="ctr">
@@ -8664,12 +8548,6 @@
               </a:rPr>
               <a:t>模</a:t>
             </a:r>
-            <a:endParaRPr sz="2200" b="1">
-              <a:solidFill>
-                <a:srgbClr val="000000"/>
-              </a:solidFill>
-              <a:latin typeface="微软雅黑" panose="020B0503020204020204" charset="-122"/>
-            </a:endParaRPr>
           </a:p>
           <a:p>
             <a:pPr algn="ctr">
@@ -8689,12 +8567,6 @@
               </a:rPr>
               <a:t>块</a:t>
             </a:r>
-            <a:endParaRPr sz="2200" b="1">
-              <a:solidFill>
-                <a:srgbClr val="000000"/>
-              </a:solidFill>
-              <a:latin typeface="微软雅黑" panose="020B0503020204020204" charset="-122"/>
-            </a:endParaRPr>
           </a:p>
         </p:txBody>
       </p:sp>
@@ -8717,10 +8589,34 @@
                 <a:tableStyleId>{5C22544A-7EE6-4342-B048-85BDC9FD1C3A}</a:tableStyleId>
               </a:tblPr>
               <a:tblGrid>
-                <a:gridCol w="2663190"/>
-                <a:gridCol w="2663190"/>
-                <a:gridCol w="2663190"/>
-                <a:gridCol w="2663190"/>
+                <a:gridCol w="2663190">
+                  <a:extLst>
+                    <a:ext uri="{9D8B030D-6E8A-4147-A177-3AD203B41FA5}">
+                      <a16:colId xmlns:a16="http://schemas.microsoft.com/office/drawing/2014/main" val="20000"/>
+                    </a:ext>
+                  </a:extLst>
+                </a:gridCol>
+                <a:gridCol w="2663190">
+                  <a:extLst>
+                    <a:ext uri="{9D8B030D-6E8A-4147-A177-3AD203B41FA5}">
+                      <a16:colId xmlns:a16="http://schemas.microsoft.com/office/drawing/2014/main" val="20001"/>
+                    </a:ext>
+                  </a:extLst>
+                </a:gridCol>
+                <a:gridCol w="2663190">
+                  <a:extLst>
+                    <a:ext uri="{9D8B030D-6E8A-4147-A177-3AD203B41FA5}">
+                      <a16:colId xmlns:a16="http://schemas.microsoft.com/office/drawing/2014/main" val="20002"/>
+                    </a:ext>
+                  </a:extLst>
+                </a:gridCol>
+                <a:gridCol w="2663190">
+                  <a:extLst>
+                    <a:ext uri="{9D8B030D-6E8A-4147-A177-3AD203B41FA5}">
+                      <a16:colId xmlns:a16="http://schemas.microsoft.com/office/drawing/2014/main" val="20003"/>
+                    </a:ext>
+                  </a:extLst>
+                </a:gridCol>
               </a:tblGrid>
               <a:tr h="738051">
                 <a:tc>
@@ -8738,12 +8634,6 @@
                         </a:rPr>
                         <a:t>序号</a:t>
                       </a:r>
-                      <a:endParaRPr sz="1300" b="1">
-                        <a:solidFill>
-                          <a:srgbClr val="FFFFFF"/>
-                        </a:solidFill>
-                        <a:latin typeface="微软雅黑" panose="020B0503020204020204" charset="-122"/>
-                      </a:endParaRPr>
                     </a:p>
                   </a:txBody>
                   <a:tcPr>
@@ -8767,12 +8657,6 @@
                         </a:rPr>
                         <a:t>特性</a:t>
                       </a:r>
-                      <a:endParaRPr sz="1300" b="1">
-                        <a:solidFill>
-                          <a:srgbClr val="FFFFFF"/>
-                        </a:solidFill>
-                        <a:latin typeface="微软雅黑" panose="020B0503020204020204" charset="-122"/>
-                      </a:endParaRPr>
                     </a:p>
                   </a:txBody>
                   <a:tcPr>
@@ -8796,12 +8680,6 @@
                         </a:rPr>
                         <a:t>代表场景</a:t>
                       </a:r>
-                      <a:endParaRPr sz="1300" b="1">
-                        <a:solidFill>
-                          <a:srgbClr val="FFFFFF"/>
-                        </a:solidFill>
-                        <a:latin typeface="微软雅黑" panose="020B0503020204020204" charset="-122"/>
-                      </a:endParaRPr>
                     </a:p>
                   </a:txBody>
                   <a:tcPr>
@@ -8825,12 +8703,6 @@
                         </a:rPr>
                         <a:t>测试设计技术</a:t>
                       </a:r>
-                      <a:endParaRPr sz="1300" b="1">
-                        <a:solidFill>
-                          <a:srgbClr val="FFFFFF"/>
-                        </a:solidFill>
-                        <a:latin typeface="微软雅黑" panose="020B0503020204020204" charset="-122"/>
-                      </a:endParaRPr>
                     </a:p>
                   </a:txBody>
                   <a:tcPr>
@@ -8839,6 +8711,11 @@
                     </a:solidFill>
                   </a:tcPr>
                 </a:tc>
+                <a:extLst>
+                  <a:ext uri="{0D108BD9-81ED-4DB2-BD59-A6C34878D82A}">
+                    <a16:rowId xmlns:a16="http://schemas.microsoft.com/office/drawing/2014/main" val="10000"/>
+                  </a:ext>
+                </a:extLst>
               </a:tr>
               <a:tr h="738051">
                 <a:tc>
@@ -8856,12 +8733,6 @@
                         </a:rPr>
                         <a:t>1</a:t>
                       </a:r>
-                      <a:endParaRPr sz="1200" b="0">
-                        <a:solidFill>
-                          <a:srgbClr val="000000"/>
-                        </a:solidFill>
-                        <a:latin typeface="微软雅黑" panose="020B0503020204020204" charset="-122"/>
-                      </a:endParaRPr>
                     </a:p>
                   </a:txBody>
                   <a:tcPr>
@@ -8885,12 +8756,6 @@
                         </a:rPr>
                         <a:t>首页展示</a:t>
                       </a:r>
-                      <a:endParaRPr sz="1200" b="0">
-                        <a:solidFill>
-                          <a:srgbClr val="000000"/>
-                        </a:solidFill>
-                        <a:latin typeface="微软雅黑" panose="020B0503020204020204" charset="-122"/>
-                      </a:endParaRPr>
                     </a:p>
                   </a:txBody>
                   <a:tcPr>
@@ -8914,12 +8779,6 @@
                         </a:rPr>
                         <a:t>首页内容正常加载</a:t>
                       </a:r>
-                      <a:endParaRPr sz="1200" b="0">
-                        <a:solidFill>
-                          <a:srgbClr val="000000"/>
-                        </a:solidFill>
-                        <a:latin typeface="微软雅黑" panose="020B0503020204020204" charset="-122"/>
-                      </a:endParaRPr>
                     </a:p>
                   </a:txBody>
                   <a:tcPr>
@@ -8943,12 +8802,6 @@
                         </a:rPr>
                         <a:t>集成测试</a:t>
                       </a:r>
-                      <a:endParaRPr sz="1200" b="0">
-                        <a:solidFill>
-                          <a:srgbClr val="000000"/>
-                        </a:solidFill>
-                        <a:latin typeface="微软雅黑" panose="020B0503020204020204" charset="-122"/>
-                      </a:endParaRPr>
                     </a:p>
                   </a:txBody>
                   <a:tcPr>
@@ -8957,6 +8810,11 @@
                     </a:solidFill>
                   </a:tcPr>
                 </a:tc>
+                <a:extLst>
+                  <a:ext uri="{0D108BD9-81ED-4DB2-BD59-A6C34878D82A}">
+                    <a16:rowId xmlns:a16="http://schemas.microsoft.com/office/drawing/2014/main" val="10001"/>
+                  </a:ext>
+                </a:extLst>
               </a:tr>
               <a:tr h="738051">
                 <a:tc>
@@ -8974,12 +8832,6 @@
                         </a:rPr>
                         <a:t>2</a:t>
                       </a:r>
-                      <a:endParaRPr sz="1200" b="0">
-                        <a:solidFill>
-                          <a:srgbClr val="000000"/>
-                        </a:solidFill>
-                        <a:latin typeface="微软雅黑" panose="020B0503020204020204" charset="-122"/>
-                      </a:endParaRPr>
                     </a:p>
                   </a:txBody>
                   <a:tcPr>
@@ -9003,12 +8855,6 @@
                         </a:rPr>
                         <a:t>新闻列表</a:t>
                       </a:r>
-                      <a:endParaRPr sz="1200" b="0">
-                        <a:solidFill>
-                          <a:srgbClr val="000000"/>
-                        </a:solidFill>
-                        <a:latin typeface="微软雅黑" panose="020B0503020204020204" charset="-122"/>
-                      </a:endParaRPr>
                     </a:p>
                   </a:txBody>
                   <a:tcPr>
@@ -9032,12 +8878,6 @@
                         </a:rPr>
                         <a:t>按页展示新闻数据</a:t>
                       </a:r>
-                      <a:endParaRPr sz="1200" b="0">
-                        <a:solidFill>
-                          <a:srgbClr val="000000"/>
-                        </a:solidFill>
-                        <a:latin typeface="微软雅黑" panose="020B0503020204020204" charset="-122"/>
-                      </a:endParaRPr>
                     </a:p>
                   </a:txBody>
                   <a:tcPr>
@@ -9061,12 +8901,6 @@
                         </a:rPr>
                         <a:t>等价类 + 边界值</a:t>
                       </a:r>
-                      <a:endParaRPr sz="1200" b="0">
-                        <a:solidFill>
-                          <a:srgbClr val="000000"/>
-                        </a:solidFill>
-                        <a:latin typeface="微软雅黑" panose="020B0503020204020204" charset="-122"/>
-                      </a:endParaRPr>
                     </a:p>
                   </a:txBody>
                   <a:tcPr>
@@ -9075,6 +8909,11 @@
                     </a:solidFill>
                   </a:tcPr>
                 </a:tc>
+                <a:extLst>
+                  <a:ext uri="{0D108BD9-81ED-4DB2-BD59-A6C34878D82A}">
+                    <a16:rowId xmlns:a16="http://schemas.microsoft.com/office/drawing/2014/main" val="10002"/>
+                  </a:ext>
+                </a:extLst>
               </a:tr>
               <a:tr h="738051">
                 <a:tc>
@@ -9092,12 +8931,6 @@
                         </a:rPr>
                         <a:t>3</a:t>
                       </a:r>
-                      <a:endParaRPr sz="1200" b="0">
-                        <a:solidFill>
-                          <a:srgbClr val="000000"/>
-                        </a:solidFill>
-                        <a:latin typeface="微软雅黑" panose="020B0503020204020204" charset="-122"/>
-                      </a:endParaRPr>
                     </a:p>
                   </a:txBody>
                   <a:tcPr>
@@ -9121,12 +8954,6 @@
                         </a:rPr>
                         <a:t>新闻详情</a:t>
                       </a:r>
-                      <a:endParaRPr sz="1200" b="0">
-                        <a:solidFill>
-                          <a:srgbClr val="000000"/>
-                        </a:solidFill>
-                        <a:latin typeface="微软雅黑" panose="020B0503020204020204" charset="-122"/>
-                      </a:endParaRPr>
                     </a:p>
                   </a:txBody>
                   <a:tcPr>
@@ -9150,12 +8977,6 @@
                         </a:rPr>
                         <a:t>查看存在 / 不存在新闻</a:t>
                       </a:r>
-                      <a:endParaRPr sz="1200" b="0">
-                        <a:solidFill>
-                          <a:srgbClr val="000000"/>
-                        </a:solidFill>
-                        <a:latin typeface="微软雅黑" panose="020B0503020204020204" charset="-122"/>
-                      </a:endParaRPr>
                     </a:p>
                   </a:txBody>
                   <a:tcPr>
@@ -9179,12 +9000,6 @@
                         </a:rPr>
                         <a:t>边界值</a:t>
                       </a:r>
-                      <a:endParaRPr sz="1200" b="0">
-                        <a:solidFill>
-                          <a:srgbClr val="000000"/>
-                        </a:solidFill>
-                        <a:latin typeface="微软雅黑" panose="020B0503020204020204" charset="-122"/>
-                      </a:endParaRPr>
                     </a:p>
                   </a:txBody>
                   <a:tcPr>
@@ -9193,6 +9008,11 @@
                     </a:solidFill>
                   </a:tcPr>
                 </a:tc>
+                <a:extLst>
+                  <a:ext uri="{0D108BD9-81ED-4DB2-BD59-A6C34878D82A}">
+                    <a16:rowId xmlns:a16="http://schemas.microsoft.com/office/drawing/2014/main" val="10003"/>
+                  </a:ext>
+                </a:extLst>
               </a:tr>
               <a:tr h="738051">
                 <a:tc>
@@ -9210,12 +9030,6 @@
                         </a:rPr>
                         <a:t>4</a:t>
                       </a:r>
-                      <a:endParaRPr sz="1200" b="0">
-                        <a:solidFill>
-                          <a:srgbClr val="000000"/>
-                        </a:solidFill>
-                        <a:latin typeface="微软雅黑" panose="020B0503020204020204" charset="-122"/>
-                      </a:endParaRPr>
                     </a:p>
                   </a:txBody>
                   <a:tcPr>
@@ -9239,12 +9053,6 @@
                         </a:rPr>
                         <a:t>场馆列表</a:t>
                       </a:r>
-                      <a:endParaRPr sz="1200" b="0">
-                        <a:solidFill>
-                          <a:srgbClr val="000000"/>
-                        </a:solidFill>
-                        <a:latin typeface="微软雅黑" panose="020B0503020204020204" charset="-122"/>
-                      </a:endParaRPr>
                     </a:p>
                   </a:txBody>
                   <a:tcPr>
@@ -9268,12 +9076,6 @@
                         </a:rPr>
                         <a:t>展示场馆与分页信息</a:t>
                       </a:r>
-                      <a:endParaRPr sz="1200" b="0">
-                        <a:solidFill>
-                          <a:srgbClr val="000000"/>
-                        </a:solidFill>
-                        <a:latin typeface="微软雅黑" panose="020B0503020204020204" charset="-122"/>
-                      </a:endParaRPr>
                     </a:p>
                   </a:txBody>
                   <a:tcPr>
@@ -9297,12 +9099,6 @@
                         </a:rPr>
                         <a:t>等价类</a:t>
                       </a:r>
-                      <a:endParaRPr sz="1200" b="0">
-                        <a:solidFill>
-                          <a:srgbClr val="000000"/>
-                        </a:solidFill>
-                        <a:latin typeface="微软雅黑" panose="020B0503020204020204" charset="-122"/>
-                      </a:endParaRPr>
                     </a:p>
                   </a:txBody>
                   <a:tcPr>
@@ -9311,6 +9107,11 @@
                     </a:solidFill>
                   </a:tcPr>
                 </a:tc>
+                <a:extLst>
+                  <a:ext uri="{0D108BD9-81ED-4DB2-BD59-A6C34878D82A}">
+                    <a16:rowId xmlns:a16="http://schemas.microsoft.com/office/drawing/2014/main" val="10004"/>
+                  </a:ext>
+                </a:extLst>
               </a:tr>
               <a:tr h="738051">
                 <a:tc>
@@ -9328,12 +9129,6 @@
                         </a:rPr>
                         <a:t>5</a:t>
                       </a:r>
-                      <a:endParaRPr sz="1200" b="0">
-                        <a:solidFill>
-                          <a:srgbClr val="000000"/>
-                        </a:solidFill>
-                        <a:latin typeface="微软雅黑" panose="020B0503020204020204" charset="-122"/>
-                      </a:endParaRPr>
                     </a:p>
                   </a:txBody>
                   <a:tcPr>
@@ -9357,12 +9152,6 @@
                         </a:rPr>
                         <a:t>预约入口</a:t>
                       </a:r>
-                      <a:endParaRPr sz="1200" b="0">
-                        <a:solidFill>
-                          <a:srgbClr val="000000"/>
-                        </a:solidFill>
-                        <a:latin typeface="微软雅黑" panose="020B0503020204020204" charset="-122"/>
-                      </a:endParaRPr>
                     </a:p>
                   </a:txBody>
                   <a:tcPr>
@@ -9386,12 +9175,6 @@
                         </a:rPr>
                         <a:t>登录与未登录访问分流</a:t>
                       </a:r>
-                      <a:endParaRPr sz="1200" b="0">
-                        <a:solidFill>
-                          <a:srgbClr val="000000"/>
-                        </a:solidFill>
-                        <a:latin typeface="微软雅黑" panose="020B0503020204020204" charset="-122"/>
-                      </a:endParaRPr>
                     </a:p>
                   </a:txBody>
                   <a:tcPr>
@@ -9415,12 +9198,6 @@
                         </a:rPr>
                         <a:t>判定覆盖</a:t>
                       </a:r>
-                      <a:endParaRPr sz="1200" b="0">
-                        <a:solidFill>
-                          <a:srgbClr val="000000"/>
-                        </a:solidFill>
-                        <a:latin typeface="微软雅黑" panose="020B0503020204020204" charset="-122"/>
-                      </a:endParaRPr>
                     </a:p>
                   </a:txBody>
                   <a:tcPr>
@@ -9429,6 +9206,11 @@
                     </a:solidFill>
                   </a:tcPr>
                 </a:tc>
+                <a:extLst>
+                  <a:ext uri="{0D108BD9-81ED-4DB2-BD59-A6C34878D82A}">
+                    <a16:rowId xmlns:a16="http://schemas.microsoft.com/office/drawing/2014/main" val="10005"/>
+                  </a:ext>
+                </a:extLst>
               </a:tr>
               <a:tr h="738054">
                 <a:tc>
@@ -9446,12 +9228,6 @@
                         </a:rPr>
                         <a:t>6</a:t>
                       </a:r>
-                      <a:endParaRPr sz="1200" b="0">
-                        <a:solidFill>
-                          <a:srgbClr val="000000"/>
-                        </a:solidFill>
-                        <a:latin typeface="微软雅黑" panose="020B0503020204020204" charset="-122"/>
-                      </a:endParaRPr>
                     </a:p>
                   </a:txBody>
                   <a:tcPr>
@@ -9475,12 +9251,6 @@
                         </a:rPr>
                         <a:t>场馆查询</a:t>
                       </a:r>
-                      <a:endParaRPr sz="1200" b="0">
-                        <a:solidFill>
-                          <a:srgbClr val="000000"/>
-                        </a:solidFill>
-                        <a:latin typeface="微软雅黑" panose="020B0503020204020204" charset="-122"/>
-                      </a:endParaRPr>
                     </a:p>
                   </a:txBody>
                   <a:tcPr>
@@ -9504,12 +9274,6 @@
                         </a:rPr>
                         <a:t>按名称查询有效/无效场馆</a:t>
                       </a:r>
-                      <a:endParaRPr sz="1200" b="0">
-                        <a:solidFill>
-                          <a:srgbClr val="000000"/>
-                        </a:solidFill>
-                        <a:latin typeface="微软雅黑" panose="020B0503020204020204" charset="-122"/>
-                      </a:endParaRPr>
                     </a:p>
                   </a:txBody>
                   <a:tcPr>
@@ -9533,12 +9297,6 @@
                         </a:rPr>
                         <a:t>等价类</a:t>
                       </a:r>
-                      <a:endParaRPr sz="1200" b="0">
-                        <a:solidFill>
-                          <a:srgbClr val="000000"/>
-                        </a:solidFill>
-                        <a:latin typeface="微软雅黑" panose="020B0503020204020204" charset="-122"/>
-                      </a:endParaRPr>
                     </a:p>
                   </a:txBody>
                   <a:tcPr>
@@ -9547,6 +9305,11 @@
                     </a:solidFill>
                   </a:tcPr>
                 </a:tc>
+                <a:extLst>
+                  <a:ext uri="{0D108BD9-81ED-4DB2-BD59-A6C34878D82A}">
+                    <a16:rowId xmlns:a16="http://schemas.microsoft.com/office/drawing/2014/main" val="10006"/>
+                  </a:ext>
+                </a:extLst>
               </a:tr>
             </a:tbl>
           </a:graphicData>
@@ -9569,7 +9332,14 @@
         <p:cNvGrpSpPr/>
         <p:nvPr/>
       </p:nvGrpSpPr>
-      <p:grpSpPr/>
+      <p:grpSpPr>
+        <a:xfrm>
+          <a:off x="0" y="0"/>
+          <a:ext cx="0" cy="0"/>
+          <a:chOff x="0" y="0"/>
+          <a:chExt cx="0" cy="0"/>
+        </a:xfrm>
+      </p:grpSpPr>
       <p:sp>
         <p:nvSpPr>
           <p:cNvPr id="2" name="Rectangle 1"/>
@@ -9610,6 +9380,7 @@
           <a:lstStyle/>
           <a:p>
             <a:pPr algn="ctr"/>
+            <a:endParaRPr/>
           </a:p>
         </p:txBody>
       </p:sp>
@@ -9653,6 +9424,7 @@
           <a:lstStyle/>
           <a:p>
             <a:pPr algn="ctr"/>
+            <a:endParaRPr/>
           </a:p>
         </p:txBody>
       </p:sp>
@@ -9696,6 +9468,7 @@
           <a:lstStyle/>
           <a:p>
             <a:pPr algn="ctr"/>
+            <a:endParaRPr/>
           </a:p>
         </p:txBody>
       </p:sp>
@@ -9739,6 +9512,7 @@
           <a:lstStyle/>
           <a:p>
             <a:pPr algn="ctr"/>
+            <a:endParaRPr/>
           </a:p>
         </p:txBody>
       </p:sp>
@@ -9782,6 +9556,7 @@
           <a:lstStyle/>
           <a:p>
             <a:pPr algn="ctr"/>
+            <a:endParaRPr/>
           </a:p>
         </p:txBody>
       </p:sp>
@@ -9825,6 +9600,7 @@
           <a:lstStyle/>
           <a:p>
             <a:pPr algn="ctr"/>
+            <a:endParaRPr/>
           </a:p>
         </p:txBody>
       </p:sp>
@@ -9868,6 +9644,7 @@
           <a:lstStyle/>
           <a:p>
             <a:pPr algn="ctr"/>
+            <a:endParaRPr/>
           </a:p>
         </p:txBody>
       </p:sp>
@@ -9910,12 +9687,6 @@
               </a:rPr>
               <a:t>预</a:t>
             </a:r>
-            <a:endParaRPr sz="2200" b="1">
-              <a:solidFill>
-                <a:srgbClr val="000000"/>
-              </a:solidFill>
-              <a:latin typeface="微软雅黑" panose="020B0503020204020204" charset="-122"/>
-            </a:endParaRPr>
           </a:p>
           <a:p>
             <a:pPr algn="ctr">
@@ -9935,12 +9706,6 @@
               </a:rPr>
               <a:t>约</a:t>
             </a:r>
-            <a:endParaRPr sz="2200" b="1">
-              <a:solidFill>
-                <a:srgbClr val="000000"/>
-              </a:solidFill>
-              <a:latin typeface="微软雅黑" panose="020B0503020204020204" charset="-122"/>
-            </a:endParaRPr>
           </a:p>
           <a:p>
             <a:pPr algn="ctr">
@@ -9960,12 +9725,6 @@
               </a:rPr>
               <a:t>订</a:t>
             </a:r>
-            <a:endParaRPr sz="2200" b="1">
-              <a:solidFill>
-                <a:srgbClr val="000000"/>
-              </a:solidFill>
-              <a:latin typeface="微软雅黑" panose="020B0503020204020204" charset="-122"/>
-            </a:endParaRPr>
           </a:p>
           <a:p>
             <a:pPr algn="ctr">
@@ -9985,12 +9744,6 @@
               </a:rPr>
               <a:t>单</a:t>
             </a:r>
-            <a:endParaRPr sz="2200" b="1">
-              <a:solidFill>
-                <a:srgbClr val="000000"/>
-              </a:solidFill>
-              <a:latin typeface="微软雅黑" panose="020B0503020204020204" charset="-122"/>
-            </a:endParaRPr>
           </a:p>
           <a:p>
             <a:pPr algn="ctr">
@@ -10010,12 +9763,6 @@
               </a:rPr>
               <a:t>模</a:t>
             </a:r>
-            <a:endParaRPr sz="2200" b="1">
-              <a:solidFill>
-                <a:srgbClr val="000000"/>
-              </a:solidFill>
-              <a:latin typeface="微软雅黑" panose="020B0503020204020204" charset="-122"/>
-            </a:endParaRPr>
           </a:p>
           <a:p>
             <a:pPr algn="ctr">
@@ -10035,12 +9782,6 @@
               </a:rPr>
               <a:t>块</a:t>
             </a:r>
-            <a:endParaRPr sz="2200" b="1">
-              <a:solidFill>
-                <a:srgbClr val="000000"/>
-              </a:solidFill>
-              <a:latin typeface="微软雅黑" panose="020B0503020204020204" charset="-122"/>
-            </a:endParaRPr>
           </a:p>
         </p:txBody>
       </p:sp>
@@ -10063,10 +9804,34 @@
                 <a:tableStyleId>{5C22544A-7EE6-4342-B048-85BDC9FD1C3A}</a:tableStyleId>
               </a:tblPr>
               <a:tblGrid>
-                <a:gridCol w="2663190"/>
-                <a:gridCol w="2663190"/>
-                <a:gridCol w="2663190"/>
-                <a:gridCol w="2663190"/>
+                <a:gridCol w="2663190">
+                  <a:extLst>
+                    <a:ext uri="{9D8B030D-6E8A-4147-A177-3AD203B41FA5}">
+                      <a16:colId xmlns:a16="http://schemas.microsoft.com/office/drawing/2014/main" val="20000"/>
+                    </a:ext>
+                  </a:extLst>
+                </a:gridCol>
+                <a:gridCol w="2663190">
+                  <a:extLst>
+                    <a:ext uri="{9D8B030D-6E8A-4147-A177-3AD203B41FA5}">
+                      <a16:colId xmlns:a16="http://schemas.microsoft.com/office/drawing/2014/main" val="20001"/>
+                    </a:ext>
+                  </a:extLst>
+                </a:gridCol>
+                <a:gridCol w="2663190">
+                  <a:extLst>
+                    <a:ext uri="{9D8B030D-6E8A-4147-A177-3AD203B41FA5}">
+                      <a16:colId xmlns:a16="http://schemas.microsoft.com/office/drawing/2014/main" val="20002"/>
+                    </a:ext>
+                  </a:extLst>
+                </a:gridCol>
+                <a:gridCol w="2663190">
+                  <a:extLst>
+                    <a:ext uri="{9D8B030D-6E8A-4147-A177-3AD203B41FA5}">
+                      <a16:colId xmlns:a16="http://schemas.microsoft.com/office/drawing/2014/main" val="20003"/>
+                    </a:ext>
+                  </a:extLst>
+                </a:gridCol>
               </a:tblGrid>
               <a:tr h="738051">
                 <a:tc>
@@ -10084,12 +9849,6 @@
                         </a:rPr>
                         <a:t>序号</a:t>
                       </a:r>
-                      <a:endParaRPr sz="1300" b="1">
-                        <a:solidFill>
-                          <a:srgbClr val="FFFFFF"/>
-                        </a:solidFill>
-                        <a:latin typeface="微软雅黑" panose="020B0503020204020204" charset="-122"/>
-                      </a:endParaRPr>
                     </a:p>
                   </a:txBody>
                   <a:tcPr>
@@ -10113,12 +9872,6 @@
                         </a:rPr>
                         <a:t>特性</a:t>
                       </a:r>
-                      <a:endParaRPr sz="1300" b="1">
-                        <a:solidFill>
-                          <a:srgbClr val="FFFFFF"/>
-                        </a:solidFill>
-                        <a:latin typeface="微软雅黑" panose="020B0503020204020204" charset="-122"/>
-                      </a:endParaRPr>
                     </a:p>
                   </a:txBody>
                   <a:tcPr>
@@ -10142,12 +9895,6 @@
                         </a:rPr>
                         <a:t>代表场景</a:t>
                       </a:r>
-                      <a:endParaRPr sz="1300" b="1">
-                        <a:solidFill>
-                          <a:srgbClr val="FFFFFF"/>
-                        </a:solidFill>
-                        <a:latin typeface="微软雅黑" panose="020B0503020204020204" charset="-122"/>
-                      </a:endParaRPr>
                     </a:p>
                   </a:txBody>
                   <a:tcPr>
@@ -10171,12 +9918,6 @@
                         </a:rPr>
                         <a:t>覆盖重点</a:t>
                       </a:r>
-                      <a:endParaRPr sz="1300" b="1">
-                        <a:solidFill>
-                          <a:srgbClr val="FFFFFF"/>
-                        </a:solidFill>
-                        <a:latin typeface="微软雅黑" panose="020B0503020204020204" charset="-122"/>
-                      </a:endParaRPr>
                     </a:p>
                   </a:txBody>
                   <a:tcPr>
@@ -10185,6 +9926,11 @@
                     </a:solidFill>
                   </a:tcPr>
                 </a:tc>
+                <a:extLst>
+                  <a:ext uri="{0D108BD9-81ED-4DB2-BD59-A6C34878D82A}">
+                    <a16:rowId xmlns:a16="http://schemas.microsoft.com/office/drawing/2014/main" val="10000"/>
+                  </a:ext>
+                </a:extLst>
               </a:tr>
               <a:tr h="738051">
                 <a:tc>
@@ -10202,12 +9948,6 @@
                         </a:rPr>
                         <a:t>1</a:t>
                       </a:r>
-                      <a:endParaRPr sz="1200" b="0">
-                        <a:solidFill>
-                          <a:srgbClr val="000000"/>
-                        </a:solidFill>
-                        <a:latin typeface="微软雅黑" panose="020B0503020204020204" charset="-122"/>
-                      </a:endParaRPr>
                     </a:p>
                   </a:txBody>
                   <a:tcPr>
@@ -10231,12 +9971,6 @@
                         </a:rPr>
                         <a:t>订单列表</a:t>
                       </a:r>
-                      <a:endParaRPr sz="1200" b="0">
-                        <a:solidFill>
-                          <a:srgbClr val="000000"/>
-                        </a:solidFill>
-                        <a:latin typeface="微软雅黑" panose="020B0503020204020204" charset="-122"/>
-                      </a:endParaRPr>
                     </a:p>
                   </a:txBody>
                   <a:tcPr>
@@ -10260,12 +9994,6 @@
                         </a:rPr>
                         <a:t>分页查看个人订单</a:t>
                       </a:r>
-                      <a:endParaRPr sz="1200" b="0">
-                        <a:solidFill>
-                          <a:srgbClr val="000000"/>
-                        </a:solidFill>
-                        <a:latin typeface="微软雅黑" panose="020B0503020204020204" charset="-122"/>
-                      </a:endParaRPr>
                     </a:p>
                   </a:txBody>
                   <a:tcPr>
@@ -10289,12 +10017,6 @@
                         </a:rPr>
                         <a:t>登录态 + page 边界</a:t>
                       </a:r>
-                      <a:endParaRPr sz="1200" b="0">
-                        <a:solidFill>
-                          <a:srgbClr val="000000"/>
-                        </a:solidFill>
-                        <a:latin typeface="微软雅黑" panose="020B0503020204020204" charset="-122"/>
-                      </a:endParaRPr>
                     </a:p>
                   </a:txBody>
                   <a:tcPr>
@@ -10303,6 +10025,11 @@
                     </a:solidFill>
                   </a:tcPr>
                 </a:tc>
+                <a:extLst>
+                  <a:ext uri="{0D108BD9-81ED-4DB2-BD59-A6C34878D82A}">
+                    <a16:rowId xmlns:a16="http://schemas.microsoft.com/office/drawing/2014/main" val="10001"/>
+                  </a:ext>
+                </a:extLst>
               </a:tr>
               <a:tr h="738051">
                 <a:tc>
@@ -10320,12 +10047,6 @@
                         </a:rPr>
                         <a:t>2</a:t>
                       </a:r>
-                      <a:endParaRPr sz="1200" b="0">
-                        <a:solidFill>
-                          <a:srgbClr val="000000"/>
-                        </a:solidFill>
-                        <a:latin typeface="微软雅黑" panose="020B0503020204020204" charset="-122"/>
-                      </a:endParaRPr>
                     </a:p>
                   </a:txBody>
                   <a:tcPr>
@@ -10349,12 +10070,6 @@
                         </a:rPr>
                         <a:t>创建订单</a:t>
                       </a:r>
-                      <a:endParaRPr sz="1200" b="0">
-                        <a:solidFill>
-                          <a:srgbClr val="000000"/>
-                        </a:solidFill>
-                        <a:latin typeface="微软雅黑" panose="020B0503020204020204" charset="-122"/>
-                      </a:endParaRPr>
                     </a:p>
                   </a:txBody>
                   <a:tcPr>
@@ -10378,12 +10093,6 @@
                         </a:rPr>
                         <a:t>合法预约 / 无效输入</a:t>
                       </a:r>
-                      <a:endParaRPr sz="1200" b="0">
-                        <a:solidFill>
-                          <a:srgbClr val="000000"/>
-                        </a:solidFill>
-                        <a:latin typeface="微软雅黑" panose="020B0503020204020204" charset="-122"/>
-                      </a:endParaRPr>
                     </a:p>
                   </a:txBody>
                   <a:tcPr>
@@ -10407,12 +10116,6 @@
                         </a:rPr>
                         <a:t>有效类 / 无效类</a:t>
                       </a:r>
-                      <a:endParaRPr sz="1200" b="0">
-                        <a:solidFill>
-                          <a:srgbClr val="000000"/>
-                        </a:solidFill>
-                        <a:latin typeface="微软雅黑" panose="020B0503020204020204" charset="-122"/>
-                      </a:endParaRPr>
                     </a:p>
                   </a:txBody>
                   <a:tcPr>
@@ -10421,6 +10124,11 @@
                     </a:solidFill>
                   </a:tcPr>
                 </a:tc>
+                <a:extLst>
+                  <a:ext uri="{0D108BD9-81ED-4DB2-BD59-A6C34878D82A}">
+                    <a16:rowId xmlns:a16="http://schemas.microsoft.com/office/drawing/2014/main" val="10002"/>
+                  </a:ext>
+                </a:extLst>
               </a:tr>
               <a:tr h="738051">
                 <a:tc>
@@ -10438,12 +10146,6 @@
                         </a:rPr>
                         <a:t>3</a:t>
                       </a:r>
-                      <a:endParaRPr sz="1200" b="0">
-                        <a:solidFill>
-                          <a:srgbClr val="000000"/>
-                        </a:solidFill>
-                        <a:latin typeface="微软雅黑" panose="020B0503020204020204" charset="-122"/>
-                      </a:endParaRPr>
                     </a:p>
                   </a:txBody>
                   <a:tcPr>
@@ -10467,12 +10169,6 @@
                         </a:rPr>
                         <a:t>取消订单</a:t>
                       </a:r>
-                      <a:endParaRPr sz="1200" b="0">
-                        <a:solidFill>
-                          <a:srgbClr val="000000"/>
-                        </a:solidFill>
-                        <a:latin typeface="微软雅黑" panose="020B0503020204020204" charset="-122"/>
-                      </a:endParaRPr>
                     </a:p>
                   </a:txBody>
                   <a:tcPr>
@@ -10496,12 +10192,6 @@
                         </a:rPr>
                         <a:t>本人订单与非本人订单</a:t>
                       </a:r>
-                      <a:endParaRPr sz="1200" b="0">
-                        <a:solidFill>
-                          <a:srgbClr val="000000"/>
-                        </a:solidFill>
-                        <a:latin typeface="微软雅黑" panose="020B0503020204020204" charset="-122"/>
-                      </a:endParaRPr>
                     </a:p>
                   </a:txBody>
                   <a:tcPr>
@@ -10525,12 +10215,6 @@
                         </a:rPr>
                         <a:t>权限与状态流转</a:t>
                       </a:r>
-                      <a:endParaRPr sz="1200" b="0">
-                        <a:solidFill>
-                          <a:srgbClr val="000000"/>
-                        </a:solidFill>
-                        <a:latin typeface="微软雅黑" panose="020B0503020204020204" charset="-122"/>
-                      </a:endParaRPr>
                     </a:p>
                   </a:txBody>
                   <a:tcPr>
@@ -10539,6 +10223,11 @@
                     </a:solidFill>
                   </a:tcPr>
                 </a:tc>
+                <a:extLst>
+                  <a:ext uri="{0D108BD9-81ED-4DB2-BD59-A6C34878D82A}">
+                    <a16:rowId xmlns:a16="http://schemas.microsoft.com/office/drawing/2014/main" val="10003"/>
+                  </a:ext>
+                </a:extLst>
               </a:tr>
               <a:tr h="738051">
                 <a:tc>
@@ -10556,12 +10245,6 @@
                         </a:rPr>
                         <a:t>4</a:t>
                       </a:r>
-                      <a:endParaRPr sz="1200" b="0">
-                        <a:solidFill>
-                          <a:srgbClr val="000000"/>
-                        </a:solidFill>
-                        <a:latin typeface="微软雅黑" panose="020B0503020204020204" charset="-122"/>
-                      </a:endParaRPr>
                     </a:p>
                   </a:txBody>
                   <a:tcPr>
@@ -10585,12 +10268,6 @@
                         </a:rPr>
                         <a:t>管理员列表</a:t>
                       </a:r>
-                      <a:endParaRPr sz="1200" b="0">
-                        <a:solidFill>
-                          <a:srgbClr val="000000"/>
-                        </a:solidFill>
-                        <a:latin typeface="微软雅黑" panose="020B0503020204020204" charset="-122"/>
-                      </a:endParaRPr>
                     </a:p>
                   </a:txBody>
                   <a:tcPr>
@@ -10614,12 +10291,6 @@
                         </a:rPr>
                         <a:t>按状态筛选订单</a:t>
                       </a:r>
-                      <a:endParaRPr sz="1200" b="0">
-                        <a:solidFill>
-                          <a:srgbClr val="000000"/>
-                        </a:solidFill>
-                        <a:latin typeface="微软雅黑" panose="020B0503020204020204" charset="-122"/>
-                      </a:endParaRPr>
                     </a:p>
                   </a:txBody>
                   <a:tcPr>
@@ -10643,12 +10314,6 @@
                         </a:rPr>
                         <a:t>筛选与分页</a:t>
                       </a:r>
-                      <a:endParaRPr sz="1200" b="0">
-                        <a:solidFill>
-                          <a:srgbClr val="000000"/>
-                        </a:solidFill>
-                        <a:latin typeface="微软雅黑" panose="020B0503020204020204" charset="-122"/>
-                      </a:endParaRPr>
                     </a:p>
                   </a:txBody>
                   <a:tcPr>
@@ -10657,6 +10322,11 @@
                     </a:solidFill>
                   </a:tcPr>
                 </a:tc>
+                <a:extLst>
+                  <a:ext uri="{0D108BD9-81ED-4DB2-BD59-A6C34878D82A}">
+                    <a16:rowId xmlns:a16="http://schemas.microsoft.com/office/drawing/2014/main" val="10004"/>
+                  </a:ext>
+                </a:extLst>
               </a:tr>
               <a:tr h="738051">
                 <a:tc>
@@ -10674,12 +10344,6 @@
                         </a:rPr>
                         <a:t>5</a:t>
                       </a:r>
-                      <a:endParaRPr sz="1200" b="0">
-                        <a:solidFill>
-                          <a:srgbClr val="000000"/>
-                        </a:solidFill>
-                        <a:latin typeface="微软雅黑" panose="020B0503020204020204" charset="-122"/>
-                      </a:endParaRPr>
                     </a:p>
                   </a:txBody>
                   <a:tcPr>
@@ -10703,12 +10367,6 @@
                         </a:rPr>
                         <a:t>审核订单</a:t>
                       </a:r>
-                      <a:endParaRPr sz="1200" b="0">
-                        <a:solidFill>
-                          <a:srgbClr val="000000"/>
-                        </a:solidFill>
-                        <a:latin typeface="微软雅黑" panose="020B0503020204020204" charset="-122"/>
-                      </a:endParaRPr>
                     </a:p>
                   </a:txBody>
                   <a:tcPr>
@@ -10732,12 +10390,6 @@
                         </a:rPr>
                         <a:t>通过 / 拒绝两类结果</a:t>
                       </a:r>
-                      <a:endParaRPr sz="1200" b="0">
-                        <a:solidFill>
-                          <a:srgbClr val="000000"/>
-                        </a:solidFill>
-                        <a:latin typeface="微软雅黑" panose="020B0503020204020204" charset="-122"/>
-                      </a:endParaRPr>
                     </a:p>
                   </a:txBody>
                   <a:tcPr>
@@ -10761,12 +10413,6 @@
                         </a:rPr>
                         <a:t>判定覆盖 true/false</a:t>
                       </a:r>
-                      <a:endParaRPr sz="1200" b="0">
-                        <a:solidFill>
-                          <a:srgbClr val="000000"/>
-                        </a:solidFill>
-                        <a:latin typeface="微软雅黑" panose="020B0503020204020204" charset="-122"/>
-                      </a:endParaRPr>
                     </a:p>
                   </a:txBody>
                   <a:tcPr>
@@ -10775,6 +10421,11 @@
                     </a:solidFill>
                   </a:tcPr>
                 </a:tc>
+                <a:extLst>
+                  <a:ext uri="{0D108BD9-81ED-4DB2-BD59-A6C34878D82A}">
+                    <a16:rowId xmlns:a16="http://schemas.microsoft.com/office/drawing/2014/main" val="10005"/>
+                  </a:ext>
+                </a:extLst>
               </a:tr>
               <a:tr h="738054">
                 <a:tc>
@@ -10792,12 +10443,6 @@
                         </a:rPr>
                         <a:t>6</a:t>
                       </a:r>
-                      <a:endParaRPr sz="1200" b="0">
-                        <a:solidFill>
-                          <a:srgbClr val="000000"/>
-                        </a:solidFill>
-                        <a:latin typeface="微软雅黑" panose="020B0503020204020204" charset="-122"/>
-                      </a:endParaRPr>
                     </a:p>
                   </a:txBody>
                   <a:tcPr>
@@ -10821,12 +10466,6 @@
                         </a:rPr>
                         <a:t>状态推进</a:t>
                       </a:r>
-                      <a:endParaRPr sz="1200" b="0">
-                        <a:solidFill>
-                          <a:srgbClr val="000000"/>
-                        </a:solidFill>
-                        <a:latin typeface="微软雅黑" panose="020B0503020204020204" charset="-122"/>
-                      </a:endParaRPr>
                     </a:p>
                   </a:txBody>
                   <a:tcPr>
@@ -10850,12 +10489,6 @@
                         </a:rPr>
                         <a:t>创建、取消、审核全流程</a:t>
                       </a:r>
-                      <a:endParaRPr sz="1200" b="0">
-                        <a:solidFill>
-                          <a:srgbClr val="000000"/>
-                        </a:solidFill>
-                        <a:latin typeface="微软雅黑" panose="020B0503020204020204" charset="-122"/>
-                      </a:endParaRPr>
                     </a:p>
                   </a:txBody>
                   <a:tcPr>
@@ -10879,12 +10512,6 @@
                         </a:rPr>
                         <a:t>语句覆盖 + 异常路径</a:t>
                       </a:r>
-                      <a:endParaRPr sz="1200" b="0">
-                        <a:solidFill>
-                          <a:srgbClr val="000000"/>
-                        </a:solidFill>
-                        <a:latin typeface="微软雅黑" panose="020B0503020204020204" charset="-122"/>
-                      </a:endParaRPr>
                     </a:p>
                   </a:txBody>
                   <a:tcPr>
@@ -10893,6 +10520,11 @@
                     </a:solidFill>
                   </a:tcPr>
                 </a:tc>
+                <a:extLst>
+                  <a:ext uri="{0D108BD9-81ED-4DB2-BD59-A6C34878D82A}">
+                    <a16:rowId xmlns:a16="http://schemas.microsoft.com/office/drawing/2014/main" val="10006"/>
+                  </a:ext>
+                </a:extLst>
               </a:tr>
             </a:tbl>
           </a:graphicData>
@@ -10915,7 +10547,14 @@
         <p:cNvGrpSpPr/>
         <p:nvPr/>
       </p:nvGrpSpPr>
-      <p:grpSpPr/>
+      <p:grpSpPr>
+        <a:xfrm>
+          <a:off x="0" y="0"/>
+          <a:ext cx="0" cy="0"/>
+          <a:chOff x="0" y="0"/>
+          <a:chExt cx="0" cy="0"/>
+        </a:xfrm>
+      </p:grpSpPr>
       <p:sp>
         <p:nvSpPr>
           <p:cNvPr id="2" name="Rectangle 1"/>
@@ -10956,6 +10595,7 @@
           <a:lstStyle/>
           <a:p>
             <a:pPr algn="ctr"/>
+            <a:endParaRPr/>
           </a:p>
         </p:txBody>
       </p:sp>
@@ -10999,6 +10639,7 @@
           <a:lstStyle/>
           <a:p>
             <a:pPr algn="ctr"/>
+            <a:endParaRPr/>
           </a:p>
         </p:txBody>
       </p:sp>
@@ -11042,6 +10683,7 @@
           <a:lstStyle/>
           <a:p>
             <a:pPr algn="ctr"/>
+            <a:endParaRPr/>
           </a:p>
         </p:txBody>
       </p:sp>
@@ -11085,6 +10727,7 @@
           <a:lstStyle/>
           <a:p>
             <a:pPr algn="ctr"/>
+            <a:endParaRPr/>
           </a:p>
         </p:txBody>
       </p:sp>
@@ -11128,6 +10771,7 @@
           <a:lstStyle/>
           <a:p>
             <a:pPr algn="ctr"/>
+            <a:endParaRPr/>
           </a:p>
         </p:txBody>
       </p:sp>
@@ -11171,6 +10815,7 @@
           <a:lstStyle/>
           <a:p>
             <a:pPr algn="ctr"/>
+            <a:endParaRPr/>
           </a:p>
         </p:txBody>
       </p:sp>
@@ -11214,6 +10859,7 @@
           <a:lstStyle/>
           <a:p>
             <a:pPr algn="ctr"/>
+            <a:endParaRPr/>
           </a:p>
         </p:txBody>
       </p:sp>
@@ -11256,12 +10902,6 @@
               </a:rPr>
               <a:t>用</a:t>
             </a:r>
-            <a:endParaRPr sz="2200" b="1">
-              <a:solidFill>
-                <a:srgbClr val="000000"/>
-              </a:solidFill>
-              <a:latin typeface="微软雅黑" panose="020B0503020204020204" charset="-122"/>
-            </a:endParaRPr>
           </a:p>
           <a:p>
             <a:pPr algn="ctr">
@@ -11281,12 +10921,6 @@
               </a:rPr>
               <a:t>户</a:t>
             </a:r>
-            <a:endParaRPr sz="2200" b="1">
-              <a:solidFill>
-                <a:srgbClr val="000000"/>
-              </a:solidFill>
-              <a:latin typeface="微软雅黑" panose="020B0503020204020204" charset="-122"/>
-            </a:endParaRPr>
           </a:p>
           <a:p>
             <a:pPr algn="ctr">
@@ -11306,12 +10940,6 @@
               </a:rPr>
               <a:t>登</a:t>
             </a:r>
-            <a:endParaRPr sz="2200" b="1">
-              <a:solidFill>
-                <a:srgbClr val="000000"/>
-              </a:solidFill>
-              <a:latin typeface="微软雅黑" panose="020B0503020204020204" charset="-122"/>
-            </a:endParaRPr>
           </a:p>
           <a:p>
             <a:pPr algn="ctr">
@@ -11331,12 +10959,6 @@
               </a:rPr>
               <a:t>录</a:t>
             </a:r>
-            <a:endParaRPr sz="2200" b="1">
-              <a:solidFill>
-                <a:srgbClr val="000000"/>
-              </a:solidFill>
-              <a:latin typeface="微软雅黑" panose="020B0503020204020204" charset="-122"/>
-            </a:endParaRPr>
           </a:p>
           <a:p>
             <a:pPr algn="ctr">
@@ -11356,12 +10978,6 @@
               </a:rPr>
               <a:t>模</a:t>
             </a:r>
-            <a:endParaRPr sz="2200" b="1">
-              <a:solidFill>
-                <a:srgbClr val="000000"/>
-              </a:solidFill>
-              <a:latin typeface="微软雅黑" panose="020B0503020204020204" charset="-122"/>
-            </a:endParaRPr>
           </a:p>
           <a:p>
             <a:pPr algn="ctr">
@@ -11381,12 +10997,6 @@
               </a:rPr>
               <a:t>块</a:t>
             </a:r>
-            <a:endParaRPr sz="2200" b="1">
-              <a:solidFill>
-                <a:srgbClr val="000000"/>
-              </a:solidFill>
-              <a:latin typeface="微软雅黑" panose="020B0503020204020204" charset="-122"/>
-            </a:endParaRPr>
           </a:p>
         </p:txBody>
       </p:sp>
@@ -11409,10 +11019,34 @@
                 <a:tableStyleId>{5C22544A-7EE6-4342-B048-85BDC9FD1C3A}</a:tableStyleId>
               </a:tblPr>
               <a:tblGrid>
-                <a:gridCol w="2663190"/>
-                <a:gridCol w="2663190"/>
-                <a:gridCol w="2663190"/>
-                <a:gridCol w="2663190"/>
+                <a:gridCol w="2663190">
+                  <a:extLst>
+                    <a:ext uri="{9D8B030D-6E8A-4147-A177-3AD203B41FA5}">
+                      <a16:colId xmlns:a16="http://schemas.microsoft.com/office/drawing/2014/main" val="20000"/>
+                    </a:ext>
+                  </a:extLst>
+                </a:gridCol>
+                <a:gridCol w="2663190">
+                  <a:extLst>
+                    <a:ext uri="{9D8B030D-6E8A-4147-A177-3AD203B41FA5}">
+                      <a16:colId xmlns:a16="http://schemas.microsoft.com/office/drawing/2014/main" val="20001"/>
+                    </a:ext>
+                  </a:extLst>
+                </a:gridCol>
+                <a:gridCol w="2663190">
+                  <a:extLst>
+                    <a:ext uri="{9D8B030D-6E8A-4147-A177-3AD203B41FA5}">
+                      <a16:colId xmlns:a16="http://schemas.microsoft.com/office/drawing/2014/main" val="20002"/>
+                    </a:ext>
+                  </a:extLst>
+                </a:gridCol>
+                <a:gridCol w="2663190">
+                  <a:extLst>
+                    <a:ext uri="{9D8B030D-6E8A-4147-A177-3AD203B41FA5}">
+                      <a16:colId xmlns:a16="http://schemas.microsoft.com/office/drawing/2014/main" val="20003"/>
+                    </a:ext>
+                  </a:extLst>
+                </a:gridCol>
               </a:tblGrid>
               <a:tr h="738051">
                 <a:tc>
@@ -11430,12 +11064,6 @@
                         </a:rPr>
                         <a:t>序号</a:t>
                       </a:r>
-                      <a:endParaRPr sz="1300" b="1">
-                        <a:solidFill>
-                          <a:srgbClr val="FFFFFF"/>
-                        </a:solidFill>
-                        <a:latin typeface="微软雅黑" panose="020B0503020204020204" charset="-122"/>
-                      </a:endParaRPr>
                     </a:p>
                   </a:txBody>
                   <a:tcPr>
@@ -11459,12 +11087,6 @@
                         </a:rPr>
                         <a:t>特性</a:t>
                       </a:r>
-                      <a:endParaRPr sz="1300" b="1">
-                        <a:solidFill>
-                          <a:srgbClr val="FFFFFF"/>
-                        </a:solidFill>
-                        <a:latin typeface="微软雅黑" panose="020B0503020204020204" charset="-122"/>
-                      </a:endParaRPr>
                     </a:p>
                   </a:txBody>
                   <a:tcPr>
@@ -11488,12 +11110,6 @@
                         </a:rPr>
                         <a:t>代表场景</a:t>
                       </a:r>
-                      <a:endParaRPr sz="1300" b="1">
-                        <a:solidFill>
-                          <a:srgbClr val="FFFFFF"/>
-                        </a:solidFill>
-                        <a:latin typeface="微软雅黑" panose="020B0503020204020204" charset="-122"/>
-                      </a:endParaRPr>
                     </a:p>
                   </a:txBody>
                   <a:tcPr>
@@ -11517,12 +11133,6 @@
                         </a:rPr>
                         <a:t>测试设计技术</a:t>
                       </a:r>
-                      <a:endParaRPr sz="1300" b="1">
-                        <a:solidFill>
-                          <a:srgbClr val="FFFFFF"/>
-                        </a:solidFill>
-                        <a:latin typeface="微软雅黑" panose="020B0503020204020204" charset="-122"/>
-                      </a:endParaRPr>
                     </a:p>
                   </a:txBody>
                   <a:tcPr>
@@ -11531,6 +11141,11 @@
                     </a:solidFill>
                   </a:tcPr>
                 </a:tc>
+                <a:extLst>
+                  <a:ext uri="{0D108BD9-81ED-4DB2-BD59-A6C34878D82A}">
+                    <a16:rowId xmlns:a16="http://schemas.microsoft.com/office/drawing/2014/main" val="10000"/>
+                  </a:ext>
+                </a:extLst>
               </a:tr>
               <a:tr h="738051">
                 <a:tc>
@@ -11548,12 +11163,6 @@
                         </a:rPr>
                         <a:t>1</a:t>
                       </a:r>
-                      <a:endParaRPr sz="1200" b="0">
-                        <a:solidFill>
-                          <a:srgbClr val="000000"/>
-                        </a:solidFill>
-                        <a:latin typeface="微软雅黑" panose="020B0503020204020204" charset="-122"/>
-                      </a:endParaRPr>
                     </a:p>
                   </a:txBody>
                   <a:tcPr>
@@ -11577,12 +11186,6 @@
                         </a:rPr>
                         <a:t>登录成功</a:t>
                       </a:r>
-                      <a:endParaRPr sz="1200" b="0">
-                        <a:solidFill>
-                          <a:srgbClr val="000000"/>
-                        </a:solidFill>
-                        <a:latin typeface="微软雅黑" panose="020B0503020204020204" charset="-122"/>
-                      </a:endParaRPr>
                     </a:p>
                   </a:txBody>
                   <a:tcPr>
@@ -11606,12 +11209,6 @@
                         </a:rPr>
                         <a:t>合法账号与密码</a:t>
                       </a:r>
-                      <a:endParaRPr sz="1200" b="0">
-                        <a:solidFill>
-                          <a:srgbClr val="000000"/>
-                        </a:solidFill>
-                        <a:latin typeface="微软雅黑" panose="020B0503020204020204" charset="-122"/>
-                      </a:endParaRPr>
                     </a:p>
                   </a:txBody>
                   <a:tcPr>
@@ -11635,12 +11232,6 @@
                         </a:rPr>
                         <a:t>有效等价类</a:t>
                       </a:r>
-                      <a:endParaRPr sz="1200" b="0">
-                        <a:solidFill>
-                          <a:srgbClr val="000000"/>
-                        </a:solidFill>
-                        <a:latin typeface="微软雅黑" panose="020B0503020204020204" charset="-122"/>
-                      </a:endParaRPr>
                     </a:p>
                   </a:txBody>
                   <a:tcPr>
@@ -11649,6 +11240,11 @@
                     </a:solidFill>
                   </a:tcPr>
                 </a:tc>
+                <a:extLst>
+                  <a:ext uri="{0D108BD9-81ED-4DB2-BD59-A6C34878D82A}">
+                    <a16:rowId xmlns:a16="http://schemas.microsoft.com/office/drawing/2014/main" val="10001"/>
+                  </a:ext>
+                </a:extLst>
               </a:tr>
               <a:tr h="738051">
                 <a:tc>
@@ -11666,12 +11262,6 @@
                         </a:rPr>
                         <a:t>2</a:t>
                       </a:r>
-                      <a:endParaRPr sz="1200" b="0">
-                        <a:solidFill>
-                          <a:srgbClr val="000000"/>
-                        </a:solidFill>
-                        <a:latin typeface="微软雅黑" panose="020B0503020204020204" charset="-122"/>
-                      </a:endParaRPr>
                     </a:p>
                   </a:txBody>
                   <a:tcPr>
@@ -11695,12 +11285,6 @@
                         </a:rPr>
                         <a:t>登录失败</a:t>
                       </a:r>
-                      <a:endParaRPr sz="1200" b="0">
-                        <a:solidFill>
-                          <a:srgbClr val="000000"/>
-                        </a:solidFill>
-                        <a:latin typeface="微软雅黑" panose="020B0503020204020204" charset="-122"/>
-                      </a:endParaRPr>
                     </a:p>
                   </a:txBody>
                   <a:tcPr>
@@ -11724,12 +11308,6 @@
                         </a:rPr>
                         <a:t>错误密码 / 不存在账号</a:t>
                       </a:r>
-                      <a:endParaRPr sz="1200" b="0">
-                        <a:solidFill>
-                          <a:srgbClr val="000000"/>
-                        </a:solidFill>
-                        <a:latin typeface="微软雅黑" panose="020B0503020204020204" charset="-122"/>
-                      </a:endParaRPr>
                     </a:p>
                   </a:txBody>
                   <a:tcPr>
@@ -11753,12 +11331,6 @@
                         </a:rPr>
                         <a:t>无效等价类</a:t>
                       </a:r>
-                      <a:endParaRPr sz="1200" b="0">
-                        <a:solidFill>
-                          <a:srgbClr val="000000"/>
-                        </a:solidFill>
-                        <a:latin typeface="微软雅黑" panose="020B0503020204020204" charset="-122"/>
-                      </a:endParaRPr>
                     </a:p>
                   </a:txBody>
                   <a:tcPr>
@@ -11767,6 +11339,11 @@
                     </a:solidFill>
                   </a:tcPr>
                 </a:tc>
+                <a:extLst>
+                  <a:ext uri="{0D108BD9-81ED-4DB2-BD59-A6C34878D82A}">
+                    <a16:rowId xmlns:a16="http://schemas.microsoft.com/office/drawing/2014/main" val="10002"/>
+                  </a:ext>
+                </a:extLst>
               </a:tr>
               <a:tr h="738051">
                 <a:tc>
@@ -11784,12 +11361,6 @@
                         </a:rPr>
                         <a:t>3</a:t>
                       </a:r>
-                      <a:endParaRPr sz="1200" b="0">
-                        <a:solidFill>
-                          <a:srgbClr val="000000"/>
-                        </a:solidFill>
-                        <a:latin typeface="微软雅黑" panose="020B0503020204020204" charset="-122"/>
-                      </a:endParaRPr>
                     </a:p>
                   </a:txBody>
                   <a:tcPr>
@@ -11813,12 +11384,6 @@
                         </a:rPr>
                         <a:t>注册用户</a:t>
                       </a:r>
-                      <a:endParaRPr sz="1200" b="0">
-                        <a:solidFill>
-                          <a:srgbClr val="000000"/>
-                        </a:solidFill>
-                        <a:latin typeface="微软雅黑" panose="020B0503020204020204" charset="-122"/>
-                      </a:endParaRPr>
                     </a:p>
                   </a:txBody>
                   <a:tcPr>
@@ -11842,12 +11407,6 @@
                         </a:rPr>
                         <a:t>新账号 / 重复账号</a:t>
                       </a:r>
-                      <a:endParaRPr sz="1200" b="0">
-                        <a:solidFill>
-                          <a:srgbClr val="000000"/>
-                        </a:solidFill>
-                        <a:latin typeface="微软雅黑" panose="020B0503020204020204" charset="-122"/>
-                      </a:endParaRPr>
                     </a:p>
                   </a:txBody>
                   <a:tcPr>
@@ -11871,12 +11430,6 @@
                         </a:rPr>
                         <a:t>边界值 + 重复值</a:t>
                       </a:r>
-                      <a:endParaRPr sz="1200" b="0">
-                        <a:solidFill>
-                          <a:srgbClr val="000000"/>
-                        </a:solidFill>
-                        <a:latin typeface="微软雅黑" panose="020B0503020204020204" charset="-122"/>
-                      </a:endParaRPr>
                     </a:p>
                   </a:txBody>
                   <a:tcPr>
@@ -11885,6 +11438,11 @@
                     </a:solidFill>
                   </a:tcPr>
                 </a:tc>
+                <a:extLst>
+                  <a:ext uri="{0D108BD9-81ED-4DB2-BD59-A6C34878D82A}">
+                    <a16:rowId xmlns:a16="http://schemas.microsoft.com/office/drawing/2014/main" val="10003"/>
+                  </a:ext>
+                </a:extLst>
               </a:tr>
               <a:tr h="738051">
                 <a:tc>
@@ -11902,12 +11460,6 @@
                         </a:rPr>
                         <a:t>4</a:t>
                       </a:r>
-                      <a:endParaRPr sz="1200" b="0">
-                        <a:solidFill>
-                          <a:srgbClr val="000000"/>
-                        </a:solidFill>
-                        <a:latin typeface="微软雅黑" panose="020B0503020204020204" charset="-122"/>
-                      </a:endParaRPr>
                     </a:p>
                   </a:txBody>
                   <a:tcPr>
@@ -11931,12 +11483,6 @@
                         </a:rPr>
                         <a:t>退出登录</a:t>
                       </a:r>
-                      <a:endParaRPr sz="1200" b="0">
-                        <a:solidFill>
-                          <a:srgbClr val="000000"/>
-                        </a:solidFill>
-                        <a:latin typeface="微软雅黑" panose="020B0503020204020204" charset="-122"/>
-                      </a:endParaRPr>
                     </a:p>
                   </a:txBody>
                   <a:tcPr>
@@ -11960,12 +11506,6 @@
                         </a:rPr>
                         <a:t>清理会话状态</a:t>
                       </a:r>
-                      <a:endParaRPr sz="1200" b="0">
-                        <a:solidFill>
-                          <a:srgbClr val="000000"/>
-                        </a:solidFill>
-                        <a:latin typeface="微软雅黑" panose="020B0503020204020204" charset="-122"/>
-                      </a:endParaRPr>
                     </a:p>
                   </a:txBody>
                   <a:tcPr>
@@ -11989,12 +11529,6 @@
                         </a:rPr>
                         <a:t>状态校验</a:t>
                       </a:r>
-                      <a:endParaRPr sz="1200" b="0">
-                        <a:solidFill>
-                          <a:srgbClr val="000000"/>
-                        </a:solidFill>
-                        <a:latin typeface="微软雅黑" panose="020B0503020204020204" charset="-122"/>
-                      </a:endParaRPr>
                     </a:p>
                   </a:txBody>
                   <a:tcPr>
@@ -12003,6 +11537,11 @@
                     </a:solidFill>
                   </a:tcPr>
                 </a:tc>
+                <a:extLst>
+                  <a:ext uri="{0D108BD9-81ED-4DB2-BD59-A6C34878D82A}">
+                    <a16:rowId xmlns:a16="http://schemas.microsoft.com/office/drawing/2014/main" val="10004"/>
+                  </a:ext>
+                </a:extLst>
               </a:tr>
               <a:tr h="738051">
                 <a:tc>
@@ -12020,12 +11559,6 @@
                         </a:rPr>
                         <a:t>5</a:t>
                       </a:r>
-                      <a:endParaRPr sz="1200" b="0">
-                        <a:solidFill>
-                          <a:srgbClr val="000000"/>
-                        </a:solidFill>
-                        <a:latin typeface="微软雅黑" panose="020B0503020204020204" charset="-122"/>
-                      </a:endParaRPr>
                     </a:p>
                   </a:txBody>
                   <a:tcPr>
@@ -12049,12 +11582,6 @@
                         </a:rPr>
                         <a:t>管理员维护</a:t>
                       </a:r>
-                      <a:endParaRPr sz="1200" b="0">
-                        <a:solidFill>
-                          <a:srgbClr val="000000"/>
-                        </a:solidFill>
-                        <a:latin typeface="微软雅黑" panose="020B0503020204020204" charset="-122"/>
-                      </a:endParaRPr>
                     </a:p>
                   </a:txBody>
                   <a:tcPr>
@@ -12078,12 +11605,6 @@
                         </a:rPr>
                         <a:t>用户增删改查</a:t>
                       </a:r>
-                      <a:endParaRPr sz="1200" b="0">
-                        <a:solidFill>
-                          <a:srgbClr val="000000"/>
-                        </a:solidFill>
-                        <a:latin typeface="微软雅黑" panose="020B0503020204020204" charset="-122"/>
-                      </a:endParaRPr>
                     </a:p>
                   </a:txBody>
                   <a:tcPr>
@@ -12107,12 +11628,6 @@
                         </a:rPr>
                         <a:t>判定覆盖</a:t>
                       </a:r>
-                      <a:endParaRPr sz="1200" b="0">
-                        <a:solidFill>
-                          <a:srgbClr val="000000"/>
-                        </a:solidFill>
-                        <a:latin typeface="微软雅黑" panose="020B0503020204020204" charset="-122"/>
-                      </a:endParaRPr>
                     </a:p>
                   </a:txBody>
                   <a:tcPr>
@@ -12121,6 +11636,11 @@
                     </a:solidFill>
                   </a:tcPr>
                 </a:tc>
+                <a:extLst>
+                  <a:ext uri="{0D108BD9-81ED-4DB2-BD59-A6C34878D82A}">
+                    <a16:rowId xmlns:a16="http://schemas.microsoft.com/office/drawing/2014/main" val="10005"/>
+                  </a:ext>
+                </a:extLst>
               </a:tr>
               <a:tr h="738054">
                 <a:tc>
@@ -12138,12 +11658,6 @@
                         </a:rPr>
                         <a:t>6</a:t>
                       </a:r>
-                      <a:endParaRPr sz="1200" b="0">
-                        <a:solidFill>
-                          <a:srgbClr val="000000"/>
-                        </a:solidFill>
-                        <a:latin typeface="微软雅黑" panose="020B0503020204020204" charset="-122"/>
-                      </a:endParaRPr>
                     </a:p>
                   </a:txBody>
                   <a:tcPr>
@@ -12167,12 +11681,6 @@
                         </a:rPr>
                         <a:t>服务校验</a:t>
                       </a:r>
-                      <a:endParaRPr sz="1200" b="0">
-                        <a:solidFill>
-                          <a:srgbClr val="000000"/>
-                        </a:solidFill>
-                        <a:latin typeface="微软雅黑" panose="020B0503020204020204" charset="-122"/>
-                      </a:endParaRPr>
                     </a:p>
                   </a:txBody>
                   <a:tcPr>
@@ -12196,12 +11704,6 @@
                         </a:rPr>
                         <a:t>登录、注册、删除、更新</a:t>
                       </a:r>
-                      <a:endParaRPr sz="1200" b="0">
-                        <a:solidFill>
-                          <a:srgbClr val="000000"/>
-                        </a:solidFill>
-                        <a:latin typeface="微软雅黑" panose="020B0503020204020204" charset="-122"/>
-                      </a:endParaRPr>
                     </a:p>
                   </a:txBody>
                   <a:tcPr>
@@ -12225,12 +11727,6 @@
                         </a:rPr>
                         <a:t>语句覆盖</a:t>
                       </a:r>
-                      <a:endParaRPr sz="1200" b="0">
-                        <a:solidFill>
-                          <a:srgbClr val="000000"/>
-                        </a:solidFill>
-                        <a:latin typeface="微软雅黑" panose="020B0503020204020204" charset="-122"/>
-                      </a:endParaRPr>
                     </a:p>
                   </a:txBody>
                   <a:tcPr>
@@ -12239,6 +11735,11 @@
                     </a:solidFill>
                   </a:tcPr>
                 </a:tc>
+                <a:extLst>
+                  <a:ext uri="{0D108BD9-81ED-4DB2-BD59-A6C34878D82A}">
+                    <a16:rowId xmlns:a16="http://schemas.microsoft.com/office/drawing/2014/main" val="10006"/>
+                  </a:ext>
+                </a:extLst>
               </a:tr>
             </a:tbl>
           </a:graphicData>
@@ -12261,7 +11762,14 @@
         <p:cNvGrpSpPr/>
         <p:nvPr/>
       </p:nvGrpSpPr>
-      <p:grpSpPr/>
+      <p:grpSpPr>
+        <a:xfrm>
+          <a:off x="0" y="0"/>
+          <a:ext cx="0" cy="0"/>
+          <a:chOff x="0" y="0"/>
+          <a:chExt cx="0" cy="0"/>
+        </a:xfrm>
+      </p:grpSpPr>
       <p:sp>
         <p:nvSpPr>
           <p:cNvPr id="2" name="Rectangle 1"/>
@@ -12302,6 +11810,7 @@
           <a:lstStyle/>
           <a:p>
             <a:pPr algn="ctr"/>
+            <a:endParaRPr/>
           </a:p>
         </p:txBody>
       </p:sp>
@@ -12345,6 +11854,7 @@
           <a:lstStyle/>
           <a:p>
             <a:pPr algn="ctr"/>
+            <a:endParaRPr/>
           </a:p>
         </p:txBody>
       </p:sp>
@@ -12388,6 +11898,7 @@
           <a:lstStyle/>
           <a:p>
             <a:pPr algn="ctr"/>
+            <a:endParaRPr/>
           </a:p>
         </p:txBody>
       </p:sp>
@@ -12431,6 +11942,7 @@
           <a:lstStyle/>
           <a:p>
             <a:pPr algn="ctr"/>
+            <a:endParaRPr/>
           </a:p>
         </p:txBody>
       </p:sp>
@@ -12474,6 +11986,7 @@
           <a:lstStyle/>
           <a:p>
             <a:pPr algn="ctr"/>
+            <a:endParaRPr/>
           </a:p>
         </p:txBody>
       </p:sp>
@@ -12517,6 +12030,7 @@
           <a:lstStyle/>
           <a:p>
             <a:pPr algn="ctr"/>
+            <a:endParaRPr/>
           </a:p>
         </p:txBody>
       </p:sp>
@@ -12560,6 +12074,7 @@
           <a:lstStyle/>
           <a:p>
             <a:pPr algn="ctr"/>
+            <a:endParaRPr/>
           </a:p>
         </p:txBody>
       </p:sp>
@@ -12602,12 +12117,6 @@
               </a:rPr>
               <a:t>留</a:t>
             </a:r>
-            <a:endParaRPr sz="2300" b="1">
-              <a:solidFill>
-                <a:srgbClr val="000000"/>
-              </a:solidFill>
-              <a:latin typeface="微软雅黑" panose="020B0503020204020204" charset="-122"/>
-            </a:endParaRPr>
           </a:p>
           <a:p>
             <a:pPr algn="ctr">
@@ -12627,12 +12136,6 @@
               </a:rPr>
               <a:t>言</a:t>
             </a:r>
-            <a:endParaRPr sz="2300" b="1">
-              <a:solidFill>
-                <a:srgbClr val="000000"/>
-              </a:solidFill>
-              <a:latin typeface="微软雅黑" panose="020B0503020204020204" charset="-122"/>
-            </a:endParaRPr>
           </a:p>
           <a:p>
             <a:pPr algn="ctr">
@@ -12652,12 +12155,6 @@
               </a:rPr>
               <a:t>板</a:t>
             </a:r>
-            <a:endParaRPr sz="2300" b="1">
-              <a:solidFill>
-                <a:srgbClr val="000000"/>
-              </a:solidFill>
-              <a:latin typeface="微软雅黑" panose="020B0503020204020204" charset="-122"/>
-            </a:endParaRPr>
           </a:p>
           <a:p>
             <a:pPr algn="ctr">
@@ -12677,12 +12174,6 @@
               </a:rPr>
               <a:t>模</a:t>
             </a:r>
-            <a:endParaRPr sz="2300" b="1">
-              <a:solidFill>
-                <a:srgbClr val="000000"/>
-              </a:solidFill>
-              <a:latin typeface="微软雅黑" panose="020B0503020204020204" charset="-122"/>
-            </a:endParaRPr>
           </a:p>
           <a:p>
             <a:pPr algn="ctr">
@@ -12702,12 +12193,6 @@
               </a:rPr>
               <a:t>块</a:t>
             </a:r>
-            <a:endParaRPr sz="2300" b="1">
-              <a:solidFill>
-                <a:srgbClr val="000000"/>
-              </a:solidFill>
-              <a:latin typeface="微软雅黑" panose="020B0503020204020204" charset="-122"/>
-            </a:endParaRPr>
           </a:p>
         </p:txBody>
       </p:sp>
@@ -12730,10 +12215,34 @@
                 <a:tableStyleId>{5C22544A-7EE6-4342-B048-85BDC9FD1C3A}</a:tableStyleId>
               </a:tblPr>
               <a:tblGrid>
-                <a:gridCol w="2663190"/>
-                <a:gridCol w="2663190"/>
-                <a:gridCol w="2663190"/>
-                <a:gridCol w="2663190"/>
+                <a:gridCol w="2663190">
+                  <a:extLst>
+                    <a:ext uri="{9D8B030D-6E8A-4147-A177-3AD203B41FA5}">
+                      <a16:colId xmlns:a16="http://schemas.microsoft.com/office/drawing/2014/main" val="20000"/>
+                    </a:ext>
+                  </a:extLst>
+                </a:gridCol>
+                <a:gridCol w="2663190">
+                  <a:extLst>
+                    <a:ext uri="{9D8B030D-6E8A-4147-A177-3AD203B41FA5}">
+                      <a16:colId xmlns:a16="http://schemas.microsoft.com/office/drawing/2014/main" val="20001"/>
+                    </a:ext>
+                  </a:extLst>
+                </a:gridCol>
+                <a:gridCol w="2663190">
+                  <a:extLst>
+                    <a:ext uri="{9D8B030D-6E8A-4147-A177-3AD203B41FA5}">
+                      <a16:colId xmlns:a16="http://schemas.microsoft.com/office/drawing/2014/main" val="20002"/>
+                    </a:ext>
+                  </a:extLst>
+                </a:gridCol>
+                <a:gridCol w="2663190">
+                  <a:extLst>
+                    <a:ext uri="{9D8B030D-6E8A-4147-A177-3AD203B41FA5}">
+                      <a16:colId xmlns:a16="http://schemas.microsoft.com/office/drawing/2014/main" val="20003"/>
+                    </a:ext>
+                  </a:extLst>
+                </a:gridCol>
               </a:tblGrid>
               <a:tr h="738051">
                 <a:tc>
@@ -12751,12 +12260,6 @@
                         </a:rPr>
                         <a:t>序号</a:t>
                       </a:r>
-                      <a:endParaRPr sz="1300" b="1">
-                        <a:solidFill>
-                          <a:srgbClr val="FFFFFF"/>
-                        </a:solidFill>
-                        <a:latin typeface="微软雅黑" panose="020B0503020204020204" charset="-122"/>
-                      </a:endParaRPr>
                     </a:p>
                   </a:txBody>
                   <a:tcPr>
@@ -12780,12 +12283,6 @@
                         </a:rPr>
                         <a:t>特性</a:t>
                       </a:r>
-                      <a:endParaRPr sz="1300" b="1">
-                        <a:solidFill>
-                          <a:srgbClr val="FFFFFF"/>
-                        </a:solidFill>
-                        <a:latin typeface="微软雅黑" panose="020B0503020204020204" charset="-122"/>
-                      </a:endParaRPr>
                     </a:p>
                   </a:txBody>
                   <a:tcPr>
@@ -12809,12 +12306,6 @@
                         </a:rPr>
                         <a:t>代表场景</a:t>
                       </a:r>
-                      <a:endParaRPr sz="1300" b="1">
-                        <a:solidFill>
-                          <a:srgbClr val="FFFFFF"/>
-                        </a:solidFill>
-                        <a:latin typeface="微软雅黑" panose="020B0503020204020204" charset="-122"/>
-                      </a:endParaRPr>
                     </a:p>
                   </a:txBody>
                   <a:tcPr>
@@ -12838,12 +12329,6 @@
                         </a:rPr>
                         <a:t>覆盖重点</a:t>
                       </a:r>
-                      <a:endParaRPr sz="1300" b="1">
-                        <a:solidFill>
-                          <a:srgbClr val="FFFFFF"/>
-                        </a:solidFill>
-                        <a:latin typeface="微软雅黑" panose="020B0503020204020204" charset="-122"/>
-                      </a:endParaRPr>
                     </a:p>
                   </a:txBody>
                   <a:tcPr>
@@ -12852,6 +12337,11 @@
                     </a:solidFill>
                   </a:tcPr>
                 </a:tc>
+                <a:extLst>
+                  <a:ext uri="{0D108BD9-81ED-4DB2-BD59-A6C34878D82A}">
+                    <a16:rowId xmlns:a16="http://schemas.microsoft.com/office/drawing/2014/main" val="10000"/>
+                  </a:ext>
+                </a:extLst>
               </a:tr>
               <a:tr h="738051">
                 <a:tc>
@@ -12869,12 +12359,6 @@
                         </a:rPr>
                         <a:t>1</a:t>
                       </a:r>
-                      <a:endParaRPr sz="1200" b="0">
-                        <a:solidFill>
-                          <a:srgbClr val="000000"/>
-                        </a:solidFill>
-                        <a:latin typeface="微软雅黑" panose="020B0503020204020204" charset="-122"/>
-                      </a:endParaRPr>
                     </a:p>
                   </a:txBody>
                   <a:tcPr>
@@ -12898,12 +12382,6 @@
                         </a:rPr>
                         <a:t>留言列表</a:t>
                       </a:r>
-                      <a:endParaRPr sz="1200" b="0">
-                        <a:solidFill>
-                          <a:srgbClr val="000000"/>
-                        </a:solidFill>
-                        <a:latin typeface="微软雅黑" panose="020B0503020204020204" charset="-122"/>
-                      </a:endParaRPr>
                     </a:p>
                   </a:txBody>
                   <a:tcPr>
@@ -12927,12 +12405,6 @@
                         </a:rPr>
                         <a:t>分页查看留言</a:t>
                       </a:r>
-                      <a:endParaRPr sz="1200" b="0">
-                        <a:solidFill>
-                          <a:srgbClr val="000000"/>
-                        </a:solidFill>
-                        <a:latin typeface="微软雅黑" panose="020B0503020204020204" charset="-122"/>
-                      </a:endParaRPr>
                     </a:p>
                   </a:txBody>
                   <a:tcPr>
@@ -12956,12 +12428,6 @@
                         </a:rPr>
                         <a:t>分页边界</a:t>
                       </a:r>
-                      <a:endParaRPr sz="1200" b="0">
-                        <a:solidFill>
-                          <a:srgbClr val="000000"/>
-                        </a:solidFill>
-                        <a:latin typeface="微软雅黑" panose="020B0503020204020204" charset="-122"/>
-                      </a:endParaRPr>
                     </a:p>
                   </a:txBody>
                   <a:tcPr>
@@ -12970,6 +12436,11 @@
                     </a:solidFill>
                   </a:tcPr>
                 </a:tc>
+                <a:extLst>
+                  <a:ext uri="{0D108BD9-81ED-4DB2-BD59-A6C34878D82A}">
+                    <a16:rowId xmlns:a16="http://schemas.microsoft.com/office/drawing/2014/main" val="10001"/>
+                  </a:ext>
+                </a:extLst>
               </a:tr>
               <a:tr h="738051">
                 <a:tc>
@@ -12987,12 +12458,6 @@
                         </a:rPr>
                         <a:t>2</a:t>
                       </a:r>
-                      <a:endParaRPr sz="1200" b="0">
-                        <a:solidFill>
-                          <a:srgbClr val="000000"/>
-                        </a:solidFill>
-                        <a:latin typeface="微软雅黑" panose="020B0503020204020204" charset="-122"/>
-                      </a:endParaRPr>
                     </a:p>
                   </a:txBody>
                   <a:tcPr>
@@ -13016,12 +12481,6 @@
                         </a:rPr>
                         <a:t>发布留言</a:t>
                       </a:r>
-                      <a:endParaRPr sz="1200" b="0">
-                        <a:solidFill>
-                          <a:srgbClr val="000000"/>
-                        </a:solidFill>
-                        <a:latin typeface="微软雅黑" panose="020B0503020204020204" charset="-122"/>
-                      </a:endParaRPr>
                     </a:p>
                   </a:txBody>
                   <a:tcPr>
@@ -13045,12 +12504,6 @@
                         </a:rPr>
                         <a:t>登录用户发布有效内容</a:t>
                       </a:r>
-                      <a:endParaRPr sz="1200" b="0">
-                        <a:solidFill>
-                          <a:srgbClr val="000000"/>
-                        </a:solidFill>
-                        <a:latin typeface="微软雅黑" panose="020B0503020204020204" charset="-122"/>
-                      </a:endParaRPr>
                     </a:p>
                   </a:txBody>
                   <a:tcPr>
@@ -13074,12 +12527,6 @@
                         </a:rPr>
                         <a:t>登录态 + 有效输入</a:t>
                       </a:r>
-                      <a:endParaRPr sz="1200" b="0">
-                        <a:solidFill>
-                          <a:srgbClr val="000000"/>
-                        </a:solidFill>
-                        <a:latin typeface="微软雅黑" panose="020B0503020204020204" charset="-122"/>
-                      </a:endParaRPr>
                     </a:p>
                   </a:txBody>
                   <a:tcPr>
@@ -13088,6 +12535,11 @@
                     </a:solidFill>
                   </a:tcPr>
                 </a:tc>
+                <a:extLst>
+                  <a:ext uri="{0D108BD9-81ED-4DB2-BD59-A6C34878D82A}">
+                    <a16:rowId xmlns:a16="http://schemas.microsoft.com/office/drawing/2014/main" val="10002"/>
+                  </a:ext>
+                </a:extLst>
               </a:tr>
               <a:tr h="738051">
                 <a:tc>
@@ -13105,12 +12557,6 @@
                         </a:rPr>
                         <a:t>3</a:t>
                       </a:r>
-                      <a:endParaRPr sz="1200" b="0">
-                        <a:solidFill>
-                          <a:srgbClr val="000000"/>
-                        </a:solidFill>
-                        <a:latin typeface="微软雅黑" panose="020B0503020204020204" charset="-122"/>
-                      </a:endParaRPr>
                     </a:p>
                   </a:txBody>
                   <a:tcPr>
@@ -13134,12 +12580,6 @@
                         </a:rPr>
                         <a:t>空内容留言</a:t>
                       </a:r>
-                      <a:endParaRPr sz="1200" b="0">
-                        <a:solidFill>
-                          <a:srgbClr val="000000"/>
-                        </a:solidFill>
-                        <a:latin typeface="微软雅黑" panose="020B0503020204020204" charset="-122"/>
-                      </a:endParaRPr>
                     </a:p>
                   </a:txBody>
                   <a:tcPr>
@@ -13163,12 +12603,6 @@
                         </a:rPr>
                         <a:t>空内容 / 缺少参数</a:t>
                       </a:r>
-                      <a:endParaRPr sz="1200" b="0">
-                        <a:solidFill>
-                          <a:srgbClr val="000000"/>
-                        </a:solidFill>
-                        <a:latin typeface="微软雅黑" panose="020B0503020204020204" charset="-122"/>
-                      </a:endParaRPr>
                     </a:p>
                   </a:txBody>
                   <a:tcPr>
@@ -13192,12 +12626,6 @@
                         </a:rPr>
                         <a:t>无效等价类</a:t>
                       </a:r>
-                      <a:endParaRPr sz="1200" b="0">
-                        <a:solidFill>
-                          <a:srgbClr val="000000"/>
-                        </a:solidFill>
-                        <a:latin typeface="微软雅黑" panose="020B0503020204020204" charset="-122"/>
-                      </a:endParaRPr>
                     </a:p>
                   </a:txBody>
                   <a:tcPr>
@@ -13206,6 +12634,11 @@
                     </a:solidFill>
                   </a:tcPr>
                 </a:tc>
+                <a:extLst>
+                  <a:ext uri="{0D108BD9-81ED-4DB2-BD59-A6C34878D82A}">
+                    <a16:rowId xmlns:a16="http://schemas.microsoft.com/office/drawing/2014/main" val="10003"/>
+                  </a:ext>
+                </a:extLst>
               </a:tr>
               <a:tr h="738051">
                 <a:tc>
@@ -13223,12 +12656,6 @@
                         </a:rPr>
                         <a:t>4</a:t>
                       </a:r>
-                      <a:endParaRPr sz="1200" b="0">
-                        <a:solidFill>
-                          <a:srgbClr val="000000"/>
-                        </a:solidFill>
-                        <a:latin typeface="微软雅黑" panose="020B0503020204020204" charset="-122"/>
-                      </a:endParaRPr>
                     </a:p>
                   </a:txBody>
                   <a:tcPr>
@@ -13252,12 +12679,6 @@
                         </a:rPr>
                         <a:t>删除留言</a:t>
                       </a:r>
-                      <a:endParaRPr sz="1200" b="0">
-                        <a:solidFill>
-                          <a:srgbClr val="000000"/>
-                        </a:solidFill>
-                        <a:latin typeface="微软雅黑" panose="020B0503020204020204" charset="-122"/>
-                      </a:endParaRPr>
                     </a:p>
                   </a:txBody>
                   <a:tcPr>
@@ -13281,12 +12702,6 @@
                         </a:rPr>
                         <a:t>本人删除 / 非法删除</a:t>
                       </a:r>
-                      <a:endParaRPr sz="1200" b="0">
-                        <a:solidFill>
-                          <a:srgbClr val="000000"/>
-                        </a:solidFill>
-                        <a:latin typeface="微软雅黑" panose="020B0503020204020204" charset="-122"/>
-                      </a:endParaRPr>
                     </a:p>
                   </a:txBody>
                   <a:tcPr>
@@ -13310,12 +12725,6 @@
                         </a:rPr>
                         <a:t>权限路径</a:t>
                       </a:r>
-                      <a:endParaRPr sz="1200" b="0">
-                        <a:solidFill>
-                          <a:srgbClr val="000000"/>
-                        </a:solidFill>
-                        <a:latin typeface="微软雅黑" panose="020B0503020204020204" charset="-122"/>
-                      </a:endParaRPr>
                     </a:p>
                   </a:txBody>
                   <a:tcPr>
@@ -13324,6 +12733,11 @@
                     </a:solidFill>
                   </a:tcPr>
                 </a:tc>
+                <a:extLst>
+                  <a:ext uri="{0D108BD9-81ED-4DB2-BD59-A6C34878D82A}">
+                    <a16:rowId xmlns:a16="http://schemas.microsoft.com/office/drawing/2014/main" val="10004"/>
+                  </a:ext>
+                </a:extLst>
               </a:tr>
               <a:tr h="738051">
                 <a:tc>
@@ -13341,12 +12755,6 @@
                         </a:rPr>
                         <a:t>5</a:t>
                       </a:r>
-                      <a:endParaRPr sz="1200" b="0">
-                        <a:solidFill>
-                          <a:srgbClr val="000000"/>
-                        </a:solidFill>
-                        <a:latin typeface="微软雅黑" panose="020B0503020204020204" charset="-122"/>
-                      </a:endParaRPr>
                     </a:p>
                   </a:txBody>
                   <a:tcPr>
@@ -13370,12 +12778,6 @@
                         </a:rPr>
                         <a:t>管理员审核</a:t>
                       </a:r>
-                      <a:endParaRPr sz="1200" b="0">
-                        <a:solidFill>
-                          <a:srgbClr val="000000"/>
-                        </a:solidFill>
-                        <a:latin typeface="微软雅黑" panose="020B0503020204020204" charset="-122"/>
-                      </a:endParaRPr>
                     </a:p>
                   </a:txBody>
                   <a:tcPr>
@@ -13399,12 +12801,6 @@
                         </a:rPr>
                         <a:t>通过 / 拒绝留言</a:t>
                       </a:r>
-                      <a:endParaRPr sz="1200" b="0">
-                        <a:solidFill>
-                          <a:srgbClr val="000000"/>
-                        </a:solidFill>
-                        <a:latin typeface="微软雅黑" panose="020B0503020204020204" charset="-122"/>
-                      </a:endParaRPr>
                     </a:p>
                   </a:txBody>
                   <a:tcPr>
@@ -13428,12 +12824,6 @@
                         </a:rPr>
                         <a:t>判定覆盖</a:t>
                       </a:r>
-                      <a:endParaRPr sz="1200" b="0">
-                        <a:solidFill>
-                          <a:srgbClr val="000000"/>
-                        </a:solidFill>
-                        <a:latin typeface="微软雅黑" panose="020B0503020204020204" charset="-122"/>
-                      </a:endParaRPr>
                     </a:p>
                   </a:txBody>
                   <a:tcPr>
@@ -13442,6 +12832,11 @@
                     </a:solidFill>
                   </a:tcPr>
                 </a:tc>
+                <a:extLst>
+                  <a:ext uri="{0D108BD9-81ED-4DB2-BD59-A6C34878D82A}">
+                    <a16:rowId xmlns:a16="http://schemas.microsoft.com/office/drawing/2014/main" val="10005"/>
+                  </a:ext>
+                </a:extLst>
               </a:tr>
               <a:tr h="738054">
                 <a:tc>
@@ -13459,12 +12854,6 @@
                         </a:rPr>
                         <a:t>6</a:t>
                       </a:r>
-                      <a:endParaRPr sz="1200" b="0">
-                        <a:solidFill>
-                          <a:srgbClr val="000000"/>
-                        </a:solidFill>
-                        <a:latin typeface="微软雅黑" panose="020B0503020204020204" charset="-122"/>
-                      </a:endParaRPr>
                     </a:p>
                   </a:txBody>
                   <a:tcPr>
@@ -13488,12 +12877,6 @@
                         </a:rPr>
                         <a:t>聚合查询</a:t>
                       </a:r>
-                      <a:endParaRPr sz="1200" b="0">
-                        <a:solidFill>
-                          <a:srgbClr val="000000"/>
-                        </a:solidFill>
-                        <a:latin typeface="微软雅黑" panose="020B0503020204020204" charset="-122"/>
-                      </a:endParaRPr>
                     </a:p>
                   </a:txBody>
                   <a:tcPr>
@@ -13517,12 +12900,6 @@
                         </a:rPr>
                         <a:t>留言与用户信息组合</a:t>
                       </a:r>
-                      <a:endParaRPr sz="1200" b="0">
-                        <a:solidFill>
-                          <a:srgbClr val="000000"/>
-                        </a:solidFill>
-                        <a:latin typeface="微软雅黑" panose="020B0503020204020204" charset="-122"/>
-                      </a:endParaRPr>
                     </a:p>
                   </a:txBody>
                   <a:tcPr>
@@ -13546,12 +12923,6 @@
                         </a:rPr>
                         <a:t>聚合查询</a:t>
                       </a:r>
-                      <a:endParaRPr sz="1200" b="0">
-                        <a:solidFill>
-                          <a:srgbClr val="000000"/>
-                        </a:solidFill>
-                        <a:latin typeface="微软雅黑" panose="020B0503020204020204" charset="-122"/>
-                      </a:endParaRPr>
                     </a:p>
                   </a:txBody>
                   <a:tcPr>
@@ -13560,6 +12931,11 @@
                     </a:solidFill>
                   </a:tcPr>
                 </a:tc>
+                <a:extLst>
+                  <a:ext uri="{0D108BD9-81ED-4DB2-BD59-A6C34878D82A}">
+                    <a16:rowId xmlns:a16="http://schemas.microsoft.com/office/drawing/2014/main" val="10006"/>
+                  </a:ext>
+                </a:extLst>
               </a:tr>
             </a:tbl>
           </a:graphicData>
@@ -13582,7 +12958,14 @@
         <p:cNvGrpSpPr/>
         <p:nvPr/>
       </p:nvGrpSpPr>
-      <p:grpSpPr/>
+      <p:grpSpPr>
+        <a:xfrm>
+          <a:off x="0" y="0"/>
+          <a:ext cx="0" cy="0"/>
+          <a:chOff x="0" y="0"/>
+          <a:chExt cx="0" cy="0"/>
+        </a:xfrm>
+      </p:grpSpPr>
       <p:sp>
         <p:nvSpPr>
           <p:cNvPr id="2" name="Rectangle 1"/>
@@ -13623,6 +13006,7 @@
           <a:lstStyle/>
           <a:p>
             <a:pPr algn="ctr"/>
+            <a:endParaRPr/>
           </a:p>
         </p:txBody>
       </p:sp>
@@ -13666,6 +13050,7 @@
           <a:lstStyle/>
           <a:p>
             <a:pPr algn="ctr"/>
+            <a:endParaRPr/>
           </a:p>
         </p:txBody>
       </p:sp>
@@ -13709,6 +13094,7 @@
           <a:lstStyle/>
           <a:p>
             <a:pPr algn="ctr"/>
+            <a:endParaRPr/>
           </a:p>
         </p:txBody>
       </p:sp>
@@ -13752,6 +13138,7 @@
           <a:lstStyle/>
           <a:p>
             <a:pPr algn="ctr"/>
+            <a:endParaRPr/>
           </a:p>
         </p:txBody>
       </p:sp>
@@ -13795,6 +13182,7 @@
           <a:lstStyle/>
           <a:p>
             <a:pPr algn="ctr"/>
+            <a:endParaRPr/>
           </a:p>
         </p:txBody>
       </p:sp>
@@ -13838,6 +13226,7 @@
           <a:lstStyle/>
           <a:p>
             <a:pPr algn="ctr"/>
+            <a:endParaRPr/>
           </a:p>
         </p:txBody>
       </p:sp>
@@ -13881,6 +13270,7 @@
           <a:lstStyle/>
           <a:p>
             <a:pPr algn="ctr"/>
+            <a:endParaRPr/>
           </a:p>
         </p:txBody>
       </p:sp>
@@ -13915,12 +13305,6 @@
               </a:rPr>
               <a:t>PJ1主要内容</a:t>
             </a:r>
-            <a:endParaRPr sz="3000" b="1">
-              <a:solidFill>
-                <a:srgbClr val="000000"/>
-              </a:solidFill>
-              <a:latin typeface="微软雅黑" panose="020B0503020204020204" charset="-122"/>
-            </a:endParaRPr>
           </a:p>
         </p:txBody>
       </p:sp>
@@ -13955,12 +13339,6 @@
               </a:rPr>
               <a:t>1. 测试计划规定</a:t>
             </a:r>
-            <a:endParaRPr sz="1900" b="1">
-              <a:solidFill>
-                <a:srgbClr val="000000"/>
-              </a:solidFill>
-              <a:latin typeface="微软雅黑" panose="020B0503020204020204" charset="-122"/>
-            </a:endParaRPr>
           </a:p>
           <a:p>
             <a:r>
@@ -13972,12 +13350,6 @@
               </a:rPr>
               <a:t>• 测试项与先决条件</a:t>
             </a:r>
-            <a:endParaRPr sz="1700" b="0">
-              <a:solidFill>
-                <a:srgbClr val="000000"/>
-              </a:solidFill>
-              <a:latin typeface="微软雅黑" panose="020B0503020204020204" charset="-122"/>
-            </a:endParaRPr>
           </a:p>
           <a:p>
             <a:r>
@@ -13989,12 +13361,6 @@
               </a:rPr>
               <a:t>• 通过/失败准则与风险管控</a:t>
             </a:r>
-            <a:endParaRPr sz="1700" b="0">
-              <a:solidFill>
-                <a:srgbClr val="000000"/>
-              </a:solidFill>
-              <a:latin typeface="微软雅黑" panose="020B0503020204020204" charset="-122"/>
-            </a:endParaRPr>
           </a:p>
           <a:p>
             <a:r>
@@ -14006,12 +13372,6 @@
               </a:rPr>
               <a:t>• 小组分工与时间安排</a:t>
             </a:r>
-            <a:endParaRPr sz="1700" b="0">
-              <a:solidFill>
-                <a:srgbClr val="000000"/>
-              </a:solidFill>
-              <a:latin typeface="微软雅黑" panose="020B0503020204020204" charset="-122"/>
-            </a:endParaRPr>
           </a:p>
           <a:p>
             <a:r>
@@ -14023,12 +13383,6 @@
               </a:rPr>
               <a:t>• 交付物与可复现环境</a:t>
             </a:r>
-            <a:endParaRPr sz="1700" b="0">
-              <a:solidFill>
-                <a:srgbClr val="000000"/>
-              </a:solidFill>
-              <a:latin typeface="微软雅黑" panose="020B0503020204020204" charset="-122"/>
-            </a:endParaRPr>
           </a:p>
         </p:txBody>
       </p:sp>
@@ -14063,12 +13417,6 @@
               </a:rPr>
               <a:t>2. 测试本身完成</a:t>
             </a:r>
-            <a:endParaRPr sz="1900" b="1">
-              <a:solidFill>
-                <a:srgbClr val="000000"/>
-              </a:solidFill>
-              <a:latin typeface="微软雅黑" panose="020B0503020204020204" charset="-122"/>
-            </a:endParaRPr>
           </a:p>
           <a:p>
             <a:r>
@@ -14080,12 +13428,6 @@
               </a:rPr>
               <a:t>• service 单元测试与 controller 集成测试</a:t>
             </a:r>
-            <a:endParaRPr sz="1700" b="0">
-              <a:solidFill>
-                <a:srgbClr val="000000"/>
-              </a:solidFill>
-              <a:latin typeface="微软雅黑" panose="020B0503020204020204" charset="-122"/>
-            </a:endParaRPr>
           </a:p>
           <a:p>
             <a:r>
@@ -14097,12 +13439,6 @@
               </a:rPr>
               <a:t>• 黑盒等价类/边界值 + 白盒语句/判定覆盖</a:t>
             </a:r>
-            <a:endParaRPr sz="1700" b="0">
-              <a:solidFill>
-                <a:srgbClr val="000000"/>
-              </a:solidFill>
-              <a:latin typeface="微软雅黑" panose="020B0503020204020204" charset="-122"/>
-            </a:endParaRPr>
           </a:p>
           <a:p>
             <a:r>
@@ -14114,12 +13450,6 @@
               </a:rPr>
               <a:t>• JUnit5、Mockito、MockMvc、H2、JaCoCo</a:t>
             </a:r>
-            <a:endParaRPr sz="1700" b="0">
-              <a:solidFill>
-                <a:srgbClr val="000000"/>
-              </a:solidFill>
-              <a:latin typeface="微软雅黑" panose="020B0503020204020204" charset="-122"/>
-            </a:endParaRPr>
           </a:p>
           <a:p>
             <a:r>
@@ -14131,12 +13461,6 @@
               </a:rPr>
               <a:t>• 执行结果、覆盖率与测试小结</a:t>
             </a:r>
-            <a:endParaRPr sz="1700" b="0">
-              <a:solidFill>
-                <a:srgbClr val="000000"/>
-              </a:solidFill>
-              <a:latin typeface="微软雅黑" panose="020B0503020204020204" charset="-122"/>
-            </a:endParaRPr>
           </a:p>
         </p:txBody>
       </p:sp>
@@ -14157,7 +13481,14 @@
         <p:cNvGrpSpPr/>
         <p:nvPr/>
       </p:nvGrpSpPr>
-      <p:grpSpPr/>
+      <p:grpSpPr>
+        <a:xfrm>
+          <a:off x="0" y="0"/>
+          <a:ext cx="0" cy="0"/>
+          <a:chOff x="0" y="0"/>
+          <a:chExt cx="0" cy="0"/>
+        </a:xfrm>
+      </p:grpSpPr>
       <p:sp>
         <p:nvSpPr>
           <p:cNvPr id="2" name="Rectangle 1"/>
@@ -14198,6 +13529,7 @@
           <a:lstStyle/>
           <a:p>
             <a:pPr algn="ctr"/>
+            <a:endParaRPr/>
           </a:p>
         </p:txBody>
       </p:sp>
@@ -14241,6 +13573,7 @@
           <a:lstStyle/>
           <a:p>
             <a:pPr algn="ctr"/>
+            <a:endParaRPr/>
           </a:p>
         </p:txBody>
       </p:sp>
@@ -14284,6 +13617,7 @@
           <a:lstStyle/>
           <a:p>
             <a:pPr algn="ctr"/>
+            <a:endParaRPr/>
           </a:p>
         </p:txBody>
       </p:sp>
@@ -14327,6 +13661,7 @@
           <a:lstStyle/>
           <a:p>
             <a:pPr algn="ctr"/>
+            <a:endParaRPr/>
           </a:p>
         </p:txBody>
       </p:sp>
@@ -14370,6 +13705,7 @@
           <a:lstStyle/>
           <a:p>
             <a:pPr algn="ctr"/>
+            <a:endParaRPr/>
           </a:p>
         </p:txBody>
       </p:sp>
@@ -14413,6 +13749,7 @@
           <a:lstStyle/>
           <a:p>
             <a:pPr algn="ctr"/>
+            <a:endParaRPr/>
           </a:p>
         </p:txBody>
       </p:sp>
@@ -14456,6 +13793,7 @@
           <a:lstStyle/>
           <a:p>
             <a:pPr algn="ctr"/>
+            <a:endParaRPr/>
           </a:p>
         </p:txBody>
       </p:sp>
@@ -14498,12 +13836,6 @@
               </a:rPr>
               <a:t>后</a:t>
             </a:r>
-            <a:endParaRPr sz="2200" b="1">
-              <a:solidFill>
-                <a:srgbClr val="000000"/>
-              </a:solidFill>
-              <a:latin typeface="微软雅黑" panose="020B0503020204020204" charset="-122"/>
-            </a:endParaRPr>
           </a:p>
           <a:p>
             <a:pPr algn="ctr">
@@ -14523,12 +13855,6 @@
               </a:rPr>
               <a:t>台</a:t>
             </a:r>
-            <a:endParaRPr sz="2200" b="1">
-              <a:solidFill>
-                <a:srgbClr val="000000"/>
-              </a:solidFill>
-              <a:latin typeface="微软雅黑" panose="020B0503020204020204" charset="-122"/>
-            </a:endParaRPr>
           </a:p>
           <a:p>
             <a:pPr algn="ctr">
@@ -14548,12 +13874,6 @@
               </a:rPr>
               <a:t>管</a:t>
             </a:r>
-            <a:endParaRPr sz="2200" b="1">
-              <a:solidFill>
-                <a:srgbClr val="000000"/>
-              </a:solidFill>
-              <a:latin typeface="微软雅黑" panose="020B0503020204020204" charset="-122"/>
-            </a:endParaRPr>
           </a:p>
           <a:p>
             <a:pPr algn="ctr">
@@ -14573,12 +13893,6 @@
               </a:rPr>
               <a:t>理</a:t>
             </a:r>
-            <a:endParaRPr sz="2200" b="1">
-              <a:solidFill>
-                <a:srgbClr val="000000"/>
-              </a:solidFill>
-              <a:latin typeface="微软雅黑" panose="020B0503020204020204" charset="-122"/>
-            </a:endParaRPr>
           </a:p>
           <a:p>
             <a:pPr algn="ctr">
@@ -14598,12 +13912,6 @@
               </a:rPr>
               <a:t>模</a:t>
             </a:r>
-            <a:endParaRPr sz="2200" b="1">
-              <a:solidFill>
-                <a:srgbClr val="000000"/>
-              </a:solidFill>
-              <a:latin typeface="微软雅黑" panose="020B0503020204020204" charset="-122"/>
-            </a:endParaRPr>
           </a:p>
           <a:p>
             <a:pPr algn="ctr">
@@ -14623,12 +13931,6 @@
               </a:rPr>
               <a:t>块</a:t>
             </a:r>
-            <a:endParaRPr sz="2200" b="1">
-              <a:solidFill>
-                <a:srgbClr val="000000"/>
-              </a:solidFill>
-              <a:latin typeface="微软雅黑" panose="020B0503020204020204" charset="-122"/>
-            </a:endParaRPr>
           </a:p>
         </p:txBody>
       </p:sp>
@@ -14651,10 +13953,34 @@
                 <a:tableStyleId>{5C22544A-7EE6-4342-B048-85BDC9FD1C3A}</a:tableStyleId>
               </a:tblPr>
               <a:tblGrid>
-                <a:gridCol w="2663190"/>
-                <a:gridCol w="2663190"/>
-                <a:gridCol w="2663190"/>
-                <a:gridCol w="2663190"/>
+                <a:gridCol w="2663190">
+                  <a:extLst>
+                    <a:ext uri="{9D8B030D-6E8A-4147-A177-3AD203B41FA5}">
+                      <a16:colId xmlns:a16="http://schemas.microsoft.com/office/drawing/2014/main" val="20000"/>
+                    </a:ext>
+                  </a:extLst>
+                </a:gridCol>
+                <a:gridCol w="2663190">
+                  <a:extLst>
+                    <a:ext uri="{9D8B030D-6E8A-4147-A177-3AD203B41FA5}">
+                      <a16:colId xmlns:a16="http://schemas.microsoft.com/office/drawing/2014/main" val="20001"/>
+                    </a:ext>
+                  </a:extLst>
+                </a:gridCol>
+                <a:gridCol w="2663190">
+                  <a:extLst>
+                    <a:ext uri="{9D8B030D-6E8A-4147-A177-3AD203B41FA5}">
+                      <a16:colId xmlns:a16="http://schemas.microsoft.com/office/drawing/2014/main" val="20002"/>
+                    </a:ext>
+                  </a:extLst>
+                </a:gridCol>
+                <a:gridCol w="2663190">
+                  <a:extLst>
+                    <a:ext uri="{9D8B030D-6E8A-4147-A177-3AD203B41FA5}">
+                      <a16:colId xmlns:a16="http://schemas.microsoft.com/office/drawing/2014/main" val="20003"/>
+                    </a:ext>
+                  </a:extLst>
+                </a:gridCol>
               </a:tblGrid>
               <a:tr h="738051">
                 <a:tc>
@@ -14672,12 +13998,6 @@
                         </a:rPr>
                         <a:t>序号</a:t>
                       </a:r>
-                      <a:endParaRPr sz="1300" b="1">
-                        <a:solidFill>
-                          <a:srgbClr val="FFFFFF"/>
-                        </a:solidFill>
-                        <a:latin typeface="微软雅黑" panose="020B0503020204020204" charset="-122"/>
-                      </a:endParaRPr>
                     </a:p>
                   </a:txBody>
                   <a:tcPr>
@@ -14701,12 +14021,6 @@
                         </a:rPr>
                         <a:t>特性</a:t>
                       </a:r>
-                      <a:endParaRPr sz="1300" b="1">
-                        <a:solidFill>
-                          <a:srgbClr val="FFFFFF"/>
-                        </a:solidFill>
-                        <a:latin typeface="微软雅黑" panose="020B0503020204020204" charset="-122"/>
-                      </a:endParaRPr>
                     </a:p>
                   </a:txBody>
                   <a:tcPr>
@@ -14730,12 +14044,6 @@
                         </a:rPr>
                         <a:t>代表场景</a:t>
                       </a:r>
-                      <a:endParaRPr sz="1300" b="1">
-                        <a:solidFill>
-                          <a:srgbClr val="FFFFFF"/>
-                        </a:solidFill>
-                        <a:latin typeface="微软雅黑" panose="020B0503020204020204" charset="-122"/>
-                      </a:endParaRPr>
                     </a:p>
                   </a:txBody>
                   <a:tcPr>
@@ -14759,12 +14067,6 @@
                         </a:rPr>
                         <a:t>覆盖重点</a:t>
                       </a:r>
-                      <a:endParaRPr sz="1300" b="1">
-                        <a:solidFill>
-                          <a:srgbClr val="FFFFFF"/>
-                        </a:solidFill>
-                        <a:latin typeface="微软雅黑" panose="020B0503020204020204" charset="-122"/>
-                      </a:endParaRPr>
                     </a:p>
                   </a:txBody>
                   <a:tcPr>
@@ -14773,6 +14075,11 @@
                     </a:solidFill>
                   </a:tcPr>
                 </a:tc>
+                <a:extLst>
+                  <a:ext uri="{0D108BD9-81ED-4DB2-BD59-A6C34878D82A}">
+                    <a16:rowId xmlns:a16="http://schemas.microsoft.com/office/drawing/2014/main" val="10000"/>
+                  </a:ext>
+                </a:extLst>
               </a:tr>
               <a:tr h="738051">
                 <a:tc>
@@ -14790,12 +14097,6 @@
                         </a:rPr>
                         <a:t>1</a:t>
                       </a:r>
-                      <a:endParaRPr sz="1200" b="0">
-                        <a:solidFill>
-                          <a:srgbClr val="000000"/>
-                        </a:solidFill>
-                        <a:latin typeface="微软雅黑" panose="020B0503020204020204" charset="-122"/>
-                      </a:endParaRPr>
                     </a:p>
                   </a:txBody>
                   <a:tcPr>
@@ -14819,12 +14120,6 @@
                         </a:rPr>
                         <a:t>场馆新增/修改</a:t>
                       </a:r>
-                      <a:endParaRPr sz="1200" b="0">
-                        <a:solidFill>
-                          <a:srgbClr val="000000"/>
-                        </a:solidFill>
-                        <a:latin typeface="微软雅黑" panose="020B0503020204020204" charset="-122"/>
-                      </a:endParaRPr>
                     </a:p>
                   </a:txBody>
                   <a:tcPr>
@@ -14848,12 +14143,6 @@
                         </a:rPr>
                         <a:t>合法数据 / 边界价格</a:t>
                       </a:r>
-                      <a:endParaRPr sz="1200" b="0">
-                        <a:solidFill>
-                          <a:srgbClr val="000000"/>
-                        </a:solidFill>
-                        <a:latin typeface="微软雅黑" panose="020B0503020204020204" charset="-122"/>
-                      </a:endParaRPr>
                     </a:p>
                   </a:txBody>
                   <a:tcPr>
@@ -14877,12 +14166,6 @@
                         </a:rPr>
                         <a:t>有效类 + 边界值</a:t>
                       </a:r>
-                      <a:endParaRPr sz="1200" b="0">
-                        <a:solidFill>
-                          <a:srgbClr val="000000"/>
-                        </a:solidFill>
-                        <a:latin typeface="微软雅黑" panose="020B0503020204020204" charset="-122"/>
-                      </a:endParaRPr>
                     </a:p>
                   </a:txBody>
                   <a:tcPr>
@@ -14891,6 +14174,11 @@
                     </a:solidFill>
                   </a:tcPr>
                 </a:tc>
+                <a:extLst>
+                  <a:ext uri="{0D108BD9-81ED-4DB2-BD59-A6C34878D82A}">
+                    <a16:rowId xmlns:a16="http://schemas.microsoft.com/office/drawing/2014/main" val="10001"/>
+                  </a:ext>
+                </a:extLst>
               </a:tr>
               <a:tr h="738051">
                 <a:tc>
@@ -14908,12 +14196,6 @@
                         </a:rPr>
                         <a:t>2</a:t>
                       </a:r>
-                      <a:endParaRPr sz="1200" b="0">
-                        <a:solidFill>
-                          <a:srgbClr val="000000"/>
-                        </a:solidFill>
-                        <a:latin typeface="微软雅黑" panose="020B0503020204020204" charset="-122"/>
-                      </a:endParaRPr>
                     </a:p>
                   </a:txBody>
                   <a:tcPr>
@@ -14937,12 +14219,6 @@
                         </a:rPr>
                         <a:t>场馆删除</a:t>
                       </a:r>
-                      <a:endParaRPr sz="1200" b="0">
-                        <a:solidFill>
-                          <a:srgbClr val="000000"/>
-                        </a:solidFill>
-                        <a:latin typeface="微软雅黑" panose="020B0503020204020204" charset="-122"/>
-                      </a:endParaRPr>
                     </a:p>
                   </a:txBody>
                   <a:tcPr>
@@ -14966,12 +14242,6 @@
                         </a:rPr>
                         <a:t>存在 ID / 不存在 ID</a:t>
                       </a:r>
-                      <a:endParaRPr sz="1200" b="0">
-                        <a:solidFill>
-                          <a:srgbClr val="000000"/>
-                        </a:solidFill>
-                        <a:latin typeface="微软雅黑" panose="020B0503020204020204" charset="-122"/>
-                      </a:endParaRPr>
                     </a:p>
                   </a:txBody>
                   <a:tcPr>
@@ -14995,12 +14265,6 @@
                         </a:rPr>
                         <a:t>异常路径</a:t>
                       </a:r>
-                      <a:endParaRPr sz="1200" b="0">
-                        <a:solidFill>
-                          <a:srgbClr val="000000"/>
-                        </a:solidFill>
-                        <a:latin typeface="微软雅黑" panose="020B0503020204020204" charset="-122"/>
-                      </a:endParaRPr>
                     </a:p>
                   </a:txBody>
                   <a:tcPr>
@@ -15009,6 +14273,11 @@
                     </a:solidFill>
                   </a:tcPr>
                 </a:tc>
+                <a:extLst>
+                  <a:ext uri="{0D108BD9-81ED-4DB2-BD59-A6C34878D82A}">
+                    <a16:rowId xmlns:a16="http://schemas.microsoft.com/office/drawing/2014/main" val="10002"/>
+                  </a:ext>
+                </a:extLst>
               </a:tr>
               <a:tr h="738051">
                 <a:tc>
@@ -15026,12 +14295,6 @@
                         </a:rPr>
                         <a:t>3</a:t>
                       </a:r>
-                      <a:endParaRPr sz="1200" b="0">
-                        <a:solidFill>
-                          <a:srgbClr val="000000"/>
-                        </a:solidFill>
-                        <a:latin typeface="微软雅黑" panose="020B0503020204020204" charset="-122"/>
-                      </a:endParaRPr>
                     </a:p>
                   </a:txBody>
                   <a:tcPr>
@@ -15055,12 +14318,6 @@
                         </a:rPr>
                         <a:t>新闻新增/修改</a:t>
                       </a:r>
-                      <a:endParaRPr sz="1200" b="0">
-                        <a:solidFill>
-                          <a:srgbClr val="000000"/>
-                        </a:solidFill>
-                        <a:latin typeface="微软雅黑" panose="020B0503020204020204" charset="-122"/>
-                      </a:endParaRPr>
                     </a:p>
                   </a:txBody>
                   <a:tcPr>
@@ -15084,12 +14341,6 @@
                         </a:rPr>
                         <a:t>空标题 / 有效内容</a:t>
                       </a:r>
-                      <a:endParaRPr sz="1200" b="0">
-                        <a:solidFill>
-                          <a:srgbClr val="000000"/>
-                        </a:solidFill>
-                        <a:latin typeface="微软雅黑" panose="020B0503020204020204" charset="-122"/>
-                      </a:endParaRPr>
                     </a:p>
                   </a:txBody>
                   <a:tcPr>
@@ -15113,12 +14364,6 @@
                         </a:rPr>
                         <a:t>无效类 + 有效类</a:t>
                       </a:r>
-                      <a:endParaRPr sz="1200" b="0">
-                        <a:solidFill>
-                          <a:srgbClr val="000000"/>
-                        </a:solidFill>
-                        <a:latin typeface="微软雅黑" panose="020B0503020204020204" charset="-122"/>
-                      </a:endParaRPr>
                     </a:p>
                   </a:txBody>
                   <a:tcPr>
@@ -15127,6 +14372,11 @@
                     </a:solidFill>
                   </a:tcPr>
                 </a:tc>
+                <a:extLst>
+                  <a:ext uri="{0D108BD9-81ED-4DB2-BD59-A6C34878D82A}">
+                    <a16:rowId xmlns:a16="http://schemas.microsoft.com/office/drawing/2014/main" val="10003"/>
+                  </a:ext>
+                </a:extLst>
               </a:tr>
               <a:tr h="738051">
                 <a:tc>
@@ -15144,12 +14394,6 @@
                         </a:rPr>
                         <a:t>4</a:t>
                       </a:r>
-                      <a:endParaRPr sz="1200" b="0">
-                        <a:solidFill>
-                          <a:srgbClr val="000000"/>
-                        </a:solidFill>
-                        <a:latin typeface="微软雅黑" panose="020B0503020204020204" charset="-122"/>
-                      </a:endParaRPr>
                     </a:p>
                   </a:txBody>
                   <a:tcPr>
@@ -15173,12 +14417,6 @@
                         </a:rPr>
                         <a:t>新闻删除</a:t>
                       </a:r>
-                      <a:endParaRPr sz="1200" b="0">
-                        <a:solidFill>
-                          <a:srgbClr val="000000"/>
-                        </a:solidFill>
-                        <a:latin typeface="微软雅黑" panose="020B0503020204020204" charset="-122"/>
-                      </a:endParaRPr>
                     </a:p>
                   </a:txBody>
                   <a:tcPr>
@@ -15202,12 +14440,6 @@
                         </a:rPr>
                         <a:t>删除后重定向</a:t>
                       </a:r>
-                      <a:endParaRPr sz="1200" b="0">
-                        <a:solidFill>
-                          <a:srgbClr val="000000"/>
-                        </a:solidFill>
-                        <a:latin typeface="微软雅黑" panose="020B0503020204020204" charset="-122"/>
-                      </a:endParaRPr>
                     </a:p>
                   </a:txBody>
                   <a:tcPr>
@@ -15231,12 +14463,6 @@
                         </a:rPr>
                         <a:t>状态码与跳转</a:t>
                       </a:r>
-                      <a:endParaRPr sz="1200" b="0">
-                        <a:solidFill>
-                          <a:srgbClr val="000000"/>
-                        </a:solidFill>
-                        <a:latin typeface="微软雅黑" panose="020B0503020204020204" charset="-122"/>
-                      </a:endParaRPr>
                     </a:p>
                   </a:txBody>
                   <a:tcPr>
@@ -15245,6 +14471,11 @@
                     </a:solidFill>
                   </a:tcPr>
                 </a:tc>
+                <a:extLst>
+                  <a:ext uri="{0D108BD9-81ED-4DB2-BD59-A6C34878D82A}">
+                    <a16:rowId xmlns:a16="http://schemas.microsoft.com/office/drawing/2014/main" val="10004"/>
+                  </a:ext>
+                </a:extLst>
               </a:tr>
               <a:tr h="738051">
                 <a:tc>
@@ -15262,12 +14493,6 @@
                         </a:rPr>
                         <a:t>5</a:t>
                       </a:r>
-                      <a:endParaRPr sz="1200" b="0">
-                        <a:solidFill>
-                          <a:srgbClr val="000000"/>
-                        </a:solidFill>
-                        <a:latin typeface="微软雅黑" panose="020B0503020204020204" charset="-122"/>
-                      </a:endParaRPr>
                     </a:p>
                   </a:txBody>
                   <a:tcPr>
@@ -15291,12 +14516,6 @@
                         </a:rPr>
                         <a:t>用户管理</a:t>
                       </a:r>
-                      <a:endParaRPr sz="1200" b="0">
-                        <a:solidFill>
-                          <a:srgbClr val="000000"/>
-                        </a:solidFill>
-                        <a:latin typeface="微软雅黑" panose="020B0503020204020204" charset="-122"/>
-                      </a:endParaRPr>
                     </a:p>
                   </a:txBody>
                   <a:tcPr>
@@ -15320,12 +14539,6 @@
                         </a:rPr>
                         <a:t>重复账号与无效 ID</a:t>
                       </a:r>
-                      <a:endParaRPr sz="1200" b="0">
-                        <a:solidFill>
-                          <a:srgbClr val="000000"/>
-                        </a:solidFill>
-                        <a:latin typeface="微软雅黑" panose="020B0503020204020204" charset="-122"/>
-                      </a:endParaRPr>
                     </a:p>
                   </a:txBody>
                   <a:tcPr>
@@ -15349,12 +14562,6 @@
                         </a:rPr>
                         <a:t>重复值 + 边界值</a:t>
                       </a:r>
-                      <a:endParaRPr sz="1200" b="0">
-                        <a:solidFill>
-                          <a:srgbClr val="000000"/>
-                        </a:solidFill>
-                        <a:latin typeface="微软雅黑" panose="020B0503020204020204" charset="-122"/>
-                      </a:endParaRPr>
                     </a:p>
                   </a:txBody>
                   <a:tcPr>
@@ -15363,6 +14570,11 @@
                     </a:solidFill>
                   </a:tcPr>
                 </a:tc>
+                <a:extLst>
+                  <a:ext uri="{0D108BD9-81ED-4DB2-BD59-A6C34878D82A}">
+                    <a16:rowId xmlns:a16="http://schemas.microsoft.com/office/drawing/2014/main" val="10005"/>
+                  </a:ext>
+                </a:extLst>
               </a:tr>
               <a:tr h="738054">
                 <a:tc>
@@ -15380,12 +14592,6 @@
                         </a:rPr>
                         <a:t>6</a:t>
                       </a:r>
-                      <a:endParaRPr sz="1200" b="0">
-                        <a:solidFill>
-                          <a:srgbClr val="000000"/>
-                        </a:solidFill>
-                        <a:latin typeface="微软雅黑" panose="020B0503020204020204" charset="-122"/>
-                      </a:endParaRPr>
                     </a:p>
                   </a:txBody>
                   <a:tcPr>
@@ -15409,12 +14615,6 @@
                         </a:rPr>
                         <a:t>公共跳转</a:t>
                       </a:r>
-                      <a:endParaRPr sz="1200" b="0">
-                        <a:solidFill>
-                          <a:srgbClr val="000000"/>
-                        </a:solidFill>
-                        <a:latin typeface="微软雅黑" panose="020B0503020204020204" charset="-122"/>
-                      </a:endParaRPr>
                     </a:p>
                   </a:txBody>
                   <a:tcPr>
@@ -15438,12 +14638,6 @@
                         </a:rPr>
                         <a:t>视图、模型、重定向</a:t>
                       </a:r>
-                      <a:endParaRPr sz="1200" b="0">
-                        <a:solidFill>
-                          <a:srgbClr val="000000"/>
-                        </a:solidFill>
-                        <a:latin typeface="微软雅黑" panose="020B0503020204020204" charset="-122"/>
-                      </a:endParaRPr>
                     </a:p>
                   </a:txBody>
                   <a:tcPr>
@@ -15467,12 +14661,6 @@
                         </a:rPr>
                         <a:t>集成链路验证</a:t>
                       </a:r>
-                      <a:endParaRPr sz="1200" b="0">
-                        <a:solidFill>
-                          <a:srgbClr val="000000"/>
-                        </a:solidFill>
-                        <a:latin typeface="微软雅黑" panose="020B0503020204020204" charset="-122"/>
-                      </a:endParaRPr>
                     </a:p>
                   </a:txBody>
                   <a:tcPr>
@@ -15481,6 +14669,11 @@
                     </a:solidFill>
                   </a:tcPr>
                 </a:tc>
+                <a:extLst>
+                  <a:ext uri="{0D108BD9-81ED-4DB2-BD59-A6C34878D82A}">
+                    <a16:rowId xmlns:a16="http://schemas.microsoft.com/office/drawing/2014/main" val="10006"/>
+                  </a:ext>
+                </a:extLst>
               </a:tr>
             </a:tbl>
           </a:graphicData>
@@ -15503,7 +14696,14 @@
         <p:cNvGrpSpPr/>
         <p:nvPr/>
       </p:nvGrpSpPr>
-      <p:grpSpPr/>
+      <p:grpSpPr>
+        <a:xfrm>
+          <a:off x="0" y="0"/>
+          <a:ext cx="0" cy="0"/>
+          <a:chOff x="0" y="0"/>
+          <a:chExt cx="0" cy="0"/>
+        </a:xfrm>
+      </p:grpSpPr>
       <p:sp>
         <p:nvSpPr>
           <p:cNvPr id="2" name="Rectangle 1"/>
@@ -15544,6 +14744,7 @@
           <a:lstStyle/>
           <a:p>
             <a:pPr algn="ctr"/>
+            <a:endParaRPr/>
           </a:p>
         </p:txBody>
       </p:sp>
@@ -15587,6 +14788,7 @@
           <a:lstStyle/>
           <a:p>
             <a:pPr algn="ctr"/>
+            <a:endParaRPr/>
           </a:p>
         </p:txBody>
       </p:sp>
@@ -15630,6 +14832,7 @@
           <a:lstStyle/>
           <a:p>
             <a:pPr algn="ctr"/>
+            <a:endParaRPr/>
           </a:p>
         </p:txBody>
       </p:sp>
@@ -15673,6 +14876,7 @@
           <a:lstStyle/>
           <a:p>
             <a:pPr algn="ctr"/>
+            <a:endParaRPr/>
           </a:p>
         </p:txBody>
       </p:sp>
@@ -15716,6 +14920,7 @@
           <a:lstStyle/>
           <a:p>
             <a:pPr algn="ctr"/>
+            <a:endParaRPr/>
           </a:p>
         </p:txBody>
       </p:sp>
@@ -15759,6 +14964,7 @@
           <a:lstStyle/>
           <a:p>
             <a:pPr algn="ctr"/>
+            <a:endParaRPr/>
           </a:p>
         </p:txBody>
       </p:sp>
@@ -15802,6 +15008,7 @@
           <a:lstStyle/>
           <a:p>
             <a:pPr algn="ctr"/>
+            <a:endParaRPr/>
           </a:p>
         </p:txBody>
       </p:sp>
@@ -15836,12 +15043,6 @@
               </a:rPr>
               <a:t>测试小结</a:t>
             </a:r>
-            <a:endParaRPr sz="2800" b="1">
-              <a:solidFill>
-                <a:srgbClr val="000000"/>
-              </a:solidFill>
-              <a:latin typeface="微软雅黑" panose="020B0503020204020204" charset="-122"/>
-            </a:endParaRPr>
           </a:p>
         </p:txBody>
       </p:sp>
@@ -15876,7 +15077,6 @@
               <a:rPr lang="zh-CN" sz="1700"/>
               <a:t>。</a:t>
             </a:r>
-            <a:endParaRPr lang="zh-CN" sz="1700"/>
           </a:p>
           <a:p>
             <a:pPr algn="l"/>
@@ -15884,7 +15084,6 @@
               <a:rPr sz="1700"/>
               <a:t>• 正式回归 147 条用例全部通过，JaCoCo 指令、分支、行、方法覆盖率均为 100%。</a:t>
             </a:r>
-            <a:endParaRPr sz="1700"/>
           </a:p>
           <a:p>
             <a:pPr algn="l"/>
@@ -15892,7 +15091,6 @@
               <a:rPr sz="1700"/>
               <a:t>• 另设计 6 条探索性失败用例，发现后台鉴权、参数边界和密码明文存储等风险。</a:t>
             </a:r>
-            <a:endParaRPr sz="1700"/>
           </a:p>
           <a:p>
             <a:pPr algn="l"/>
@@ -15900,7 +15098,6 @@
               <a:rPr sz="1700"/>
               <a:t>• 探索用例不纳入默认 mvn test 统计，作为缺陷记录和后续修复方向。</a:t>
             </a:r>
-            <a:endParaRPr sz="1700"/>
           </a:p>
           <a:p>
             <a:pPr algn="l"/>
@@ -15908,7 +15105,6 @@
               <a:rPr sz="1700"/>
               <a:t>• 后续可补浏览器 UI 自动化、性能测试和真实 MySQL 环境回归。</a:t>
             </a:r>
-            <a:endParaRPr sz="1700"/>
           </a:p>
         </p:txBody>
       </p:sp>
@@ -15929,7 +15125,14 @@
         <p:cNvGrpSpPr/>
         <p:nvPr/>
       </p:nvGrpSpPr>
-      <p:grpSpPr/>
+      <p:grpSpPr>
+        <a:xfrm>
+          <a:off x="0" y="0"/>
+          <a:ext cx="0" cy="0"/>
+          <a:chOff x="0" y="0"/>
+          <a:chExt cx="0" cy="0"/>
+        </a:xfrm>
+      </p:grpSpPr>
       <p:sp>
         <p:nvSpPr>
           <p:cNvPr id="2" name="Rectangle 1"/>
@@ -15970,6 +15173,7 @@
           <a:lstStyle/>
           <a:p>
             <a:pPr algn="ctr"/>
+            <a:endParaRPr/>
           </a:p>
         </p:txBody>
       </p:sp>
@@ -16013,6 +15217,7 @@
           <a:lstStyle/>
           <a:p>
             <a:pPr algn="ctr"/>
+            <a:endParaRPr/>
           </a:p>
         </p:txBody>
       </p:sp>
@@ -16056,6 +15261,7 @@
           <a:lstStyle/>
           <a:p>
             <a:pPr algn="ctr"/>
+            <a:endParaRPr/>
           </a:p>
         </p:txBody>
       </p:sp>
@@ -16099,6 +15305,7 @@
           <a:lstStyle/>
           <a:p>
             <a:pPr algn="ctr"/>
+            <a:endParaRPr/>
           </a:p>
         </p:txBody>
       </p:sp>
@@ -16142,6 +15349,7 @@
           <a:lstStyle/>
           <a:p>
             <a:pPr algn="ctr"/>
+            <a:endParaRPr/>
           </a:p>
         </p:txBody>
       </p:sp>
@@ -16185,6 +15393,7 @@
           <a:lstStyle/>
           <a:p>
             <a:pPr algn="ctr"/>
+            <a:endParaRPr/>
           </a:p>
         </p:txBody>
       </p:sp>
@@ -16228,6 +15437,7 @@
           <a:lstStyle/>
           <a:p>
             <a:pPr algn="ctr"/>
+            <a:endParaRPr/>
           </a:p>
         </p:txBody>
       </p:sp>
@@ -16262,12 +15472,6 @@
               </a:rPr>
               <a:t>测试项 &amp; 先决条件</a:t>
             </a:r>
-            <a:endParaRPr sz="3000" b="1">
-              <a:solidFill>
-                <a:srgbClr val="000000"/>
-              </a:solidFill>
-              <a:latin typeface="微软雅黑" panose="020B0503020204020204" charset="-122"/>
-            </a:endParaRPr>
           </a:p>
         </p:txBody>
       </p:sp>
@@ -16297,42 +15501,36 @@
               <a:rPr sz="1400"/>
               <a:t>测试项版本/修订号</a:t>
             </a:r>
-            <a:endParaRPr sz="1400"/>
           </a:p>
           <a:p>
             <a:r>
               <a:rPr sz="1400"/>
               <a:t>• service：7 个实现类，45 个业务方法</a:t>
             </a:r>
-            <a:endParaRPr sz="1400"/>
           </a:p>
           <a:p>
             <a:r>
               <a:rPr sz="1400"/>
               <a:t>• controller：11 个控制器，65 个请求映射</a:t>
             </a:r>
-            <a:endParaRPr sz="1400"/>
           </a:p>
           <a:p>
             <a:r>
               <a:rPr sz="1400"/>
               <a:t>• 测试脚本：20 个测试类</a:t>
             </a:r>
-            <a:endParaRPr sz="1400"/>
           </a:p>
           <a:p>
             <a:r>
               <a:rPr sz="1400"/>
               <a:t>  service 单测 7 个 / controller 集成 8 个 / 专项补充 5 个</a:t>
             </a:r>
-            <a:endParaRPr sz="1400"/>
           </a:p>
           <a:p>
             <a:r>
               <a:rPr sz="1400"/>
               <a:t>• 入口：mvn test，Surefire 实际运行 147 条用例</a:t>
             </a:r>
-            <a:endParaRPr sz="1400"/>
           </a:p>
         </p:txBody>
       </p:sp>
@@ -16362,35 +15560,30 @@
               <a:rPr sz="1500"/>
               <a:t>其中的环境需求</a:t>
             </a:r>
-            <a:endParaRPr sz="1500"/>
           </a:p>
           <a:p>
             <a:r>
               <a:rPr sz="1500"/>
               <a:t>• JDK 8+、Maven、Spring Boot 2.2.2</a:t>
             </a:r>
-            <a:endParaRPr sz="1500"/>
           </a:p>
           <a:p>
             <a:r>
               <a:rPr sz="1500"/>
               <a:t>• H2 内存库，MySQL 兼容模式</a:t>
             </a:r>
-            <a:endParaRPr sz="1500"/>
           </a:p>
           <a:p>
             <a:r>
               <a:rPr sz="1500"/>
               <a:t>• JUnit5 + Mockito + MockMvc</a:t>
             </a:r>
-            <a:endParaRPr sz="1500"/>
           </a:p>
           <a:p>
             <a:r>
               <a:rPr sz="1500"/>
               <a:t>• JaCoCo 报告：target/site/jacoco/index.html</a:t>
             </a:r>
-            <a:endParaRPr sz="1500"/>
           </a:p>
         </p:txBody>
       </p:sp>
@@ -16411,7 +15604,14 @@
         <p:cNvGrpSpPr/>
         <p:nvPr/>
       </p:nvGrpSpPr>
-      <p:grpSpPr/>
+      <p:grpSpPr>
+        <a:xfrm>
+          <a:off x="0" y="0"/>
+          <a:ext cx="0" cy="0"/>
+          <a:chOff x="0" y="0"/>
+          <a:chExt cx="0" cy="0"/>
+        </a:xfrm>
+      </p:grpSpPr>
       <p:sp>
         <p:nvSpPr>
           <p:cNvPr id="2" name="Rectangle 1"/>
@@ -16452,6 +15652,7 @@
           <a:lstStyle/>
           <a:p>
             <a:pPr algn="ctr"/>
+            <a:endParaRPr/>
           </a:p>
         </p:txBody>
       </p:sp>
@@ -16495,6 +15696,7 @@
           <a:lstStyle/>
           <a:p>
             <a:pPr algn="ctr"/>
+            <a:endParaRPr/>
           </a:p>
         </p:txBody>
       </p:sp>
@@ -16538,6 +15740,7 @@
           <a:lstStyle/>
           <a:p>
             <a:pPr algn="ctr"/>
+            <a:endParaRPr/>
           </a:p>
         </p:txBody>
       </p:sp>
@@ -16581,6 +15784,7 @@
           <a:lstStyle/>
           <a:p>
             <a:pPr algn="ctr"/>
+            <a:endParaRPr/>
           </a:p>
         </p:txBody>
       </p:sp>
@@ -16624,6 +15828,7 @@
           <a:lstStyle/>
           <a:p>
             <a:pPr algn="ctr"/>
+            <a:endParaRPr/>
           </a:p>
         </p:txBody>
       </p:sp>
@@ -16667,6 +15872,7 @@
           <a:lstStyle/>
           <a:p>
             <a:pPr algn="ctr"/>
+            <a:endParaRPr/>
           </a:p>
         </p:txBody>
       </p:sp>
@@ -16710,6 +15916,7 @@
           <a:lstStyle/>
           <a:p>
             <a:pPr algn="ctr"/>
+            <a:endParaRPr/>
           </a:p>
         </p:txBody>
       </p:sp>
@@ -16737,6 +15944,7 @@
           <a:bodyPr wrap="square">
             <a:spAutoFit/>
           </a:bodyPr>
+          <a:lstStyle/>
           <a:p>
             <a:pPr algn="just">
               <a:lnSpc>
@@ -17046,6 +16254,7 @@
           <a:bodyPr wrap="square">
             <a:spAutoFit/>
           </a:bodyPr>
+          <a:lstStyle/>
           <a:p>
             <a:pPr algn="just">
               <a:lnSpc>
@@ -17468,7 +16677,14 @@
         <p:cNvGrpSpPr/>
         <p:nvPr/>
       </p:nvGrpSpPr>
-      <p:grpSpPr/>
+      <p:grpSpPr>
+        <a:xfrm>
+          <a:off x="0" y="0"/>
+          <a:ext cx="0" cy="0"/>
+          <a:chOff x="0" y="0"/>
+          <a:chExt cx="0" cy="0"/>
+        </a:xfrm>
+      </p:grpSpPr>
       <p:sp>
         <p:nvSpPr>
           <p:cNvPr id="2" name="Rectangle 1"/>
@@ -17509,6 +16725,7 @@
           <a:lstStyle/>
           <a:p>
             <a:pPr algn="ctr"/>
+            <a:endParaRPr/>
           </a:p>
         </p:txBody>
       </p:sp>
@@ -17552,6 +16769,7 @@
           <a:lstStyle/>
           <a:p>
             <a:pPr algn="ctr"/>
+            <a:endParaRPr/>
           </a:p>
         </p:txBody>
       </p:sp>
@@ -17595,6 +16813,7 @@
           <a:lstStyle/>
           <a:p>
             <a:pPr algn="ctr"/>
+            <a:endParaRPr/>
           </a:p>
         </p:txBody>
       </p:sp>
@@ -17638,6 +16857,7 @@
           <a:lstStyle/>
           <a:p>
             <a:pPr algn="ctr"/>
+            <a:endParaRPr/>
           </a:p>
         </p:txBody>
       </p:sp>
@@ -17681,6 +16901,7 @@
           <a:lstStyle/>
           <a:p>
             <a:pPr algn="ctr"/>
+            <a:endParaRPr/>
           </a:p>
         </p:txBody>
       </p:sp>
@@ -17724,6 +16945,7 @@
           <a:lstStyle/>
           <a:p>
             <a:pPr algn="ctr"/>
+            <a:endParaRPr/>
           </a:p>
         </p:txBody>
       </p:sp>
@@ -17767,6 +16989,7 @@
           <a:lstStyle/>
           <a:p>
             <a:pPr algn="ctr"/>
+            <a:endParaRPr/>
           </a:p>
         </p:txBody>
       </p:sp>
@@ -17801,12 +17024,6 @@
               </a:rPr>
               <a:t>风险管控</a:t>
             </a:r>
-            <a:endParaRPr sz="3000" b="1">
-              <a:solidFill>
-                <a:srgbClr val="000000"/>
-              </a:solidFill>
-              <a:latin typeface="微软雅黑" panose="020B0503020204020204" charset="-122"/>
-            </a:endParaRPr>
           </a:p>
         </p:txBody>
       </p:sp>
@@ -17829,9 +17046,27 @@
                 <a:tableStyleId>{5C22544A-7EE6-4342-B048-85BDC9FD1C3A}</a:tableStyleId>
               </a:tblPr>
               <a:tblGrid>
-                <a:gridCol w="3108960"/>
-                <a:gridCol w="3108960"/>
-                <a:gridCol w="3108960"/>
+                <a:gridCol w="3108960">
+                  <a:extLst>
+                    <a:ext uri="{9D8B030D-6E8A-4147-A177-3AD203B41FA5}">
+                      <a16:colId xmlns:a16="http://schemas.microsoft.com/office/drawing/2014/main" val="20000"/>
+                    </a:ext>
+                  </a:extLst>
+                </a:gridCol>
+                <a:gridCol w="3108960">
+                  <a:extLst>
+                    <a:ext uri="{9D8B030D-6E8A-4147-A177-3AD203B41FA5}">
+                      <a16:colId xmlns:a16="http://schemas.microsoft.com/office/drawing/2014/main" val="20001"/>
+                    </a:ext>
+                  </a:extLst>
+                </a:gridCol>
+                <a:gridCol w="3108960">
+                  <a:extLst>
+                    <a:ext uri="{9D8B030D-6E8A-4147-A177-3AD203B41FA5}">
+                      <a16:colId xmlns:a16="http://schemas.microsoft.com/office/drawing/2014/main" val="20002"/>
+                    </a:ext>
+                  </a:extLst>
+                </a:gridCol>
               </a:tblGrid>
               <a:tr h="621792">
                 <a:tc>
@@ -17843,7 +17078,6 @@
                         <a:rPr sz="1700"/>
                         <a:t>风险类型</a:t>
                       </a:r>
-                      <a:endParaRPr sz="1700"/>
                     </a:p>
                   </a:txBody>
                   <a:tcPr>
@@ -17861,7 +17095,6 @@
                         <a:rPr sz="1700"/>
                         <a:t>本项目表现</a:t>
                       </a:r>
-                      <a:endParaRPr sz="1700"/>
                     </a:p>
                   </a:txBody>
                   <a:tcPr>
@@ -17879,7 +17112,6 @@
                         <a:rPr sz="1700"/>
                         <a:t>应急措施</a:t>
                       </a:r>
-                      <a:endParaRPr sz="1700"/>
                     </a:p>
                   </a:txBody>
                   <a:tcPr>
@@ -17888,6 +17120,11 @@
                     </a:solidFill>
                   </a:tcPr>
                 </a:tc>
+                <a:extLst>
+                  <a:ext uri="{0D108BD9-81ED-4DB2-BD59-A6C34878D82A}">
+                    <a16:rowId xmlns:a16="http://schemas.microsoft.com/office/drawing/2014/main" val="10000"/>
+                  </a:ext>
+                </a:extLst>
               </a:tr>
               <a:tr h="621792">
                 <a:tc>
@@ -17899,7 +17136,6 @@
                         <a:rPr sz="1700"/>
                         <a:t>数据库差异</a:t>
                       </a:r>
-                      <a:endParaRPr sz="1700"/>
                     </a:p>
                   </a:txBody>
                   <a:tcPr>
@@ -17917,7 +17153,6 @@
                         <a:rPr sz="1700"/>
                         <a:t>H2 与 MySQL 可能存在少量行为差异</a:t>
                       </a:r>
-                      <a:endParaRPr sz="1700"/>
                     </a:p>
                   </a:txBody>
                   <a:tcPr>
@@ -17935,7 +17170,6 @@
                         <a:rPr sz="1700"/>
                         <a:t>启用 MySQL 模式；真实库再回归</a:t>
                       </a:r>
-                      <a:endParaRPr sz="1700"/>
                     </a:p>
                   </a:txBody>
                   <a:tcPr>
@@ -17944,6 +17178,11 @@
                     </a:solidFill>
                   </a:tcPr>
                 </a:tc>
+                <a:extLst>
+                  <a:ext uri="{0D108BD9-81ED-4DB2-BD59-A6C34878D82A}">
+                    <a16:rowId xmlns:a16="http://schemas.microsoft.com/office/drawing/2014/main" val="10001"/>
+                  </a:ext>
+                </a:extLst>
               </a:tr>
               <a:tr h="621792">
                 <a:tc>
@@ -17955,7 +17194,6 @@
                         <a:rPr sz="1700"/>
                         <a:t>权限校验</a:t>
                       </a:r>
-                      <a:endParaRPr sz="1700"/>
                     </a:p>
                   </a:txBody>
                   <a:tcPr>
@@ -17973,7 +17211,6 @@
                         <a:rPr sz="1700"/>
                         <a:t>后台页、删除订单未严格拦截</a:t>
                       </a:r>
-                      <a:endParaRPr sz="1700"/>
                     </a:p>
                   </a:txBody>
                   <a:tcPr>
@@ -17991,7 +17228,6 @@
                         <a:rPr sz="1700"/>
                         <a:t>后续补登录/角色校验</a:t>
                       </a:r>
-                      <a:endParaRPr sz="1700"/>
                     </a:p>
                   </a:txBody>
                   <a:tcPr>
@@ -18000,6 +17236,11 @@
                     </a:solidFill>
                   </a:tcPr>
                 </a:tc>
+                <a:extLst>
+                  <a:ext uri="{0D108BD9-81ED-4DB2-BD59-A6C34878D82A}">
+                    <a16:rowId xmlns:a16="http://schemas.microsoft.com/office/drawing/2014/main" val="10002"/>
+                  </a:ext>
+                </a:extLst>
               </a:tr>
               <a:tr h="621792">
                 <a:tc>
@@ -18011,7 +17252,6 @@
                         <a:rPr sz="1700"/>
                         <a:t>参数边界</a:t>
                       </a:r>
-                      <a:endParaRPr sz="1700"/>
                     </a:p>
                   </a:txBody>
                   <a:tcPr>
@@ -18029,7 +17269,6 @@
                         <a:rPr sz="1700"/>
                         <a:t>page=0、负数时长处理不足</a:t>
                       </a:r>
-                      <a:endParaRPr sz="1700"/>
                     </a:p>
                   </a:txBody>
                   <a:tcPr>
@@ -18047,7 +17286,6 @@
                         <a:rPr sz="1700"/>
                         <a:t>增加边界校验并回归</a:t>
                       </a:r>
-                      <a:endParaRPr sz="1700"/>
                     </a:p>
                   </a:txBody>
                   <a:tcPr>
@@ -18056,6 +17294,11 @@
                     </a:solidFill>
                   </a:tcPr>
                 </a:tc>
+                <a:extLst>
+                  <a:ext uri="{0D108BD9-81ED-4DB2-BD59-A6C34878D82A}">
+                    <a16:rowId xmlns:a16="http://schemas.microsoft.com/office/drawing/2014/main" val="10003"/>
+                  </a:ext>
+                </a:extLst>
               </a:tr>
               <a:tr h="621792">
                 <a:tc>
@@ -18067,7 +17310,6 @@
                         <a:rPr sz="1700"/>
                         <a:t>密码安全</a:t>
                       </a:r>
-                      <a:endParaRPr sz="1700"/>
                     </a:p>
                   </a:txBody>
                   <a:tcPr>
@@ -18085,7 +17327,6 @@
                         <a:rPr sz="1700"/>
                         <a:t>注册密码明文保存</a:t>
                       </a:r>
-                      <a:endParaRPr sz="1700"/>
                     </a:p>
                   </a:txBody>
                   <a:tcPr>
@@ -18103,7 +17344,6 @@
                         <a:rPr sz="1700"/>
                         <a:t>后续加密存储并增加密码策略</a:t>
                       </a:r>
-                      <a:endParaRPr sz="1700"/>
                     </a:p>
                   </a:txBody>
                   <a:tcPr>
@@ -18112,6 +17352,11 @@
                     </a:solidFill>
                   </a:tcPr>
                 </a:tc>
+                <a:extLst>
+                  <a:ext uri="{0D108BD9-81ED-4DB2-BD59-A6C34878D82A}">
+                    <a16:rowId xmlns:a16="http://schemas.microsoft.com/office/drawing/2014/main" val="10004"/>
+                  </a:ext>
+                </a:extLst>
               </a:tr>
             </a:tbl>
           </a:graphicData>
@@ -18134,7 +17379,14 @@
         <p:cNvGrpSpPr/>
         <p:nvPr/>
       </p:nvGrpSpPr>
-      <p:grpSpPr/>
+      <p:grpSpPr>
+        <a:xfrm>
+          <a:off x="0" y="0"/>
+          <a:ext cx="0" cy="0"/>
+          <a:chOff x="0" y="0"/>
+          <a:chExt cx="0" cy="0"/>
+        </a:xfrm>
+      </p:grpSpPr>
       <p:sp>
         <p:nvSpPr>
           <p:cNvPr id="2" name="Rectangle 1"/>
@@ -18175,6 +17427,7 @@
           <a:lstStyle/>
           <a:p>
             <a:pPr algn="ctr"/>
+            <a:endParaRPr/>
           </a:p>
         </p:txBody>
       </p:sp>
@@ -18218,6 +17471,7 @@
           <a:lstStyle/>
           <a:p>
             <a:pPr algn="ctr"/>
+            <a:endParaRPr/>
           </a:p>
         </p:txBody>
       </p:sp>
@@ -18261,6 +17515,7 @@
           <a:lstStyle/>
           <a:p>
             <a:pPr algn="ctr"/>
+            <a:endParaRPr/>
           </a:p>
         </p:txBody>
       </p:sp>
@@ -18304,6 +17559,7 @@
           <a:lstStyle/>
           <a:p>
             <a:pPr algn="ctr"/>
+            <a:endParaRPr/>
           </a:p>
         </p:txBody>
       </p:sp>
@@ -18347,6 +17603,7 @@
           <a:lstStyle/>
           <a:p>
             <a:pPr algn="ctr"/>
+            <a:endParaRPr/>
           </a:p>
         </p:txBody>
       </p:sp>
@@ -18390,6 +17647,7 @@
           <a:lstStyle/>
           <a:p>
             <a:pPr algn="ctr"/>
+            <a:endParaRPr/>
           </a:p>
         </p:txBody>
       </p:sp>
@@ -18433,6 +17691,7 @@
           <a:lstStyle/>
           <a:p>
             <a:pPr algn="ctr"/>
+            <a:endParaRPr/>
           </a:p>
         </p:txBody>
       </p:sp>
@@ -18467,12 +17726,6 @@
               </a:rPr>
               <a:t>组员</a:t>
             </a:r>
-            <a:endParaRPr sz="2700" b="1">
-              <a:solidFill>
-                <a:srgbClr val="000000"/>
-              </a:solidFill>
-              <a:latin typeface="微软雅黑" panose="020B0503020204020204" charset="-122"/>
-            </a:endParaRPr>
           </a:p>
           <a:p>
             <a:r>
@@ -18484,12 +17737,6 @@
               </a:rPr>
               <a:t>分工</a:t>
             </a:r>
-            <a:endParaRPr sz="2700" b="1">
-              <a:solidFill>
-                <a:srgbClr val="000000"/>
-              </a:solidFill>
-              <a:latin typeface="微软雅黑" panose="020B0503020204020204" charset="-122"/>
-            </a:endParaRPr>
           </a:p>
         </p:txBody>
       </p:sp>
@@ -18512,10 +17759,34 @@
                 <a:tableStyleId>{5C22544A-7EE6-4342-B048-85BDC9FD1C3A}</a:tableStyleId>
               </a:tblPr>
               <a:tblGrid>
-                <a:gridCol w="2171700"/>
-                <a:gridCol w="2171700"/>
-                <a:gridCol w="2171700"/>
-                <a:gridCol w="2171700"/>
+                <a:gridCol w="2171700">
+                  <a:extLst>
+                    <a:ext uri="{9D8B030D-6E8A-4147-A177-3AD203B41FA5}">
+                      <a16:colId xmlns:a16="http://schemas.microsoft.com/office/drawing/2014/main" val="20000"/>
+                    </a:ext>
+                  </a:extLst>
+                </a:gridCol>
+                <a:gridCol w="2171700">
+                  <a:extLst>
+                    <a:ext uri="{9D8B030D-6E8A-4147-A177-3AD203B41FA5}">
+                      <a16:colId xmlns:a16="http://schemas.microsoft.com/office/drawing/2014/main" val="20001"/>
+                    </a:ext>
+                  </a:extLst>
+                </a:gridCol>
+                <a:gridCol w="2171700">
+                  <a:extLst>
+                    <a:ext uri="{9D8B030D-6E8A-4147-A177-3AD203B41FA5}">
+                      <a16:colId xmlns:a16="http://schemas.microsoft.com/office/drawing/2014/main" val="20002"/>
+                    </a:ext>
+                  </a:extLst>
+                </a:gridCol>
+                <a:gridCol w="2171700">
+                  <a:extLst>
+                    <a:ext uri="{9D8B030D-6E8A-4147-A177-3AD203B41FA5}">
+                      <a16:colId xmlns:a16="http://schemas.microsoft.com/office/drawing/2014/main" val="20003"/>
+                    </a:ext>
+                  </a:extLst>
+                </a:gridCol>
               </a:tblGrid>
               <a:tr h="822960">
                 <a:tc>
@@ -18533,12 +17804,6 @@
                         </a:rPr>
                         <a:t>序号</a:t>
                       </a:r>
-                      <a:endParaRPr sz="1200" b="1">
-                        <a:solidFill>
-                          <a:srgbClr val="FFFFFF"/>
-                        </a:solidFill>
-                        <a:latin typeface="微软雅黑" panose="020B0503020204020204" charset="-122"/>
-                      </a:endParaRPr>
                     </a:p>
                   </a:txBody>
                   <a:tcPr>
@@ -18562,12 +17827,6 @@
                         </a:rPr>
                         <a:t>小组成员</a:t>
                       </a:r>
-                      <a:endParaRPr sz="1200" b="1">
-                        <a:solidFill>
-                          <a:srgbClr val="FFFFFF"/>
-                        </a:solidFill>
-                        <a:latin typeface="微软雅黑" panose="020B0503020204020204" charset="-122"/>
-                      </a:endParaRPr>
                     </a:p>
                   </a:txBody>
                   <a:tcPr>
@@ -18591,12 +17850,6 @@
                         </a:rPr>
                         <a:t>职责</a:t>
                       </a:r>
-                      <a:endParaRPr sz="1200" b="1">
-                        <a:solidFill>
-                          <a:srgbClr val="FFFFFF"/>
-                        </a:solidFill>
-                        <a:latin typeface="微软雅黑" panose="020B0503020204020204" charset="-122"/>
-                      </a:endParaRPr>
                     </a:p>
                   </a:txBody>
                   <a:tcPr>
@@ -18620,12 +17873,6 @@
                         </a:rPr>
                         <a:t>任务占比</a:t>
                       </a:r>
-                      <a:endParaRPr sz="1200" b="1">
-                        <a:solidFill>
-                          <a:srgbClr val="FFFFFF"/>
-                        </a:solidFill>
-                        <a:latin typeface="微软雅黑" panose="020B0503020204020204" charset="-122"/>
-                      </a:endParaRPr>
                     </a:p>
                   </a:txBody>
                   <a:tcPr>
@@ -18634,6 +17881,11 @@
                     </a:solidFill>
                   </a:tcPr>
                 </a:tc>
+                <a:extLst>
+                  <a:ext uri="{0D108BD9-81ED-4DB2-BD59-A6C34878D82A}">
+                    <a16:rowId xmlns:a16="http://schemas.microsoft.com/office/drawing/2014/main" val="10000"/>
+                  </a:ext>
+                </a:extLst>
               </a:tr>
               <a:tr h="822960">
                 <a:tc>
@@ -18650,6 +17902,225 @@
                           <a:latin typeface="微软雅黑" panose="020B0503020204020204" charset="-122"/>
                         </a:rPr>
                         <a:t>1</a:t>
+                      </a:r>
+                    </a:p>
+                  </a:txBody>
+                  <a:tcPr>
+                    <a:solidFill>
+                      <a:srgbClr val="DAECE2"/>
+                    </a:solidFill>
+                  </a:tcPr>
+                </a:tc>
+                <a:tc>
+                  <a:txBody>
+                    <a:bodyPr/>
+                    <a:lstStyle/>
+                    <a:p>
+                      <a:pPr algn="ctr"/>
+                      <a:r>
+                        <a:rPr sz="1100" b="0">
+                          <a:solidFill>
+                            <a:srgbClr val="000000"/>
+                          </a:solidFill>
+                          <a:latin typeface="微软雅黑" panose="020B0503020204020204" charset="-122"/>
+                        </a:rPr>
+                        <a:t>胡彬泽</a:t>
+                      </a:r>
+                    </a:p>
+                  </a:txBody>
+                  <a:tcPr>
+                    <a:solidFill>
+                      <a:srgbClr val="DAECE2"/>
+                    </a:solidFill>
+                  </a:tcPr>
+                </a:tc>
+                <a:tc>
+                  <a:txBody>
+                    <a:bodyPr/>
+                    <a:lstStyle/>
+                    <a:p>
+                      <a:pPr algn="ctr"/>
+                      <a:r>
+                        <a:rPr lang="zh-CN" sz="1100" b="0">
+                          <a:solidFill>
+                            <a:srgbClr val="000000"/>
+                          </a:solidFill>
+                          <a:latin typeface="微软雅黑" panose="020B0503020204020204" charset="-122"/>
+                        </a:rPr>
+                        <a:t>任务分配；</a:t>
+                      </a:r>
+                      <a:r>
+                        <a:rPr sz="1100" b="0">
+                          <a:solidFill>
+                            <a:srgbClr val="000000"/>
+                          </a:solidFill>
+                          <a:latin typeface="微软雅黑" panose="020B0503020204020204" charset="-122"/>
+                        </a:rPr>
+                        <a:t>环境搭建；</a:t>
+                      </a:r>
+                      <a:r>
+                        <a:rPr lang="zh-CN" sz="1100" b="0">
+                          <a:solidFill>
+                            <a:srgbClr val="000000"/>
+                          </a:solidFill>
+                          <a:latin typeface="微软雅黑" panose="020B0503020204020204" charset="-122"/>
+                        </a:rPr>
+                        <a:t>部分</a:t>
+                      </a:r>
+                      <a:r>
+                        <a:rPr sz="1100" b="0">
+                          <a:solidFill>
+                            <a:srgbClr val="000000"/>
+                          </a:solidFill>
+                          <a:latin typeface="微软雅黑" panose="020B0503020204020204" charset="-122"/>
+                        </a:rPr>
+                        <a:t>service 单测；</a:t>
+                      </a:r>
+                      <a:r>
+                        <a:rPr lang="zh-CN" sz="1100" b="0">
+                          <a:solidFill>
+                            <a:srgbClr val="000000"/>
+                          </a:solidFill>
+                          <a:latin typeface="微软雅黑" panose="020B0503020204020204" charset="-122"/>
+                        </a:rPr>
+                        <a:t>部分</a:t>
+                      </a:r>
+                      <a:r>
+                        <a:rPr sz="1100" b="0">
+                          <a:solidFill>
+                            <a:srgbClr val="000000"/>
+                          </a:solidFill>
+                          <a:latin typeface="微软雅黑" panose="020B0503020204020204" charset="-122"/>
+                        </a:rPr>
+                        <a:t>controller 集成测试；</a:t>
+                      </a:r>
+                    </a:p>
+                  </a:txBody>
+                  <a:tcPr>
+                    <a:solidFill>
+                      <a:srgbClr val="DAECE2"/>
+                    </a:solidFill>
+                  </a:tcPr>
+                </a:tc>
+                <a:tc>
+                  <a:txBody>
+                    <a:bodyPr/>
+                    <a:lstStyle/>
+                    <a:p>
+                      <a:pPr algn="ctr"/>
+                      <a:r>
+                        <a:rPr lang="en-US" sz="1100" b="0">
+                          <a:solidFill>
+                            <a:srgbClr val="000000"/>
+                          </a:solidFill>
+                          <a:latin typeface="微软雅黑" panose="020B0503020204020204" charset="-122"/>
+                        </a:rPr>
+                        <a:t>20</a:t>
+                      </a:r>
+                      <a:r>
+                        <a:rPr sz="1100" b="0">
+                          <a:solidFill>
+                            <a:srgbClr val="000000"/>
+                          </a:solidFill>
+                          <a:latin typeface="微软雅黑" panose="020B0503020204020204" charset="-122"/>
+                        </a:rPr>
+                        <a:t>%</a:t>
+                      </a:r>
+                    </a:p>
+                  </a:txBody>
+                  <a:tcPr>
+                    <a:solidFill>
+                      <a:srgbClr val="DAECE2"/>
+                    </a:solidFill>
+                  </a:tcPr>
+                </a:tc>
+                <a:extLst>
+                  <a:ext uri="{0D108BD9-81ED-4DB2-BD59-A6C34878D82A}">
+                    <a16:rowId xmlns:a16="http://schemas.microsoft.com/office/drawing/2014/main" val="10001"/>
+                  </a:ext>
+                </a:extLst>
+              </a:tr>
+              <a:tr h="822960">
+                <a:tc>
+                  <a:txBody>
+                    <a:bodyPr/>
+                    <a:lstStyle/>
+                    <a:p>
+                      <a:pPr algn="ctr"/>
+                      <a:r>
+                        <a:rPr sz="1100" b="0">
+                          <a:solidFill>
+                            <a:srgbClr val="000000"/>
+                          </a:solidFill>
+                          <a:latin typeface="微软雅黑" panose="020B0503020204020204" charset="-122"/>
+                        </a:rPr>
+                        <a:t>2</a:t>
+                      </a:r>
+                    </a:p>
+                  </a:txBody>
+                  <a:tcPr>
+                    <a:solidFill>
+                      <a:srgbClr val="F1F7EC"/>
+                    </a:solidFill>
+                  </a:tcPr>
+                </a:tc>
+                <a:tc>
+                  <a:txBody>
+                    <a:bodyPr/>
+                    <a:lstStyle/>
+                    <a:p>
+                      <a:pPr algn="ctr"/>
+                      <a:r>
+                        <a:rPr sz="1100" b="0">
+                          <a:solidFill>
+                            <a:srgbClr val="000000"/>
+                          </a:solidFill>
+                          <a:latin typeface="微软雅黑" panose="020B0503020204020204" charset="-122"/>
+                        </a:rPr>
+                        <a:t>沙华煜</a:t>
+                      </a:r>
+                    </a:p>
+                  </a:txBody>
+                  <a:tcPr>
+                    <a:solidFill>
+                      <a:srgbClr val="F1F7EC"/>
+                    </a:solidFill>
+                  </a:tcPr>
+                </a:tc>
+                <a:tc>
+                  <a:txBody>
+                    <a:bodyPr/>
+                    <a:lstStyle/>
+                    <a:p>
+                      <a:pPr algn="ctr"/>
+                      <a:r>
+                        <a:rPr sz="1100" b="0">
+                          <a:solidFill>
+                            <a:srgbClr val="000000"/>
+                          </a:solidFill>
+                          <a:latin typeface="微软雅黑" panose="020B0503020204020204" charset="-122"/>
+                        </a:rPr>
+                        <a:t>项目测试计划书；</a:t>
+                      </a:r>
+                      <a:r>
+                        <a:rPr lang="zh-CN" sz="1100">
+                          <a:solidFill>
+                            <a:srgbClr val="000000"/>
+                          </a:solidFill>
+                          <a:latin typeface="微软雅黑" panose="020B0503020204020204" charset="-122"/>
+                          <a:sym typeface="+mn-ea"/>
+                        </a:rPr>
+                        <a:t>部分</a:t>
+                      </a:r>
+                      <a:r>
+                        <a:rPr sz="1100">
+                          <a:solidFill>
+                            <a:srgbClr val="000000"/>
+                          </a:solidFill>
+                          <a:latin typeface="微软雅黑" panose="020B0503020204020204" charset="-122"/>
+                          <a:sym typeface="+mn-ea"/>
+                        </a:rPr>
+                        <a:t>service 单测；</a:t>
                       </a:r>
                       <a:endParaRPr sz="1100" b="0">
                         <a:solidFill>
@@ -18661,6 +18132,68 @@
                   </a:txBody>
                   <a:tcPr>
                     <a:solidFill>
+                      <a:srgbClr val="F1F7EC"/>
+                    </a:solidFill>
+                  </a:tcPr>
+                </a:tc>
+                <a:tc>
+                  <a:txBody>
+                    <a:bodyPr/>
+                    <a:lstStyle/>
+                    <a:p>
+                      <a:pPr algn="ctr"/>
+                      <a:r>
+                        <a:rPr lang="en-US" sz="1100" b="0">
+                          <a:solidFill>
+                            <a:srgbClr val="000000"/>
+                          </a:solidFill>
+                          <a:latin typeface="微软雅黑" panose="020B0503020204020204" charset="-122"/>
+                        </a:rPr>
+                        <a:t>20</a:t>
+                      </a:r>
+                      <a:r>
+                        <a:rPr sz="1100" b="0">
+                          <a:solidFill>
+                            <a:srgbClr val="000000"/>
+                          </a:solidFill>
+                          <a:latin typeface="微软雅黑" panose="020B0503020204020204" charset="-122"/>
+                        </a:rPr>
+                        <a:t>%</a:t>
+                      </a:r>
+                    </a:p>
+                  </a:txBody>
+                  <a:tcPr>
+                    <a:solidFill>
+                      <a:srgbClr val="F1F7EC"/>
+                    </a:solidFill>
+                  </a:tcPr>
+                </a:tc>
+                <a:extLst>
+                  <a:ext uri="{0D108BD9-81ED-4DB2-BD59-A6C34878D82A}">
+                    <a16:rowId xmlns:a16="http://schemas.microsoft.com/office/drawing/2014/main" val="10002"/>
+                  </a:ext>
+                </a:extLst>
+              </a:tr>
+              <a:tr h="822960">
+                <a:tc>
+                  <a:txBody>
+                    <a:bodyPr/>
+                    <a:lstStyle/>
+                    <a:p>
+                      <a:pPr algn="ctr"/>
+                      <a:r>
+                        <a:rPr sz="1100" b="0">
+                          <a:solidFill>
+                            <a:srgbClr val="000000"/>
+                          </a:solidFill>
+                          <a:latin typeface="微软雅黑" panose="020B0503020204020204" charset="-122"/>
+                        </a:rPr>
+                        <a:t>3</a:t>
+                      </a:r>
+                    </a:p>
+                  </a:txBody>
+                  <a:tcPr>
+                    <a:solidFill>
                       <a:srgbClr val="DAECE2"/>
                     </a:solidFill>
                   </a:tcPr>
@@ -18678,7 +18211,50 @@
                           </a:solidFill>
                           <a:latin typeface="微软雅黑" panose="020B0503020204020204" charset="-122"/>
                         </a:rPr>
-                        <a:t>胡彬泽</a:t>
+                        <a:t>彭祈元</a:t>
+                      </a:r>
+                    </a:p>
+                  </a:txBody>
+                  <a:tcPr>
+                    <a:solidFill>
+                      <a:srgbClr val="DAECE2"/>
+                    </a:solidFill>
+                  </a:tcPr>
+                </a:tc>
+                <a:tc>
+                  <a:txBody>
+                    <a:bodyPr/>
+                    <a:lstStyle/>
+                    <a:p>
+                      <a:pPr algn="ctr"/>
+                      <a:r>
+                        <a:rPr sz="1100" b="0">
+                          <a:solidFill>
+                            <a:srgbClr val="000000"/>
+                          </a:solidFill>
+                          <a:latin typeface="微软雅黑" panose="020B0503020204020204" charset="-122"/>
+                        </a:rPr>
+                        <a:t>单元测试用例文档；</a:t>
+                      </a:r>
+                      <a:r>
+                        <a:rPr lang="zh-CN" sz="1100">
+                          <a:solidFill>
+                            <a:srgbClr val="000000"/>
+                          </a:solidFill>
+                          <a:latin typeface="微软雅黑" panose="020B0503020204020204" charset="-122"/>
+                          <a:sym typeface="+mn-ea"/>
+                        </a:rPr>
+                        <a:t>部分</a:t>
+                      </a:r>
+                      <a:r>
+                        <a:rPr sz="1100">
+                          <a:solidFill>
+                            <a:srgbClr val="000000"/>
+                          </a:solidFill>
+                          <a:latin typeface="微软雅黑" panose="020B0503020204020204" charset="-122"/>
+                          <a:sym typeface="+mn-ea"/>
+                        </a:rPr>
+                        <a:t>controller 集成测试；</a:t>
                       </a:r>
                       <a:endParaRPr sz="1100" b="0">
                         <a:solidFill>
@@ -18701,58 +18277,127 @@
                     <a:p>
                       <a:pPr algn="ctr"/>
                       <a:r>
+                        <a:rPr lang="en-US" sz="1100" b="0">
+                          <a:solidFill>
+                            <a:srgbClr val="000000"/>
+                          </a:solidFill>
+                          <a:latin typeface="微软雅黑" panose="020B0503020204020204" charset="-122"/>
+                        </a:rPr>
+                        <a:t>20</a:t>
+                      </a:r>
+                      <a:r>
+                        <a:rPr sz="1100" b="0">
+                          <a:solidFill>
+                            <a:srgbClr val="000000"/>
+                          </a:solidFill>
+                          <a:latin typeface="微软雅黑" panose="020B0503020204020204" charset="-122"/>
+                        </a:rPr>
+                        <a:t>%</a:t>
+                      </a:r>
+                    </a:p>
+                  </a:txBody>
+                  <a:tcPr>
+                    <a:solidFill>
+                      <a:srgbClr val="DAECE2"/>
+                    </a:solidFill>
+                  </a:tcPr>
+                </a:tc>
+                <a:extLst>
+                  <a:ext uri="{0D108BD9-81ED-4DB2-BD59-A6C34878D82A}">
+                    <a16:rowId xmlns:a16="http://schemas.microsoft.com/office/drawing/2014/main" val="10003"/>
+                  </a:ext>
+                </a:extLst>
+              </a:tr>
+              <a:tr h="822960">
+                <a:tc>
+                  <a:txBody>
+                    <a:bodyPr/>
+                    <a:lstStyle/>
+                    <a:p>
+                      <a:pPr algn="ctr"/>
+                      <a:r>
+                        <a:rPr sz="1100" b="0">
+                          <a:solidFill>
+                            <a:srgbClr val="000000"/>
+                          </a:solidFill>
+                          <a:latin typeface="微软雅黑" panose="020B0503020204020204" charset="-122"/>
+                        </a:rPr>
+                        <a:t>4</a:t>
+                      </a:r>
+                    </a:p>
+                  </a:txBody>
+                  <a:tcPr>
+                    <a:solidFill>
+                      <a:srgbClr val="F1F7EC"/>
+                    </a:solidFill>
+                  </a:tcPr>
+                </a:tc>
+                <a:tc>
+                  <a:txBody>
+                    <a:bodyPr/>
+                    <a:lstStyle/>
+                    <a:p>
+                      <a:pPr algn="ctr"/>
+                      <a:r>
+                        <a:rPr sz="1100" b="0">
+                          <a:solidFill>
+                            <a:srgbClr val="000000"/>
+                          </a:solidFill>
+                          <a:latin typeface="微软雅黑" panose="020B0503020204020204" charset="-122"/>
+                        </a:rPr>
+                        <a:t>郭政颖</a:t>
+                      </a:r>
+                    </a:p>
+                  </a:txBody>
+                  <a:tcPr>
+                    <a:solidFill>
+                      <a:srgbClr val="F1F7EC"/>
+                    </a:solidFill>
+                  </a:tcPr>
+                </a:tc>
+                <a:tc>
+                  <a:txBody>
+                    <a:bodyPr/>
+                    <a:lstStyle/>
+                    <a:p>
+                      <a:pPr algn="ctr"/>
+                      <a:r>
+                        <a:rPr sz="1100" b="0">
+                          <a:solidFill>
+                            <a:srgbClr val="000000"/>
+                          </a:solidFill>
+                          <a:latin typeface="微软雅黑" panose="020B0503020204020204" charset="-122"/>
+                        </a:rPr>
+                        <a:t>集成测试用例文档；维护 controller 编号</a:t>
+                      </a:r>
+                      <a:r>
                         <a:rPr lang="zh-CN" sz="1100" b="0">
                           <a:solidFill>
                             <a:srgbClr val="000000"/>
                           </a:solidFill>
                           <a:latin typeface="微软雅黑" panose="020B0503020204020204" charset="-122"/>
                         </a:rPr>
-                        <a:t>任务分配；</a:t>
-                      </a:r>
-                      <a:r>
-                        <a:rPr sz="1100" b="0">
+                        <a:t>；</a:t>
+                      </a:r>
+                      <a:r>
+                        <a:rPr lang="zh-CN" sz="1100">
                           <a:solidFill>
                             <a:srgbClr val="000000"/>
                           </a:solidFill>
                           <a:latin typeface="微软雅黑" panose="020B0503020204020204" charset="-122"/>
-                        </a:rPr>
-                        <a:t>环境搭建；</a:t>
-                      </a:r>
-                      <a:r>
-                        <a:rPr lang="zh-CN" sz="1100" b="0">
+                          <a:sym typeface="+mn-ea"/>
+                        </a:rPr>
+                        <a:t>部分</a:t>
+                      </a:r>
+                      <a:r>
+                        <a:rPr sz="1100">
                           <a:solidFill>
                             <a:srgbClr val="000000"/>
                           </a:solidFill>
                           <a:latin typeface="微软雅黑" panose="020B0503020204020204" charset="-122"/>
-                        </a:rPr>
-                        <a:t>部分</a:t>
-                      </a:r>
-                      <a:r>
-                        <a:rPr sz="1100" b="0">
-                          <a:solidFill>
-                            <a:srgbClr val="000000"/>
-                          </a:solidFill>
-                          <a:latin typeface="微软雅黑" panose="020B0503020204020204" charset="-122"/>
+                          <a:sym typeface="+mn-ea"/>
                         </a:rPr>
                         <a:t>service 单测；</a:t>
-                      </a:r>
-                      <a:r>
-                        <a:rPr lang="zh-CN" sz="1100" b="0">
-                          <a:solidFill>
-                            <a:srgbClr val="000000"/>
-                          </a:solidFill>
-                          <a:latin typeface="微软雅黑" panose="020B0503020204020204" charset="-122"/>
-                        </a:rPr>
-                        <a:t>部分</a:t>
-                      </a:r>
-                      <a:r>
-                        <a:rPr sz="1100" b="0">
-                          <a:solidFill>
-                            <a:srgbClr val="000000"/>
-                          </a:solidFill>
-                          <a:latin typeface="微软雅黑" panose="020B0503020204020204" charset="-122"/>
-                        </a:rPr>
-                        <a:t>controller 集成测试；</a:t>
                       </a:r>
                       <a:endParaRPr sz="1100" b="0">
                         <a:solidFill>
@@ -18761,6 +18406,77 @@
                         <a:latin typeface="微软雅黑" panose="020B0503020204020204" charset="-122"/>
                       </a:endParaRPr>
                     </a:p>
+                    <a:p>
+                      <a:pPr algn="ctr"/>
+                      <a:endParaRPr lang="zh-CN" sz="1100" b="0">
+                        <a:solidFill>
+                          <a:srgbClr val="000000"/>
+                        </a:solidFill>
+                        <a:latin typeface="微软雅黑" panose="020B0503020204020204" charset="-122"/>
+                      </a:endParaRPr>
+                    </a:p>
+                  </a:txBody>
+                  <a:tcPr>
+                    <a:solidFill>
+                      <a:srgbClr val="F1F7EC"/>
+                    </a:solidFill>
+                  </a:tcPr>
+                </a:tc>
+                <a:tc>
+                  <a:txBody>
+                    <a:bodyPr/>
+                    <a:lstStyle/>
+                    <a:p>
+                      <a:pPr algn="ctr"/>
+                      <a:r>
+                        <a:rPr lang="en-US" sz="1100" b="0">
+                          <a:solidFill>
+                            <a:srgbClr val="000000"/>
+                          </a:solidFill>
+                          <a:latin typeface="微软雅黑" panose="020B0503020204020204" charset="-122"/>
+                        </a:rPr>
+                        <a:t>20</a:t>
+                      </a:r>
+                      <a:r>
+                        <a:rPr sz="1100" b="0">
+                          <a:solidFill>
+                            <a:srgbClr val="000000"/>
+                          </a:solidFill>
+                          <a:latin typeface="微软雅黑" panose="020B0503020204020204" charset="-122"/>
+                        </a:rPr>
+                        <a:t>%</a:t>
+                      </a:r>
+                    </a:p>
+                  </a:txBody>
+                  <a:tcPr>
+                    <a:solidFill>
+                      <a:srgbClr val="F1F7EC"/>
+                    </a:solidFill>
+                  </a:tcPr>
+                </a:tc>
+                <a:extLst>
+                  <a:ext uri="{0D108BD9-81ED-4DB2-BD59-A6C34878D82A}">
+                    <a16:rowId xmlns:a16="http://schemas.microsoft.com/office/drawing/2014/main" val="10004"/>
+                  </a:ext>
+                </a:extLst>
+              </a:tr>
+              <a:tr h="822960">
+                <a:tc>
+                  <a:txBody>
+                    <a:bodyPr/>
+                    <a:lstStyle/>
+                    <a:p>
+                      <a:pPr algn="ctr"/>
+                      <a:r>
+                        <a:rPr sz="1100" b="0">
+                          <a:solidFill>
+                            <a:srgbClr val="000000"/>
+                          </a:solidFill>
+                          <a:latin typeface="微软雅黑" panose="020B0503020204020204" charset="-122"/>
+                        </a:rPr>
+                        <a:t>5</a:t>
+                      </a:r>
+                    </a:p>
                   </a:txBody>
                   <a:tcPr>
                     <a:solidFill>
@@ -18775,14 +18491,28 @@
                     <a:p>
                       <a:pPr algn="ctr"/>
                       <a:r>
-                        <a:rPr lang="en-US" sz="1100" b="0">
+                        <a:rPr sz="1100" b="0">
                           <a:solidFill>
                             <a:srgbClr val="000000"/>
                           </a:solidFill>
                           <a:latin typeface="微软雅黑" panose="020B0503020204020204" charset="-122"/>
                         </a:rPr>
-                        <a:t>20</a:t>
-                      </a:r>
+                        <a:t>周宇尘</a:t>
+                      </a:r>
+                    </a:p>
+                  </a:txBody>
+                  <a:tcPr>
+                    <a:solidFill>
+                      <a:srgbClr val="DAECE2"/>
+                    </a:solidFill>
+                  </a:tcPr>
+                </a:tc>
+                <a:tc>
+                  <a:txBody>
+                    <a:bodyPr/>
+                    <a:lstStyle/>
+                    <a:p>
+                      <a:pPr algn="ctr"/>
                       <a:r>
                         <a:rPr sz="1100" b="0">
                           <a:solidFill>
@@ -18790,7 +18520,27 @@
                           </a:solidFill>
                           <a:latin typeface="微软雅黑" panose="020B0503020204020204" charset="-122"/>
                         </a:rPr>
-                        <a:t>%</a:t>
+                        <a:t>测试总结；结果汇总；</a:t>
+                      </a:r>
+                      <a:r>
+                        <a:rPr lang="zh-CN" sz="1100">
+                          <a:solidFill>
+                            <a:srgbClr val="000000"/>
+                          </a:solidFill>
+                          <a:latin typeface="微软雅黑" panose="020B0503020204020204" charset="-122"/>
+                          <a:sym typeface="+mn-ea"/>
+                        </a:rPr>
+                        <a:t>部分</a:t>
+                      </a:r>
+                      <a:r>
+                        <a:rPr sz="1100">
+                          <a:solidFill>
+                            <a:srgbClr val="000000"/>
+                          </a:solidFill>
+                          <a:latin typeface="微软雅黑" panose="020B0503020204020204" charset="-122"/>
+                          <a:sym typeface="+mn-ea"/>
+                        </a:rPr>
+                        <a:t>controller 集成测试；</a:t>
                       </a:r>
                       <a:endParaRPr sz="1100" b="0">
                         <a:solidFill>
@@ -18806,14 +18556,21 @@
                     </a:solidFill>
                   </a:tcPr>
                 </a:tc>
-              </a:tr>
-              <a:tr h="822960">
-                <a:tc>
-                  <a:txBody>
-                    <a:bodyPr/>
-                    <a:lstStyle/>
-                    <a:p>
-                      <a:pPr algn="ctr"/>
+                <a:tc>
+                  <a:txBody>
+                    <a:bodyPr/>
+                    <a:lstStyle/>
+                    <a:p>
+                      <a:pPr algn="ctr"/>
+                      <a:r>
+                        <a:rPr lang="en-US" sz="1100" b="0">
+                          <a:solidFill>
+                            <a:srgbClr val="000000"/>
+                          </a:solidFill>
+                          <a:latin typeface="微软雅黑" panose="020B0503020204020204" charset="-122"/>
+                        </a:rPr>
+                        <a:t>20</a:t>
+                      </a:r>
                       <a:r>
                         <a:rPr sz="1100" b="0">
                           <a:solidFill>
@@ -18821,161 +18578,8 @@
                           </a:solidFill>
                           <a:latin typeface="微软雅黑" panose="020B0503020204020204" charset="-122"/>
                         </a:rPr>
-                        <a:t>2</a:t>
-                      </a:r>
-                      <a:endParaRPr sz="1100" b="0">
-                        <a:solidFill>
-                          <a:srgbClr val="000000"/>
-                        </a:solidFill>
-                        <a:latin typeface="微软雅黑" panose="020B0503020204020204" charset="-122"/>
-                      </a:endParaRPr>
-                    </a:p>
-                  </a:txBody>
-                  <a:tcPr>
-                    <a:solidFill>
-                      <a:srgbClr val="F1F7EC"/>
-                    </a:solidFill>
-                  </a:tcPr>
-                </a:tc>
-                <a:tc>
-                  <a:txBody>
-                    <a:bodyPr/>
-                    <a:lstStyle/>
-                    <a:p>
-                      <a:pPr algn="ctr"/>
-                      <a:r>
-                        <a:rPr sz="1100" b="0">
-                          <a:solidFill>
-                            <a:srgbClr val="000000"/>
-                          </a:solidFill>
-                          <a:latin typeface="微软雅黑" panose="020B0503020204020204" charset="-122"/>
-                        </a:rPr>
-                        <a:t>沙华煜</a:t>
-                      </a:r>
-                      <a:endParaRPr sz="1100" b="0">
-                        <a:solidFill>
-                          <a:srgbClr val="000000"/>
-                        </a:solidFill>
-                        <a:latin typeface="微软雅黑" panose="020B0503020204020204" charset="-122"/>
-                      </a:endParaRPr>
-                    </a:p>
-                  </a:txBody>
-                  <a:tcPr>
-                    <a:solidFill>
-                      <a:srgbClr val="F1F7EC"/>
-                    </a:solidFill>
-                  </a:tcPr>
-                </a:tc>
-                <a:tc>
-                  <a:txBody>
-                    <a:bodyPr/>
-                    <a:lstStyle/>
-                    <a:p>
-                      <a:pPr algn="ctr"/>
-                      <a:r>
-                        <a:rPr sz="1100" b="0">
-                          <a:solidFill>
-                            <a:srgbClr val="000000"/>
-                          </a:solidFill>
-                          <a:latin typeface="微软雅黑" panose="020B0503020204020204" charset="-122"/>
-                        </a:rPr>
-                        <a:t>项目测试计划书；</a:t>
-                      </a:r>
-                      <a:r>
-                        <a:rPr lang="zh-CN" sz="1100">
-                          <a:solidFill>
-                            <a:srgbClr val="000000"/>
-                          </a:solidFill>
-                          <a:latin typeface="微软雅黑" panose="020B0503020204020204" charset="-122"/>
-                          <a:sym typeface="+mn-ea"/>
-                        </a:rPr>
-                        <a:t>部分</a:t>
-                      </a:r>
-                      <a:r>
-                        <a:rPr sz="1100">
-                          <a:solidFill>
-                            <a:srgbClr val="000000"/>
-                          </a:solidFill>
-                          <a:latin typeface="微软雅黑" panose="020B0503020204020204" charset="-122"/>
-                          <a:sym typeface="+mn-ea"/>
-                        </a:rPr>
-                        <a:t>service 单测；</a:t>
-                      </a:r>
-                      <a:endParaRPr sz="1100" b="0">
-                        <a:solidFill>
-                          <a:srgbClr val="000000"/>
-                        </a:solidFill>
-                        <a:latin typeface="微软雅黑" panose="020B0503020204020204" charset="-122"/>
-                      </a:endParaRPr>
-                    </a:p>
-                  </a:txBody>
-                  <a:tcPr>
-                    <a:solidFill>
-                      <a:srgbClr val="F1F7EC"/>
-                    </a:solidFill>
-                  </a:tcPr>
-                </a:tc>
-                <a:tc>
-                  <a:txBody>
-                    <a:bodyPr/>
-                    <a:lstStyle/>
-                    <a:p>
-                      <a:pPr algn="ctr"/>
-                      <a:r>
-                        <a:rPr lang="en-US" sz="1100" b="0">
-                          <a:solidFill>
-                            <a:srgbClr val="000000"/>
-                          </a:solidFill>
-                          <a:latin typeface="微软雅黑" panose="020B0503020204020204" charset="-122"/>
-                        </a:rPr>
-                        <a:t>20</a:t>
-                      </a:r>
-                      <a:r>
-                        <a:rPr sz="1100" b="0">
-                          <a:solidFill>
-                            <a:srgbClr val="000000"/>
-                          </a:solidFill>
-                          <a:latin typeface="微软雅黑" panose="020B0503020204020204" charset="-122"/>
-                        </a:rPr>
                         <a:t>%</a:t>
                       </a:r>
-                      <a:endParaRPr sz="1100" b="0">
-                        <a:solidFill>
-                          <a:srgbClr val="000000"/>
-                        </a:solidFill>
-                        <a:latin typeface="微软雅黑" panose="020B0503020204020204" charset="-122"/>
-                      </a:endParaRPr>
-                    </a:p>
-                  </a:txBody>
-                  <a:tcPr>
-                    <a:solidFill>
-                      <a:srgbClr val="F1F7EC"/>
-                    </a:solidFill>
-                  </a:tcPr>
-                </a:tc>
-              </a:tr>
-              <a:tr h="822960">
-                <a:tc>
-                  <a:txBody>
-                    <a:bodyPr/>
-                    <a:lstStyle/>
-                    <a:p>
-                      <a:pPr algn="ctr"/>
-                      <a:r>
-                        <a:rPr sz="1100" b="0">
-                          <a:solidFill>
-                            <a:srgbClr val="000000"/>
-                          </a:solidFill>
-                          <a:latin typeface="微软雅黑" panose="020B0503020204020204" charset="-122"/>
-                        </a:rPr>
-                        <a:t>3</a:t>
-                      </a:r>
-                      <a:endParaRPr sz="1100" b="0">
-                        <a:solidFill>
-                          <a:srgbClr val="000000"/>
-                        </a:solidFill>
-                        <a:latin typeface="微软雅黑" panose="020B0503020204020204" charset="-122"/>
-                      </a:endParaRPr>
                     </a:p>
                   </a:txBody>
                   <a:tcPr>
@@ -18984,434 +18588,11 @@
                     </a:solidFill>
                   </a:tcPr>
                 </a:tc>
-                <a:tc>
-                  <a:txBody>
-                    <a:bodyPr/>
-                    <a:lstStyle/>
-                    <a:p>
-                      <a:pPr algn="ctr"/>
-                      <a:r>
-                        <a:rPr sz="1100" b="0">
-                          <a:solidFill>
-                            <a:srgbClr val="000000"/>
-                          </a:solidFill>
-                          <a:latin typeface="微软雅黑" panose="020B0503020204020204" charset="-122"/>
-                        </a:rPr>
-                        <a:t>彭祈元</a:t>
-                      </a:r>
-                      <a:endParaRPr sz="1100" b="0">
-                        <a:solidFill>
-                          <a:srgbClr val="000000"/>
-                        </a:solidFill>
-                        <a:latin typeface="微软雅黑" panose="020B0503020204020204" charset="-122"/>
-                      </a:endParaRPr>
-                    </a:p>
-                  </a:txBody>
-                  <a:tcPr>
-                    <a:solidFill>
-                      <a:srgbClr val="DAECE2"/>
-                    </a:solidFill>
-                  </a:tcPr>
-                </a:tc>
-                <a:tc>
-                  <a:txBody>
-                    <a:bodyPr/>
-                    <a:lstStyle/>
-                    <a:p>
-                      <a:pPr algn="ctr"/>
-                      <a:r>
-                        <a:rPr sz="1100" b="0">
-                          <a:solidFill>
-                            <a:srgbClr val="000000"/>
-                          </a:solidFill>
-                          <a:latin typeface="微软雅黑" panose="020B0503020204020204" charset="-122"/>
-                        </a:rPr>
-                        <a:t>单元测试用例文档；</a:t>
-                      </a:r>
-                      <a:r>
-                        <a:rPr lang="zh-CN" sz="1100">
-                          <a:solidFill>
-                            <a:srgbClr val="000000"/>
-                          </a:solidFill>
-                          <a:latin typeface="微软雅黑" panose="020B0503020204020204" charset="-122"/>
-                          <a:sym typeface="+mn-ea"/>
-                        </a:rPr>
-                        <a:t>部分</a:t>
-                      </a:r>
-                      <a:r>
-                        <a:rPr sz="1100">
-                          <a:solidFill>
-                            <a:srgbClr val="000000"/>
-                          </a:solidFill>
-                          <a:latin typeface="微软雅黑" panose="020B0503020204020204" charset="-122"/>
-                          <a:sym typeface="+mn-ea"/>
-                        </a:rPr>
-                        <a:t>controller 集成测试；</a:t>
-                      </a:r>
-                      <a:endParaRPr sz="1100" b="0">
-                        <a:solidFill>
-                          <a:srgbClr val="000000"/>
-                        </a:solidFill>
-                        <a:latin typeface="微软雅黑" panose="020B0503020204020204" charset="-122"/>
-                      </a:endParaRPr>
-                    </a:p>
-                  </a:txBody>
-                  <a:tcPr>
-                    <a:solidFill>
-                      <a:srgbClr val="DAECE2"/>
-                    </a:solidFill>
-                  </a:tcPr>
-                </a:tc>
-                <a:tc>
-                  <a:txBody>
-                    <a:bodyPr/>
-                    <a:lstStyle/>
-                    <a:p>
-                      <a:pPr algn="ctr"/>
-                      <a:r>
-                        <a:rPr lang="en-US" sz="1100" b="0">
-                          <a:solidFill>
-                            <a:srgbClr val="000000"/>
-                          </a:solidFill>
-                          <a:latin typeface="微软雅黑" panose="020B0503020204020204" charset="-122"/>
-                        </a:rPr>
-                        <a:t>20</a:t>
-                      </a:r>
-                      <a:r>
-                        <a:rPr sz="1100" b="0">
-                          <a:solidFill>
-                            <a:srgbClr val="000000"/>
-                          </a:solidFill>
-                          <a:latin typeface="微软雅黑" panose="020B0503020204020204" charset="-122"/>
-                        </a:rPr>
-                        <a:t>%</a:t>
-                      </a:r>
-                      <a:endParaRPr sz="1100" b="0">
-                        <a:solidFill>
-                          <a:srgbClr val="000000"/>
-                        </a:solidFill>
-                        <a:latin typeface="微软雅黑" panose="020B0503020204020204" charset="-122"/>
-                      </a:endParaRPr>
-                    </a:p>
-                  </a:txBody>
-                  <a:tcPr>
-                    <a:solidFill>
-                      <a:srgbClr val="DAECE2"/>
-                    </a:solidFill>
-                  </a:tcPr>
-                </a:tc>
-              </a:tr>
-              <a:tr h="822960">
-                <a:tc>
-                  <a:txBody>
-                    <a:bodyPr/>
-                    <a:lstStyle/>
-                    <a:p>
-                      <a:pPr algn="ctr"/>
-                      <a:r>
-                        <a:rPr sz="1100" b="0">
-                          <a:solidFill>
-                            <a:srgbClr val="000000"/>
-                          </a:solidFill>
-                          <a:latin typeface="微软雅黑" panose="020B0503020204020204" charset="-122"/>
-                        </a:rPr>
-                        <a:t>4</a:t>
-                      </a:r>
-                      <a:endParaRPr sz="1100" b="0">
-                        <a:solidFill>
-                          <a:srgbClr val="000000"/>
-                        </a:solidFill>
-                        <a:latin typeface="微软雅黑" panose="020B0503020204020204" charset="-122"/>
-                      </a:endParaRPr>
-                    </a:p>
-                  </a:txBody>
-                  <a:tcPr>
-                    <a:solidFill>
-                      <a:srgbClr val="F1F7EC"/>
-                    </a:solidFill>
-                  </a:tcPr>
-                </a:tc>
-                <a:tc>
-                  <a:txBody>
-                    <a:bodyPr/>
-                    <a:lstStyle/>
-                    <a:p>
-                      <a:pPr algn="ctr"/>
-                      <a:r>
-                        <a:rPr sz="1100" b="0">
-                          <a:solidFill>
-                            <a:srgbClr val="000000"/>
-                          </a:solidFill>
-                          <a:latin typeface="微软雅黑" panose="020B0503020204020204" charset="-122"/>
-                        </a:rPr>
-                        <a:t>郭政颖</a:t>
-                      </a:r>
-                      <a:endParaRPr sz="1100" b="0">
-                        <a:solidFill>
-                          <a:srgbClr val="000000"/>
-                        </a:solidFill>
-                        <a:latin typeface="微软雅黑" panose="020B0503020204020204" charset="-122"/>
-                      </a:endParaRPr>
-                    </a:p>
-                  </a:txBody>
-                  <a:tcPr>
-                    <a:solidFill>
-                      <a:srgbClr val="F1F7EC"/>
-                    </a:solidFill>
-                  </a:tcPr>
-                </a:tc>
-                <a:tc>
-                  <a:txBody>
-                    <a:bodyPr/>
-                    <a:lstStyle/>
-                    <a:p>
-                      <a:pPr algn="ctr"/>
-                      <a:r>
-                        <a:rPr sz="1100" b="0">
-                          <a:solidFill>
-                            <a:srgbClr val="000000"/>
-                          </a:solidFill>
-                          <a:latin typeface="微软雅黑" panose="020B0503020204020204" charset="-122"/>
-                        </a:rPr>
-                        <a:t>集成测试用例文档；维护 controller 编号</a:t>
-                      </a:r>
-                      <a:r>
-                        <a:rPr lang="zh-CN" sz="1100" b="0">
-                          <a:solidFill>
-                            <a:srgbClr val="000000"/>
-                          </a:solidFill>
-                          <a:latin typeface="微软雅黑" panose="020B0503020204020204" charset="-122"/>
-                        </a:rPr>
-                        <a:t>；</a:t>
-                      </a:r>
-                      <a:r>
-                        <a:rPr lang="zh-CN" sz="1100">
-                          <a:solidFill>
-                            <a:srgbClr val="000000"/>
-                          </a:solidFill>
-                          <a:latin typeface="微软雅黑" panose="020B0503020204020204" charset="-122"/>
-                          <a:sym typeface="+mn-ea"/>
-                        </a:rPr>
-                        <a:t>部分</a:t>
-                      </a:r>
-                      <a:r>
-                        <a:rPr sz="1100">
-                          <a:solidFill>
-                            <a:srgbClr val="000000"/>
-                          </a:solidFill>
-                          <a:latin typeface="微软雅黑" panose="020B0503020204020204" charset="-122"/>
-                          <a:sym typeface="+mn-ea"/>
-                        </a:rPr>
-                        <a:t>service 单测；</a:t>
-                      </a:r>
-                      <a:endParaRPr sz="1100" b="0">
-                        <a:solidFill>
-                          <a:srgbClr val="000000"/>
-                        </a:solidFill>
-                        <a:latin typeface="微软雅黑" panose="020B0503020204020204" charset="-122"/>
-                      </a:endParaRPr>
-                    </a:p>
-                    <a:p>
-                      <a:pPr algn="ctr"/>
-                      <a:endParaRPr lang="zh-CN" sz="1100" b="0">
-                        <a:solidFill>
-                          <a:srgbClr val="000000"/>
-                        </a:solidFill>
-                        <a:latin typeface="微软雅黑" panose="020B0503020204020204" charset="-122"/>
-                      </a:endParaRPr>
-                    </a:p>
-                  </a:txBody>
-                  <a:tcPr>
-                    <a:solidFill>
-                      <a:srgbClr val="F1F7EC"/>
-                    </a:solidFill>
-                  </a:tcPr>
-                </a:tc>
-                <a:tc>
-                  <a:txBody>
-                    <a:bodyPr/>
-                    <a:lstStyle/>
-                    <a:p>
-                      <a:pPr algn="ctr"/>
-                      <a:r>
-                        <a:rPr lang="en-US" sz="1100" b="0">
-                          <a:solidFill>
-                            <a:srgbClr val="000000"/>
-                          </a:solidFill>
-                          <a:latin typeface="微软雅黑" panose="020B0503020204020204" charset="-122"/>
-                        </a:rPr>
-                        <a:t>20</a:t>
-                      </a:r>
-                      <a:r>
-                        <a:rPr sz="1100" b="0">
-                          <a:solidFill>
-                            <a:srgbClr val="000000"/>
-                          </a:solidFill>
-                          <a:latin typeface="微软雅黑" panose="020B0503020204020204" charset="-122"/>
-                        </a:rPr>
-                        <a:t>%</a:t>
-                      </a:r>
-                      <a:endParaRPr sz="1100" b="0">
-                        <a:solidFill>
-                          <a:srgbClr val="000000"/>
-                        </a:solidFill>
-                        <a:latin typeface="微软雅黑" panose="020B0503020204020204" charset="-122"/>
-                      </a:endParaRPr>
-                    </a:p>
-                  </a:txBody>
-                  <a:tcPr>
-                    <a:solidFill>
-                      <a:srgbClr val="F1F7EC"/>
-                    </a:solidFill>
-                  </a:tcPr>
-                </a:tc>
-              </a:tr>
-              <a:tr h="822960">
-                <a:tc>
-                  <a:txBody>
-                    <a:bodyPr/>
-                    <a:lstStyle/>
-                    <a:p>
-                      <a:pPr algn="ctr"/>
-                      <a:r>
-                        <a:rPr sz="1100" b="0">
-                          <a:solidFill>
-                            <a:srgbClr val="000000"/>
-                          </a:solidFill>
-                          <a:latin typeface="微软雅黑" panose="020B0503020204020204" charset="-122"/>
-                        </a:rPr>
-                        <a:t>5</a:t>
-                      </a:r>
-                      <a:endParaRPr sz="1100" b="0">
-                        <a:solidFill>
-                          <a:srgbClr val="000000"/>
-                        </a:solidFill>
-                        <a:latin typeface="微软雅黑" panose="020B0503020204020204" charset="-122"/>
-                      </a:endParaRPr>
-                    </a:p>
-                  </a:txBody>
-                  <a:tcPr>
-                    <a:solidFill>
-                      <a:srgbClr val="DAECE2"/>
-                    </a:solidFill>
-                  </a:tcPr>
-                </a:tc>
-                <a:tc>
-                  <a:txBody>
-                    <a:bodyPr/>
-                    <a:lstStyle/>
-                    <a:p>
-                      <a:pPr algn="ctr"/>
-                      <a:r>
-                        <a:rPr sz="1100" b="0">
-                          <a:solidFill>
-                            <a:srgbClr val="000000"/>
-                          </a:solidFill>
-                          <a:latin typeface="微软雅黑" panose="020B0503020204020204" charset="-122"/>
-                        </a:rPr>
-                        <a:t>周宇尘</a:t>
-                      </a:r>
-                      <a:endParaRPr sz="1100" b="0">
-                        <a:solidFill>
-                          <a:srgbClr val="000000"/>
-                        </a:solidFill>
-                        <a:latin typeface="微软雅黑" panose="020B0503020204020204" charset="-122"/>
-                      </a:endParaRPr>
-                    </a:p>
-                  </a:txBody>
-                  <a:tcPr>
-                    <a:solidFill>
-                      <a:srgbClr val="DAECE2"/>
-                    </a:solidFill>
-                  </a:tcPr>
-                </a:tc>
-                <a:tc>
-                  <a:txBody>
-                    <a:bodyPr/>
-                    <a:lstStyle/>
-                    <a:p>
-                      <a:pPr algn="ctr"/>
-                      <a:r>
-                        <a:rPr sz="1100" b="0">
-                          <a:solidFill>
-                            <a:srgbClr val="000000"/>
-                          </a:solidFill>
-                          <a:latin typeface="微软雅黑" panose="020B0503020204020204" charset="-122"/>
-                        </a:rPr>
-                        <a:t>测试总结；结果汇总；</a:t>
-                      </a:r>
-                      <a:r>
-                        <a:rPr lang="zh-CN" sz="1100">
-                          <a:solidFill>
-                            <a:srgbClr val="000000"/>
-                          </a:solidFill>
-                          <a:latin typeface="微软雅黑" panose="020B0503020204020204" charset="-122"/>
-                          <a:sym typeface="+mn-ea"/>
-                        </a:rPr>
-                        <a:t>部分</a:t>
-                      </a:r>
-                      <a:r>
-                        <a:rPr sz="1100">
-                          <a:solidFill>
-                            <a:srgbClr val="000000"/>
-                          </a:solidFill>
-                          <a:latin typeface="微软雅黑" panose="020B0503020204020204" charset="-122"/>
-                          <a:sym typeface="+mn-ea"/>
-                        </a:rPr>
-                        <a:t>controller 集成测试；</a:t>
-                      </a:r>
-                      <a:endParaRPr sz="1100" b="0">
-                        <a:solidFill>
-                          <a:srgbClr val="000000"/>
-                        </a:solidFill>
-                        <a:latin typeface="微软雅黑" panose="020B0503020204020204" charset="-122"/>
-                      </a:endParaRPr>
-                    </a:p>
-                  </a:txBody>
-                  <a:tcPr>
-                    <a:solidFill>
-                      <a:srgbClr val="DAECE2"/>
-                    </a:solidFill>
-                  </a:tcPr>
-                </a:tc>
-                <a:tc>
-                  <a:txBody>
-                    <a:bodyPr/>
-                    <a:lstStyle/>
-                    <a:p>
-                      <a:pPr algn="ctr"/>
-                      <a:r>
-                        <a:rPr lang="en-US" sz="1100" b="0">
-                          <a:solidFill>
-                            <a:srgbClr val="000000"/>
-                          </a:solidFill>
-                          <a:latin typeface="微软雅黑" panose="020B0503020204020204" charset="-122"/>
-                        </a:rPr>
-                        <a:t>20</a:t>
-                      </a:r>
-                      <a:r>
-                        <a:rPr sz="1100" b="0">
-                          <a:solidFill>
-                            <a:srgbClr val="000000"/>
-                          </a:solidFill>
-                          <a:latin typeface="微软雅黑" panose="020B0503020204020204" charset="-122"/>
-                        </a:rPr>
-                        <a:t>%</a:t>
-                      </a:r>
-                      <a:endParaRPr sz="1100" b="0">
-                        <a:solidFill>
-                          <a:srgbClr val="000000"/>
-                        </a:solidFill>
-                        <a:latin typeface="微软雅黑" panose="020B0503020204020204" charset="-122"/>
-                      </a:endParaRPr>
-                    </a:p>
-                  </a:txBody>
-                  <a:tcPr>
-                    <a:solidFill>
-                      <a:srgbClr val="DAECE2"/>
-                    </a:solidFill>
-                  </a:tcPr>
-                </a:tc>
+                <a:extLst>
+                  <a:ext uri="{0D108BD9-81ED-4DB2-BD59-A6C34878D82A}">
+                    <a16:rowId xmlns:a16="http://schemas.microsoft.com/office/drawing/2014/main" val="10005"/>
+                  </a:ext>
+                </a:extLst>
               </a:tr>
             </a:tbl>
           </a:graphicData>
@@ -19434,7 +18615,14 @@
         <p:cNvGrpSpPr/>
         <p:nvPr/>
       </p:nvGrpSpPr>
-      <p:grpSpPr/>
+      <p:grpSpPr>
+        <a:xfrm>
+          <a:off x="0" y="0"/>
+          <a:ext cx="0" cy="0"/>
+          <a:chOff x="0" y="0"/>
+          <a:chExt cx="0" cy="0"/>
+        </a:xfrm>
+      </p:grpSpPr>
       <p:sp>
         <p:nvSpPr>
           <p:cNvPr id="2" name="Rectangle 1"/>
@@ -19475,6 +18663,7 @@
           <a:lstStyle/>
           <a:p>
             <a:pPr algn="ctr"/>
+            <a:endParaRPr/>
           </a:p>
         </p:txBody>
       </p:sp>
@@ -19518,6 +18707,7 @@
           <a:lstStyle/>
           <a:p>
             <a:pPr algn="ctr"/>
+            <a:endParaRPr/>
           </a:p>
         </p:txBody>
       </p:sp>
@@ -19561,6 +18751,7 @@
           <a:lstStyle/>
           <a:p>
             <a:pPr algn="ctr"/>
+            <a:endParaRPr/>
           </a:p>
         </p:txBody>
       </p:sp>
@@ -19604,6 +18795,7 @@
           <a:lstStyle/>
           <a:p>
             <a:pPr algn="ctr"/>
+            <a:endParaRPr/>
           </a:p>
         </p:txBody>
       </p:sp>
@@ -19647,6 +18839,7 @@
           <a:lstStyle/>
           <a:p>
             <a:pPr algn="ctr"/>
+            <a:endParaRPr/>
           </a:p>
         </p:txBody>
       </p:sp>
@@ -19690,6 +18883,7 @@
           <a:lstStyle/>
           <a:p>
             <a:pPr algn="ctr"/>
+            <a:endParaRPr/>
           </a:p>
         </p:txBody>
       </p:sp>
@@ -19733,6 +18927,7 @@
           <a:lstStyle/>
           <a:p>
             <a:pPr algn="ctr"/>
+            <a:endParaRPr/>
           </a:p>
         </p:txBody>
       </p:sp>
@@ -19767,12 +18962,6 @@
               </a:rPr>
               <a:t>时间安排</a:t>
             </a:r>
-            <a:endParaRPr sz="3000" b="1">
-              <a:solidFill>
-                <a:srgbClr val="000000"/>
-              </a:solidFill>
-              <a:latin typeface="微软雅黑" panose="020B0503020204020204" charset="-122"/>
-            </a:endParaRPr>
           </a:p>
         </p:txBody>
       </p:sp>
@@ -19795,9 +18984,27 @@
                 <a:tableStyleId>{5C22544A-7EE6-4342-B048-85BDC9FD1C3A}</a:tableStyleId>
               </a:tblPr>
               <a:tblGrid>
-                <a:gridCol w="3657600"/>
-                <a:gridCol w="3657600"/>
-                <a:gridCol w="3657600"/>
+                <a:gridCol w="3657600">
+                  <a:extLst>
+                    <a:ext uri="{9D8B030D-6E8A-4147-A177-3AD203B41FA5}">
+                      <a16:colId xmlns:a16="http://schemas.microsoft.com/office/drawing/2014/main" val="20000"/>
+                    </a:ext>
+                  </a:extLst>
+                </a:gridCol>
+                <a:gridCol w="3657600">
+                  <a:extLst>
+                    <a:ext uri="{9D8B030D-6E8A-4147-A177-3AD203B41FA5}">
+                      <a16:colId xmlns:a16="http://schemas.microsoft.com/office/drawing/2014/main" val="20001"/>
+                    </a:ext>
+                  </a:extLst>
+                </a:gridCol>
+                <a:gridCol w="3657600">
+                  <a:extLst>
+                    <a:ext uri="{9D8B030D-6E8A-4147-A177-3AD203B41FA5}">
+                      <a16:colId xmlns:a16="http://schemas.microsoft.com/office/drawing/2014/main" val="20002"/>
+                    </a:ext>
+                  </a:extLst>
+                </a:gridCol>
               </a:tblGrid>
               <a:tr h="723900">
                 <a:tc>
@@ -19815,12 +19022,6 @@
                         </a:rPr>
                         <a:t>日期</a:t>
                       </a:r>
-                      <a:endParaRPr sz="1400" b="1">
-                        <a:solidFill>
-                          <a:srgbClr val="FFFFFF"/>
-                        </a:solidFill>
-                        <a:latin typeface="微软雅黑" panose="020B0503020204020204" charset="-122"/>
-                      </a:endParaRPr>
                     </a:p>
                   </a:txBody>
                   <a:tcPr>
@@ -19844,12 +19045,6 @@
                         </a:rPr>
                         <a:t>任务安排</a:t>
                       </a:r>
-                      <a:endParaRPr sz="1400" b="1">
-                        <a:solidFill>
-                          <a:srgbClr val="FFFFFF"/>
-                        </a:solidFill>
-                        <a:latin typeface="微软雅黑" panose="020B0503020204020204" charset="-122"/>
-                      </a:endParaRPr>
                     </a:p>
                   </a:txBody>
                   <a:tcPr>
@@ -19873,12 +19068,6 @@
                         </a:rPr>
                         <a:t>输出成果</a:t>
                       </a:r>
-                      <a:endParaRPr sz="1400" b="1">
-                        <a:solidFill>
-                          <a:srgbClr val="FFFFFF"/>
-                        </a:solidFill>
-                        <a:latin typeface="微软雅黑" panose="020B0503020204020204" charset="-122"/>
-                      </a:endParaRPr>
                     </a:p>
                   </a:txBody>
                   <a:tcPr>
@@ -19887,6 +19076,11 @@
                     </a:solidFill>
                   </a:tcPr>
                 </a:tc>
+                <a:extLst>
+                  <a:ext uri="{0D108BD9-81ED-4DB2-BD59-A6C34878D82A}">
+                    <a16:rowId xmlns:a16="http://schemas.microsoft.com/office/drawing/2014/main" val="10000"/>
+                  </a:ext>
+                </a:extLst>
               </a:tr>
               <a:tr h="723900">
                 <a:tc>
@@ -19904,12 +19098,6 @@
                         </a:rPr>
                         <a:t>04.06-04.12</a:t>
                       </a:r>
-                      <a:endParaRPr sz="1300" b="0">
-                        <a:solidFill>
-                          <a:srgbClr val="000000"/>
-                        </a:solidFill>
-                        <a:latin typeface="微软雅黑" panose="020B0503020204020204" charset="-122"/>
-                      </a:endParaRPr>
                     </a:p>
                   </a:txBody>
                   <a:tcPr>
@@ -19933,12 +19121,6 @@
                         </a:rPr>
                         <a:t>service 单元测试编写</a:t>
                       </a:r>
-                      <a:endParaRPr sz="1300" b="0">
-                        <a:solidFill>
-                          <a:srgbClr val="000000"/>
-                        </a:solidFill>
-                        <a:latin typeface="微软雅黑" panose="020B0503020204020204" charset="-122"/>
-                      </a:endParaRPr>
                     </a:p>
                   </a:txBody>
                   <a:tcPr>
@@ -19962,12 +19144,6 @@
                         </a:rPr>
                         <a:t>7 个 service 测试类</a:t>
                       </a:r>
-                      <a:endParaRPr sz="1300" b="0">
-                        <a:solidFill>
-                          <a:srgbClr val="000000"/>
-                        </a:solidFill>
-                        <a:latin typeface="微软雅黑" panose="020B0503020204020204" charset="-122"/>
-                      </a:endParaRPr>
                     </a:p>
                   </a:txBody>
                   <a:tcPr>
@@ -19976,6 +19152,11 @@
                     </a:solidFill>
                   </a:tcPr>
                 </a:tc>
+                <a:extLst>
+                  <a:ext uri="{0D108BD9-81ED-4DB2-BD59-A6C34878D82A}">
+                    <a16:rowId xmlns:a16="http://schemas.microsoft.com/office/drawing/2014/main" val="10001"/>
+                  </a:ext>
+                </a:extLst>
               </a:tr>
               <a:tr h="723900">
                 <a:tc>
@@ -19993,12 +19174,6 @@
                         </a:rPr>
                         <a:t>04.10-04.16</a:t>
                       </a:r>
-                      <a:endParaRPr sz="1300" b="0">
-                        <a:solidFill>
-                          <a:srgbClr val="000000"/>
-                        </a:solidFill>
-                        <a:latin typeface="微软雅黑" panose="020B0503020204020204" charset="-122"/>
-                      </a:endParaRPr>
                     </a:p>
                   </a:txBody>
                   <a:tcPr>
@@ -20022,12 +19197,6 @@
                         </a:rPr>
                         <a:t>controller 集成测试编写</a:t>
                       </a:r>
-                      <a:endParaRPr sz="1300" b="0">
-                        <a:solidFill>
-                          <a:srgbClr val="000000"/>
-                        </a:solidFill>
-                        <a:latin typeface="微软雅黑" panose="020B0503020204020204" charset="-122"/>
-                      </a:endParaRPr>
                     </a:p>
                   </a:txBody>
                   <a:tcPr>
@@ -20051,12 +19220,6 @@
                         </a:rPr>
                         <a:t>8 个集成测试脚本</a:t>
                       </a:r>
-                      <a:endParaRPr sz="1300" b="0">
-                        <a:solidFill>
-                          <a:srgbClr val="000000"/>
-                        </a:solidFill>
-                        <a:latin typeface="微软雅黑" panose="020B0503020204020204" charset="-122"/>
-                      </a:endParaRPr>
                     </a:p>
                   </a:txBody>
                   <a:tcPr>
@@ -20065,6 +19228,11 @@
                     </a:solidFill>
                   </a:tcPr>
                 </a:tc>
+                <a:extLst>
+                  <a:ext uri="{0D108BD9-81ED-4DB2-BD59-A6C34878D82A}">
+                    <a16:rowId xmlns:a16="http://schemas.microsoft.com/office/drawing/2014/main" val="10002"/>
+                  </a:ext>
+                </a:extLst>
               </a:tr>
               <a:tr h="723900">
                 <a:tc>
@@ -20082,12 +19250,6 @@
                         </a:rPr>
                         <a:t>04.17-04.18</a:t>
                       </a:r>
-                      <a:endParaRPr sz="1300" b="0">
-                        <a:solidFill>
-                          <a:srgbClr val="000000"/>
-                        </a:solidFill>
-                        <a:latin typeface="微软雅黑" panose="020B0503020204020204" charset="-122"/>
-                      </a:endParaRPr>
                     </a:p>
                   </a:txBody>
                   <a:tcPr>
@@ -20111,12 +19273,6 @@
                         </a:rPr>
                         <a:t>全量 mvn test 与覆盖率收集</a:t>
                       </a:r>
-                      <a:endParaRPr sz="1300" b="0">
-                        <a:solidFill>
-                          <a:srgbClr val="000000"/>
-                        </a:solidFill>
-                        <a:latin typeface="微软雅黑" panose="020B0503020204020204" charset="-122"/>
-                      </a:endParaRPr>
                     </a:p>
                   </a:txBody>
                   <a:tcPr>
@@ -20140,12 +19296,6 @@
                         </a:rPr>
                         <a:t>JaCoCo + Surefire 报告</a:t>
                       </a:r>
-                      <a:endParaRPr sz="1300" b="0">
-                        <a:solidFill>
-                          <a:srgbClr val="000000"/>
-                        </a:solidFill>
-                        <a:latin typeface="微软雅黑" panose="020B0503020204020204" charset="-122"/>
-                      </a:endParaRPr>
                     </a:p>
                   </a:txBody>
                   <a:tcPr>
@@ -20154,6 +19304,11 @@
                     </a:solidFill>
                   </a:tcPr>
                 </a:tc>
+                <a:extLst>
+                  <a:ext uri="{0D108BD9-81ED-4DB2-BD59-A6C34878D82A}">
+                    <a16:rowId xmlns:a16="http://schemas.microsoft.com/office/drawing/2014/main" val="10003"/>
+                  </a:ext>
+                </a:extLst>
               </a:tr>
               <a:tr h="723900">
                 <a:tc>
@@ -20171,12 +19326,6 @@
                         </a:rPr>
                         <a:t>04.19-04.22</a:t>
                       </a:r>
-                      <a:endParaRPr sz="1300" b="0">
-                        <a:solidFill>
-                          <a:srgbClr val="000000"/>
-                        </a:solidFill>
-                        <a:latin typeface="微软雅黑" panose="020B0503020204020204" charset="-122"/>
-                      </a:endParaRPr>
                     </a:p>
                   </a:txBody>
                   <a:tcPr>
@@ -20200,12 +19349,6 @@
                         </a:rPr>
                         <a:t>测试计划、用例文档、总结对齐</a:t>
                       </a:r>
-                      <a:endParaRPr sz="1300" b="0">
-                        <a:solidFill>
-                          <a:srgbClr val="000000"/>
-                        </a:solidFill>
-                        <a:latin typeface="微软雅黑" panose="020B0503020204020204" charset="-122"/>
-                      </a:endParaRPr>
                     </a:p>
                   </a:txBody>
                   <a:tcPr>
@@ -20229,12 +19372,6 @@
                         </a:rPr>
                         <a:t>三份课程文档</a:t>
                       </a:r>
-                      <a:endParaRPr sz="1300" b="0">
-                        <a:solidFill>
-                          <a:srgbClr val="000000"/>
-                        </a:solidFill>
-                        <a:latin typeface="微软雅黑" panose="020B0503020204020204" charset="-122"/>
-                      </a:endParaRPr>
                     </a:p>
                   </a:txBody>
                   <a:tcPr>
@@ -20243,6 +19380,11 @@
                     </a:solidFill>
                   </a:tcPr>
                 </a:tc>
+                <a:extLst>
+                  <a:ext uri="{0D108BD9-81ED-4DB2-BD59-A6C34878D82A}">
+                    <a16:rowId xmlns:a16="http://schemas.microsoft.com/office/drawing/2014/main" val="10004"/>
+                  </a:ext>
+                </a:extLst>
               </a:tr>
               <a:tr h="723900">
                 <a:tc>
@@ -20260,12 +19402,6 @@
                         </a:rPr>
                         <a:t>04.23-04.26</a:t>
                       </a:r>
-                      <a:endParaRPr sz="1300" b="0">
-                        <a:solidFill>
-                          <a:srgbClr val="000000"/>
-                        </a:solidFill>
-                        <a:latin typeface="微软雅黑" panose="020B0503020204020204" charset="-122"/>
-                      </a:endParaRPr>
                     </a:p>
                   </a:txBody>
                   <a:tcPr>
@@ -20289,12 +19425,6 @@
                         </a:rPr>
                         <a:t>PPT 汇报与提交包整理</a:t>
                       </a:r>
-                      <a:endParaRPr sz="1300" b="0">
-                        <a:solidFill>
-                          <a:srgbClr val="000000"/>
-                        </a:solidFill>
-                        <a:latin typeface="微软雅黑" panose="020B0503020204020204" charset="-122"/>
-                      </a:endParaRPr>
                     </a:p>
                   </a:txBody>
                   <a:tcPr>
@@ -20318,12 +19448,6 @@
                         </a:rPr>
                         <a:t>PDF + 源码压缩包</a:t>
                       </a:r>
-                      <a:endParaRPr sz="1300" b="0">
-                        <a:solidFill>
-                          <a:srgbClr val="000000"/>
-                        </a:solidFill>
-                        <a:latin typeface="微软雅黑" panose="020B0503020204020204" charset="-122"/>
-                      </a:endParaRPr>
                     </a:p>
                   </a:txBody>
                   <a:tcPr>
@@ -20332,6 +19456,11 @@
                     </a:solidFill>
                   </a:tcPr>
                 </a:tc>
+                <a:extLst>
+                  <a:ext uri="{0D108BD9-81ED-4DB2-BD59-A6C34878D82A}">
+                    <a16:rowId xmlns:a16="http://schemas.microsoft.com/office/drawing/2014/main" val="10005"/>
+                  </a:ext>
+                </a:extLst>
               </a:tr>
             </a:tbl>
           </a:graphicData>
@@ -20354,7 +19483,14 @@
         <p:cNvGrpSpPr/>
         <p:nvPr/>
       </p:nvGrpSpPr>
-      <p:grpSpPr/>
+      <p:grpSpPr>
+        <a:xfrm>
+          <a:off x="0" y="0"/>
+          <a:ext cx="0" cy="0"/>
+          <a:chOff x="0" y="0"/>
+          <a:chExt cx="0" cy="0"/>
+        </a:xfrm>
+      </p:grpSpPr>
       <p:sp>
         <p:nvSpPr>
           <p:cNvPr id="2" name="Rectangle 1"/>
@@ -20395,6 +19531,7 @@
           <a:lstStyle/>
           <a:p>
             <a:pPr algn="ctr"/>
+            <a:endParaRPr/>
           </a:p>
         </p:txBody>
       </p:sp>
@@ -20438,6 +19575,7 @@
           <a:lstStyle/>
           <a:p>
             <a:pPr algn="ctr"/>
+            <a:endParaRPr/>
           </a:p>
         </p:txBody>
       </p:sp>
@@ -20481,6 +19619,7 @@
           <a:lstStyle/>
           <a:p>
             <a:pPr algn="ctr"/>
+            <a:endParaRPr/>
           </a:p>
         </p:txBody>
       </p:sp>
@@ -20524,6 +19663,7 @@
           <a:lstStyle/>
           <a:p>
             <a:pPr algn="ctr"/>
+            <a:endParaRPr/>
           </a:p>
         </p:txBody>
       </p:sp>
@@ -20567,6 +19707,7 @@
           <a:lstStyle/>
           <a:p>
             <a:pPr algn="ctr"/>
+            <a:endParaRPr/>
           </a:p>
         </p:txBody>
       </p:sp>
@@ -20610,6 +19751,7 @@
           <a:lstStyle/>
           <a:p>
             <a:pPr algn="ctr"/>
+            <a:endParaRPr/>
           </a:p>
         </p:txBody>
       </p:sp>
@@ -20653,6 +19795,7 @@
           <a:lstStyle/>
           <a:p>
             <a:pPr algn="ctr"/>
+            <a:endParaRPr/>
           </a:p>
         </p:txBody>
       </p:sp>
@@ -20687,12 +19830,6 @@
               </a:rPr>
               <a:t>PJ1测试的主要方法</a:t>
             </a:r>
-            <a:endParaRPr sz="1900" b="1">
-              <a:solidFill>
-                <a:srgbClr val="000000"/>
-              </a:solidFill>
-              <a:latin typeface="微软雅黑" panose="020B0503020204020204" charset="-122"/>
-            </a:endParaRPr>
           </a:p>
         </p:txBody>
       </p:sp>
@@ -20727,12 +19864,6 @@
               </a:rPr>
               <a:t>• 主要活动：编写测试脚本、执行测试用例、分析覆盖率与结果</a:t>
             </a:r>
-            <a:endParaRPr sz="1500" b="0">
-              <a:solidFill>
-                <a:srgbClr val="000000"/>
-              </a:solidFill>
-              <a:latin typeface="微软雅黑" panose="020B0503020204020204" charset="-122"/>
-            </a:endParaRPr>
           </a:p>
           <a:p>
             <a:r>
@@ -20770,12 +19901,6 @@
               </a:rPr>
               <a:t>• 黑盒：等价类划分、边界值分析，用于参数、ID、状态值、页码等输入</a:t>
             </a:r>
-            <a:endParaRPr sz="1500" b="0">
-              <a:solidFill>
-                <a:srgbClr val="000000"/>
-              </a:solidFill>
-              <a:latin typeface="微软雅黑" panose="020B0503020204020204" charset="-122"/>
-            </a:endParaRPr>
           </a:p>
           <a:p>
             <a:r>
@@ -20787,12 +19912,6 @@
               </a:rPr>
               <a:t>• 白盒：语句覆盖、判定覆盖，用于 service 分支与 controller 登录/跳转逻辑</a:t>
             </a:r>
-            <a:endParaRPr sz="1500" b="0">
-              <a:solidFill>
-                <a:srgbClr val="000000"/>
-              </a:solidFill>
-              <a:latin typeface="微软雅黑" panose="020B0503020204020204" charset="-122"/>
-            </a:endParaRPr>
           </a:p>
           <a:p>
             <a:r>
@@ -20804,12 +19923,6 @@
               </a:rPr>
               <a:t>• 冗余控制：合并同等价类和相同结果路径，保留代表性用例</a:t>
             </a:r>
-            <a:endParaRPr sz="1500" b="0">
-              <a:solidFill>
-                <a:srgbClr val="000000"/>
-              </a:solidFill>
-              <a:latin typeface="微软雅黑" panose="020B0503020204020204" charset="-122"/>
-            </a:endParaRPr>
           </a:p>
         </p:txBody>
       </p:sp>
@@ -20833,6 +19946,7 @@
           <a:bodyPr wrap="square" rtlCol="0" anchor="t">
             <a:spAutoFit/>
           </a:bodyPr>
+          <a:lstStyle/>
           <a:p>
             <a:pPr algn="l">
               <a:buClrTx/>
@@ -20849,13 +19963,6 @@
               </a:rPr>
               <a:t>工具：IntelliJ IDEA等开发工具</a:t>
             </a:r>
-            <a:endParaRPr sz="1500">
-              <a:solidFill>
-                <a:srgbClr val="000000"/>
-              </a:solidFill>
-              <a:latin typeface="微软雅黑" panose="020B0503020204020204" charset="-122"/>
-              <a:sym typeface="+mn-ea"/>
-            </a:endParaRPr>
           </a:p>
           <a:p>
             <a:pPr algn="l">
@@ -20896,13 +20003,6 @@
               </a:rPr>
               <a:t>完成准则：测试覆盖率达到100%</a:t>
             </a:r>
-            <a:endParaRPr sz="1500">
-              <a:solidFill>
-                <a:srgbClr val="000000"/>
-              </a:solidFill>
-              <a:latin typeface="微软雅黑" panose="020B0503020204020204" charset="-122"/>
-              <a:sym typeface="+mn-ea"/>
-            </a:endParaRPr>
           </a:p>
         </p:txBody>
       </p:sp>
@@ -20923,7 +20023,14 @@
         <p:cNvGrpSpPr/>
         <p:nvPr/>
       </p:nvGrpSpPr>
-      <p:grpSpPr/>
+      <p:grpSpPr>
+        <a:xfrm>
+          <a:off x="0" y="0"/>
+          <a:ext cx="0" cy="0"/>
+          <a:chOff x="0" y="0"/>
+          <a:chExt cx="0" cy="0"/>
+        </a:xfrm>
+      </p:grpSpPr>
       <p:sp>
         <p:nvSpPr>
           <p:cNvPr id="2" name="Rectangle 1"/>
@@ -20964,6 +20071,7 @@
           <a:lstStyle/>
           <a:p>
             <a:pPr algn="ctr"/>
+            <a:endParaRPr/>
           </a:p>
         </p:txBody>
       </p:sp>
@@ -21007,6 +20115,7 @@
           <a:lstStyle/>
           <a:p>
             <a:pPr algn="ctr"/>
+            <a:endParaRPr/>
           </a:p>
         </p:txBody>
       </p:sp>
@@ -21050,6 +20159,7 @@
           <a:lstStyle/>
           <a:p>
             <a:pPr algn="ctr"/>
+            <a:endParaRPr/>
           </a:p>
         </p:txBody>
       </p:sp>
@@ -21093,6 +20203,7 @@
           <a:lstStyle/>
           <a:p>
             <a:pPr algn="ctr"/>
+            <a:endParaRPr/>
           </a:p>
         </p:txBody>
       </p:sp>
@@ -21136,6 +20247,7 @@
           <a:lstStyle/>
           <a:p>
             <a:pPr algn="ctr"/>
+            <a:endParaRPr/>
           </a:p>
         </p:txBody>
       </p:sp>
@@ -21179,6 +20291,7 @@
           <a:lstStyle/>
           <a:p>
             <a:pPr algn="ctr"/>
+            <a:endParaRPr/>
           </a:p>
         </p:txBody>
       </p:sp>
@@ -21222,6 +20335,7 @@
           <a:lstStyle/>
           <a:p>
             <a:pPr algn="ctr"/>
+            <a:endParaRPr/>
           </a:p>
         </p:txBody>
       </p:sp>
@@ -21256,12 +20370,6 @@
               </a:rPr>
               <a:t>测试覆盖模块</a:t>
             </a:r>
-            <a:endParaRPr sz="3000" b="1">
-              <a:solidFill>
-                <a:srgbClr val="000000"/>
-              </a:solidFill>
-              <a:latin typeface="微软雅黑" panose="020B0503020204020204" charset="-122"/>
-            </a:endParaRPr>
           </a:p>
         </p:txBody>
       </p:sp>
@@ -21307,6 +20415,7 @@
           <a:lstStyle/>
           <a:p>
             <a:pPr algn="ctr"/>
+            <a:endParaRPr/>
           </a:p>
         </p:txBody>
       </p:sp>
@@ -21359,12 +20468,6 @@
               </a:rPr>
               <a:t>用户与登录</a:t>
             </a:r>
-            <a:endParaRPr sz="1200" b="1">
-              <a:solidFill>
-                <a:srgbClr val="FFFFFF"/>
-              </a:solidFill>
-              <a:latin typeface="微软雅黑" panose="020B0503020204020204" charset="-122"/>
-            </a:endParaRPr>
           </a:p>
         </p:txBody>
       </p:sp>
@@ -21400,12 +20503,6 @@
               </a:rPr>
               <a:t>UserService</a:t>
             </a:r>
-            <a:endParaRPr sz="1000" b="0">
-              <a:solidFill>
-                <a:srgbClr val="000000"/>
-              </a:solidFill>
-              <a:latin typeface="微软雅黑" panose="020B0503020204020204" charset="-122"/>
-            </a:endParaRPr>
           </a:p>
           <a:p>
             <a:pPr algn="ctr"/>
@@ -21418,12 +20515,6 @@
               </a:rPr>
               <a:t>UserController</a:t>
             </a:r>
-            <a:endParaRPr sz="1000" b="0">
-              <a:solidFill>
-                <a:srgbClr val="000000"/>
-              </a:solidFill>
-              <a:latin typeface="微软雅黑" panose="020B0503020204020204" charset="-122"/>
-            </a:endParaRPr>
           </a:p>
           <a:p>
             <a:pPr algn="ctr"/>
@@ -21436,12 +20527,6 @@
               </a:rPr>
               <a:t>AdminUserController</a:t>
             </a:r>
-            <a:endParaRPr sz="1000" b="0">
-              <a:solidFill>
-                <a:srgbClr val="000000"/>
-              </a:solidFill>
-              <a:latin typeface="微软雅黑" panose="020B0503020204020204" charset="-122"/>
-            </a:endParaRPr>
           </a:p>
         </p:txBody>
       </p:sp>
@@ -21487,6 +20572,7 @@
           <a:lstStyle/>
           <a:p>
             <a:pPr algn="ctr"/>
+            <a:endParaRPr/>
           </a:p>
         </p:txBody>
       </p:sp>
@@ -21539,12 +20625,6 @@
               </a:rPr>
               <a:t>场馆信息</a:t>
             </a:r>
-            <a:endParaRPr sz="1200" b="1">
-              <a:solidFill>
-                <a:srgbClr val="FFFFFF"/>
-              </a:solidFill>
-              <a:latin typeface="微软雅黑" panose="020B0503020204020204" charset="-122"/>
-            </a:endParaRPr>
           </a:p>
         </p:txBody>
       </p:sp>
@@ -21580,12 +20660,6 @@
               </a:rPr>
               <a:t>VenueService</a:t>
             </a:r>
-            <a:endParaRPr sz="1000" b="0">
-              <a:solidFill>
-                <a:srgbClr val="000000"/>
-              </a:solidFill>
-              <a:latin typeface="微软雅黑" panose="020B0503020204020204" charset="-122"/>
-            </a:endParaRPr>
           </a:p>
           <a:p>
             <a:pPr algn="ctr"/>
@@ -21598,12 +20672,6 @@
               </a:rPr>
               <a:t>VenueController</a:t>
             </a:r>
-            <a:endParaRPr sz="1000" b="0">
-              <a:solidFill>
-                <a:srgbClr val="000000"/>
-              </a:solidFill>
-              <a:latin typeface="微软雅黑" panose="020B0503020204020204" charset="-122"/>
-            </a:endParaRPr>
           </a:p>
           <a:p>
             <a:pPr algn="ctr"/>
@@ -21616,12 +20684,6 @@
               </a:rPr>
               <a:t>AdminVenueController</a:t>
             </a:r>
-            <a:endParaRPr sz="1000" b="0">
-              <a:solidFill>
-                <a:srgbClr val="000000"/>
-              </a:solidFill>
-              <a:latin typeface="微软雅黑" panose="020B0503020204020204" charset="-122"/>
-            </a:endParaRPr>
           </a:p>
         </p:txBody>
       </p:sp>
@@ -21667,6 +20729,7 @@
           <a:lstStyle/>
           <a:p>
             <a:pPr algn="ctr"/>
+            <a:endParaRPr/>
           </a:p>
         </p:txBody>
       </p:sp>
@@ -21719,12 +20782,6 @@
               </a:rPr>
               <a:t>预约订单</a:t>
             </a:r>
-            <a:endParaRPr sz="1200" b="1">
-              <a:solidFill>
-                <a:srgbClr val="FFFFFF"/>
-              </a:solidFill>
-              <a:latin typeface="微软雅黑" panose="020B0503020204020204" charset="-122"/>
-            </a:endParaRPr>
           </a:p>
         </p:txBody>
       </p:sp>
@@ -21760,12 +20817,6 @@
               </a:rPr>
               <a:t>OrderService</a:t>
             </a:r>
-            <a:endParaRPr sz="1000" b="0">
-              <a:solidFill>
-                <a:srgbClr val="000000"/>
-              </a:solidFill>
-              <a:latin typeface="微软雅黑" panose="020B0503020204020204" charset="-122"/>
-            </a:endParaRPr>
           </a:p>
           <a:p>
             <a:pPr algn="ctr"/>
@@ -21778,12 +20829,6 @@
               </a:rPr>
               <a:t>OrderVoService</a:t>
             </a:r>
-            <a:endParaRPr sz="1000" b="0">
-              <a:solidFill>
-                <a:srgbClr val="000000"/>
-              </a:solidFill>
-              <a:latin typeface="微软雅黑" panose="020B0503020204020204" charset="-122"/>
-            </a:endParaRPr>
           </a:p>
           <a:p>
             <a:pPr algn="ctr"/>
@@ -21796,12 +20841,6 @@
               </a:rPr>
               <a:t>OrderController</a:t>
             </a:r>
-            <a:endParaRPr sz="1000" b="0">
-              <a:solidFill>
-                <a:srgbClr val="000000"/>
-              </a:solidFill>
-              <a:latin typeface="微软雅黑" panose="020B0503020204020204" charset="-122"/>
-            </a:endParaRPr>
           </a:p>
         </p:txBody>
       </p:sp>
@@ -21847,6 +20886,7 @@
           <a:lstStyle/>
           <a:p>
             <a:pPr algn="ctr"/>
+            <a:endParaRPr/>
           </a:p>
         </p:txBody>
       </p:sp>
@@ -21899,12 +20939,6 @@
               </a:rPr>
               <a:t>留言板</a:t>
             </a:r>
-            <a:endParaRPr sz="1200" b="1">
-              <a:solidFill>
-                <a:srgbClr val="FFFFFF"/>
-              </a:solidFill>
-              <a:latin typeface="微软雅黑" panose="020B0503020204020204" charset="-122"/>
-            </a:endParaRPr>
           </a:p>
         </p:txBody>
       </p:sp>
@@ -21940,12 +20974,6 @@
               </a:rPr>
               <a:t>MessageService</a:t>
             </a:r>
-            <a:endParaRPr sz="1000" b="0">
-              <a:solidFill>
-                <a:srgbClr val="000000"/>
-              </a:solidFill>
-              <a:latin typeface="微软雅黑" panose="020B0503020204020204" charset="-122"/>
-            </a:endParaRPr>
           </a:p>
           <a:p>
             <a:pPr algn="ctr"/>
@@ -21958,12 +20986,6 @@
               </a:rPr>
               <a:t>MessageVoService</a:t>
             </a:r>
-            <a:endParaRPr sz="1000" b="0">
-              <a:solidFill>
-                <a:srgbClr val="000000"/>
-              </a:solidFill>
-              <a:latin typeface="微软雅黑" panose="020B0503020204020204" charset="-122"/>
-            </a:endParaRPr>
           </a:p>
           <a:p>
             <a:pPr algn="ctr"/>
@@ -21976,12 +20998,6 @@
               </a:rPr>
               <a:t>MessageController</a:t>
             </a:r>
-            <a:endParaRPr sz="1000" b="0">
-              <a:solidFill>
-                <a:srgbClr val="000000"/>
-              </a:solidFill>
-              <a:latin typeface="微软雅黑" panose="020B0503020204020204" charset="-122"/>
-            </a:endParaRPr>
           </a:p>
         </p:txBody>
       </p:sp>
@@ -22027,6 +21043,7 @@
           <a:lstStyle/>
           <a:p>
             <a:pPr algn="ctr"/>
+            <a:endParaRPr/>
           </a:p>
         </p:txBody>
       </p:sp>
@@ -22079,12 +21096,6 @@
               </a:rPr>
               <a:t>新闻展示</a:t>
             </a:r>
-            <a:endParaRPr sz="1200" b="1">
-              <a:solidFill>
-                <a:srgbClr val="FFFFFF"/>
-              </a:solidFill>
-              <a:latin typeface="微软雅黑" panose="020B0503020204020204" charset="-122"/>
-            </a:endParaRPr>
           </a:p>
         </p:txBody>
       </p:sp>
@@ -22120,12 +21131,6 @@
               </a:rPr>
               <a:t>NewsService</a:t>
             </a:r>
-            <a:endParaRPr sz="1000" b="0">
-              <a:solidFill>
-                <a:srgbClr val="000000"/>
-              </a:solidFill>
-              <a:latin typeface="微软雅黑" panose="020B0503020204020204" charset="-122"/>
-            </a:endParaRPr>
           </a:p>
           <a:p>
             <a:pPr algn="ctr"/>
@@ -22138,12 +21143,6 @@
               </a:rPr>
               <a:t>NewsController</a:t>
             </a:r>
-            <a:endParaRPr sz="1000" b="0">
-              <a:solidFill>
-                <a:srgbClr val="000000"/>
-              </a:solidFill>
-              <a:latin typeface="微软雅黑" panose="020B0503020204020204" charset="-122"/>
-            </a:endParaRPr>
           </a:p>
           <a:p>
             <a:pPr algn="ctr"/>
@@ -22156,12 +21155,6 @@
               </a:rPr>
               <a:t>AdminNewsController</a:t>
             </a:r>
-            <a:endParaRPr sz="1000" b="0">
-              <a:solidFill>
-                <a:srgbClr val="000000"/>
-              </a:solidFill>
-              <a:latin typeface="微软雅黑" panose="020B0503020204020204" charset="-122"/>
-            </a:endParaRPr>
           </a:p>
         </p:txBody>
       </p:sp>
@@ -22207,6 +21200,7 @@
           <a:lstStyle/>
           <a:p>
             <a:pPr algn="ctr"/>
+            <a:endParaRPr/>
           </a:p>
         </p:txBody>
       </p:sp>
@@ -22259,12 +21253,6 @@
               </a:rPr>
               <a:t>公共首页</a:t>
             </a:r>
-            <a:endParaRPr sz="1200" b="1">
-              <a:solidFill>
-                <a:srgbClr val="FFFFFF"/>
-              </a:solidFill>
-              <a:latin typeface="微软雅黑" panose="020B0503020204020204" charset="-122"/>
-            </a:endParaRPr>
           </a:p>
         </p:txBody>
       </p:sp>
@@ -22300,12 +21288,6 @@
               </a:rPr>
               <a:t>IndexController</a:t>
             </a:r>
-            <a:endParaRPr sz="1000" b="0">
-              <a:solidFill>
-                <a:srgbClr val="000000"/>
-              </a:solidFill>
-              <a:latin typeface="微软雅黑" panose="020B0503020204020204" charset="-122"/>
-            </a:endParaRPr>
           </a:p>
           <a:p>
             <a:pPr algn="ctr"/>
@@ -22318,12 +21300,6 @@
               </a:rPr>
               <a:t>公共内容展示</a:t>
             </a:r>
-            <a:endParaRPr sz="1000" b="0">
-              <a:solidFill>
-                <a:srgbClr val="000000"/>
-              </a:solidFill>
-              <a:latin typeface="微软雅黑" panose="020B0503020204020204" charset="-122"/>
-            </a:endParaRPr>
           </a:p>
           <a:p>
             <a:pPr algn="ctr"/>
@@ -22336,12 +21312,6 @@
               </a:rPr>
               <a:t>首页数据聚合</a:t>
             </a:r>
-            <a:endParaRPr sz="1000" b="0">
-              <a:solidFill>
-                <a:srgbClr val="000000"/>
-              </a:solidFill>
-              <a:latin typeface="微软雅黑" panose="020B0503020204020204" charset="-122"/>
-            </a:endParaRPr>
           </a:p>
         </p:txBody>
       </p:sp>
@@ -22354,38 +21324,38 @@
 </file>
 
 <file path=ppt/tags/tag1.xml><?xml version="1.0" encoding="utf-8"?>
-<p:tagLst xmlns:p="http://schemas.openxmlformats.org/presentationml/2006/main">
-  <p:tag name="KSO_WM_BEAUTIFY_FLAG" val=""/>
+<p:tagLst xmlns:a="http://schemas.openxmlformats.org/drawingml/2006/main" xmlns:r="http://schemas.openxmlformats.org/officeDocument/2006/relationships" xmlns:p="http://schemas.openxmlformats.org/presentationml/2006/main">
+  <p:tag name="COMMONDATA" val="eyJoZGlkIjoiODE3NzM4YjVmNGQ5YWQ1MWY4MzgxZGM1ZWEyZWIzN2IifQ=="/>
 </p:tagLst>
 </file>
 
 <file path=ppt/tags/tag2.xml><?xml version="1.0" encoding="utf-8"?>
-<p:tagLst xmlns:p="http://schemas.openxmlformats.org/presentationml/2006/main">
+<p:tagLst xmlns:a="http://schemas.openxmlformats.org/drawingml/2006/main" xmlns:r="http://schemas.openxmlformats.org/officeDocument/2006/relationships" xmlns:p="http://schemas.openxmlformats.org/presentationml/2006/main">
   <p:tag name="KSO_WM_BEAUTIFY_FLAG" val=""/>
 </p:tagLst>
 </file>
 
 <file path=ppt/tags/tag3.xml><?xml version="1.0" encoding="utf-8"?>
-<p:tagLst xmlns:p="http://schemas.openxmlformats.org/presentationml/2006/main">
+<p:tagLst xmlns:a="http://schemas.openxmlformats.org/drawingml/2006/main" xmlns:r="http://schemas.openxmlformats.org/officeDocument/2006/relationships" xmlns:p="http://schemas.openxmlformats.org/presentationml/2006/main">
   <p:tag name="KSO_WM_BEAUTIFY_FLAG" val=""/>
 </p:tagLst>
 </file>
 
 <file path=ppt/tags/tag4.xml><?xml version="1.0" encoding="utf-8"?>
-<p:tagLst xmlns:p="http://schemas.openxmlformats.org/presentationml/2006/main">
+<p:tagLst xmlns:a="http://schemas.openxmlformats.org/drawingml/2006/main" xmlns:r="http://schemas.openxmlformats.org/officeDocument/2006/relationships" xmlns:p="http://schemas.openxmlformats.org/presentationml/2006/main">
   <p:tag name="KSO_WM_BEAUTIFY_FLAG" val=""/>
 </p:tagLst>
 </file>
 
 <file path=ppt/tags/tag5.xml><?xml version="1.0" encoding="utf-8"?>
-<p:tagLst xmlns:p="http://schemas.openxmlformats.org/presentationml/2006/main">
+<p:tagLst xmlns:a="http://schemas.openxmlformats.org/drawingml/2006/main" xmlns:r="http://schemas.openxmlformats.org/officeDocument/2006/relationships" xmlns:p="http://schemas.openxmlformats.org/presentationml/2006/main">
   <p:tag name="KSO_WM_BEAUTIFY_FLAG" val=""/>
 </p:tagLst>
 </file>
 
 <file path=ppt/tags/tag6.xml><?xml version="1.0" encoding="utf-8"?>
-<p:tagLst xmlns:p="http://schemas.openxmlformats.org/presentationml/2006/main">
-  <p:tag name="commondata" val="eyJoZGlkIjoiODE3NzM4YjVmNGQ5YWQ1MWY4MzgxZGM1ZWEyZWIzN2IifQ=="/>
+<p:tagLst xmlns:a="http://schemas.openxmlformats.org/drawingml/2006/main" xmlns:r="http://schemas.openxmlformats.org/officeDocument/2006/relationships" xmlns:p="http://schemas.openxmlformats.org/presentationml/2006/main">
+  <p:tag name="KSO_WM_BEAUTIFY_FLAG" val=""/>
 </p:tagLst>
 </file>
 
@@ -22705,6 +21675,7 @@
       </a:style>
     </a:lnDef>
   </a:objectDefaults>
+  <a:extraClrSchemeLst/>
   <a:extLst>
     <a:ext uri="{05A4C25C-085E-4340-85A3-A5531E510DB2}">
       <thm15:themeFamily xmlns:thm15="http://schemas.microsoft.com/office/thememl/2012/main" name="Office Theme" id="{62F939B6-93AF-4DB8-9C6B-D6C7DFDC589F}" vid="{4A3C46E8-61CC-4603-A589-7422A47A8E4A}"/>
